--- a/Day15/15-paev-andmetarkus-esitlus.pptx
+++ b/Day15/15-paev-andmetarkus-esitlus.pptx
@@ -5,51 +5,52 @@
     <p:sldMasterId id="2147483648" r:id="rId4"/>
   </p:sldMasterIdLst>
   <p:notesMasterIdLst>
-    <p:notesMasterId r:id="rId20"/>
+    <p:notesMasterId r:id="rId21"/>
   </p:notesMasterIdLst>
   <p:handoutMasterIdLst>
-    <p:handoutMasterId r:id="rId21"/>
+    <p:handoutMasterId r:id="rId22"/>
   </p:handoutMasterIdLst>
   <p:sldIdLst>
     <p:sldId id="417" r:id="rId5"/>
     <p:sldId id="479" r:id="rId6"/>
-    <p:sldId id="475" r:id="rId7"/>
-    <p:sldId id="452" r:id="rId8"/>
-    <p:sldId id="476" r:id="rId9"/>
-    <p:sldId id="477" r:id="rId10"/>
-    <p:sldId id="494" r:id="rId11"/>
-    <p:sldId id="446" r:id="rId12"/>
-    <p:sldId id="447" r:id="rId13"/>
-    <p:sldId id="646" r:id="rId14"/>
-    <p:sldId id="567" r:id="rId15"/>
-    <p:sldId id="514" r:id="rId16"/>
-    <p:sldId id="619" r:id="rId17"/>
-    <p:sldId id="571" r:id="rId18"/>
+    <p:sldId id="567" r:id="rId7"/>
+    <p:sldId id="475" r:id="rId8"/>
+    <p:sldId id="452" r:id="rId9"/>
+    <p:sldId id="647" r:id="rId10"/>
+    <p:sldId id="476" r:id="rId11"/>
+    <p:sldId id="477" r:id="rId12"/>
+    <p:sldId id="494" r:id="rId13"/>
+    <p:sldId id="446" r:id="rId14"/>
+    <p:sldId id="447" r:id="rId15"/>
+    <p:sldId id="646" r:id="rId16"/>
+    <p:sldId id="571" r:id="rId17"/>
+    <p:sldId id="514" r:id="rId18"/>
     <p:sldId id="572" r:id="rId19"/>
+    <p:sldId id="619" r:id="rId20"/>
   </p:sldIdLst>
   <p:sldSz cx="12192000" cy="6858000"/>
   <p:notesSz cx="6858000" cy="9144000"/>
   <p:embeddedFontLst>
     <p:embeddedFont>
       <p:font typeface="Inter" panose="020B0604020202020204" charset="0"/>
-      <p:regular r:id="rId22"/>
-      <p:bold r:id="rId23"/>
+      <p:regular r:id="rId23"/>
+      <p:bold r:id="rId24"/>
     </p:embeddedFont>
     <p:embeddedFont>
       <p:font typeface="Inter Bold" panose="020B0604020202020204" charset="0"/>
-      <p:bold r:id="rId24"/>
+      <p:bold r:id="rId25"/>
     </p:embeddedFont>
     <p:embeddedFont>
       <p:font typeface="Noto Serif" panose="02020600060500020200" pitchFamily="18" charset="0"/>
-      <p:regular r:id="rId25"/>
-      <p:bold r:id="rId26"/>
-      <p:italic r:id="rId27"/>
-      <p:boldItalic r:id="rId28"/>
+      <p:regular r:id="rId26"/>
+      <p:bold r:id="rId27"/>
+      <p:italic r:id="rId28"/>
+      <p:boldItalic r:id="rId29"/>
     </p:embeddedFont>
     <p:embeddedFont>
       <p:font typeface="Poppins SemiBold" panose="00000700000000000000" pitchFamily="2" charset="0"/>
-      <p:bold r:id="rId29"/>
-      <p:boldItalic r:id="rId30"/>
+      <p:bold r:id="rId30"/>
+      <p:boldItalic r:id="rId31"/>
     </p:embeddedFont>
   </p:embeddedFontLst>
   <p:defaultTextStyle>
@@ -161,7 +162,7 @@
 <file path=ppt/revisionInfo.xml><?xml version="1.0" encoding="utf-8"?>
 <p1510:revInfo xmlns:a="http://schemas.openxmlformats.org/drawingml/2006/main" xmlns:r="http://schemas.openxmlformats.org/officeDocument/2006/relationships" xmlns:p1510="http://schemas.microsoft.com/office/powerpoint/2015/10/main">
   <p1510:revLst>
-    <p1510:client id="{700FA394-0DB7-4104-96D1-C1B96C0EB4DB}" v="4" dt="2026-03-18T07:48:40.057"/>
+    <p1510:client id="{2EADCC2F-0731-4A5B-A287-B42682DA1D9C}" v="91" dt="2026-04-14T08:13:17.052"/>
   </p1510:revLst>
 </p1510:revInfo>
 </file>
@@ -171,25 +172,72 @@
   <pc:docChgLst>
     <pc:chgData name="Virve Räni" userId="161a7437-7ef4-49ec-91bf-54882f313dfe" providerId="ADAL" clId="{6D754EED-65AA-4A21-B175-6769012CF487}"/>
     <pc:docChg chg="addSld delSld modSld sldOrd">
-      <pc:chgData name="Virve Räni" userId="161a7437-7ef4-49ec-91bf-54882f313dfe" providerId="ADAL" clId="{6D754EED-65AA-4A21-B175-6769012CF487}" dt="2026-03-18T08:01:02.537" v="200" actId="20577"/>
+      <pc:chgData name="Virve Räni" userId="161a7437-7ef4-49ec-91bf-54882f313dfe" providerId="ADAL" clId="{6D754EED-65AA-4A21-B175-6769012CF487}" dt="2026-04-14T08:13:17.052" v="511" actId="20577"/>
       <pc:docMkLst>
         <pc:docMk/>
       </pc:docMkLst>
-      <pc:sldChg chg="add">
-        <pc:chgData name="Virve Räni" userId="161a7437-7ef4-49ec-91bf-54882f313dfe" providerId="ADAL" clId="{6D754EED-65AA-4A21-B175-6769012CF487}" dt="2026-03-18T07:48:40.053" v="105"/>
+      <pc:sldChg chg="modSp mod">
+        <pc:chgData name="Virve Räni" userId="161a7437-7ef4-49ec-91bf-54882f313dfe" providerId="ADAL" clId="{6D754EED-65AA-4A21-B175-6769012CF487}" dt="2026-04-14T08:06:07.883" v="377" actId="790"/>
+        <pc:sldMkLst>
+          <pc:docMk/>
+          <pc:sldMk cId="4169291970" sldId="417"/>
+        </pc:sldMkLst>
+        <pc:spChg chg="mod">
+          <ac:chgData name="Virve Räni" userId="161a7437-7ef4-49ec-91bf-54882f313dfe" providerId="ADAL" clId="{6D754EED-65AA-4A21-B175-6769012CF487}" dt="2026-04-14T08:06:07.883" v="377" actId="790"/>
+          <ac:spMkLst>
+            <pc:docMk/>
+            <pc:sldMk cId="4169291970" sldId="417"/>
+            <ac:spMk id="5" creationId="{3496B8E7-2B01-285F-88ED-B3ADE66A3D31}"/>
+          </ac:spMkLst>
+        </pc:spChg>
+        <pc:spChg chg="mod">
+          <ac:chgData name="Virve Räni" userId="161a7437-7ef4-49ec-91bf-54882f313dfe" providerId="ADAL" clId="{6D754EED-65AA-4A21-B175-6769012CF487}" dt="2026-04-14T08:06:07.883" v="377" actId="790"/>
+          <ac:spMkLst>
+            <pc:docMk/>
+            <pc:sldMk cId="4169291970" sldId="417"/>
+            <ac:spMk id="23" creationId="{382D4282-6F49-4A70-83AA-7E8F5DD56DC2}"/>
+          </ac:spMkLst>
+        </pc:spChg>
+      </pc:sldChg>
+      <pc:sldChg chg="modSp add mod">
+        <pc:chgData name="Virve Räni" userId="161a7437-7ef4-49ec-91bf-54882f313dfe" providerId="ADAL" clId="{6D754EED-65AA-4A21-B175-6769012CF487}" dt="2026-04-14T08:06:07.883" v="377" actId="790"/>
         <pc:sldMkLst>
           <pc:docMk/>
           <pc:sldMk cId="1536515755" sldId="446"/>
         </pc:sldMkLst>
+        <pc:spChg chg="mod">
+          <ac:chgData name="Virve Räni" userId="161a7437-7ef4-49ec-91bf-54882f313dfe" providerId="ADAL" clId="{6D754EED-65AA-4A21-B175-6769012CF487}" dt="2026-04-14T08:06:07.883" v="377" actId="790"/>
+          <ac:spMkLst>
+            <pc:docMk/>
+            <pc:sldMk cId="1536515755" sldId="446"/>
+            <ac:spMk id="2" creationId="{15E4613B-AA18-2E8F-A97B-F0B013DE2391}"/>
+          </ac:spMkLst>
+        </pc:spChg>
+        <pc:spChg chg="mod">
+          <ac:chgData name="Virve Räni" userId="161a7437-7ef4-49ec-91bf-54882f313dfe" providerId="ADAL" clId="{6D754EED-65AA-4A21-B175-6769012CF487}" dt="2026-04-14T08:06:07.883" v="377" actId="790"/>
+          <ac:spMkLst>
+            <pc:docMk/>
+            <pc:sldMk cId="1536515755" sldId="446"/>
+            <ac:spMk id="3" creationId="{F4A70332-1D1A-2C6E-9052-C6A2A2009676}"/>
+          </ac:spMkLst>
+        </pc:spChg>
       </pc:sldChg>
       <pc:sldChg chg="modSp add mod">
-        <pc:chgData name="Virve Räni" userId="161a7437-7ef4-49ec-91bf-54882f313dfe" providerId="ADAL" clId="{6D754EED-65AA-4A21-B175-6769012CF487}" dt="2026-03-18T08:01:02.537" v="200" actId="20577"/>
+        <pc:chgData name="Virve Räni" userId="161a7437-7ef4-49ec-91bf-54882f313dfe" providerId="ADAL" clId="{6D754EED-65AA-4A21-B175-6769012CF487}" dt="2026-04-14T08:06:07.883" v="377" actId="790"/>
         <pc:sldMkLst>
           <pc:docMk/>
           <pc:sldMk cId="3667732403" sldId="447"/>
         </pc:sldMkLst>
         <pc:spChg chg="mod">
-          <ac:chgData name="Virve Räni" userId="161a7437-7ef4-49ec-91bf-54882f313dfe" providerId="ADAL" clId="{6D754EED-65AA-4A21-B175-6769012CF487}" dt="2026-03-18T08:01:02.537" v="200" actId="20577"/>
+          <ac:chgData name="Virve Räni" userId="161a7437-7ef4-49ec-91bf-54882f313dfe" providerId="ADAL" clId="{6D754EED-65AA-4A21-B175-6769012CF487}" dt="2026-04-14T08:06:07.883" v="377" actId="790"/>
+          <ac:spMkLst>
+            <pc:docMk/>
+            <pc:sldMk cId="3667732403" sldId="447"/>
+            <ac:spMk id="2" creationId="{637509EE-22F1-1315-8A2D-3282644AA9E1}"/>
+          </ac:spMkLst>
+        </pc:spChg>
+        <pc:spChg chg="mod">
+          <ac:chgData name="Virve Räni" userId="161a7437-7ef4-49ec-91bf-54882f313dfe" providerId="ADAL" clId="{6D754EED-65AA-4A21-B175-6769012CF487}" dt="2026-04-14T08:06:07.883" v="377" actId="790"/>
           <ac:spMkLst>
             <pc:docMk/>
             <pc:sldMk cId="3667732403" sldId="447"/>
@@ -197,36 +245,122 @@
           </ac:spMkLst>
         </pc:spChg>
       </pc:sldChg>
-      <pc:sldChg chg="add">
-        <pc:chgData name="Virve Räni" userId="161a7437-7ef4-49ec-91bf-54882f313dfe" providerId="ADAL" clId="{6D754EED-65AA-4A21-B175-6769012CF487}" dt="2026-03-18T07:47:59.508" v="104"/>
+      <pc:sldChg chg="modSp add mod">
+        <pc:chgData name="Virve Räni" userId="161a7437-7ef4-49ec-91bf-54882f313dfe" providerId="ADAL" clId="{6D754EED-65AA-4A21-B175-6769012CF487}" dt="2026-04-14T08:06:07.883" v="377" actId="790"/>
         <pc:sldMkLst>
           <pc:docMk/>
           <pc:sldMk cId="3557357758" sldId="452"/>
         </pc:sldMkLst>
-      </pc:sldChg>
-      <pc:sldChg chg="modSp add del mod">
-        <pc:chgData name="Virve Räni" userId="161a7437-7ef4-49ec-91bf-54882f313dfe" providerId="ADAL" clId="{6D754EED-65AA-4A21-B175-6769012CF487}" dt="2026-03-18T07:48:55.243" v="107" actId="47"/>
-        <pc:sldMkLst>
-          <pc:docMk/>
-          <pc:sldMk cId="3579936010" sldId="453"/>
-        </pc:sldMkLst>
         <pc:spChg chg="mod">
-          <ac:chgData name="Virve Räni" userId="161a7437-7ef4-49ec-91bf-54882f313dfe" providerId="ADAL" clId="{6D754EED-65AA-4A21-B175-6769012CF487}" dt="2026-03-18T07:48:46.667" v="106" actId="20577"/>
+          <ac:chgData name="Virve Räni" userId="161a7437-7ef4-49ec-91bf-54882f313dfe" providerId="ADAL" clId="{6D754EED-65AA-4A21-B175-6769012CF487}" dt="2026-04-14T08:06:07.883" v="377" actId="790"/>
           <ac:spMkLst>
             <pc:docMk/>
-            <pc:sldMk cId="3579936010" sldId="453"/>
-            <ac:spMk id="2" creationId="{AFCE01E6-D719-60C9-6A7D-77EE04BD12FB}"/>
+            <pc:sldMk cId="3557357758" sldId="452"/>
+            <ac:spMk id="2" creationId="{8181DBF1-6B0C-F0AB-B6AE-072A389A2741}"/>
+          </ac:spMkLst>
+        </pc:spChg>
+        <pc:spChg chg="mod">
+          <ac:chgData name="Virve Räni" userId="161a7437-7ef4-49ec-91bf-54882f313dfe" providerId="ADAL" clId="{6D754EED-65AA-4A21-B175-6769012CF487}" dt="2026-04-14T08:06:07.883" v="377" actId="790"/>
+          <ac:spMkLst>
+            <pc:docMk/>
+            <pc:sldMk cId="3557357758" sldId="452"/>
+            <ac:spMk id="9" creationId="{2C7597CA-D61E-17DA-17B5-C9C1738A73BE}"/>
+          </ac:spMkLst>
+        </pc:spChg>
+        <pc:spChg chg="mod">
+          <ac:chgData name="Virve Räni" userId="161a7437-7ef4-49ec-91bf-54882f313dfe" providerId="ADAL" clId="{6D754EED-65AA-4A21-B175-6769012CF487}" dt="2026-04-14T08:06:07.883" v="377" actId="790"/>
+          <ac:spMkLst>
+            <pc:docMk/>
+            <pc:sldMk cId="3557357758" sldId="452"/>
+            <ac:spMk id="13" creationId="{7D4B374B-E0FB-F26A-AAD2-2AA0ED2D1C5C}"/>
           </ac:spMkLst>
         </pc:spChg>
       </pc:sldChg>
       <pc:sldChg chg="modSp mod">
-        <pc:chgData name="Virve Räni" userId="161a7437-7ef4-49ec-91bf-54882f313dfe" providerId="ADAL" clId="{6D754EED-65AA-4A21-B175-6769012CF487}" dt="2026-03-18T07:15:38.517" v="98" actId="20577"/>
+        <pc:chgData name="Virve Räni" userId="161a7437-7ef4-49ec-91bf-54882f313dfe" providerId="ADAL" clId="{6D754EED-65AA-4A21-B175-6769012CF487}" dt="2026-04-14T08:13:17.052" v="511" actId="20577"/>
+        <pc:sldMkLst>
+          <pc:docMk/>
+          <pc:sldMk cId="3647997252" sldId="475"/>
+        </pc:sldMkLst>
+        <pc:spChg chg="mod">
+          <ac:chgData name="Virve Räni" userId="161a7437-7ef4-49ec-91bf-54882f313dfe" providerId="ADAL" clId="{6D754EED-65AA-4A21-B175-6769012CF487}" dt="2026-04-14T08:06:07.883" v="377" actId="790"/>
+          <ac:spMkLst>
+            <pc:docMk/>
+            <pc:sldMk cId="3647997252" sldId="475"/>
+            <ac:spMk id="2" creationId="{B5EA4698-C786-6EFD-B097-B5E4A75DB8C2}"/>
+          </ac:spMkLst>
+        </pc:spChg>
+        <pc:spChg chg="mod">
+          <ac:chgData name="Virve Räni" userId="161a7437-7ef4-49ec-91bf-54882f313dfe" providerId="ADAL" clId="{6D754EED-65AA-4A21-B175-6769012CF487}" dt="2026-04-14T08:13:17.052" v="511" actId="20577"/>
+          <ac:spMkLst>
+            <pc:docMk/>
+            <pc:sldMk cId="3647997252" sldId="475"/>
+            <ac:spMk id="3" creationId="{6724179F-8918-CD83-5B3D-AF1D9C751EAD}"/>
+          </ac:spMkLst>
+        </pc:spChg>
+      </pc:sldChg>
+      <pc:sldChg chg="modSp mod">
+        <pc:chgData name="Virve Räni" userId="161a7437-7ef4-49ec-91bf-54882f313dfe" providerId="ADAL" clId="{6D754EED-65AA-4A21-B175-6769012CF487}" dt="2026-04-14T08:06:07.883" v="377" actId="790"/>
+        <pc:sldMkLst>
+          <pc:docMk/>
+          <pc:sldMk cId="574469935" sldId="476"/>
+        </pc:sldMkLst>
+        <pc:spChg chg="mod">
+          <ac:chgData name="Virve Räni" userId="161a7437-7ef4-49ec-91bf-54882f313dfe" providerId="ADAL" clId="{6D754EED-65AA-4A21-B175-6769012CF487}" dt="2026-04-14T08:06:07.883" v="377" actId="790"/>
+          <ac:spMkLst>
+            <pc:docMk/>
+            <pc:sldMk cId="574469935" sldId="476"/>
+            <ac:spMk id="2" creationId="{30C2D799-FEF4-2867-2771-9F5C35BC3DBA}"/>
+          </ac:spMkLst>
+        </pc:spChg>
+        <pc:spChg chg="mod">
+          <ac:chgData name="Virve Räni" userId="161a7437-7ef4-49ec-91bf-54882f313dfe" providerId="ADAL" clId="{6D754EED-65AA-4A21-B175-6769012CF487}" dt="2026-04-14T08:06:07.883" v="377" actId="790"/>
+          <ac:spMkLst>
+            <pc:docMk/>
+            <pc:sldMk cId="574469935" sldId="476"/>
+            <ac:spMk id="3" creationId="{AC5492C0-055D-8861-D035-31319A801802}"/>
+          </ac:spMkLst>
+        </pc:spChg>
+      </pc:sldChg>
+      <pc:sldChg chg="modSp mod">
+        <pc:chgData name="Virve Räni" userId="161a7437-7ef4-49ec-91bf-54882f313dfe" providerId="ADAL" clId="{6D754EED-65AA-4A21-B175-6769012CF487}" dt="2026-04-14T08:06:07.883" v="377" actId="790"/>
+        <pc:sldMkLst>
+          <pc:docMk/>
+          <pc:sldMk cId="1894215464" sldId="477"/>
+        </pc:sldMkLst>
+        <pc:spChg chg="mod">
+          <ac:chgData name="Virve Räni" userId="161a7437-7ef4-49ec-91bf-54882f313dfe" providerId="ADAL" clId="{6D754EED-65AA-4A21-B175-6769012CF487}" dt="2026-04-14T08:06:07.883" v="377" actId="790"/>
+          <ac:spMkLst>
+            <pc:docMk/>
+            <pc:sldMk cId="1894215464" sldId="477"/>
+            <ac:spMk id="2" creationId="{8C4CA12E-8239-93DD-2B09-FE46CB68CA64}"/>
+          </ac:spMkLst>
+        </pc:spChg>
+        <pc:spChg chg="mod">
+          <ac:chgData name="Virve Räni" userId="161a7437-7ef4-49ec-91bf-54882f313dfe" providerId="ADAL" clId="{6D754EED-65AA-4A21-B175-6769012CF487}" dt="2026-04-14T08:06:07.883" v="377" actId="790"/>
+          <ac:spMkLst>
+            <pc:docMk/>
+            <pc:sldMk cId="1894215464" sldId="477"/>
+            <ac:spMk id="3" creationId="{4BAEE41D-2DBC-64AB-6A9E-0377C470EE09}"/>
+          </ac:spMkLst>
+        </pc:spChg>
+      </pc:sldChg>
+      <pc:sldChg chg="modSp mod">
+        <pc:chgData name="Virve Räni" userId="161a7437-7ef4-49ec-91bf-54882f313dfe" providerId="ADAL" clId="{6D754EED-65AA-4A21-B175-6769012CF487}" dt="2026-04-14T08:06:07.883" v="377" actId="790"/>
         <pc:sldMkLst>
           <pc:docMk/>
           <pc:sldMk cId="1139234541" sldId="479"/>
         </pc:sldMkLst>
+        <pc:spChg chg="mod">
+          <ac:chgData name="Virve Räni" userId="161a7437-7ef4-49ec-91bf-54882f313dfe" providerId="ADAL" clId="{6D754EED-65AA-4A21-B175-6769012CF487}" dt="2026-04-14T08:06:07.883" v="377" actId="790"/>
+          <ac:spMkLst>
+            <pc:docMk/>
+            <pc:sldMk cId="1139234541" sldId="479"/>
+            <ac:spMk id="2" creationId="{C1FE7A2D-F34A-AFF4-F094-9247F2654D30}"/>
+          </ac:spMkLst>
+        </pc:spChg>
         <pc:graphicFrameChg chg="mod modGraphic">
-          <ac:chgData name="Virve Räni" userId="161a7437-7ef4-49ec-91bf-54882f313dfe" providerId="ADAL" clId="{6D754EED-65AA-4A21-B175-6769012CF487}" dt="2026-03-18T07:15:38.517" v="98" actId="20577"/>
+          <ac:chgData name="Virve Räni" userId="161a7437-7ef4-49ec-91bf-54882f313dfe" providerId="ADAL" clId="{6D754EED-65AA-4A21-B175-6769012CF487}" dt="2026-04-14T08:06:07.883" v="377" actId="790"/>
           <ac:graphicFrameMkLst>
             <pc:docMk/>
             <pc:sldMk cId="1139234541" sldId="479"/>
@@ -234,19 +368,189 @@
           </ac:graphicFrameMkLst>
         </pc:graphicFrameChg>
       </pc:sldChg>
-      <pc:sldChg chg="ord">
-        <pc:chgData name="Virve Räni" userId="161a7437-7ef4-49ec-91bf-54882f313dfe" providerId="ADAL" clId="{6D754EED-65AA-4A21-B175-6769012CF487}" dt="2026-03-18T07:47:14.719" v="103"/>
+      <pc:sldChg chg="modSp mod modAnim">
+        <pc:chgData name="Virve Räni" userId="161a7437-7ef4-49ec-91bf-54882f313dfe" providerId="ADAL" clId="{6D754EED-65AA-4A21-B175-6769012CF487}" dt="2026-04-14T08:06:07.883" v="377" actId="790"/>
+        <pc:sldMkLst>
+          <pc:docMk/>
+          <pc:sldMk cId="4027656671" sldId="494"/>
+        </pc:sldMkLst>
+        <pc:spChg chg="mod">
+          <ac:chgData name="Virve Räni" userId="161a7437-7ef4-49ec-91bf-54882f313dfe" providerId="ADAL" clId="{6D754EED-65AA-4A21-B175-6769012CF487}" dt="2026-04-14T08:06:07.883" v="377" actId="790"/>
+          <ac:spMkLst>
+            <pc:docMk/>
+            <pc:sldMk cId="4027656671" sldId="494"/>
+            <ac:spMk id="2" creationId="{193632AA-1804-C95A-235A-B1630A75A285}"/>
+          </ac:spMkLst>
+        </pc:spChg>
+        <pc:spChg chg="mod">
+          <ac:chgData name="Virve Räni" userId="161a7437-7ef4-49ec-91bf-54882f313dfe" providerId="ADAL" clId="{6D754EED-65AA-4A21-B175-6769012CF487}" dt="2026-04-14T08:06:07.883" v="377" actId="790"/>
+          <ac:spMkLst>
+            <pc:docMk/>
+            <pc:sldMk cId="4027656671" sldId="494"/>
+            <ac:spMk id="3" creationId="{2ED24C29-7DB7-412C-B56A-46EC71179C17}"/>
+          </ac:spMkLst>
+        </pc:spChg>
+      </pc:sldChg>
+      <pc:sldChg chg="modSp mod ord">
+        <pc:chgData name="Virve Räni" userId="161a7437-7ef4-49ec-91bf-54882f313dfe" providerId="ADAL" clId="{6D754EED-65AA-4A21-B175-6769012CF487}" dt="2026-04-14T08:06:47.771" v="379"/>
+        <pc:sldMkLst>
+          <pc:docMk/>
+          <pc:sldMk cId="2641817430" sldId="514"/>
+        </pc:sldMkLst>
+        <pc:spChg chg="mod">
+          <ac:chgData name="Virve Räni" userId="161a7437-7ef4-49ec-91bf-54882f313dfe" providerId="ADAL" clId="{6D754EED-65AA-4A21-B175-6769012CF487}" dt="2026-04-14T08:06:07.883" v="377" actId="790"/>
+          <ac:spMkLst>
+            <pc:docMk/>
+            <pc:sldMk cId="2641817430" sldId="514"/>
+            <ac:spMk id="2" creationId="{C9529B55-022C-CCF6-9EF2-07D4A3BCE7C1}"/>
+          </ac:spMkLst>
+        </pc:spChg>
+        <pc:spChg chg="mod">
+          <ac:chgData name="Virve Räni" userId="161a7437-7ef4-49ec-91bf-54882f313dfe" providerId="ADAL" clId="{6D754EED-65AA-4A21-B175-6769012CF487}" dt="2026-04-14T08:06:07.883" v="377" actId="790"/>
+          <ac:spMkLst>
+            <pc:docMk/>
+            <pc:sldMk cId="2641817430" sldId="514"/>
+            <ac:spMk id="3" creationId="{1F0A66F8-FBDE-40E8-405E-245CA696AFB7}"/>
+          </ac:spMkLst>
+        </pc:spChg>
+      </pc:sldChg>
+      <pc:sldChg chg="modSp mod ord">
+        <pc:chgData name="Virve Räni" userId="161a7437-7ef4-49ec-91bf-54882f313dfe" providerId="ADAL" clId="{6D754EED-65AA-4A21-B175-6769012CF487}" dt="2026-04-14T08:06:07.883" v="377" actId="790"/>
         <pc:sldMkLst>
           <pc:docMk/>
           <pc:sldMk cId="2677885354" sldId="567"/>
         </pc:sldMkLst>
+        <pc:spChg chg="mod">
+          <ac:chgData name="Virve Räni" userId="161a7437-7ef4-49ec-91bf-54882f313dfe" providerId="ADAL" clId="{6D754EED-65AA-4A21-B175-6769012CF487}" dt="2026-04-14T08:06:07.883" v="377" actId="790"/>
+          <ac:spMkLst>
+            <pc:docMk/>
+            <pc:sldMk cId="2677885354" sldId="567"/>
+            <ac:spMk id="3" creationId="{563CB597-CCE1-B2CB-AF5D-4898AE067311}"/>
+          </ac:spMkLst>
+        </pc:spChg>
+        <pc:spChg chg="mod">
+          <ac:chgData name="Virve Räni" userId="161a7437-7ef4-49ec-91bf-54882f313dfe" providerId="ADAL" clId="{6D754EED-65AA-4A21-B175-6769012CF487}" dt="2026-04-14T08:06:07.883" v="377" actId="790"/>
+          <ac:spMkLst>
+            <pc:docMk/>
+            <pc:sldMk cId="2677885354" sldId="567"/>
+            <ac:spMk id="5" creationId="{DC12984A-F918-66CF-9BF7-11C289E0534A}"/>
+          </ac:spMkLst>
+        </pc:spChg>
       </pc:sldChg>
-      <pc:sldChg chg="del">
-        <pc:chgData name="Virve Räni" userId="161a7437-7ef4-49ec-91bf-54882f313dfe" providerId="ADAL" clId="{6D754EED-65AA-4A21-B175-6769012CF487}" dt="2026-03-18T07:46:12.763" v="101" actId="47"/>
+      <pc:sldChg chg="modSp mod">
+        <pc:chgData name="Virve Räni" userId="161a7437-7ef4-49ec-91bf-54882f313dfe" providerId="ADAL" clId="{6D754EED-65AA-4A21-B175-6769012CF487}" dt="2026-04-14T08:06:07.883" v="377" actId="790"/>
         <pc:sldMkLst>
           <pc:docMk/>
-          <pc:sldMk cId="113238818" sldId="647"/>
+          <pc:sldMk cId="1494237226" sldId="571"/>
         </pc:sldMkLst>
+        <pc:spChg chg="mod">
+          <ac:chgData name="Virve Räni" userId="161a7437-7ef4-49ec-91bf-54882f313dfe" providerId="ADAL" clId="{6D754EED-65AA-4A21-B175-6769012CF487}" dt="2026-04-14T08:06:07.883" v="377" actId="790"/>
+          <ac:spMkLst>
+            <pc:docMk/>
+            <pc:sldMk cId="1494237226" sldId="571"/>
+            <ac:spMk id="3" creationId="{D12FCE63-0FB0-32F6-8A25-B0877487D27A}"/>
+          </ac:spMkLst>
+        </pc:spChg>
+        <pc:spChg chg="mod">
+          <ac:chgData name="Virve Räni" userId="161a7437-7ef4-49ec-91bf-54882f313dfe" providerId="ADAL" clId="{6D754EED-65AA-4A21-B175-6769012CF487}" dt="2026-04-14T08:06:07.883" v="377" actId="790"/>
+          <ac:spMkLst>
+            <pc:docMk/>
+            <pc:sldMk cId="1494237226" sldId="571"/>
+            <ac:spMk id="5" creationId="{2DEE2DCD-5528-0E71-8160-938192ACA33B}"/>
+          </ac:spMkLst>
+        </pc:spChg>
+      </pc:sldChg>
+      <pc:sldChg chg="modSp mod">
+        <pc:chgData name="Virve Räni" userId="161a7437-7ef4-49ec-91bf-54882f313dfe" providerId="ADAL" clId="{6D754EED-65AA-4A21-B175-6769012CF487}" dt="2026-04-14T08:06:07.883" v="377" actId="790"/>
+        <pc:sldMkLst>
+          <pc:docMk/>
+          <pc:sldMk cId="3652901621" sldId="572"/>
+        </pc:sldMkLst>
+        <pc:spChg chg="mod">
+          <ac:chgData name="Virve Räni" userId="161a7437-7ef4-49ec-91bf-54882f313dfe" providerId="ADAL" clId="{6D754EED-65AA-4A21-B175-6769012CF487}" dt="2026-04-14T08:06:07.883" v="377" actId="790"/>
+          <ac:spMkLst>
+            <pc:docMk/>
+            <pc:sldMk cId="3652901621" sldId="572"/>
+            <ac:spMk id="3" creationId="{96915822-6BB3-759C-184D-73740C8BDF97}"/>
+          </ac:spMkLst>
+        </pc:spChg>
+        <pc:spChg chg="mod">
+          <ac:chgData name="Virve Räni" userId="161a7437-7ef4-49ec-91bf-54882f313dfe" providerId="ADAL" clId="{6D754EED-65AA-4A21-B175-6769012CF487}" dt="2026-04-14T08:06:07.883" v="377" actId="790"/>
+          <ac:spMkLst>
+            <pc:docMk/>
+            <pc:sldMk cId="3652901621" sldId="572"/>
+            <ac:spMk id="5" creationId="{C6EAEB33-E2E1-C05F-2B41-C3ECC3F9D6BB}"/>
+          </ac:spMkLst>
+        </pc:spChg>
+      </pc:sldChg>
+      <pc:sldChg chg="modSp mod ord">
+        <pc:chgData name="Virve Räni" userId="161a7437-7ef4-49ec-91bf-54882f313dfe" providerId="ADAL" clId="{6D754EED-65AA-4A21-B175-6769012CF487}" dt="2026-04-14T08:07:04.953" v="381"/>
+        <pc:sldMkLst>
+          <pc:docMk/>
+          <pc:sldMk cId="1362109033" sldId="619"/>
+        </pc:sldMkLst>
+        <pc:spChg chg="mod">
+          <ac:chgData name="Virve Räni" userId="161a7437-7ef4-49ec-91bf-54882f313dfe" providerId="ADAL" clId="{6D754EED-65AA-4A21-B175-6769012CF487}" dt="2026-04-14T08:06:07.883" v="377" actId="790"/>
+          <ac:spMkLst>
+            <pc:docMk/>
+            <pc:sldMk cId="1362109033" sldId="619"/>
+            <ac:spMk id="2" creationId="{DD181A30-3F12-3F34-4B12-D2A75ABF5922}"/>
+          </ac:spMkLst>
+        </pc:spChg>
+        <pc:spChg chg="mod">
+          <ac:chgData name="Virve Räni" userId="161a7437-7ef4-49ec-91bf-54882f313dfe" providerId="ADAL" clId="{6D754EED-65AA-4A21-B175-6769012CF487}" dt="2026-04-14T08:06:07.883" v="377" actId="790"/>
+          <ac:spMkLst>
+            <pc:docMk/>
+            <pc:sldMk cId="1362109033" sldId="619"/>
+            <ac:spMk id="3" creationId="{EB1B2D3B-479E-EDB2-3538-B9498FA1C196}"/>
+          </ac:spMkLst>
+        </pc:spChg>
+      </pc:sldChg>
+      <pc:sldChg chg="modSp mod">
+        <pc:chgData name="Virve Räni" userId="161a7437-7ef4-49ec-91bf-54882f313dfe" providerId="ADAL" clId="{6D754EED-65AA-4A21-B175-6769012CF487}" dt="2026-04-14T08:06:07.883" v="377" actId="790"/>
+        <pc:sldMkLst>
+          <pc:docMk/>
+          <pc:sldMk cId="3682630093" sldId="646"/>
+        </pc:sldMkLst>
+        <pc:spChg chg="mod">
+          <ac:chgData name="Virve Räni" userId="161a7437-7ef4-49ec-91bf-54882f313dfe" providerId="ADAL" clId="{6D754EED-65AA-4A21-B175-6769012CF487}" dt="2026-04-14T08:06:07.883" v="377" actId="790"/>
+          <ac:spMkLst>
+            <pc:docMk/>
+            <pc:sldMk cId="3682630093" sldId="646"/>
+            <ac:spMk id="2" creationId="{4FFB36D3-A970-D5A5-D02E-FEE0E6B0D12C}"/>
+          </ac:spMkLst>
+        </pc:spChg>
+        <pc:spChg chg="mod">
+          <ac:chgData name="Virve Räni" userId="161a7437-7ef4-49ec-91bf-54882f313dfe" providerId="ADAL" clId="{6D754EED-65AA-4A21-B175-6769012CF487}" dt="2026-04-14T08:06:07.883" v="377" actId="790"/>
+          <ac:spMkLst>
+            <pc:docMk/>
+            <pc:sldMk cId="3682630093" sldId="646"/>
+            <ac:spMk id="3" creationId="{DEB6FC87-C50E-09CA-7F87-C4C23D6BFC79}"/>
+          </ac:spMkLst>
+        </pc:spChg>
+      </pc:sldChg>
+      <pc:sldChg chg="modSp new mod">
+        <pc:chgData name="Virve Räni" userId="161a7437-7ef4-49ec-91bf-54882f313dfe" providerId="ADAL" clId="{6D754EED-65AA-4A21-B175-6769012CF487}" dt="2026-04-14T08:12:52.894" v="497" actId="20577"/>
+        <pc:sldMkLst>
+          <pc:docMk/>
+          <pc:sldMk cId="1143583913" sldId="647"/>
+        </pc:sldMkLst>
+        <pc:spChg chg="mod">
+          <ac:chgData name="Virve Räni" userId="161a7437-7ef4-49ec-91bf-54882f313dfe" providerId="ADAL" clId="{6D754EED-65AA-4A21-B175-6769012CF487}" dt="2026-04-14T08:11:50.324" v="428" actId="20577"/>
+          <ac:spMkLst>
+            <pc:docMk/>
+            <pc:sldMk cId="1143583913" sldId="647"/>
+            <ac:spMk id="2" creationId="{1A746728-76D6-E8E6-D46A-BE5C5BCFA966}"/>
+          </ac:spMkLst>
+        </pc:spChg>
+        <pc:spChg chg="mod">
+          <ac:chgData name="Virve Räni" userId="161a7437-7ef4-49ec-91bf-54882f313dfe" providerId="ADAL" clId="{6D754EED-65AA-4A21-B175-6769012CF487}" dt="2026-04-14T08:12:52.894" v="497" actId="20577"/>
+          <ac:spMkLst>
+            <pc:docMk/>
+            <pc:sldMk cId="1143583913" sldId="647"/>
+            <ac:spMk id="3" creationId="{04A36C9B-9CD7-7743-0A7B-85761C9ACA6F}"/>
+          </ac:spMkLst>
+        </pc:spChg>
       </pc:sldChg>
     </pc:docChg>
   </pc:docChgLst>
@@ -347,7 +651,7 @@
           <a:p>
             <a:fld id="{F9D2AD6E-DEDD-49A0-A4BE-7A081A9112DA}" type="datetimeFigureOut">
               <a:rPr lang="en-US" smtClean="0"/>
-              <a:t>3/18/2026</a:t>
+              <a:t>4/14/2026</a:t>
             </a:fld>
             <a:endParaRPr lang="en-US"/>
           </a:p>
@@ -523,7 +827,7 @@
           </a:lstStyle>
           <a:p>
             <a:fld id="{2AF9C1A6-4321-41FA-B001-4140F0E2457F}" type="datetimeFigureOut">
-              <a:t>18.03.2026</a:t>
+              <a:t>14.04.2026</a:t>
             </a:fld>
             <a:endParaRPr lang="en-US"/>
           </a:p>
@@ -967,7 +1271,7 @@
           <a:p>
             <a:fld id="{46699514-027B-49BD-8B49-5054CA40ECF4}" type="slidenum">
               <a:rPr lang="en-US"/>
-              <a:t>6</a:t>
+              <a:t>8</a:t>
             </a:fld>
             <a:endParaRPr lang="en-US"/>
           </a:p>
@@ -1026,10 +1330,10 @@
           <p:nvPr userDrawn="1"/>
         </p:nvPicPr>
         <p:blipFill>
-          <a:blip r:embed="rId2">
+          <a:blip>
             <a:extLst>
               <a:ext uri="{96DAC541-7B7A-43D3-8B79-37D633B846F1}">
-                <asvg:svgBlip xmlns:asvg="http://schemas.microsoft.com/office/drawing/2016/SVG/main" r:embed="rId3"/>
+                <asvg:svgBlip xmlns:asvg="http://schemas.microsoft.com/office/drawing/2016/SVG/main" r:embed="rId2"/>
               </a:ext>
             </a:extLst>
           </a:blip>
@@ -10587,10 +10891,10 @@
             <a:ext cx="810000" cy="320400"/>
           </a:xfrm>
           <a:blipFill>
-            <a:blip r:embed="rId2">
+            <a:blip>
               <a:extLst>
                 <a:ext uri="{96DAC541-7B7A-43D3-8B79-37D633B846F1}">
-                  <asvg:svgBlip xmlns:asvg="http://schemas.microsoft.com/office/drawing/2016/SVG/main" r:embed="rId3"/>
+                  <asvg:svgBlip xmlns:asvg="http://schemas.microsoft.com/office/drawing/2016/SVG/main" r:embed="rId2"/>
                 </a:ext>
               </a:extLst>
             </a:blip>
@@ -11869,10 +12173,10 @@
             <a:ext cx="810000" cy="320400"/>
           </a:xfrm>
           <a:blipFill>
-            <a:blip r:embed="rId2">
+            <a:blip>
               <a:extLst>
                 <a:ext uri="{96DAC541-7B7A-43D3-8B79-37D633B846F1}">
-                  <asvg:svgBlip xmlns:asvg="http://schemas.microsoft.com/office/drawing/2016/SVG/main" r:embed="rId3"/>
+                  <asvg:svgBlip xmlns:asvg="http://schemas.microsoft.com/office/drawing/2016/SVG/main" r:embed="rId2"/>
                 </a:ext>
               </a:extLst>
             </a:blip>
@@ -12113,7 +12417,7 @@
           <a:p>
             <a:fld id="{DE840A40-73C8-4048-8140-49F5D65BB431}" type="datetimeFigureOut">
               <a:rPr lang="et-EE" smtClean="0"/>
-              <a:t>18.03.2026</a:t>
+              <a:t>14.04.2026</a:t>
             </a:fld>
             <a:endParaRPr lang="et-EE"/>
           </a:p>
@@ -12226,10 +12530,10 @@
           <p:nvPr userDrawn="1"/>
         </p:nvPicPr>
         <p:blipFill>
-          <a:blip r:embed="rId2">
+          <a:blip>
             <a:extLst>
               <a:ext uri="{96DAC541-7B7A-43D3-8B79-37D633B846F1}">
-                <asvg:svgBlip xmlns:asvg="http://schemas.microsoft.com/office/drawing/2016/SVG/main" r:embed="rId3"/>
+                <asvg:svgBlip xmlns:asvg="http://schemas.microsoft.com/office/drawing/2016/SVG/main" r:embed="rId2"/>
               </a:ext>
             </a:extLst>
           </a:blip>
@@ -19208,10 +19512,10 @@
             <a:ext cx="2302064" cy="927536"/>
           </a:xfrm>
           <a:blipFill>
-            <a:blip r:embed="rId2">
+            <a:blip>
               <a:extLst>
                 <a:ext uri="{96DAC541-7B7A-43D3-8B79-37D633B846F1}">
-                  <asvg:svgBlip xmlns:asvg="http://schemas.microsoft.com/office/drawing/2016/SVG/main" r:embed="rId3"/>
+                  <asvg:svgBlip xmlns:asvg="http://schemas.microsoft.com/office/drawing/2016/SVG/main" r:embed="rId2"/>
                 </a:ext>
               </a:extLst>
             </a:blip>
@@ -19394,10 +19698,10 @@
           <p:nvPr userDrawn="1"/>
         </p:nvPicPr>
         <p:blipFill>
-          <a:blip r:embed="rId2">
+          <a:blip>
             <a:extLst>
               <a:ext uri="{96DAC541-7B7A-43D3-8B79-37D633B846F1}">
-                <asvg:svgBlip xmlns:asvg="http://schemas.microsoft.com/office/drawing/2016/SVG/main" r:embed="rId3"/>
+                <asvg:svgBlip xmlns:asvg="http://schemas.microsoft.com/office/drawing/2016/SVG/main" r:embed="rId2"/>
               </a:ext>
             </a:extLst>
           </a:blip>
@@ -20128,10 +20432,10 @@
           <p:nvPr userDrawn="1"/>
         </p:nvPicPr>
         <p:blipFill>
-          <a:blip r:embed="rId2">
+          <a:blip>
             <a:extLst>
               <a:ext uri="{96DAC541-7B7A-43D3-8B79-37D633B846F1}">
-                <asvg:svgBlip xmlns:asvg="http://schemas.microsoft.com/office/drawing/2016/SVG/main" r:embed="rId3"/>
+                <asvg:svgBlip xmlns:asvg="http://schemas.microsoft.com/office/drawing/2016/SVG/main" r:embed="rId2"/>
               </a:ext>
             </a:extLst>
           </a:blip>
@@ -20917,10 +21221,10 @@
             <a:ext cx="810000" cy="320400"/>
           </a:xfrm>
           <a:blipFill>
-            <a:blip r:embed="rId2">
+            <a:blip>
               <a:extLst>
                 <a:ext uri="{96DAC541-7B7A-43D3-8B79-37D633B846F1}">
-                  <asvg:svgBlip xmlns:asvg="http://schemas.microsoft.com/office/drawing/2016/SVG/main" r:embed="rId3"/>
+                  <asvg:svgBlip xmlns:asvg="http://schemas.microsoft.com/office/drawing/2016/SVG/main" r:embed="rId2"/>
                 </a:ext>
               </a:extLst>
             </a:blip>
@@ -23878,24 +24182,12 @@
               </a:lnSpc>
             </a:pPr>
             <a:r>
-              <a:rPr lang="en-US">
+              <a:rPr lang="et-EE" noProof="0" dirty="0">
                 <a:cs typeface="Poppins SemiBold"/>
               </a:rPr>
-              <a:t>Vali </a:t>
+              <a:t>Vali Andmetarkus!</a:t>
             </a:r>
-            <a:r>
-              <a:rPr lang="en-US" err="1">
-                <a:cs typeface="Poppins SemiBold"/>
-              </a:rPr>
-              <a:t>Andmetarkus</a:t>
-            </a:r>
-            <a:r>
-              <a:rPr lang="en-US">
-                <a:cs typeface="Poppins SemiBold"/>
-              </a:rPr>
-              <a:t>!</a:t>
-            </a:r>
-            <a:endParaRPr lang="en-US"/>
+            <a:endParaRPr lang="et-EE" noProof="0" dirty="0"/>
           </a:p>
         </p:txBody>
       </p:sp>
@@ -24181,29 +24473,23 @@
           </a:lstStyle>
           <a:p>
             <a:r>
-              <a:rPr lang="en-US">
+              <a:rPr lang="et-EE" noProof="0" dirty="0">
                 <a:ea typeface="Inter"/>
               </a:rPr>
-              <a:t>Virve </a:t>
+              <a:t>Virve Räni</a:t>
             </a:r>
-            <a:r>
-              <a:rPr lang="en-US" err="1">
-                <a:ea typeface="Inter"/>
-              </a:rPr>
-              <a:t>Räni</a:t>
-            </a:r>
-            <a:endParaRPr lang="en-US" err="1"/>
+            <a:endParaRPr lang="et-EE" noProof="0" dirty="0"/>
           </a:p>
           <a:p>
             <a:r>
-              <a:rPr lang="en-US">
+              <a:rPr lang="et-EE" noProof="0" dirty="0">
                 <a:ea typeface="Inter"/>
               </a:rPr>
               <a:t>virve.rani@bcs.ee</a:t>
             </a:r>
           </a:p>
           <a:p>
-            <a:endParaRPr lang="en-US"/>
+            <a:endParaRPr lang="et-EE" noProof="0" dirty="0"/>
           </a:p>
         </p:txBody>
       </p:sp>
@@ -24242,6 +24528,464 @@
           <p:cNvPr id="2" name="Title 1">
             <a:extLst>
               <a:ext uri="{FF2B5EF4-FFF2-40B4-BE49-F238E27FC236}">
+                <a16:creationId xmlns:a16="http://schemas.microsoft.com/office/drawing/2014/main" id="{15E4613B-AA18-2E8F-A97B-F0B013DE2391}"/>
+              </a:ext>
+            </a:extLst>
+          </p:cNvPr>
+          <p:cNvSpPr>
+            <a:spLocks noGrp="1"/>
+          </p:cNvSpPr>
+          <p:nvPr>
+            <p:ph type="ctrTitle"/>
+          </p:nvPr>
+        </p:nvSpPr>
+        <p:spPr/>
+        <p:txBody>
+          <a:bodyPr/>
+          <a:lstStyle/>
+          <a:p>
+            <a:r>
+              <a:rPr lang="et-EE" noProof="0" dirty="0"/>
+              <a:t>Sisendi kirjutamise põhimõtted (CRAFT mudel)</a:t>
+            </a:r>
+          </a:p>
+        </p:txBody>
+      </p:sp>
+      <p:sp>
+        <p:nvSpPr>
+          <p:cNvPr id="3" name="Content Placeholder 2">
+            <a:extLst>
+              <a:ext uri="{FF2B5EF4-FFF2-40B4-BE49-F238E27FC236}">
+                <a16:creationId xmlns:a16="http://schemas.microsoft.com/office/drawing/2014/main" id="{F4A70332-1D1A-2C6E-9052-C6A2A2009676}"/>
+              </a:ext>
+            </a:extLst>
+          </p:cNvPr>
+          <p:cNvSpPr>
+            <a:spLocks noGrp="1"/>
+          </p:cNvSpPr>
+          <p:nvPr>
+            <p:ph sz="quarter" idx="10"/>
+          </p:nvPr>
+        </p:nvSpPr>
+        <p:spPr/>
+        <p:txBody>
+          <a:bodyPr/>
+          <a:lstStyle/>
+          <a:p>
+            <a:pPr marL="457200" indent="0">
+              <a:lnSpc>
+                <a:spcPct val="150000"/>
+              </a:lnSpc>
+              <a:buNone/>
+            </a:pPr>
+            <a:r>
+              <a:rPr lang="et-EE" sz="2400" noProof="0" dirty="0">
+                <a:ea typeface="Inter"/>
+              </a:rPr>
+              <a:t>1) Kontekst - taustainfo</a:t>
+            </a:r>
+          </a:p>
+          <a:p>
+            <a:pPr marL="457200" indent="0">
+              <a:lnSpc>
+                <a:spcPct val="150000"/>
+              </a:lnSpc>
+              <a:buNone/>
+            </a:pPr>
+            <a:r>
+              <a:rPr lang="et-EE" sz="2400" noProof="0" dirty="0">
+                <a:ea typeface="Inter"/>
+              </a:rPr>
+              <a:t>2) Roll – kelle rolli tehisaru võtab, nt ametiala</a:t>
+            </a:r>
+          </a:p>
+          <a:p>
+            <a:pPr marL="457200" indent="0">
+              <a:lnSpc>
+                <a:spcPct val="150000"/>
+              </a:lnSpc>
+              <a:buNone/>
+            </a:pPr>
+            <a:r>
+              <a:rPr lang="et-EE" sz="2400" noProof="0" dirty="0">
+                <a:ea typeface="Inter"/>
+              </a:rPr>
+              <a:t>3) Tegevus – mis on eesmärk ja oodatud tulemus</a:t>
+            </a:r>
+          </a:p>
+          <a:p>
+            <a:pPr marL="457200" indent="0">
+              <a:lnSpc>
+                <a:spcPct val="150000"/>
+              </a:lnSpc>
+              <a:buNone/>
+            </a:pPr>
+            <a:r>
+              <a:rPr lang="et-EE" sz="2400" noProof="0" dirty="0">
+                <a:ea typeface="Inter"/>
+              </a:rPr>
+              <a:t>4) Formaat – millises formaadis vastust soovid</a:t>
+            </a:r>
+            <a:endParaRPr lang="et-EE" noProof="0" dirty="0">
+              <a:ea typeface="Inter"/>
+            </a:endParaRPr>
+          </a:p>
+          <a:p>
+            <a:pPr marL="457200" indent="0">
+              <a:lnSpc>
+                <a:spcPct val="150000"/>
+              </a:lnSpc>
+              <a:buNone/>
+            </a:pPr>
+            <a:r>
+              <a:rPr lang="et-EE" sz="2400" noProof="0" dirty="0">
+                <a:ea typeface="Inter"/>
+              </a:rPr>
+              <a:t>5) Sihtgrupp - kellele on tulem suunatud</a:t>
+            </a:r>
+            <a:endParaRPr lang="et-EE" noProof="0" dirty="0"/>
+          </a:p>
+          <a:p>
+            <a:pPr marL="742950" lvl="1" indent="-285750">
+              <a:lnSpc>
+                <a:spcPct val="150000"/>
+              </a:lnSpc>
+            </a:pPr>
+            <a:endParaRPr lang="et-EE" noProof="0" dirty="0">
+              <a:solidFill>
+                <a:srgbClr val="121212"/>
+              </a:solidFill>
+            </a:endParaRPr>
+          </a:p>
+        </p:txBody>
+      </p:sp>
+    </p:spTree>
+    <p:extLst>
+      <p:ext uri="{BB962C8B-B14F-4D97-AF65-F5344CB8AC3E}">
+        <p14:creationId xmlns:p14="http://schemas.microsoft.com/office/powerpoint/2010/main" val="1536515755"/>
+      </p:ext>
+    </p:extLst>
+  </p:cSld>
+  <p:clrMapOvr>
+    <a:masterClrMapping/>
+  </p:clrMapOvr>
+</p:sld>
+</file>
+
+<file path=ppt/slides/slide11.xml><?xml version="1.0" encoding="utf-8"?>
+<p:sld xmlns:a="http://schemas.openxmlformats.org/drawingml/2006/main" xmlns:r="http://schemas.openxmlformats.org/officeDocument/2006/relationships" xmlns:p="http://schemas.openxmlformats.org/presentationml/2006/main">
+  <p:cSld>
+    <p:spTree>
+      <p:nvGrpSpPr>
+        <p:cNvPr id="1" name=""/>
+        <p:cNvGrpSpPr/>
+        <p:nvPr/>
+      </p:nvGrpSpPr>
+      <p:grpSpPr>
+        <a:xfrm>
+          <a:off x="0" y="0"/>
+          <a:ext cx="0" cy="0"/>
+          <a:chOff x="0" y="0"/>
+          <a:chExt cx="0" cy="0"/>
+        </a:xfrm>
+      </p:grpSpPr>
+      <p:sp>
+        <p:nvSpPr>
+          <p:cNvPr id="2" name="Title 1">
+            <a:extLst>
+              <a:ext uri="{FF2B5EF4-FFF2-40B4-BE49-F238E27FC236}">
+                <a16:creationId xmlns:a16="http://schemas.microsoft.com/office/drawing/2014/main" id="{637509EE-22F1-1315-8A2D-3282644AA9E1}"/>
+              </a:ext>
+            </a:extLst>
+          </p:cNvPr>
+          <p:cNvSpPr>
+            <a:spLocks noGrp="1"/>
+          </p:cNvSpPr>
+          <p:nvPr>
+            <p:ph type="ctrTitle"/>
+          </p:nvPr>
+        </p:nvSpPr>
+        <p:spPr/>
+        <p:txBody>
+          <a:bodyPr/>
+          <a:lstStyle/>
+          <a:p>
+            <a:r>
+              <a:rPr lang="et-EE" noProof="0" dirty="0"/>
+              <a:t>Sisendi näide</a:t>
+            </a:r>
+          </a:p>
+        </p:txBody>
+      </p:sp>
+      <p:sp>
+        <p:nvSpPr>
+          <p:cNvPr id="3" name="Content Placeholder 2">
+            <a:extLst>
+              <a:ext uri="{FF2B5EF4-FFF2-40B4-BE49-F238E27FC236}">
+                <a16:creationId xmlns:a16="http://schemas.microsoft.com/office/drawing/2014/main" id="{90E5931E-0B21-061A-1BAA-585EFA37FA45}"/>
+              </a:ext>
+            </a:extLst>
+          </p:cNvPr>
+          <p:cNvSpPr>
+            <a:spLocks noGrp="1"/>
+          </p:cNvSpPr>
+          <p:nvPr>
+            <p:ph sz="quarter" idx="10"/>
+          </p:nvPr>
+        </p:nvSpPr>
+        <p:spPr/>
+        <p:txBody>
+          <a:bodyPr/>
+          <a:lstStyle/>
+          <a:p>
+            <a:r>
+              <a:rPr lang="et-EE" sz="2400" noProof="0" dirty="0">
+                <a:ea typeface="Inter"/>
+              </a:rPr>
+              <a:t>Algne: </a:t>
+            </a:r>
+            <a:r>
+              <a:rPr lang="et-EE" sz="2400" noProof="0" dirty="0">
+                <a:ea typeface="+mn-lt"/>
+                <a:cs typeface="+mn-lt"/>
+              </a:rPr>
+              <a:t>Analüüsi andmeid.</a:t>
+            </a:r>
+            <a:endParaRPr lang="et-EE" sz="2400" noProof="0" dirty="0"/>
+          </a:p>
+          <a:p>
+            <a:pPr marL="0" indent="0">
+              <a:buNone/>
+            </a:pPr>
+            <a:endParaRPr lang="et-EE" sz="2400" noProof="0" dirty="0"/>
+          </a:p>
+          <a:p>
+            <a:pPr>
+              <a:lnSpc>
+                <a:spcPct val="150000"/>
+              </a:lnSpc>
+            </a:pPr>
+            <a:r>
+              <a:rPr lang="et-EE" sz="2400" noProof="0" dirty="0">
+                <a:ea typeface="Inter"/>
+              </a:rPr>
+              <a:t>Täiendatud:</a:t>
+            </a:r>
+          </a:p>
+          <a:p>
+            <a:pPr lvl="1">
+              <a:lnSpc>
+                <a:spcPct val="150000"/>
+              </a:lnSpc>
+            </a:pPr>
+            <a:r>
+              <a:rPr lang="et-EE" sz="2000" noProof="0" dirty="0">
+                <a:ea typeface="Inter"/>
+              </a:rPr>
+              <a:t>Siin on andmestik kahe pakiroboti tarneaja kohta. </a:t>
+            </a:r>
+            <a:r>
+              <a:rPr lang="et-EE" sz="2000" i="1" noProof="0" dirty="0">
+                <a:ea typeface="Inter"/>
+              </a:rPr>
+              <a:t>(Kontekst)</a:t>
+            </a:r>
+            <a:endParaRPr lang="et-EE" sz="2000" i="1" noProof="0" dirty="0"/>
+          </a:p>
+          <a:p>
+            <a:pPr lvl="1">
+              <a:lnSpc>
+                <a:spcPct val="150000"/>
+              </a:lnSpc>
+            </a:pPr>
+            <a:r>
+              <a:rPr lang="et-EE" sz="2000" noProof="0" dirty="0">
+                <a:ea typeface="Inter"/>
+              </a:rPr>
+              <a:t>Sa oled seenior andmeanalüütik. </a:t>
+            </a:r>
+            <a:r>
+              <a:rPr lang="et-EE" sz="2000" i="1" noProof="0" dirty="0">
+                <a:ea typeface="Inter"/>
+              </a:rPr>
+              <a:t>(Roll)</a:t>
+            </a:r>
+            <a:endParaRPr lang="et-EE" sz="2000" i="1" noProof="0" dirty="0"/>
+          </a:p>
+          <a:p>
+            <a:pPr lvl="1">
+              <a:lnSpc>
+                <a:spcPct val="150000"/>
+              </a:lnSpc>
+              <a:buClr>
+                <a:srgbClr val="121212"/>
+              </a:buClr>
+            </a:pPr>
+            <a:r>
+              <a:rPr lang="et-EE" sz="2000" noProof="0" dirty="0">
+                <a:ea typeface="+mn-lt"/>
+                <a:cs typeface="+mn-lt"/>
+              </a:rPr>
+              <a:t>Võrdle erinevust vana ja uue tarkvaraga pakiroboti vahel. </a:t>
+            </a:r>
+            <a:r>
+              <a:rPr lang="et-EE" sz="2000" i="1" noProof="0" dirty="0">
+                <a:ea typeface="+mn-lt"/>
+                <a:cs typeface="+mn-lt"/>
+              </a:rPr>
+              <a:t>(Tegevus)</a:t>
+            </a:r>
+          </a:p>
+          <a:p>
+            <a:pPr lvl="1">
+              <a:lnSpc>
+                <a:spcPct val="150000"/>
+              </a:lnSpc>
+              <a:buClr>
+                <a:srgbClr val="121212"/>
+              </a:buClr>
+            </a:pPr>
+            <a:r>
+              <a:rPr lang="et-EE" sz="2000" noProof="0" dirty="0">
+                <a:ea typeface="+mn-lt"/>
+                <a:cs typeface="+mn-lt"/>
+              </a:rPr>
+              <a:t>Loo </a:t>
+            </a:r>
+            <a:r>
+              <a:rPr lang="et-EE" sz="2000" noProof="0" dirty="0" err="1">
+                <a:ea typeface="+mn-lt"/>
+                <a:cs typeface="+mn-lt"/>
+              </a:rPr>
+              <a:t>Jupyter</a:t>
+            </a:r>
+            <a:r>
+              <a:rPr lang="et-EE" sz="2000" noProof="0" dirty="0">
+                <a:ea typeface="+mn-lt"/>
+                <a:cs typeface="+mn-lt"/>
+              </a:rPr>
+              <a:t> </a:t>
+            </a:r>
+            <a:r>
+              <a:rPr lang="et-EE" sz="2000" noProof="0" dirty="0" err="1">
+                <a:ea typeface="+mn-lt"/>
+                <a:cs typeface="+mn-lt"/>
+              </a:rPr>
+              <a:t>Notebook</a:t>
+            </a:r>
+            <a:r>
+              <a:rPr lang="et-EE" sz="2000" noProof="0" dirty="0">
+                <a:ea typeface="+mn-lt"/>
+                <a:cs typeface="+mn-lt"/>
+              </a:rPr>
+              <a:t> fail. </a:t>
+            </a:r>
+            <a:r>
+              <a:rPr lang="et-EE" sz="2000" i="1" noProof="0" dirty="0">
+                <a:ea typeface="+mn-lt"/>
+                <a:cs typeface="+mn-lt"/>
+              </a:rPr>
+              <a:t>(Formaat)</a:t>
+            </a:r>
+          </a:p>
+          <a:p>
+            <a:pPr lvl="1">
+              <a:lnSpc>
+                <a:spcPct val="150000"/>
+              </a:lnSpc>
+              <a:buClr>
+                <a:srgbClr val="121212"/>
+              </a:buClr>
+            </a:pPr>
+            <a:r>
+              <a:rPr lang="et-EE" sz="2000" noProof="0" dirty="0">
+                <a:ea typeface="+mn-lt"/>
+                <a:cs typeface="+mn-lt"/>
+              </a:rPr>
+              <a:t>Esitlus on mõeldud tootetiimile.</a:t>
+            </a:r>
+            <a:r>
+              <a:rPr lang="et-EE" sz="2000" i="1" noProof="0" dirty="0">
+                <a:ea typeface="+mn-lt"/>
+                <a:cs typeface="+mn-lt"/>
+              </a:rPr>
+              <a:t> (Sihtgrupp)</a:t>
+            </a:r>
+          </a:p>
+          <a:p>
+            <a:pPr lvl="1">
+              <a:lnSpc>
+                <a:spcPct val="150000"/>
+              </a:lnSpc>
+              <a:buClr>
+                <a:srgbClr val="121212"/>
+              </a:buClr>
+              <a:buFont typeface="Courier New" panose="020B0502030000000004" pitchFamily="34" charset="0"/>
+              <a:buChar char="o"/>
+            </a:pPr>
+            <a:endParaRPr lang="et-EE" sz="2400" noProof="0" dirty="0"/>
+          </a:p>
+          <a:p>
+            <a:pPr lvl="1">
+              <a:buClr>
+                <a:srgbClr val="121212"/>
+              </a:buClr>
+              <a:buFont typeface="Courier New" panose="020B0502030000000004" pitchFamily="34" charset="0"/>
+              <a:buChar char="o"/>
+            </a:pPr>
+            <a:endParaRPr lang="et-EE" sz="2400" noProof="0" dirty="0"/>
+          </a:p>
+          <a:p>
+            <a:pPr lvl="1">
+              <a:buFont typeface="Courier New" panose="020B0502030000000004" pitchFamily="34" charset="0"/>
+              <a:buChar char="o"/>
+            </a:pPr>
+            <a:endParaRPr lang="et-EE" sz="2400" noProof="0" dirty="0"/>
+          </a:p>
+          <a:p>
+            <a:pPr lvl="1">
+              <a:buFont typeface="Courier New" panose="020B0502030000000004" pitchFamily="34" charset="0"/>
+              <a:buChar char="o"/>
+            </a:pPr>
+            <a:endParaRPr lang="et-EE" noProof="0" dirty="0"/>
+          </a:p>
+        </p:txBody>
+      </p:sp>
+    </p:spTree>
+    <p:extLst>
+      <p:ext uri="{BB962C8B-B14F-4D97-AF65-F5344CB8AC3E}">
+        <p14:creationId xmlns:p14="http://schemas.microsoft.com/office/powerpoint/2010/main" val="3667732403"/>
+      </p:ext>
+    </p:extLst>
+  </p:cSld>
+  <p:clrMapOvr>
+    <a:masterClrMapping/>
+  </p:clrMapOvr>
+</p:sld>
+</file>
+
+<file path=ppt/slides/slide12.xml><?xml version="1.0" encoding="utf-8"?>
+<p:sld xmlns:a="http://schemas.openxmlformats.org/drawingml/2006/main" xmlns:r="http://schemas.openxmlformats.org/officeDocument/2006/relationships" xmlns:p="http://schemas.openxmlformats.org/presentationml/2006/main">
+  <p:cSld>
+    <p:spTree>
+      <p:nvGrpSpPr>
+        <p:cNvPr id="1" name=""/>
+        <p:cNvGrpSpPr/>
+        <p:nvPr/>
+      </p:nvGrpSpPr>
+      <p:grpSpPr>
+        <a:xfrm>
+          <a:off x="0" y="0"/>
+          <a:ext cx="0" cy="0"/>
+          <a:chOff x="0" y="0"/>
+          <a:chExt cx="0" cy="0"/>
+        </a:xfrm>
+      </p:grpSpPr>
+      <p:sp>
+        <p:nvSpPr>
+          <p:cNvPr id="2" name="Title 1">
+            <a:extLst>
+              <a:ext uri="{FF2B5EF4-FFF2-40B4-BE49-F238E27FC236}">
                 <a16:creationId xmlns:a16="http://schemas.microsoft.com/office/drawing/2014/main" id="{4FFB36D3-A970-D5A5-D02E-FEE0E6B0D12C}"/>
               </a:ext>
             </a:extLst>
@@ -24259,16 +25003,8 @@
           <a:lstStyle/>
           <a:p>
             <a:r>
-              <a:rPr lang="en-US" dirty="0" err="1"/>
-              <a:t>Tehisaru</a:t>
-            </a:r>
-            <a:r>
-              <a:rPr lang="en-US" dirty="0"/>
-              <a:t> - </a:t>
-            </a:r>
-            <a:r>
-              <a:rPr lang="en-US" dirty="0" err="1"/>
-              <a:t>personaliseerimine</a:t>
+              <a:rPr lang="et-EE" noProof="0" dirty="0"/>
+              <a:t>Tehisaru - personaliseerimine</a:t>
             </a:r>
           </a:p>
         </p:txBody>
@@ -24300,80 +25036,11 @@
               </a:lnSpc>
             </a:pPr>
             <a:r>
-              <a:rPr lang="en-US" sz="2400" dirty="0">
+              <a:rPr lang="et-EE" sz="2400" noProof="0" dirty="0">
                 <a:ea typeface="Inter"/>
               </a:rPr>
-              <a:t>Saab </a:t>
+              <a:t>Saab lisada info, mida iga päringu tegemisel jooksutatakse</a:t>
             </a:r>
-            <a:r>
-              <a:rPr lang="en-US" sz="2400" err="1">
-                <a:ea typeface="Inter"/>
-              </a:rPr>
-              <a:t>lisada</a:t>
-            </a:r>
-            <a:r>
-              <a:rPr lang="en-US" sz="2400" dirty="0">
-                <a:ea typeface="Inter"/>
-              </a:rPr>
-              <a:t> info, </a:t>
-            </a:r>
-            <a:r>
-              <a:rPr lang="en-US" sz="2400" err="1">
-                <a:ea typeface="Inter"/>
-              </a:rPr>
-              <a:t>mida</a:t>
-            </a:r>
-            <a:r>
-              <a:rPr lang="en-US" sz="2400" dirty="0">
-                <a:ea typeface="Inter"/>
-              </a:rPr>
-              <a:t> </a:t>
-            </a:r>
-            <a:r>
-              <a:rPr lang="en-US" sz="2400" err="1">
-                <a:ea typeface="Inter"/>
-              </a:rPr>
-              <a:t>iga</a:t>
-            </a:r>
-            <a:r>
-              <a:rPr lang="en-US" sz="2400" dirty="0">
-                <a:ea typeface="Inter"/>
-              </a:rPr>
-              <a:t> </a:t>
-            </a:r>
-            <a:r>
-              <a:rPr lang="en-US" sz="2400" err="1">
-                <a:ea typeface="Inter"/>
-              </a:rPr>
-              <a:t>päringu</a:t>
-            </a:r>
-            <a:r>
-              <a:rPr lang="en-US" sz="2400" dirty="0">
-                <a:ea typeface="Inter"/>
-              </a:rPr>
-              <a:t> </a:t>
-            </a:r>
-            <a:r>
-              <a:rPr lang="en-US" sz="2400" err="1">
-                <a:ea typeface="Inter"/>
-              </a:rPr>
-              <a:t>tegemisel</a:t>
-            </a:r>
-            <a:r>
-              <a:rPr lang="en-US" sz="2400" dirty="0">
-                <a:ea typeface="Inter"/>
-              </a:rPr>
-              <a:t> </a:t>
-            </a:r>
-            <a:r>
-              <a:rPr lang="en-US" sz="2400" err="1">
-                <a:ea typeface="Inter"/>
-              </a:rPr>
-              <a:t>jooksutatakse</a:t>
-            </a:r>
-            <a:endParaRPr lang="en-US" sz="2400">
-              <a:ea typeface="Inter"/>
-            </a:endParaRPr>
           </a:p>
           <a:p>
             <a:pPr lvl="1">
@@ -24384,54 +25051,42 @@
               <a:buChar char="o"/>
             </a:pPr>
             <a:r>
-              <a:rPr lang="en-US" sz="2400" dirty="0" err="1">
+              <a:rPr lang="et-EE" sz="2400" noProof="0" dirty="0">
                 <a:ea typeface="Inter"/>
               </a:rPr>
-              <a:t>Nt</a:t>
+              <a:t>Nt </a:t>
             </a:r>
             <a:r>
-              <a:rPr lang="en-US" sz="2400" dirty="0">
+              <a:rPr lang="et-EE" sz="2400" noProof="0" dirty="0" err="1">
                 <a:ea typeface="Inter"/>
               </a:rPr>
-              <a:t> ChatGPT --&gt; </a:t>
+              <a:t>ChatGPT</a:t>
             </a:r>
             <a:r>
-              <a:rPr lang="en-US" sz="2400" dirty="0" err="1">
+              <a:rPr lang="et-EE" sz="2400" noProof="0" dirty="0">
                 <a:ea typeface="Inter"/>
               </a:rPr>
-              <a:t>kliki</a:t>
+              <a:t> --&gt; kliki oma profiilil --&gt; </a:t>
             </a:r>
             <a:r>
-              <a:rPr lang="en-US" sz="2400" dirty="0">
+              <a:rPr lang="et-EE" sz="2400" noProof="0" dirty="0" err="1">
+                <a:ea typeface="Inter"/>
+              </a:rPr>
+              <a:t>Customize</a:t>
+            </a:r>
+            <a:r>
+              <a:rPr lang="et-EE" sz="2400" noProof="0" dirty="0">
                 <a:ea typeface="Inter"/>
               </a:rPr>
               <a:t> </a:t>
             </a:r>
             <a:r>
-              <a:rPr lang="en-US" sz="2400" dirty="0" err="1">
+              <a:rPr lang="et-EE" sz="2400" noProof="0" dirty="0" err="1">
                 <a:ea typeface="Inter"/>
               </a:rPr>
-              <a:t>oma</a:t>
+              <a:t>ChatGPT</a:t>
             </a:r>
-            <a:r>
-              <a:rPr lang="en-US" sz="2400" dirty="0">
-                <a:ea typeface="Inter"/>
-              </a:rPr>
-              <a:t> </a:t>
-            </a:r>
-            <a:r>
-              <a:rPr lang="en-US" sz="2400" dirty="0" err="1">
-                <a:ea typeface="Inter"/>
-              </a:rPr>
-              <a:t>profiilil</a:t>
-            </a:r>
-            <a:r>
-              <a:rPr lang="en-US" sz="2400" dirty="0">
-                <a:ea typeface="Inter"/>
-              </a:rPr>
-              <a:t> --&gt; Customize ChatGPT</a:t>
-            </a:r>
-            <a:endParaRPr lang="en-US" sz="2400" dirty="0"/>
+            <a:endParaRPr lang="et-EE" sz="2400" noProof="0" dirty="0"/>
           </a:p>
         </p:txBody>
       </p:sp>
@@ -24448,7 +25103,7 @@
 </p:sld>
 </file>
 
-<file path=ppt/slides/slide11.xml><?xml version="1.0" encoding="utf-8"?>
+<file path=ppt/slides/slide13.xml><?xml version="1.0" encoding="utf-8"?>
 <p:sld xmlns:a="http://schemas.openxmlformats.org/drawingml/2006/main" xmlns:r="http://schemas.openxmlformats.org/officeDocument/2006/relationships" xmlns:p="http://schemas.openxmlformats.org/presentationml/2006/main">
   <p:cSld>
     <p:spTree>
@@ -24456,7 +25111,7 @@
         <p:cNvPr id="1" name="">
           <a:extLst>
             <a:ext uri="{FF2B5EF4-FFF2-40B4-BE49-F238E27FC236}">
-              <a16:creationId xmlns:a16="http://schemas.microsoft.com/office/drawing/2014/main" id="{0C98EBB5-E66E-D684-9080-959FC5E28AA6}"/>
+              <a16:creationId xmlns:a16="http://schemas.microsoft.com/office/drawing/2014/main" id="{9736B0F9-9A44-A96E-0A3E-14C2C20C7605}"/>
             </a:ext>
           </a:extLst>
         </p:cNvPr>
@@ -24476,7 +25131,7 @@
           <p:cNvPr id="3" name="Content Placeholder 2">
             <a:extLst>
               <a:ext uri="{FF2B5EF4-FFF2-40B4-BE49-F238E27FC236}">
-                <a16:creationId xmlns:a16="http://schemas.microsoft.com/office/drawing/2014/main" id="{563CB597-CCE1-B2CB-AF5D-4898AE067311}"/>
+                <a16:creationId xmlns:a16="http://schemas.microsoft.com/office/drawing/2014/main" id="{D12FCE63-0FB0-32F6-8A25-B0877487D27A}"/>
               </a:ext>
             </a:extLst>
           </p:cNvPr>
@@ -24498,7 +25153,7 @@
               </a:lnSpc>
               <a:buNone/>
             </a:pPr>
-            <a:endParaRPr lang="en-US" sz="2800">
+            <a:endParaRPr lang="et-EE" sz="2800" noProof="0" dirty="0">
               <a:ea typeface="Inter"/>
             </a:endParaRPr>
           </a:p>
@@ -24509,7 +25164,7 @@
               </a:lnSpc>
               <a:buNone/>
             </a:pPr>
-            <a:endParaRPr lang="en-US" sz="2000">
+            <a:endParaRPr lang="et-EE" sz="2000" noProof="0" dirty="0">
               <a:ea typeface="Inter"/>
             </a:endParaRPr>
           </a:p>
@@ -24520,7 +25175,7 @@
           <p:cNvPr id="5" name="Title 4">
             <a:extLst>
               <a:ext uri="{FF2B5EF4-FFF2-40B4-BE49-F238E27FC236}">
-                <a16:creationId xmlns:a16="http://schemas.microsoft.com/office/drawing/2014/main" id="{DC12984A-F918-66CF-9BF7-11C289E0534A}"/>
+                <a16:creationId xmlns:a16="http://schemas.microsoft.com/office/drawing/2014/main" id="{2DEE2DCD-5528-0E71-8160-938192ACA33B}"/>
               </a:ext>
             </a:extLst>
           </p:cNvPr>
@@ -24533,8 +25188,8 @@
         </p:nvSpPr>
         <p:spPr>
           <a:xfrm>
-            <a:off x="4283493" y="2675333"/>
-            <a:ext cx="3777666" cy="357043"/>
+            <a:off x="3461336" y="2675333"/>
+            <a:ext cx="6575007" cy="357043"/>
           </a:xfrm>
         </p:spPr>
         <p:txBody>
@@ -24542,8 +25197,8 @@
           <a:lstStyle/>
           <a:p>
             <a:r>
-              <a:rPr lang="en-US"/>
-              <a:t>Paus 10:30-10:45</a:t>
+              <a:rPr lang="et-EE" noProof="0" dirty="0"/>
+              <a:t>Lõunapaus 12:15-13:15</a:t>
             </a:r>
           </a:p>
         </p:txBody>
@@ -24551,7 +25206,7 @@
     </p:spTree>
     <p:extLst>
       <p:ext uri="{BB962C8B-B14F-4D97-AF65-F5344CB8AC3E}">
-        <p14:creationId xmlns:p14="http://schemas.microsoft.com/office/powerpoint/2010/main" val="2677885354"/>
+        <p14:creationId xmlns:p14="http://schemas.microsoft.com/office/powerpoint/2010/main" val="1494237226"/>
       </p:ext>
     </p:extLst>
   </p:cSld>
@@ -24561,7 +25216,7 @@
 </p:sld>
 </file>
 
-<file path=ppt/slides/slide12.xml><?xml version="1.0" encoding="utf-8"?>
+<file path=ppt/slides/slide14.xml><?xml version="1.0" encoding="utf-8"?>
 <p:sld xmlns:a="http://schemas.openxmlformats.org/drawingml/2006/main" xmlns:r="http://schemas.openxmlformats.org/officeDocument/2006/relationships" xmlns:p="http://schemas.openxmlformats.org/presentationml/2006/main">
   <p:cSld>
     <p:spTree>
@@ -24611,34 +25266,9 @@
           <a:lstStyle/>
           <a:p>
             <a:r>
-              <a:rPr lang="en-US" b="1" err="1"/>
-              <a:t>Tehisaru</a:t>
+              <a:rPr lang="et-EE" b="1" noProof="0" dirty="0"/>
+              <a:t>Tehisaru – vestlusrobotid - praktiline harjutus</a:t>
             </a:r>
-            <a:r>
-              <a:rPr lang="en-US" b="1"/>
-              <a:t> – </a:t>
-            </a:r>
-            <a:r>
-              <a:rPr lang="en-US" b="1" err="1"/>
-              <a:t>vestlusrobotid</a:t>
-            </a:r>
-            <a:r>
-              <a:rPr lang="en-US" b="1"/>
-              <a:t> - </a:t>
-            </a:r>
-            <a:r>
-              <a:rPr lang="en-US" b="1" err="1"/>
-              <a:t>praktiline</a:t>
-            </a:r>
-            <a:r>
-              <a:rPr lang="en-US" b="1"/>
-              <a:t> </a:t>
-            </a:r>
-            <a:r>
-              <a:rPr lang="en-US" b="1" err="1"/>
-              <a:t>harjutus</a:t>
-            </a:r>
-            <a:endParaRPr lang="en-US" b="1"/>
           </a:p>
         </p:txBody>
       </p:sp>
@@ -24671,27 +25301,13 @@
               <a:buChar char="•"/>
             </a:pPr>
             <a:r>
-              <a:rPr lang="en-US" sz="2400" dirty="0">
+              <a:rPr lang="et-EE" sz="2400" noProof="0" dirty="0">
                 <a:ea typeface="Inter"/>
                 <a:cs typeface="Noto Serif"/>
               </a:rPr>
-              <a:t>Ava  </a:t>
+              <a:t>Ava  Müügiraporti Power BI </a:t>
             </a:r>
-            <a:r>
-              <a:rPr lang="en-US" sz="2400" dirty="0" err="1">
-                <a:ea typeface="Inter"/>
-                <a:cs typeface="Noto Serif"/>
-              </a:rPr>
-              <a:t>Müügiraporti</a:t>
-            </a:r>
-            <a:r>
-              <a:rPr lang="en-US" sz="2400" dirty="0">
-                <a:ea typeface="Inter"/>
-                <a:cs typeface="Noto Serif"/>
-              </a:rPr>
-              <a:t> Power BI </a:t>
-            </a:r>
-            <a:endParaRPr lang="en-US" sz="2400" dirty="0">
+            <a:endParaRPr lang="et-EE" sz="2400" noProof="0" dirty="0">
               <a:cs typeface="Noto Serif"/>
             </a:endParaRPr>
           </a:p>
@@ -24704,277 +25320,11 @@
               <a:buChar char="o"/>
             </a:pPr>
             <a:r>
-              <a:rPr lang="en-US" sz="2400" dirty="0">
+              <a:rPr lang="et-EE" sz="2400" noProof="0" dirty="0">
                 <a:ea typeface="Inter"/>
                 <a:cs typeface="Noto Serif"/>
               </a:rPr>
-              <a:t>Palu </a:t>
-            </a:r>
-            <a:r>
-              <a:rPr lang="en-US" sz="2400" dirty="0" err="1">
-                <a:ea typeface="Inter"/>
-                <a:cs typeface="Noto Serif"/>
-              </a:rPr>
-              <a:t>erinevatel</a:t>
-            </a:r>
-            <a:r>
-              <a:rPr lang="en-US" sz="2400" dirty="0">
-                <a:ea typeface="Inter"/>
-                <a:cs typeface="Noto Serif"/>
-              </a:rPr>
-              <a:t> </a:t>
-            </a:r>
-            <a:r>
-              <a:rPr lang="en-US" sz="2400" dirty="0" err="1">
-                <a:ea typeface="Inter"/>
-                <a:cs typeface="Noto Serif"/>
-              </a:rPr>
-              <a:t>vestlusrobotitel</a:t>
-            </a:r>
-            <a:r>
-              <a:rPr lang="en-US" sz="2400" dirty="0">
-                <a:ea typeface="Inter"/>
-                <a:cs typeface="Noto Serif"/>
-              </a:rPr>
-              <a:t> </a:t>
-            </a:r>
-            <a:r>
-              <a:rPr lang="en-US" sz="2400" dirty="0" err="1">
-                <a:ea typeface="Inter"/>
-                <a:cs typeface="Noto Serif"/>
-              </a:rPr>
-              <a:t>luua</a:t>
-            </a:r>
-            <a:r>
-              <a:rPr lang="en-US" sz="2400" dirty="0">
-                <a:ea typeface="Inter"/>
-                <a:cs typeface="Noto Serif"/>
-              </a:rPr>
-              <a:t> </a:t>
-            </a:r>
-            <a:r>
-              <a:rPr lang="en-US" sz="2400" dirty="0" err="1">
-                <a:ea typeface="Inter"/>
-                <a:cs typeface="Noto Serif"/>
-              </a:rPr>
-              <a:t>samu</a:t>
-            </a:r>
-            <a:r>
-              <a:rPr lang="en-US" sz="2400" dirty="0">
-                <a:ea typeface="Inter"/>
-                <a:cs typeface="Noto Serif"/>
-              </a:rPr>
-              <a:t> </a:t>
-            </a:r>
-            <a:r>
-              <a:rPr lang="en-US" sz="2400" dirty="0" err="1">
-                <a:ea typeface="Inter"/>
-                <a:cs typeface="Noto Serif"/>
-              </a:rPr>
-              <a:t>arvutatud</a:t>
-            </a:r>
-            <a:r>
-              <a:rPr lang="en-US" sz="2400" dirty="0">
-                <a:ea typeface="Inter"/>
-                <a:cs typeface="Noto Serif"/>
-              </a:rPr>
-              <a:t> </a:t>
-            </a:r>
-            <a:r>
-              <a:rPr lang="en-US" sz="2400" dirty="0" err="1">
-                <a:ea typeface="Inter"/>
-                <a:cs typeface="Noto Serif"/>
-              </a:rPr>
-              <a:t>tulpasid</a:t>
-            </a:r>
-            <a:r>
-              <a:rPr lang="en-US" sz="2400" dirty="0">
-                <a:ea typeface="Inter"/>
-                <a:cs typeface="Noto Serif"/>
-              </a:rPr>
-              <a:t> ja </a:t>
-            </a:r>
-            <a:r>
-              <a:rPr lang="en-US" sz="2400" dirty="0" err="1">
-                <a:ea typeface="Inter"/>
-                <a:cs typeface="Noto Serif"/>
-              </a:rPr>
-              <a:t>mõõdikuid</a:t>
-            </a:r>
-            <a:r>
-              <a:rPr lang="en-US" sz="2400" dirty="0">
-                <a:ea typeface="Inter"/>
-                <a:cs typeface="Noto Serif"/>
-              </a:rPr>
-              <a:t>, </a:t>
-            </a:r>
-            <a:r>
-              <a:rPr lang="en-US" sz="2400" dirty="0" err="1">
-                <a:ea typeface="Inter"/>
-                <a:cs typeface="Noto Serif"/>
-              </a:rPr>
-              <a:t>mida</a:t>
-            </a:r>
-            <a:r>
-              <a:rPr lang="en-US" sz="2400" dirty="0">
-                <a:ea typeface="Inter"/>
-                <a:cs typeface="Noto Serif"/>
-              </a:rPr>
-              <a:t> </a:t>
-            </a:r>
-            <a:r>
-              <a:rPr lang="en-US" sz="2400" dirty="0" err="1">
-                <a:ea typeface="Inter"/>
-                <a:cs typeface="Noto Serif"/>
-              </a:rPr>
-              <a:t>analüüsis</a:t>
-            </a:r>
-            <a:r>
-              <a:rPr lang="en-US" sz="2400" dirty="0">
-                <a:ea typeface="Inter"/>
-                <a:cs typeface="Noto Serif"/>
-              </a:rPr>
-              <a:t> </a:t>
-            </a:r>
-            <a:r>
-              <a:rPr lang="en-US" sz="2400" dirty="0" err="1">
-                <a:ea typeface="Inter"/>
-                <a:cs typeface="Noto Serif"/>
-              </a:rPr>
-              <a:t>kasutasime</a:t>
-            </a:r>
-            <a:r>
-              <a:rPr lang="en-US" sz="2400" dirty="0">
-                <a:ea typeface="Inter"/>
-                <a:cs typeface="Noto Serif"/>
-              </a:rPr>
-              <a:t>. </a:t>
-            </a:r>
-            <a:r>
-              <a:rPr lang="en-US" sz="2400" dirty="0" err="1">
-                <a:ea typeface="Inter"/>
-                <a:cs typeface="Noto Serif"/>
-              </a:rPr>
-              <a:t>Võrdle</a:t>
-            </a:r>
-            <a:r>
-              <a:rPr lang="en-US" sz="2400" dirty="0">
-                <a:ea typeface="Inter"/>
-                <a:cs typeface="Noto Serif"/>
-              </a:rPr>
-              <a:t> </a:t>
-            </a:r>
-            <a:r>
-              <a:rPr lang="en-US" sz="2400" dirty="0" err="1">
-                <a:ea typeface="Inter"/>
-                <a:cs typeface="Noto Serif"/>
-              </a:rPr>
-              <a:t>vestlusrobotite</a:t>
-            </a:r>
-            <a:r>
-              <a:rPr lang="en-US" sz="2400" dirty="0">
-                <a:ea typeface="Inter"/>
-                <a:cs typeface="Noto Serif"/>
-              </a:rPr>
-              <a:t> </a:t>
-            </a:r>
-            <a:r>
-              <a:rPr lang="en-US" sz="2400" dirty="0" err="1">
-                <a:ea typeface="Inter"/>
-                <a:cs typeface="Noto Serif"/>
-              </a:rPr>
-              <a:t>vahelisi</a:t>
-            </a:r>
-            <a:r>
-              <a:rPr lang="en-US" sz="2400" dirty="0">
-                <a:ea typeface="Inter"/>
-                <a:cs typeface="Noto Serif"/>
-              </a:rPr>
-              <a:t> </a:t>
-            </a:r>
-            <a:r>
-              <a:rPr lang="en-US" sz="2400" dirty="0" err="1">
-                <a:ea typeface="Inter"/>
-                <a:cs typeface="Noto Serif"/>
-              </a:rPr>
-              <a:t>tulemusi</a:t>
-            </a:r>
-            <a:r>
-              <a:rPr lang="en-US" sz="2400" dirty="0">
-                <a:ea typeface="Inter"/>
-                <a:cs typeface="Noto Serif"/>
-              </a:rPr>
-              <a:t> </a:t>
-            </a:r>
-            <a:r>
-              <a:rPr lang="en-US" sz="2400" dirty="0" err="1">
-                <a:ea typeface="Inter"/>
-                <a:cs typeface="Noto Serif"/>
-              </a:rPr>
-              <a:t>ning</a:t>
-            </a:r>
-            <a:r>
-              <a:rPr lang="en-US" sz="2400" dirty="0">
-                <a:ea typeface="Inter"/>
-                <a:cs typeface="Noto Serif"/>
-              </a:rPr>
-              <a:t> </a:t>
-            </a:r>
-            <a:r>
-              <a:rPr lang="en-US" sz="2400" dirty="0" err="1">
-                <a:ea typeface="Inter"/>
-                <a:cs typeface="Noto Serif"/>
-              </a:rPr>
-              <a:t>meie</a:t>
-            </a:r>
-            <a:r>
-              <a:rPr lang="en-US" sz="2400" dirty="0">
-                <a:ea typeface="Inter"/>
-                <a:cs typeface="Noto Serif"/>
-              </a:rPr>
-              <a:t> </a:t>
-            </a:r>
-            <a:r>
-              <a:rPr lang="en-US" sz="2400" dirty="0" err="1">
-                <a:ea typeface="Inter"/>
-                <a:cs typeface="Noto Serif"/>
-              </a:rPr>
-              <a:t>poolt</a:t>
-            </a:r>
-            <a:r>
-              <a:rPr lang="en-US" sz="2400" dirty="0">
-                <a:ea typeface="Inter"/>
-                <a:cs typeface="Noto Serif"/>
-              </a:rPr>
-              <a:t> </a:t>
-            </a:r>
-            <a:r>
-              <a:rPr lang="en-US" sz="2400" dirty="0" err="1">
-                <a:ea typeface="Inter"/>
-                <a:cs typeface="Noto Serif"/>
-              </a:rPr>
-              <a:t>kirjutatud</a:t>
-            </a:r>
-            <a:r>
-              <a:rPr lang="en-US" sz="2400" dirty="0">
-                <a:ea typeface="Inter"/>
-                <a:cs typeface="Noto Serif"/>
-              </a:rPr>
-              <a:t> </a:t>
-            </a:r>
-            <a:r>
-              <a:rPr lang="en-US" sz="2400" dirty="0" err="1">
-                <a:ea typeface="Inter"/>
-                <a:cs typeface="Noto Serif"/>
-              </a:rPr>
-              <a:t>valemeid</a:t>
-            </a:r>
-            <a:r>
-              <a:rPr lang="en-US" sz="2400" dirty="0">
-                <a:ea typeface="Inter"/>
-                <a:cs typeface="Noto Serif"/>
-              </a:rPr>
-              <a:t>. </a:t>
+              <a:t>Palu erinevatel vestlusrobotitel luua samu arvutatud tulpasid ja mõõdikuid, mida analüüsis kasutasime. Võrdle vestlusrobotite vahelisi tulemusi ning meie poolt kirjutatud valemeid. </a:t>
             </a:r>
           </a:p>
           <a:p>
@@ -24986,62 +25336,35 @@
               <a:buChar char="o"/>
             </a:pPr>
             <a:r>
-              <a:rPr lang="en-US" sz="2400" dirty="0" err="1">
+              <a:rPr lang="et-EE" sz="2400" noProof="0" dirty="0">
                 <a:cs typeface="Noto Serif"/>
               </a:rPr>
-              <a:t>Uuri</a:t>
+              <a:t>Uuri sama </a:t>
             </a:r>
             <a:r>
-              <a:rPr lang="en-US" sz="2400" dirty="0">
+              <a:rPr lang="et-EE" sz="2400" noProof="0" dirty="0" err="1">
+                <a:cs typeface="Noto Serif"/>
+              </a:rPr>
+              <a:t>Employee</a:t>
+            </a:r>
+            <a:r>
+              <a:rPr lang="et-EE" sz="2400" noProof="0" dirty="0">
                 <a:cs typeface="Noto Serif"/>
               </a:rPr>
               <a:t> </a:t>
             </a:r>
             <a:r>
-              <a:rPr lang="en-US" sz="2400" dirty="0" err="1">
+              <a:rPr lang="et-EE" sz="2400" noProof="0" dirty="0" err="1">
                 <a:cs typeface="Noto Serif"/>
               </a:rPr>
-              <a:t>sama</a:t>
+              <a:t>Overview</a:t>
             </a:r>
             <a:r>
-              <a:rPr lang="en-US" sz="2400" dirty="0">
+              <a:rPr lang="et-EE" sz="2400" noProof="0" dirty="0">
                 <a:cs typeface="Noto Serif"/>
               </a:rPr>
-              <a:t> Employee Overview </a:t>
+              <a:t> raporti mõõdikute kohta</a:t>
             </a:r>
-            <a:r>
-              <a:rPr lang="en-US" sz="2400" dirty="0" err="1">
-                <a:cs typeface="Noto Serif"/>
-              </a:rPr>
-              <a:t>raporti</a:t>
-            </a:r>
-            <a:r>
-              <a:rPr lang="en-US" sz="2400" dirty="0">
-                <a:cs typeface="Noto Serif"/>
-              </a:rPr>
-              <a:t> </a:t>
-            </a:r>
-            <a:r>
-              <a:rPr lang="en-US" sz="2400" dirty="0" err="1">
-                <a:cs typeface="Noto Serif"/>
-              </a:rPr>
-              <a:t>mõõdikute</a:t>
-            </a:r>
-            <a:r>
-              <a:rPr lang="en-US" sz="2400" dirty="0">
-                <a:cs typeface="Noto Serif"/>
-              </a:rPr>
-              <a:t> </a:t>
-            </a:r>
-            <a:r>
-              <a:rPr lang="en-US" sz="2400" dirty="0" err="1">
-                <a:cs typeface="Noto Serif"/>
-              </a:rPr>
-              <a:t>kohta</a:t>
-            </a:r>
-            <a:endParaRPr lang="en-US" sz="2400" dirty="0">
-              <a:cs typeface="Noto Serif"/>
-            </a:endParaRPr>
           </a:p>
           <a:p>
             <a:pPr marL="342900">
@@ -25052,7 +25375,7 @@
                 <a:srgbClr val="121212"/>
               </a:buClr>
             </a:pPr>
-            <a:endParaRPr lang="en-US" sz="2400" dirty="0">
+            <a:endParaRPr lang="et-EE" sz="2400" noProof="0" dirty="0">
               <a:cs typeface="Noto Serif"/>
             </a:endParaRPr>
           </a:p>
@@ -25067,7 +25390,7 @@
               <a:buFont typeface="Arial,Sans-Serif" panose="020B0502030000000004" pitchFamily="34" charset="0"/>
               <a:buChar char="•"/>
             </a:pPr>
-            <a:endParaRPr lang="en-US" sz="2400" dirty="0">
+            <a:endParaRPr lang="et-EE" sz="2400" noProof="0" dirty="0">
               <a:cs typeface="Noto Serif"/>
             </a:endParaRPr>
           </a:p>
@@ -25082,7 +25405,7 @@
               <a:buFont typeface="Arial,Sans-Serif" panose="020B0502030000000004" pitchFamily="34" charset="0"/>
               <a:buChar char="•"/>
             </a:pPr>
-            <a:endParaRPr lang="en-US" sz="2400" dirty="0">
+            <a:endParaRPr lang="et-EE" sz="2400" noProof="0" dirty="0">
               <a:cs typeface="Arial"/>
             </a:endParaRPr>
           </a:p>
@@ -25094,7 +25417,7 @@
               <a:buFont typeface="Arial,Sans-Serif" panose="020B0502030000000004" pitchFamily="34" charset="0"/>
               <a:buChar char="o"/>
             </a:pPr>
-            <a:endParaRPr lang="en-US" sz="2400" dirty="0">
+            <a:endParaRPr lang="et-EE" sz="2400" noProof="0" dirty="0">
               <a:cs typeface="Arial"/>
             </a:endParaRPr>
           </a:p>
@@ -25106,7 +25429,7 @@
               <a:buFont typeface="Arial,Sans-Serif" panose="020B0502030000000004" pitchFamily="34" charset="0"/>
               <a:buChar char="•"/>
             </a:pPr>
-            <a:endParaRPr lang="en-US" sz="2400" dirty="0">
+            <a:endParaRPr lang="et-EE" sz="2400" noProof="0" dirty="0">
               <a:cs typeface="Arial"/>
             </a:endParaRPr>
           </a:p>
@@ -25116,7 +25439,7 @@
                 <a:spcPct val="150000"/>
               </a:lnSpc>
             </a:pPr>
-            <a:endParaRPr lang="en-US" sz="2800" dirty="0">
+            <a:endParaRPr lang="et-EE" sz="2800" noProof="0" dirty="0">
               <a:cs typeface="Arial"/>
             </a:endParaRPr>
           </a:p>
@@ -25127,7 +25450,7 @@
               </a:lnSpc>
               <a:buNone/>
             </a:pPr>
-            <a:endParaRPr lang="en-US" sz="2800" dirty="0"/>
+            <a:endParaRPr lang="et-EE" sz="2800" noProof="0" dirty="0"/>
           </a:p>
         </p:txBody>
       </p:sp>
@@ -25306,7 +25629,120 @@
 </p:sld>
 </file>
 
-<file path=ppt/slides/slide13.xml><?xml version="1.0" encoding="utf-8"?>
+<file path=ppt/slides/slide15.xml><?xml version="1.0" encoding="utf-8"?>
+<p:sld xmlns:a="http://schemas.openxmlformats.org/drawingml/2006/main" xmlns:r="http://schemas.openxmlformats.org/officeDocument/2006/relationships" xmlns:p="http://schemas.openxmlformats.org/presentationml/2006/main">
+  <p:cSld>
+    <p:spTree>
+      <p:nvGrpSpPr>
+        <p:cNvPr id="1" name="">
+          <a:extLst>
+            <a:ext uri="{FF2B5EF4-FFF2-40B4-BE49-F238E27FC236}">
+              <a16:creationId xmlns:a16="http://schemas.microsoft.com/office/drawing/2014/main" id="{2AAD065C-5832-C00B-D532-FF4338797576}"/>
+            </a:ext>
+          </a:extLst>
+        </p:cNvPr>
+        <p:cNvGrpSpPr/>
+        <p:nvPr/>
+      </p:nvGrpSpPr>
+      <p:grpSpPr>
+        <a:xfrm>
+          <a:off x="0" y="0"/>
+          <a:ext cx="0" cy="0"/>
+          <a:chOff x="0" y="0"/>
+          <a:chExt cx="0" cy="0"/>
+        </a:xfrm>
+      </p:grpSpPr>
+      <p:sp>
+        <p:nvSpPr>
+          <p:cNvPr id="3" name="Content Placeholder 2">
+            <a:extLst>
+              <a:ext uri="{FF2B5EF4-FFF2-40B4-BE49-F238E27FC236}">
+                <a16:creationId xmlns:a16="http://schemas.microsoft.com/office/drawing/2014/main" id="{96915822-6BB3-759C-184D-73740C8BDF97}"/>
+              </a:ext>
+            </a:extLst>
+          </p:cNvPr>
+          <p:cNvSpPr>
+            <a:spLocks noGrp="1"/>
+          </p:cNvSpPr>
+          <p:nvPr>
+            <p:ph sz="quarter" idx="10"/>
+          </p:nvPr>
+        </p:nvSpPr>
+        <p:spPr/>
+        <p:txBody>
+          <a:bodyPr/>
+          <a:lstStyle/>
+          <a:p>
+            <a:pPr marL="0" indent="0">
+              <a:lnSpc>
+                <a:spcPct val="150000"/>
+              </a:lnSpc>
+              <a:buNone/>
+            </a:pPr>
+            <a:endParaRPr lang="et-EE" sz="2800" noProof="0" dirty="0">
+              <a:ea typeface="Inter"/>
+            </a:endParaRPr>
+          </a:p>
+          <a:p>
+            <a:pPr marL="457200" lvl="1" indent="0">
+              <a:lnSpc>
+                <a:spcPct val="150000"/>
+              </a:lnSpc>
+              <a:buNone/>
+            </a:pPr>
+            <a:endParaRPr lang="et-EE" sz="2000" noProof="0" dirty="0">
+              <a:ea typeface="Inter"/>
+            </a:endParaRPr>
+          </a:p>
+        </p:txBody>
+      </p:sp>
+      <p:sp>
+        <p:nvSpPr>
+          <p:cNvPr id="5" name="Title 4">
+            <a:extLst>
+              <a:ext uri="{FF2B5EF4-FFF2-40B4-BE49-F238E27FC236}">
+                <a16:creationId xmlns:a16="http://schemas.microsoft.com/office/drawing/2014/main" id="{C6EAEB33-E2E1-C05F-2B41-C3ECC3F9D6BB}"/>
+              </a:ext>
+            </a:extLst>
+          </p:cNvPr>
+          <p:cNvSpPr>
+            <a:spLocks noGrp="1"/>
+          </p:cNvSpPr>
+          <p:nvPr>
+            <p:ph type="ctrTitle"/>
+          </p:nvPr>
+        </p:nvSpPr>
+        <p:spPr>
+          <a:xfrm>
+            <a:off x="4283493" y="2675333"/>
+            <a:ext cx="3777666" cy="357043"/>
+          </a:xfrm>
+        </p:spPr>
+        <p:txBody>
+          <a:bodyPr/>
+          <a:lstStyle/>
+          <a:p>
+            <a:r>
+              <a:rPr lang="et-EE" noProof="0" dirty="0"/>
+              <a:t>Paus 14:45-15:00</a:t>
+            </a:r>
+          </a:p>
+        </p:txBody>
+      </p:sp>
+    </p:spTree>
+    <p:extLst>
+      <p:ext uri="{BB962C8B-B14F-4D97-AF65-F5344CB8AC3E}">
+        <p14:creationId xmlns:p14="http://schemas.microsoft.com/office/powerpoint/2010/main" val="3652901621"/>
+      </p:ext>
+    </p:extLst>
+  </p:cSld>
+  <p:clrMapOvr>
+    <a:masterClrMapping/>
+  </p:clrMapOvr>
+</p:sld>
+</file>
+
+<file path=ppt/slides/slide16.xml><?xml version="1.0" encoding="utf-8"?>
 <p:sld xmlns:a="http://schemas.openxmlformats.org/drawingml/2006/main" xmlns:r="http://schemas.openxmlformats.org/officeDocument/2006/relationships" xmlns:p="http://schemas.openxmlformats.org/presentationml/2006/main">
   <p:cSld>
     <p:spTree>
@@ -25356,12 +25792,8 @@
           <a:lstStyle/>
           <a:p>
             <a:r>
-              <a:rPr lang="en-US" b="1" err="1"/>
-              <a:t>Tehisaru</a:t>
-            </a:r>
-            <a:r>
-              <a:rPr lang="en-US" b="1"/>
-              <a:t> – Visual Studio Code</a:t>
+              <a:rPr lang="et-EE" b="1" noProof="0" dirty="0"/>
+              <a:t>Tehisaru – Visual Studio Code</a:t>
             </a:r>
           </a:p>
         </p:txBody>
@@ -25395,13 +25827,20 @@
               <a:buChar char="•"/>
             </a:pPr>
             <a:r>
-              <a:rPr lang="en-US" sz="2400">
+              <a:rPr lang="et-EE" sz="2400" noProof="0" dirty="0" err="1">
                 <a:ea typeface="Inter"/>
                 <a:cs typeface="Noto Serif"/>
               </a:rPr>
-              <a:t>View --&gt; Chat</a:t>
+              <a:t>View</a:t>
             </a:r>
-            <a:endParaRPr lang="en-US" sz="2400">
+            <a:r>
+              <a:rPr lang="et-EE" sz="2400" noProof="0" dirty="0">
+                <a:ea typeface="Inter"/>
+                <a:cs typeface="Noto Serif"/>
+              </a:rPr>
+              <a:t> --&gt; Chat</a:t>
+            </a:r>
+            <a:endParaRPr lang="et-EE" sz="2400" noProof="0" dirty="0">
               <a:cs typeface="Noto Serif"/>
             </a:endParaRPr>
           </a:p>
@@ -25414,39 +25853,11 @@
               <a:buChar char="o"/>
             </a:pPr>
             <a:r>
-              <a:rPr lang="en-US" sz="2400" err="1">
+              <a:rPr lang="et-EE" sz="2400" noProof="0" dirty="0">
                 <a:ea typeface="Inter"/>
                 <a:cs typeface="Noto Serif"/>
               </a:rPr>
-              <a:t>Ühendus</a:t>
-            </a:r>
-            <a:r>
-              <a:rPr lang="en-US" sz="2400">
-                <a:ea typeface="Inter"/>
-                <a:cs typeface="Noto Serif"/>
-              </a:rPr>
-              <a:t> </a:t>
-            </a:r>
-            <a:r>
-              <a:rPr lang="en-US" sz="2400" err="1">
-                <a:ea typeface="Inter"/>
-                <a:cs typeface="Noto Serif"/>
-              </a:rPr>
-              <a:t>valitud</a:t>
-            </a:r>
-            <a:r>
-              <a:rPr lang="en-US" sz="2400">
-                <a:ea typeface="Inter"/>
-                <a:cs typeface="Noto Serif"/>
-              </a:rPr>
-              <a:t> </a:t>
-            </a:r>
-            <a:r>
-              <a:rPr lang="en-US" sz="2400" err="1">
-                <a:ea typeface="Inter"/>
-                <a:cs typeface="Noto Serif"/>
-              </a:rPr>
-              <a:t>vestlusrobotiga</a:t>
+              <a:t>Ühendus valitud vestlusrobotiga</a:t>
             </a:r>
           </a:p>
           <a:p>
@@ -25458,55 +25869,13 @@
               <a:buChar char="o"/>
             </a:pPr>
             <a:r>
-              <a:rPr lang="en-US" sz="2400" err="1">
+              <a:rPr lang="et-EE" sz="2400" noProof="0" dirty="0">
                 <a:ea typeface="Inter"/>
                 <a:cs typeface="Noto Serif"/>
               </a:rPr>
-              <a:t>Võimalik</a:t>
+              <a:t>Võimalik ette anda kontekst</a:t>
             </a:r>
-            <a:r>
-              <a:rPr lang="en-US" sz="2400">
-                <a:ea typeface="Inter"/>
-                <a:cs typeface="Noto Serif"/>
-              </a:rPr>
-              <a:t> </a:t>
-            </a:r>
-            <a:r>
-              <a:rPr lang="en-US" sz="2400" err="1">
-                <a:ea typeface="Inter"/>
-                <a:cs typeface="Noto Serif"/>
-              </a:rPr>
-              <a:t>ette</a:t>
-            </a:r>
-            <a:r>
-              <a:rPr lang="en-US" sz="2400">
-                <a:ea typeface="Inter"/>
-                <a:cs typeface="Noto Serif"/>
-              </a:rPr>
-              <a:t> </a:t>
-            </a:r>
-            <a:r>
-              <a:rPr lang="en-US" sz="2400" err="1">
-                <a:ea typeface="Inter"/>
-                <a:cs typeface="Noto Serif"/>
-              </a:rPr>
-              <a:t>anda</a:t>
-            </a:r>
-            <a:r>
-              <a:rPr lang="en-US" sz="2400">
-                <a:ea typeface="Inter"/>
-                <a:cs typeface="Noto Serif"/>
-              </a:rPr>
-              <a:t> </a:t>
-            </a:r>
-            <a:r>
-              <a:rPr lang="en-US" sz="2400" err="1">
-                <a:ea typeface="Inter"/>
-                <a:cs typeface="Noto Serif"/>
-              </a:rPr>
-              <a:t>kontekst</a:t>
-            </a:r>
-            <a:endParaRPr lang="en-US" sz="2400" err="1">
+            <a:endParaRPr lang="et-EE" sz="2400" noProof="0" dirty="0">
               <a:cs typeface="Noto Serif"/>
             </a:endParaRPr>
           </a:p>
@@ -25520,69 +25889,13 @@
               </a:buClr>
             </a:pPr>
             <a:r>
-              <a:rPr lang="en-US" sz="2400" err="1">
+              <a:rPr lang="et-EE" sz="2400" noProof="0" dirty="0">
                 <a:ea typeface="Inter"/>
                 <a:cs typeface="Noto Serif"/>
               </a:rPr>
-              <a:t>Proovi</a:t>
+              <a:t>Proovi luua SQL päringuid kirjelduse abil</a:t>
             </a:r>
-            <a:r>
-              <a:rPr lang="en-US" sz="2400">
-                <a:ea typeface="Inter"/>
-                <a:cs typeface="Noto Serif"/>
-              </a:rPr>
-              <a:t> </a:t>
-            </a:r>
-            <a:r>
-              <a:rPr lang="en-US" sz="2400" err="1">
-                <a:ea typeface="Inter"/>
-                <a:cs typeface="Noto Serif"/>
-              </a:rPr>
-              <a:t>luua</a:t>
-            </a:r>
-            <a:r>
-              <a:rPr lang="en-US" sz="2400">
-                <a:ea typeface="Inter"/>
-                <a:cs typeface="Noto Serif"/>
-              </a:rPr>
-              <a:t> SQL </a:t>
-            </a:r>
-            <a:r>
-              <a:rPr lang="en-US" sz="2400" err="1">
-                <a:ea typeface="Inter"/>
-                <a:cs typeface="Noto Serif"/>
-              </a:rPr>
-              <a:t>päringuid</a:t>
-            </a:r>
-            <a:r>
-              <a:rPr lang="en-US" sz="2400">
-                <a:ea typeface="Inter"/>
-                <a:cs typeface="Noto Serif"/>
-              </a:rPr>
-              <a:t> </a:t>
-            </a:r>
-            <a:r>
-              <a:rPr lang="en-US" sz="2400" err="1">
-                <a:ea typeface="Inter"/>
-                <a:cs typeface="Noto Serif"/>
-              </a:rPr>
-              <a:t>kirjelduse</a:t>
-            </a:r>
-            <a:r>
-              <a:rPr lang="en-US" sz="2400">
-                <a:ea typeface="Inter"/>
-                <a:cs typeface="Noto Serif"/>
-              </a:rPr>
-              <a:t> </a:t>
-            </a:r>
-            <a:r>
-              <a:rPr lang="en-US" sz="2400" err="1">
-                <a:ea typeface="Inter"/>
-                <a:cs typeface="Noto Serif"/>
-              </a:rPr>
-              <a:t>abil</a:t>
-            </a:r>
-            <a:endParaRPr lang="en-US" sz="2400" err="1">
+            <a:endParaRPr lang="et-EE" sz="2400" noProof="0" dirty="0">
               <a:cs typeface="Noto Serif"/>
             </a:endParaRPr>
           </a:p>
@@ -25595,7 +25908,7 @@
                 <a:srgbClr val="121212"/>
               </a:buClr>
             </a:pPr>
-            <a:endParaRPr lang="en-US" sz="2400">
+            <a:endParaRPr lang="et-EE" sz="2400" noProof="0" dirty="0">
               <a:cs typeface="Noto Serif"/>
             </a:endParaRPr>
           </a:p>
@@ -25610,7 +25923,7 @@
               <a:buFont typeface="Arial,Sans-Serif" panose="020B0502030000000004" pitchFamily="34" charset="0"/>
               <a:buChar char="•"/>
             </a:pPr>
-            <a:endParaRPr lang="en-US" sz="2400">
+            <a:endParaRPr lang="et-EE" sz="2400" noProof="0" dirty="0">
               <a:cs typeface="Noto Serif"/>
             </a:endParaRPr>
           </a:p>
@@ -25625,7 +25938,7 @@
               <a:buFont typeface="Arial,Sans-Serif" panose="020B0502030000000004" pitchFamily="34" charset="0"/>
               <a:buChar char="•"/>
             </a:pPr>
-            <a:endParaRPr lang="en-US" sz="2400">
+            <a:endParaRPr lang="et-EE" sz="2400" noProof="0" dirty="0">
               <a:cs typeface="Arial"/>
             </a:endParaRPr>
           </a:p>
@@ -25637,7 +25950,7 @@
               <a:buFont typeface="Arial,Sans-Serif" panose="020B0502030000000004" pitchFamily="34" charset="0"/>
               <a:buChar char="o"/>
             </a:pPr>
-            <a:endParaRPr lang="en-US" sz="2400">
+            <a:endParaRPr lang="et-EE" sz="2400" noProof="0" dirty="0">
               <a:cs typeface="Arial"/>
             </a:endParaRPr>
           </a:p>
@@ -25649,7 +25962,7 @@
               <a:buFont typeface="Arial,Sans-Serif" panose="020B0502030000000004" pitchFamily="34" charset="0"/>
               <a:buChar char="•"/>
             </a:pPr>
-            <a:endParaRPr lang="en-US" sz="2400">
+            <a:endParaRPr lang="et-EE" sz="2400" noProof="0" dirty="0">
               <a:cs typeface="Arial"/>
             </a:endParaRPr>
           </a:p>
@@ -25659,7 +25972,7 @@
                 <a:spcPct val="150000"/>
               </a:lnSpc>
             </a:pPr>
-            <a:endParaRPr lang="en-US" sz="2800">
+            <a:endParaRPr lang="et-EE" sz="2800" noProof="0" dirty="0">
               <a:cs typeface="Arial"/>
             </a:endParaRPr>
           </a:p>
@@ -25670,7 +25983,7 @@
               </a:lnSpc>
               <a:buNone/>
             </a:pPr>
-            <a:endParaRPr lang="en-US" sz="2800"/>
+            <a:endParaRPr lang="et-EE" sz="2800" noProof="0" dirty="0"/>
           </a:p>
         </p:txBody>
       </p:sp>
@@ -25880,236 +26193,6 @@
 </p:sld>
 </file>
 
-<file path=ppt/slides/slide14.xml><?xml version="1.0" encoding="utf-8"?>
-<p:sld xmlns:a="http://schemas.openxmlformats.org/drawingml/2006/main" xmlns:r="http://schemas.openxmlformats.org/officeDocument/2006/relationships" xmlns:p="http://schemas.openxmlformats.org/presentationml/2006/main">
-  <p:cSld>
-    <p:spTree>
-      <p:nvGrpSpPr>
-        <p:cNvPr id="1" name="">
-          <a:extLst>
-            <a:ext uri="{FF2B5EF4-FFF2-40B4-BE49-F238E27FC236}">
-              <a16:creationId xmlns:a16="http://schemas.microsoft.com/office/drawing/2014/main" id="{9736B0F9-9A44-A96E-0A3E-14C2C20C7605}"/>
-            </a:ext>
-          </a:extLst>
-        </p:cNvPr>
-        <p:cNvGrpSpPr/>
-        <p:nvPr/>
-      </p:nvGrpSpPr>
-      <p:grpSpPr>
-        <a:xfrm>
-          <a:off x="0" y="0"/>
-          <a:ext cx="0" cy="0"/>
-          <a:chOff x="0" y="0"/>
-          <a:chExt cx="0" cy="0"/>
-        </a:xfrm>
-      </p:grpSpPr>
-      <p:sp>
-        <p:nvSpPr>
-          <p:cNvPr id="3" name="Content Placeholder 2">
-            <a:extLst>
-              <a:ext uri="{FF2B5EF4-FFF2-40B4-BE49-F238E27FC236}">
-                <a16:creationId xmlns:a16="http://schemas.microsoft.com/office/drawing/2014/main" id="{D12FCE63-0FB0-32F6-8A25-B0877487D27A}"/>
-              </a:ext>
-            </a:extLst>
-          </p:cNvPr>
-          <p:cNvSpPr>
-            <a:spLocks noGrp="1"/>
-          </p:cNvSpPr>
-          <p:nvPr>
-            <p:ph sz="quarter" idx="10"/>
-          </p:nvPr>
-        </p:nvSpPr>
-        <p:spPr/>
-        <p:txBody>
-          <a:bodyPr/>
-          <a:lstStyle/>
-          <a:p>
-            <a:pPr marL="0" indent="0">
-              <a:lnSpc>
-                <a:spcPct val="150000"/>
-              </a:lnSpc>
-              <a:buNone/>
-            </a:pPr>
-            <a:endParaRPr lang="en-US" sz="2800">
-              <a:ea typeface="Inter"/>
-            </a:endParaRPr>
-          </a:p>
-          <a:p>
-            <a:pPr marL="457200" lvl="1" indent="0">
-              <a:lnSpc>
-                <a:spcPct val="150000"/>
-              </a:lnSpc>
-              <a:buNone/>
-            </a:pPr>
-            <a:endParaRPr lang="en-US" sz="2000">
-              <a:ea typeface="Inter"/>
-            </a:endParaRPr>
-          </a:p>
-        </p:txBody>
-      </p:sp>
-      <p:sp>
-        <p:nvSpPr>
-          <p:cNvPr id="5" name="Title 4">
-            <a:extLst>
-              <a:ext uri="{FF2B5EF4-FFF2-40B4-BE49-F238E27FC236}">
-                <a16:creationId xmlns:a16="http://schemas.microsoft.com/office/drawing/2014/main" id="{2DEE2DCD-5528-0E71-8160-938192ACA33B}"/>
-              </a:ext>
-            </a:extLst>
-          </p:cNvPr>
-          <p:cNvSpPr>
-            <a:spLocks noGrp="1"/>
-          </p:cNvSpPr>
-          <p:nvPr>
-            <p:ph type="ctrTitle"/>
-          </p:nvPr>
-        </p:nvSpPr>
-        <p:spPr>
-          <a:xfrm>
-            <a:off x="3461336" y="2675333"/>
-            <a:ext cx="6575007" cy="357043"/>
-          </a:xfrm>
-        </p:spPr>
-        <p:txBody>
-          <a:bodyPr/>
-          <a:lstStyle/>
-          <a:p>
-            <a:r>
-              <a:rPr lang="en-US" err="1"/>
-              <a:t>Lõunapaus</a:t>
-            </a:r>
-            <a:r>
-              <a:rPr lang="en-US"/>
-              <a:t> 12:15-13:15</a:t>
-            </a:r>
-          </a:p>
-        </p:txBody>
-      </p:sp>
-    </p:spTree>
-    <p:extLst>
-      <p:ext uri="{BB962C8B-B14F-4D97-AF65-F5344CB8AC3E}">
-        <p14:creationId xmlns:p14="http://schemas.microsoft.com/office/powerpoint/2010/main" val="1494237226"/>
-      </p:ext>
-    </p:extLst>
-  </p:cSld>
-  <p:clrMapOvr>
-    <a:masterClrMapping/>
-  </p:clrMapOvr>
-</p:sld>
-</file>
-
-<file path=ppt/slides/slide15.xml><?xml version="1.0" encoding="utf-8"?>
-<p:sld xmlns:a="http://schemas.openxmlformats.org/drawingml/2006/main" xmlns:r="http://schemas.openxmlformats.org/officeDocument/2006/relationships" xmlns:p="http://schemas.openxmlformats.org/presentationml/2006/main">
-  <p:cSld>
-    <p:spTree>
-      <p:nvGrpSpPr>
-        <p:cNvPr id="1" name="">
-          <a:extLst>
-            <a:ext uri="{FF2B5EF4-FFF2-40B4-BE49-F238E27FC236}">
-              <a16:creationId xmlns:a16="http://schemas.microsoft.com/office/drawing/2014/main" id="{2AAD065C-5832-C00B-D532-FF4338797576}"/>
-            </a:ext>
-          </a:extLst>
-        </p:cNvPr>
-        <p:cNvGrpSpPr/>
-        <p:nvPr/>
-      </p:nvGrpSpPr>
-      <p:grpSpPr>
-        <a:xfrm>
-          <a:off x="0" y="0"/>
-          <a:ext cx="0" cy="0"/>
-          <a:chOff x="0" y="0"/>
-          <a:chExt cx="0" cy="0"/>
-        </a:xfrm>
-      </p:grpSpPr>
-      <p:sp>
-        <p:nvSpPr>
-          <p:cNvPr id="3" name="Content Placeholder 2">
-            <a:extLst>
-              <a:ext uri="{FF2B5EF4-FFF2-40B4-BE49-F238E27FC236}">
-                <a16:creationId xmlns:a16="http://schemas.microsoft.com/office/drawing/2014/main" id="{96915822-6BB3-759C-184D-73740C8BDF97}"/>
-              </a:ext>
-            </a:extLst>
-          </p:cNvPr>
-          <p:cNvSpPr>
-            <a:spLocks noGrp="1"/>
-          </p:cNvSpPr>
-          <p:nvPr>
-            <p:ph sz="quarter" idx="10"/>
-          </p:nvPr>
-        </p:nvSpPr>
-        <p:spPr/>
-        <p:txBody>
-          <a:bodyPr/>
-          <a:lstStyle/>
-          <a:p>
-            <a:pPr marL="0" indent="0">
-              <a:lnSpc>
-                <a:spcPct val="150000"/>
-              </a:lnSpc>
-              <a:buNone/>
-            </a:pPr>
-            <a:endParaRPr lang="en-US" sz="2800">
-              <a:ea typeface="Inter"/>
-            </a:endParaRPr>
-          </a:p>
-          <a:p>
-            <a:pPr marL="457200" lvl="1" indent="0">
-              <a:lnSpc>
-                <a:spcPct val="150000"/>
-              </a:lnSpc>
-              <a:buNone/>
-            </a:pPr>
-            <a:endParaRPr lang="en-US" sz="2000">
-              <a:ea typeface="Inter"/>
-            </a:endParaRPr>
-          </a:p>
-        </p:txBody>
-      </p:sp>
-      <p:sp>
-        <p:nvSpPr>
-          <p:cNvPr id="5" name="Title 4">
-            <a:extLst>
-              <a:ext uri="{FF2B5EF4-FFF2-40B4-BE49-F238E27FC236}">
-                <a16:creationId xmlns:a16="http://schemas.microsoft.com/office/drawing/2014/main" id="{C6EAEB33-E2E1-C05F-2B41-C3ECC3F9D6BB}"/>
-              </a:ext>
-            </a:extLst>
-          </p:cNvPr>
-          <p:cNvSpPr>
-            <a:spLocks noGrp="1"/>
-          </p:cNvSpPr>
-          <p:nvPr>
-            <p:ph type="ctrTitle"/>
-          </p:nvPr>
-        </p:nvSpPr>
-        <p:spPr>
-          <a:xfrm>
-            <a:off x="4283493" y="2675333"/>
-            <a:ext cx="3777666" cy="357043"/>
-          </a:xfrm>
-        </p:spPr>
-        <p:txBody>
-          <a:bodyPr/>
-          <a:lstStyle/>
-          <a:p>
-            <a:r>
-              <a:rPr lang="en-US"/>
-              <a:t>Paus 14:45-15:00</a:t>
-            </a:r>
-          </a:p>
-        </p:txBody>
-      </p:sp>
-    </p:spTree>
-    <p:extLst>
-      <p:ext uri="{BB962C8B-B14F-4D97-AF65-F5344CB8AC3E}">
-        <p14:creationId xmlns:p14="http://schemas.microsoft.com/office/powerpoint/2010/main" val="3652901621"/>
-      </p:ext>
-    </p:extLst>
-  </p:cSld>
-  <p:clrMapOvr>
-    <a:masterClrMapping/>
-  </p:clrMapOvr>
-</p:sld>
-</file>
-
 <file path=ppt/slides/slide2.xml><?xml version="1.0" encoding="utf-8"?>
 <p:sld xmlns:a="http://schemas.openxmlformats.org/drawingml/2006/main" xmlns:r="http://schemas.openxmlformats.org/officeDocument/2006/relationships" xmlns:p="http://schemas.openxmlformats.org/presentationml/2006/main">
   <p:cSld>
@@ -26155,27 +26238,13 @@
           <a:lstStyle/>
           <a:p>
             <a:r>
-              <a:rPr lang="en-US" sz="3600" b="1" err="1">
+              <a:rPr lang="et-EE" sz="3600" b="1" noProof="0" dirty="0">
                 <a:ea typeface="+mj-lt"/>
                 <a:cs typeface="+mj-lt"/>
               </a:rPr>
-              <a:t>Päevakava</a:t>
+              <a:t>Päevakava - XV päev</a:t>
             </a:r>
-            <a:r>
-              <a:rPr lang="en-US" sz="3600" b="1">
-                <a:ea typeface="+mj-lt"/>
-                <a:cs typeface="+mj-lt"/>
-              </a:rPr>
-              <a:t> - XV </a:t>
-            </a:r>
-            <a:r>
-              <a:rPr lang="en-US" sz="3600" b="1" err="1">
-                <a:ea typeface="+mj-lt"/>
-                <a:cs typeface="+mj-lt"/>
-              </a:rPr>
-              <a:t>päev</a:t>
-            </a:r>
-            <a:endParaRPr lang="en-US" err="1"/>
+            <a:endParaRPr lang="et-EE" noProof="0" dirty="0"/>
           </a:p>
         </p:txBody>
       </p:sp>
@@ -26195,7 +26264,7 @@
             <p:ph sz="quarter" idx="10"/>
             <p:extLst>
               <p:ext uri="{D42A27DB-BD31-4B8C-83A1-F6EECF244321}">
-                <p14:modId xmlns:p14="http://schemas.microsoft.com/office/powerpoint/2010/main" val="2278524344"/>
+                <p14:modId xmlns:p14="http://schemas.microsoft.com/office/powerpoint/2010/main" val="3832999610"/>
               </p:ext>
             </p:extLst>
           </p:nvPr>
@@ -26233,7 +26302,7 @@
                         <a:buChar char="•"/>
                       </a:pPr>
                       <a:r>
-                        <a:rPr lang="en-US" sz="2400" b="0" i="0" dirty="0">
+                        <a:rPr lang="et-EE" sz="2400" b="0" i="0" noProof="0" dirty="0">
                           <a:solidFill>
                             <a:srgbClr val="121212"/>
                           </a:solidFill>
@@ -26243,56 +26312,16 @@
                         <a:t>09:00 – 10:30 – Koolitus – </a:t>
                       </a:r>
                       <a:r>
-                        <a:rPr lang="en-US" sz="2400" b="0" i="0" u="none" strike="noStrike" noProof="0" dirty="0" err="1">
+                        <a:rPr lang="et-EE" sz="2400" b="0" i="0" u="none" strike="noStrike" noProof="0" dirty="0">
                           <a:solidFill>
                             <a:srgbClr val="121212"/>
                           </a:solidFill>
                           <a:effectLst/>
                           <a:latin typeface="+mn-lt"/>
                         </a:rPr>
-                        <a:t>Tehisaru</a:t>
+                        <a:t>Erki Pogoretski (Telia)</a:t>
                       </a:r>
-                      <a:r>
-                        <a:rPr lang="en-US" sz="2400" b="0" i="0" u="none" strike="noStrike" noProof="0" dirty="0">
-                          <a:solidFill>
-                            <a:srgbClr val="121212"/>
-                          </a:solidFill>
-                          <a:effectLst/>
-                          <a:latin typeface="+mn-lt"/>
-                        </a:rPr>
-                        <a:t> </a:t>
-                      </a:r>
-                      <a:r>
-                        <a:rPr lang="en-US" sz="2400" b="0" i="0" u="none" strike="noStrike" noProof="0" dirty="0" err="1">
-                          <a:solidFill>
-                            <a:srgbClr val="121212"/>
-                          </a:solidFill>
-                          <a:effectLst/>
-                          <a:latin typeface="+mn-lt"/>
-                        </a:rPr>
-                        <a:t>toimimise</a:t>
-                      </a:r>
-                      <a:r>
-                        <a:rPr lang="en-US" sz="2400" b="0" i="0" u="none" strike="noStrike" noProof="0" dirty="0">
-                          <a:solidFill>
-                            <a:srgbClr val="121212"/>
-                          </a:solidFill>
-                          <a:effectLst/>
-                          <a:latin typeface="+mn-lt"/>
-                        </a:rPr>
-                        <a:t> </a:t>
-                      </a:r>
-                      <a:r>
-                        <a:rPr lang="en-US" sz="2400" b="0" i="0" u="none" strike="noStrike" noProof="0" dirty="0" err="1">
-                          <a:solidFill>
-                            <a:srgbClr val="121212"/>
-                          </a:solidFill>
-                          <a:effectLst/>
-                          <a:latin typeface="+mn-lt"/>
-                        </a:rPr>
-                        <a:t>põhimõtted</a:t>
-                      </a:r>
-                      <a:endParaRPr lang="en-US" sz="2400" b="0" i="0" dirty="0">
+                      <a:endParaRPr lang="et-EE" sz="2400" b="0" i="0" noProof="0" dirty="0">
                         <a:solidFill>
                           <a:srgbClr val="121212"/>
                         </a:solidFill>
@@ -26361,7 +26390,7 @@
                         <a:buChar char="•"/>
                       </a:pPr>
                       <a:r>
-                        <a:rPr lang="en-US" sz="2400" b="0" i="0" dirty="0">
+                        <a:rPr lang="et-EE" sz="2400" b="0" i="0" noProof="0" dirty="0">
                           <a:solidFill>
                             <a:srgbClr val="121212"/>
                           </a:solidFill>
@@ -26432,7 +26461,7 @@
                         <a:buChar char="•"/>
                       </a:pPr>
                       <a:r>
-                        <a:rPr lang="en-US" sz="2400" b="0" i="0" dirty="0">
+                        <a:rPr lang="et-EE" sz="2400" b="0" i="0" noProof="0" dirty="0">
                           <a:solidFill>
                             <a:srgbClr val="121212"/>
                           </a:solidFill>
@@ -26442,36 +26471,16 @@
                         <a:t>10:45 – 12:15 – Koolitus - </a:t>
                       </a:r>
                       <a:r>
-                        <a:rPr lang="en-US" sz="2400" b="0" i="0" dirty="0" err="1">
+                        <a:rPr lang="et-EE" sz="2400" b="0" i="0" u="none" strike="noStrike" noProof="0" dirty="0">
                           <a:solidFill>
                             <a:srgbClr val="121212"/>
                           </a:solidFill>
                           <a:effectLst/>
                           <a:latin typeface="+mn-lt"/>
                         </a:rPr>
-                        <a:t>Vestlusrobotiga</a:t>
+                        <a:t>Tehisaru toimimise põhimõtted</a:t>
                       </a:r>
-                      <a:r>
-                        <a:rPr lang="en-US" sz="2400" b="0" i="0" dirty="0">
-                          <a:solidFill>
-                            <a:srgbClr val="121212"/>
-                          </a:solidFill>
-                          <a:effectLst/>
-                          <a:latin typeface="+mn-lt"/>
-                        </a:rPr>
-                        <a:t> </a:t>
-                      </a:r>
-                      <a:r>
-                        <a:rPr lang="en-US" sz="2400" b="0" i="0" dirty="0" err="1">
-                          <a:solidFill>
-                            <a:srgbClr val="121212"/>
-                          </a:solidFill>
-                          <a:effectLst/>
-                          <a:latin typeface="+mn-lt"/>
-                        </a:rPr>
-                        <a:t>andmeanalüüs</a:t>
-                      </a:r>
-                      <a:endParaRPr lang="en-US" b="0" i="0" dirty="0">
+                      <a:endParaRPr lang="et-EE" b="0" i="0" noProof="0" dirty="0">
                         <a:solidFill>
                           <a:srgbClr val="121212"/>
                         </a:solidFill>
@@ -26540,7 +26549,7 @@
                         <a:buChar char="•"/>
                       </a:pPr>
                       <a:r>
-                        <a:rPr lang="en-US" sz="2400" b="0" i="0" dirty="0">
+                        <a:rPr lang="et-EE" sz="2400" b="0" i="0" noProof="0" dirty="0">
                           <a:solidFill>
                             <a:srgbClr val="121212"/>
                           </a:solidFill>
@@ -26550,26 +26559,16 @@
                         <a:t>12:15 – 13:15 – </a:t>
                       </a:r>
                       <a:r>
-                        <a:rPr lang="en-US" sz="2400" b="0" i="0" u="none" strike="noStrike" noProof="0" dirty="0" err="1">
+                        <a:rPr lang="et-EE" sz="2400" b="0" i="0" u="none" strike="noStrike" noProof="0" dirty="0">
                           <a:solidFill>
                             <a:srgbClr val="121212"/>
                           </a:solidFill>
                           <a:effectLst/>
                           <a:latin typeface="Inter"/>
                         </a:rPr>
-                        <a:t>Lõunapaus</a:t>
+                        <a:t>Lõunapaus </a:t>
                       </a:r>
-                      <a:r>
-                        <a:rPr lang="en-US" sz="2400" b="0" i="0" u="none" strike="noStrike" noProof="0" dirty="0">
-                          <a:solidFill>
-                            <a:srgbClr val="121212"/>
-                          </a:solidFill>
-                          <a:effectLst/>
-                          <a:latin typeface="Inter"/>
-                        </a:rPr>
-                        <a:t> </a:t>
-                      </a:r>
-                      <a:endParaRPr lang="en-US" b="0" i="0" u="none" strike="noStrike" noProof="0" dirty="0">
+                      <a:endParaRPr lang="et-EE" b="0" i="0" u="none" strike="noStrike" noProof="0" dirty="0">
                         <a:solidFill>
                           <a:srgbClr val="121212"/>
                         </a:solidFill>
@@ -26638,46 +26637,16 @@
                         <a:buChar char="•"/>
                       </a:pPr>
                       <a:r>
-                        <a:rPr lang="en-US" sz="2400" b="0" i="0" dirty="0">
+                        <a:rPr lang="et-EE" sz="2400" b="0" i="0" noProof="0" dirty="0">
                           <a:solidFill>
                             <a:srgbClr val="121212"/>
                           </a:solidFill>
                           <a:effectLst/>
                           <a:latin typeface="Inter"/>
                         </a:rPr>
-                        <a:t>13:15 – 14:45 – Koolitus – </a:t>
+                        <a:t>13:15 – 14:45 – Koolitus – Vestlusrobotiga andmeanalüüs</a:t>
                       </a:r>
-                      <a:r>
-                        <a:rPr lang="en-US" sz="2400" b="0" i="0" dirty="0" err="1">
-                          <a:solidFill>
-                            <a:srgbClr val="121212"/>
-                          </a:solidFill>
-                          <a:effectLst/>
-                          <a:latin typeface="Inter"/>
-                        </a:rPr>
-                        <a:t>Ettevõte</a:t>
-                      </a:r>
-                      <a:r>
-                        <a:rPr lang="en-US" sz="2400" b="0" i="0" dirty="0">
-                          <a:solidFill>
-                            <a:srgbClr val="121212"/>
-                          </a:solidFill>
-                          <a:effectLst/>
-                          <a:latin typeface="Inter"/>
-                        </a:rPr>
-                        <a:t> </a:t>
-                      </a:r>
-                      <a:r>
-                        <a:rPr lang="en-US" sz="2400" b="0" i="0" dirty="0" err="1">
-                          <a:solidFill>
-                            <a:srgbClr val="121212"/>
-                          </a:solidFill>
-                          <a:effectLst/>
-                          <a:latin typeface="Inter"/>
-                        </a:rPr>
-                        <a:t>külastus</a:t>
-                      </a:r>
-                      <a:endParaRPr lang="en-US" b="0" i="0" dirty="0">
+                      <a:endParaRPr lang="et-EE" b="0" i="0" noProof="0" dirty="0">
                         <a:solidFill>
                           <a:srgbClr val="121212"/>
                         </a:solidFill>
@@ -26746,7 +26715,7 @@
                         <a:buChar char="•"/>
                       </a:pPr>
                       <a:r>
-                        <a:rPr lang="en-US" sz="2400" b="0" i="0" dirty="0">
+                        <a:rPr lang="et-EE" sz="2400" b="0" i="0" noProof="0" dirty="0">
                           <a:solidFill>
                             <a:srgbClr val="121212"/>
                           </a:solidFill>
@@ -26755,7 +26724,7 @@
                         </a:rPr>
                         <a:t>14:45 – 15:00 – Paus </a:t>
                       </a:r>
-                      <a:endParaRPr lang="en-US" b="0" i="0" dirty="0">
+                      <a:endParaRPr lang="et-EE" b="0" i="0" noProof="0" dirty="0">
                         <a:solidFill>
                           <a:srgbClr val="121212"/>
                         </a:solidFill>
@@ -26824,52 +26793,15 @@
                         <a:buChar char="•"/>
                       </a:pPr>
                       <a:r>
-                        <a:rPr lang="en-US" sz="2400" b="0" i="0" dirty="0">
+                        <a:rPr lang="et-EE" sz="2400" b="0" i="0" noProof="0" dirty="0">
                           <a:solidFill>
                             <a:srgbClr val="121212"/>
                           </a:solidFill>
                           <a:effectLst/>
                           <a:latin typeface="Inter"/>
                         </a:rPr>
-                        <a:t>15:00 – 16:30 – Koolitus – </a:t>
+                        <a:t>15:00 – 16:30 – Koolitus – Vestlusrobotiga andmeanalüüs</a:t>
                       </a:r>
-                      <a:r>
-                        <a:rPr lang="en-US" sz="2400" b="0" i="0" dirty="0" err="1">
-                          <a:solidFill>
-                            <a:srgbClr val="121212"/>
-                          </a:solidFill>
-                          <a:effectLst/>
-                          <a:latin typeface="Inter"/>
-                        </a:rPr>
-                        <a:t>Ettevõte</a:t>
-                      </a:r>
-                      <a:r>
-                        <a:rPr lang="en-US" sz="2400" b="0" i="0" dirty="0">
-                          <a:solidFill>
-                            <a:srgbClr val="121212"/>
-                          </a:solidFill>
-                          <a:effectLst/>
-                          <a:latin typeface="Inter"/>
-                        </a:rPr>
-                        <a:t> </a:t>
-                      </a:r>
-                      <a:r>
-                        <a:rPr lang="en-US" sz="2400" b="0" i="0" dirty="0" err="1">
-                          <a:solidFill>
-                            <a:srgbClr val="121212"/>
-                          </a:solidFill>
-                          <a:effectLst/>
-                          <a:latin typeface="Inter"/>
-                        </a:rPr>
-                        <a:t>külastus</a:t>
-                      </a:r>
-                      <a:endParaRPr lang="en-US" sz="2400" b="0" i="0" dirty="0">
-                        <a:solidFill>
-                          <a:srgbClr val="121212"/>
-                        </a:solidFill>
-                        <a:effectLst/>
-                        <a:latin typeface="Inter"/>
-                      </a:endParaRPr>
                     </a:p>
                   </a:txBody>
                   <a:tcPr marL="99060" marR="99060" marT="49530" marB="49530" anchor="ctr">
@@ -26943,6 +26875,119 @@
         <p:cNvPr id="1" name="">
           <a:extLst>
             <a:ext uri="{FF2B5EF4-FFF2-40B4-BE49-F238E27FC236}">
+              <a16:creationId xmlns:a16="http://schemas.microsoft.com/office/drawing/2014/main" id="{0C98EBB5-E66E-D684-9080-959FC5E28AA6}"/>
+            </a:ext>
+          </a:extLst>
+        </p:cNvPr>
+        <p:cNvGrpSpPr/>
+        <p:nvPr/>
+      </p:nvGrpSpPr>
+      <p:grpSpPr>
+        <a:xfrm>
+          <a:off x="0" y="0"/>
+          <a:ext cx="0" cy="0"/>
+          <a:chOff x="0" y="0"/>
+          <a:chExt cx="0" cy="0"/>
+        </a:xfrm>
+      </p:grpSpPr>
+      <p:sp>
+        <p:nvSpPr>
+          <p:cNvPr id="3" name="Content Placeholder 2">
+            <a:extLst>
+              <a:ext uri="{FF2B5EF4-FFF2-40B4-BE49-F238E27FC236}">
+                <a16:creationId xmlns:a16="http://schemas.microsoft.com/office/drawing/2014/main" id="{563CB597-CCE1-B2CB-AF5D-4898AE067311}"/>
+              </a:ext>
+            </a:extLst>
+          </p:cNvPr>
+          <p:cNvSpPr>
+            <a:spLocks noGrp="1"/>
+          </p:cNvSpPr>
+          <p:nvPr>
+            <p:ph sz="quarter" idx="10"/>
+          </p:nvPr>
+        </p:nvSpPr>
+        <p:spPr/>
+        <p:txBody>
+          <a:bodyPr/>
+          <a:lstStyle/>
+          <a:p>
+            <a:pPr marL="0" indent="0">
+              <a:lnSpc>
+                <a:spcPct val="150000"/>
+              </a:lnSpc>
+              <a:buNone/>
+            </a:pPr>
+            <a:endParaRPr lang="et-EE" sz="2800" noProof="0" dirty="0">
+              <a:ea typeface="Inter"/>
+            </a:endParaRPr>
+          </a:p>
+          <a:p>
+            <a:pPr marL="457200" lvl="1" indent="0">
+              <a:lnSpc>
+                <a:spcPct val="150000"/>
+              </a:lnSpc>
+              <a:buNone/>
+            </a:pPr>
+            <a:endParaRPr lang="et-EE" sz="2000" noProof="0" dirty="0">
+              <a:ea typeface="Inter"/>
+            </a:endParaRPr>
+          </a:p>
+        </p:txBody>
+      </p:sp>
+      <p:sp>
+        <p:nvSpPr>
+          <p:cNvPr id="5" name="Title 4">
+            <a:extLst>
+              <a:ext uri="{FF2B5EF4-FFF2-40B4-BE49-F238E27FC236}">
+                <a16:creationId xmlns:a16="http://schemas.microsoft.com/office/drawing/2014/main" id="{DC12984A-F918-66CF-9BF7-11C289E0534A}"/>
+              </a:ext>
+            </a:extLst>
+          </p:cNvPr>
+          <p:cNvSpPr>
+            <a:spLocks noGrp="1"/>
+          </p:cNvSpPr>
+          <p:nvPr>
+            <p:ph type="ctrTitle"/>
+          </p:nvPr>
+        </p:nvSpPr>
+        <p:spPr>
+          <a:xfrm>
+            <a:off x="4283493" y="2675333"/>
+            <a:ext cx="3777666" cy="357043"/>
+          </a:xfrm>
+        </p:spPr>
+        <p:txBody>
+          <a:bodyPr/>
+          <a:lstStyle/>
+          <a:p>
+            <a:r>
+              <a:rPr lang="et-EE" noProof="0" dirty="0"/>
+              <a:t>Paus 10:30-10:45</a:t>
+            </a:r>
+          </a:p>
+        </p:txBody>
+      </p:sp>
+    </p:spTree>
+    <p:extLst>
+      <p:ext uri="{BB962C8B-B14F-4D97-AF65-F5344CB8AC3E}">
+        <p14:creationId xmlns:p14="http://schemas.microsoft.com/office/powerpoint/2010/main" val="2677885354"/>
+      </p:ext>
+    </p:extLst>
+  </p:cSld>
+  <p:clrMapOvr>
+    <a:masterClrMapping/>
+  </p:clrMapOvr>
+</p:sld>
+</file>
+
+<file path=ppt/slides/slide4.xml><?xml version="1.0" encoding="utf-8"?>
+<p:sld xmlns:a="http://schemas.openxmlformats.org/drawingml/2006/main" xmlns:r="http://schemas.openxmlformats.org/officeDocument/2006/relationships" xmlns:p="http://schemas.openxmlformats.org/presentationml/2006/main">
+  <p:cSld>
+    <p:spTree>
+      <p:nvGrpSpPr>
+        <p:cNvPr id="1" name="">
+          <a:extLst>
+            <a:ext uri="{FF2B5EF4-FFF2-40B4-BE49-F238E27FC236}">
               <a16:creationId xmlns:a16="http://schemas.microsoft.com/office/drawing/2014/main" id="{A219154E-E89E-8B00-74C5-66A723E4B049}"/>
             </a:ext>
           </a:extLst>
@@ -26985,38 +27030,18 @@
           <a:lstStyle/>
           <a:p>
             <a:r>
-              <a:rPr lang="en-US" sz="2800" b="1" err="1"/>
-              <a:t>Generatiivne</a:t>
+              <a:rPr lang="et-EE" sz="2800" b="1" noProof="0" dirty="0"/>
+              <a:t>Generatiivne tehisaru – suured keelemudelid (</a:t>
             </a:r>
             <a:r>
-              <a:rPr lang="en-US" sz="2800" b="1"/>
-              <a:t> </a:t>
+              <a:rPr lang="et-EE" sz="2800" b="1" noProof="0" dirty="0" err="1"/>
+              <a:t>LLMs</a:t>
             </a:r>
             <a:r>
-              <a:rPr lang="en-US" sz="2800" b="1" err="1"/>
-              <a:t>tehisaru</a:t>
+              <a:rPr lang="et-EE" sz="2800" b="1" noProof="0" dirty="0"/>
+              <a:t>)</a:t>
             </a:r>
-            <a:r>
-              <a:rPr lang="en-US" sz="2800" b="1"/>
-              <a:t> – </a:t>
-            </a:r>
-            <a:r>
-              <a:rPr lang="en-US" sz="2800" b="1" err="1"/>
-              <a:t>suured</a:t>
-            </a:r>
-            <a:r>
-              <a:rPr lang="en-US" sz="2800" b="1"/>
-              <a:t> </a:t>
-            </a:r>
-            <a:r>
-              <a:rPr lang="en-US" sz="2800" b="1" err="1"/>
-              <a:t>keelemudelid</a:t>
-            </a:r>
-            <a:r>
-              <a:rPr lang="en-US" sz="2800" b="1"/>
-              <a:t> (LLMs)</a:t>
-            </a:r>
-            <a:endParaRPr lang="en-US" sz="2800" err="1"/>
+            <a:endParaRPr lang="et-EE" sz="2800" noProof="0" dirty="0"/>
           </a:p>
         </p:txBody>
       </p:sp>
@@ -27049,7 +27074,7 @@
               <a:buChar char="•"/>
             </a:pPr>
             <a:r>
-              <a:rPr lang="en-US" sz="2400" dirty="0" err="1">
+              <a:rPr lang="et-EE" sz="2400" noProof="0" dirty="0">
                 <a:solidFill>
                   <a:srgbClr val="121212"/>
                 </a:solidFill>
@@ -27057,108 +27082,9 @@
                 <a:ea typeface="Inter"/>
                 <a:cs typeface="Noto Serif"/>
               </a:rPr>
-              <a:t>Treenitakse</a:t>
+              <a:t>Treenitakse tekstide ja muude materjalide pinnalt.</a:t>
             </a:r>
-            <a:r>
-              <a:rPr lang="en-US" sz="2400" dirty="0">
-                <a:solidFill>
-                  <a:srgbClr val="121212"/>
-                </a:solidFill>
-                <a:latin typeface="Inter"/>
-                <a:ea typeface="Inter"/>
-                <a:cs typeface="Noto Serif"/>
-              </a:rPr>
-              <a:t> </a:t>
-            </a:r>
-            <a:r>
-              <a:rPr lang="en-US" sz="2400" dirty="0" err="1">
-                <a:solidFill>
-                  <a:srgbClr val="121212"/>
-                </a:solidFill>
-                <a:latin typeface="Inter"/>
-                <a:ea typeface="Inter"/>
-                <a:cs typeface="Noto Serif"/>
-              </a:rPr>
-              <a:t>tekstide</a:t>
-            </a:r>
-            <a:r>
-              <a:rPr lang="en-US" sz="2400" dirty="0">
-                <a:solidFill>
-                  <a:srgbClr val="121212"/>
-                </a:solidFill>
-                <a:latin typeface="Inter"/>
-                <a:ea typeface="Inter"/>
-                <a:cs typeface="Noto Serif"/>
-              </a:rPr>
-              <a:t> ja </a:t>
-            </a:r>
-            <a:r>
-              <a:rPr lang="en-US" sz="2400" dirty="0" err="1">
-                <a:solidFill>
-                  <a:srgbClr val="121212"/>
-                </a:solidFill>
-                <a:latin typeface="Inter"/>
-                <a:ea typeface="Inter"/>
-                <a:cs typeface="Noto Serif"/>
-              </a:rPr>
-              <a:t>muude</a:t>
-            </a:r>
-            <a:r>
-              <a:rPr lang="en-US" sz="2400" dirty="0">
-                <a:solidFill>
-                  <a:srgbClr val="121212"/>
-                </a:solidFill>
-                <a:latin typeface="Inter"/>
-                <a:ea typeface="Inter"/>
-                <a:cs typeface="Noto Serif"/>
-              </a:rPr>
-              <a:t> </a:t>
-            </a:r>
-            <a:r>
-              <a:rPr lang="en-US" sz="2400" dirty="0" err="1">
-                <a:solidFill>
-                  <a:srgbClr val="121212"/>
-                </a:solidFill>
-                <a:latin typeface="Inter"/>
-                <a:ea typeface="Inter"/>
-                <a:cs typeface="Noto Serif"/>
-              </a:rPr>
-              <a:t>materjalide</a:t>
-            </a:r>
-            <a:r>
-              <a:rPr lang="en-US" sz="2400" dirty="0">
-                <a:solidFill>
-                  <a:srgbClr val="121212"/>
-                </a:solidFill>
-                <a:latin typeface="Inter"/>
-                <a:ea typeface="Inter"/>
-                <a:cs typeface="Noto Serif"/>
-              </a:rPr>
-              <a:t> </a:t>
-            </a:r>
-            <a:r>
-              <a:rPr lang="en-US" sz="2400" dirty="0" err="1">
-                <a:solidFill>
-                  <a:srgbClr val="121212"/>
-                </a:solidFill>
-                <a:latin typeface="Inter"/>
-                <a:ea typeface="Inter"/>
-                <a:cs typeface="Noto Serif"/>
-              </a:rPr>
-              <a:t>pinnalt</a:t>
-            </a:r>
-            <a:r>
-              <a:rPr lang="en-US" sz="2400" dirty="0">
-                <a:solidFill>
-                  <a:srgbClr val="121212"/>
-                </a:solidFill>
-                <a:latin typeface="Inter"/>
-                <a:ea typeface="Inter"/>
-                <a:cs typeface="Noto Serif"/>
-              </a:rPr>
-              <a:t>.</a:t>
-            </a:r>
-            <a:endParaRPr lang="en-US" sz="2400" dirty="0">
+            <a:endParaRPr lang="et-EE" sz="2400" noProof="0" dirty="0">
               <a:solidFill>
                 <a:srgbClr val="121212"/>
               </a:solidFill>
@@ -27175,116 +27101,25 @@
               <a:buChar char="o"/>
             </a:pPr>
             <a:r>
-              <a:rPr lang="en-US" sz="2000" dirty="0" err="1">
+              <a:rPr lang="et-EE" sz="2000" noProof="0" dirty="0">
                 <a:ea typeface="Inter"/>
                 <a:cs typeface="Noto Serif"/>
               </a:rPr>
-              <a:t>Otsib</a:t>
+              <a:t>Otsib mustreid tekstides - </a:t>
             </a:r>
             <a:r>
-              <a:rPr lang="en-US" sz="2000" dirty="0">
-                <a:ea typeface="Inter"/>
-                <a:cs typeface="Noto Serif"/>
-              </a:rPr>
-              <a:t> </a:t>
-            </a:r>
-            <a:r>
-              <a:rPr lang="en-US" sz="2000" dirty="0" err="1">
-                <a:ea typeface="Inter"/>
-                <a:cs typeface="Noto Serif"/>
-              </a:rPr>
-              <a:t>mustreid</a:t>
-            </a:r>
-            <a:r>
-              <a:rPr lang="en-US" sz="2000" dirty="0">
-                <a:ea typeface="Inter"/>
-                <a:cs typeface="Noto Serif"/>
-              </a:rPr>
-              <a:t> </a:t>
-            </a:r>
-            <a:r>
-              <a:rPr lang="en-US" sz="2000" dirty="0" err="1">
-                <a:ea typeface="Inter"/>
-                <a:cs typeface="Noto Serif"/>
-              </a:rPr>
-              <a:t>tekstides</a:t>
-            </a:r>
-            <a:r>
-              <a:rPr lang="en-US" sz="2000" dirty="0">
-                <a:ea typeface="Inter"/>
-                <a:cs typeface="Noto Serif"/>
-              </a:rPr>
-              <a:t> - </a:t>
-            </a:r>
-            <a:r>
-              <a:rPr lang="en-US" sz="2000" dirty="0" err="1">
+              <a:rPr lang="et-EE" sz="2000" noProof="0" dirty="0" err="1">
                 <a:ea typeface="Inter"/>
                 <a:cs typeface="Noto Serif"/>
               </a:rPr>
               <a:t>sõnadevahelisi</a:t>
             </a:r>
             <a:r>
-              <a:rPr lang="en-US" sz="2000" dirty="0">
+              <a:rPr lang="et-EE" sz="2000" noProof="0" dirty="0">
                 <a:ea typeface="Inter"/>
                 <a:cs typeface="Noto Serif"/>
               </a:rPr>
-              <a:t> </a:t>
-            </a:r>
-            <a:r>
-              <a:rPr lang="en-US" sz="2000" dirty="0" err="1">
-                <a:ea typeface="Inter"/>
-                <a:cs typeface="Noto Serif"/>
-              </a:rPr>
-              <a:t>seoseid</a:t>
-            </a:r>
-            <a:r>
-              <a:rPr lang="en-US" sz="2000" dirty="0">
-                <a:ea typeface="Inter"/>
-                <a:cs typeface="Noto Serif"/>
-              </a:rPr>
-              <a:t> </a:t>
-            </a:r>
-            <a:r>
-              <a:rPr lang="en-US" sz="2000" dirty="0" err="1">
-                <a:ea typeface="Inter"/>
-                <a:cs typeface="Noto Serif"/>
-              </a:rPr>
-              <a:t>mitmete</a:t>
-            </a:r>
-            <a:r>
-              <a:rPr lang="en-US" sz="2000" dirty="0">
-                <a:ea typeface="Inter"/>
-                <a:cs typeface="Noto Serif"/>
-              </a:rPr>
-              <a:t> </a:t>
-            </a:r>
-            <a:r>
-              <a:rPr lang="en-US" sz="2000" dirty="0" err="1">
-                <a:ea typeface="Inter"/>
-                <a:cs typeface="Noto Serif"/>
-              </a:rPr>
-              <a:t>treeningtsüklite</a:t>
-            </a:r>
-            <a:r>
-              <a:rPr lang="en-US" sz="2000" dirty="0">
-                <a:ea typeface="Inter"/>
-                <a:cs typeface="Noto Serif"/>
-              </a:rPr>
-              <a:t> </a:t>
-            </a:r>
-            <a:r>
-              <a:rPr lang="en-US" sz="2000" dirty="0" err="1">
-                <a:ea typeface="Inter"/>
-                <a:cs typeface="Noto Serif"/>
-              </a:rPr>
-              <a:t>käigus</a:t>
-            </a:r>
-            <a:r>
-              <a:rPr lang="en-US" sz="2000" dirty="0">
-                <a:ea typeface="Inter"/>
-                <a:cs typeface="Noto Serif"/>
-              </a:rPr>
-              <a:t>.</a:t>
+              <a:t> seoseid mitmete treeningtsüklite käigus.</a:t>
             </a:r>
           </a:p>
           <a:p>
@@ -27296,53 +27131,18 @@
               <a:buChar char="§"/>
             </a:pPr>
             <a:r>
-              <a:rPr lang="en-US" sz="2000" dirty="0">
+              <a:rPr lang="et-EE" sz="2000" noProof="0" dirty="0" err="1">
                 <a:ea typeface="Inter"/>
                 <a:cs typeface="Noto Serif"/>
               </a:rPr>
-              <a:t>Tokenization – </a:t>
+              <a:t>Tokenization</a:t>
             </a:r>
             <a:r>
-              <a:rPr lang="en-US" sz="2000" dirty="0" err="1">
+              <a:rPr lang="et-EE" sz="2000" noProof="0" dirty="0">
                 <a:ea typeface="Inter"/>
                 <a:cs typeface="Noto Serif"/>
               </a:rPr>
-              <a:t>tekstid</a:t>
-            </a:r>
-            <a:r>
-              <a:rPr lang="en-US" sz="2000" dirty="0">
-                <a:ea typeface="Inter"/>
-                <a:cs typeface="Noto Serif"/>
-              </a:rPr>
-              <a:t> </a:t>
-            </a:r>
-            <a:r>
-              <a:rPr lang="en-US" sz="2000" dirty="0" err="1">
-                <a:ea typeface="Inter"/>
-                <a:cs typeface="Noto Serif"/>
-              </a:rPr>
-              <a:t>jagatakse</a:t>
-            </a:r>
-            <a:r>
-              <a:rPr lang="en-US" sz="2000" dirty="0">
-                <a:ea typeface="Inter"/>
-                <a:cs typeface="Noto Serif"/>
-              </a:rPr>
-              <a:t> </a:t>
-            </a:r>
-            <a:r>
-              <a:rPr lang="en-US" sz="2000" dirty="0" err="1">
-                <a:ea typeface="Inter"/>
-                <a:cs typeface="Noto Serif"/>
-              </a:rPr>
-              <a:t>osadeks</a:t>
-            </a:r>
-            <a:r>
-              <a:rPr lang="en-US" sz="2000" dirty="0">
-                <a:ea typeface="Inter"/>
-                <a:cs typeface="Noto Serif"/>
-              </a:rPr>
-              <a:t>.</a:t>
+              <a:t> – tekstid jagatakse osadeks.</a:t>
             </a:r>
           </a:p>
           <a:p>
@@ -27354,137 +27154,46 @@
               <a:buChar char="§"/>
             </a:pPr>
             <a:r>
-              <a:rPr lang="en-US" sz="2000" dirty="0">
+              <a:rPr lang="et-EE" sz="2000" noProof="0" dirty="0" err="1">
                 <a:ea typeface="Inter"/>
                 <a:cs typeface="Noto Serif"/>
               </a:rPr>
-              <a:t>Embedding – </a:t>
+              <a:t>Embedding</a:t>
             </a:r>
             <a:r>
-              <a:rPr lang="en-US" sz="2000" dirty="0" err="1">
+              <a:rPr lang="et-EE" sz="2000" noProof="0" dirty="0">
+                <a:ea typeface="Inter"/>
+                <a:cs typeface="Noto Serif"/>
+              </a:rPr>
+              <a:t> – </a:t>
+            </a:r>
+            <a:r>
+              <a:rPr lang="et-EE" sz="2000" noProof="0" dirty="0" err="1">
                 <a:ea typeface="Inter"/>
                 <a:cs typeface="Noto Serif"/>
               </a:rPr>
               <a:t>tokenitele</a:t>
             </a:r>
             <a:r>
-              <a:rPr lang="en-US" sz="2000" dirty="0">
+              <a:rPr lang="et-EE" sz="2000" noProof="0" dirty="0">
                 <a:ea typeface="Inter"/>
                 <a:cs typeface="Noto Serif"/>
               </a:rPr>
-              <a:t> </a:t>
+              <a:t> määratakse vektor, mis määrab tema asukoha teiste </a:t>
             </a:r>
             <a:r>
-              <a:rPr lang="en-US" sz="2000" dirty="0" err="1">
-                <a:ea typeface="Inter"/>
-                <a:cs typeface="Noto Serif"/>
-              </a:rPr>
-              <a:t>määratakse</a:t>
-            </a:r>
-            <a:r>
-              <a:rPr lang="en-US" sz="2000" dirty="0">
-                <a:ea typeface="Inter"/>
-                <a:cs typeface="Noto Serif"/>
-              </a:rPr>
-              <a:t> </a:t>
-            </a:r>
-            <a:r>
-              <a:rPr lang="en-US" sz="2000" dirty="0" err="1">
-                <a:ea typeface="Inter"/>
-                <a:cs typeface="Noto Serif"/>
-              </a:rPr>
-              <a:t>vektor</a:t>
-            </a:r>
-            <a:r>
-              <a:rPr lang="en-US" sz="2000" dirty="0">
-                <a:ea typeface="Inter"/>
-                <a:cs typeface="Noto Serif"/>
-              </a:rPr>
-              <a:t>, mis </a:t>
-            </a:r>
-            <a:r>
-              <a:rPr lang="en-US" sz="2000" dirty="0" err="1">
-                <a:ea typeface="Inter"/>
-                <a:cs typeface="Noto Serif"/>
-              </a:rPr>
-              <a:t>määrab</a:t>
-            </a:r>
-            <a:r>
-              <a:rPr lang="en-US" sz="2000" dirty="0">
-                <a:ea typeface="Inter"/>
-                <a:cs typeface="Noto Serif"/>
-              </a:rPr>
-              <a:t> </a:t>
-            </a:r>
-            <a:r>
-              <a:rPr lang="en-US" sz="2000" dirty="0" err="1">
-                <a:ea typeface="Inter"/>
-                <a:cs typeface="Noto Serif"/>
-              </a:rPr>
-              <a:t>tema</a:t>
-            </a:r>
-            <a:r>
-              <a:rPr lang="en-US" sz="2000" dirty="0">
-                <a:ea typeface="Inter"/>
-                <a:cs typeface="Noto Serif"/>
-              </a:rPr>
-              <a:t> </a:t>
-            </a:r>
-            <a:r>
-              <a:rPr lang="en-US" sz="2000" dirty="0" err="1">
-                <a:ea typeface="Inter"/>
-                <a:cs typeface="Noto Serif"/>
-              </a:rPr>
-              <a:t>asukoha</a:t>
-            </a:r>
-            <a:r>
-              <a:rPr lang="en-US" sz="2000" dirty="0">
-                <a:ea typeface="Inter"/>
-                <a:cs typeface="Noto Serif"/>
-              </a:rPr>
-              <a:t> </a:t>
-            </a:r>
-            <a:r>
-              <a:rPr lang="en-US" sz="2000" dirty="0" err="1">
-                <a:ea typeface="Inter"/>
-                <a:cs typeface="Noto Serif"/>
-              </a:rPr>
-              <a:t>teiste</a:t>
-            </a:r>
-            <a:r>
-              <a:rPr lang="en-US" sz="2000" dirty="0">
-                <a:ea typeface="Inter"/>
-                <a:cs typeface="Noto Serif"/>
-              </a:rPr>
-              <a:t> </a:t>
-            </a:r>
-            <a:r>
-              <a:rPr lang="en-US" sz="2000" dirty="0" err="1">
+              <a:rPr lang="et-EE" sz="2000" noProof="0" dirty="0" err="1">
                 <a:ea typeface="Inter"/>
                 <a:cs typeface="Noto Serif"/>
               </a:rPr>
               <a:t>tokenitega</a:t>
             </a:r>
             <a:r>
-              <a:rPr lang="en-US" sz="2000" dirty="0">
+              <a:rPr lang="et-EE" sz="2000" noProof="0" dirty="0">
                 <a:ea typeface="Inter"/>
                 <a:cs typeface="Noto Serif"/>
               </a:rPr>
-              <a:t> </a:t>
-            </a:r>
-            <a:r>
-              <a:rPr lang="en-US" sz="2000" dirty="0" err="1">
-                <a:ea typeface="Inter"/>
-                <a:cs typeface="Noto Serif"/>
-              </a:rPr>
-              <a:t>võrdluses</a:t>
-            </a:r>
-            <a:r>
-              <a:rPr lang="en-US" sz="2000" dirty="0">
-                <a:ea typeface="Inter"/>
-                <a:cs typeface="Noto Serif"/>
-              </a:rPr>
-              <a:t>.</a:t>
+              <a:t> võrdluses.</a:t>
             </a:r>
           </a:p>
           <a:p>
@@ -27496,46 +27205,39 @@
               <a:buChar char="o"/>
             </a:pPr>
             <a:r>
-              <a:rPr lang="en-US" sz="2000" dirty="0" err="1">
+              <a:rPr lang="et-EE" sz="2000" noProof="0" dirty="0">
                 <a:ea typeface="Inter"/>
                 <a:cs typeface="Noto Serif"/>
               </a:rPr>
-              <a:t>Areneb</a:t>
+              <a:t>Areneb vastavalt tagasisidele. (</a:t>
             </a:r>
             <a:r>
-              <a:rPr lang="en-US" sz="2000" dirty="0">
+              <a:rPr lang="et-EE" sz="2000" noProof="0" dirty="0" err="1">
+                <a:ea typeface="Inter"/>
+                <a:cs typeface="Noto Serif"/>
+              </a:rPr>
+              <a:t>Reinforcement</a:t>
+            </a:r>
+            <a:r>
+              <a:rPr lang="et-EE" sz="2000" noProof="0" dirty="0">
                 <a:ea typeface="Inter"/>
                 <a:cs typeface="Noto Serif"/>
               </a:rPr>
               <a:t> </a:t>
             </a:r>
             <a:r>
-              <a:rPr lang="en-US" sz="2000" dirty="0" err="1">
+              <a:rPr lang="et-EE" sz="2000" noProof="0" dirty="0" err="1">
                 <a:ea typeface="Inter"/>
                 <a:cs typeface="Noto Serif"/>
               </a:rPr>
-              <a:t>vastavalt</a:t>
+              <a:t>Learning</a:t>
             </a:r>
             <a:r>
-              <a:rPr lang="en-US" sz="2000" dirty="0">
+              <a:rPr lang="et-EE" sz="2000" noProof="0" dirty="0">
                 <a:ea typeface="Inter"/>
                 <a:cs typeface="Noto Serif"/>
               </a:rPr>
-              <a:t> </a:t>
-            </a:r>
-            <a:r>
-              <a:rPr lang="en-US" sz="2000" dirty="0" err="1">
-                <a:ea typeface="Inter"/>
-                <a:cs typeface="Noto Serif"/>
-              </a:rPr>
-              <a:t>tagasisidele</a:t>
-            </a:r>
-            <a:r>
-              <a:rPr lang="en-US" sz="2000" dirty="0">
-                <a:ea typeface="Inter"/>
-                <a:cs typeface="Noto Serif"/>
-              </a:rPr>
-              <a:t>. (Reinforcement Learning)</a:t>
+              <a:t>)</a:t>
             </a:r>
           </a:p>
           <a:p>
@@ -27550,90 +27252,34 @@
               <a:buChar char="•"/>
             </a:pPr>
             <a:r>
-              <a:rPr lang="en-US" sz="2400" dirty="0" err="1">
+              <a:rPr lang="en-US" sz="2400" noProof="0" dirty="0" err="1">
                 <a:ea typeface="Inter"/>
                 <a:cs typeface="Noto Serif"/>
               </a:rPr>
-              <a:t>Päringu</a:t>
+              <a:t>Sisendi</a:t>
             </a:r>
             <a:r>
-              <a:rPr lang="en-US" sz="2400" dirty="0">
+              <a:rPr lang="et-EE" sz="2400" noProof="0" dirty="0">
                 <a:ea typeface="Inter"/>
                 <a:cs typeface="Noto Serif"/>
               </a:rPr>
               <a:t> </a:t>
             </a:r>
             <a:r>
-              <a:rPr lang="en-US" sz="2400" dirty="0" err="1">
+              <a:rPr lang="en-US" sz="2400" noProof="0" dirty="0" err="1">
                 <a:ea typeface="Inter"/>
                 <a:cs typeface="Noto Serif"/>
               </a:rPr>
-              <a:t>esitades</a:t>
+              <a:t>järel</a:t>
             </a:r>
             <a:r>
-              <a:rPr lang="en-US" sz="2400" dirty="0">
+              <a:rPr lang="et-EE" sz="2400" noProof="0" dirty="0">
                 <a:ea typeface="Inter"/>
                 <a:cs typeface="Noto Serif"/>
               </a:rPr>
-              <a:t> </a:t>
+              <a:t> ennustatakse, milline sõna tuleb järgmisena. </a:t>
             </a:r>
-            <a:r>
-              <a:rPr lang="en-US" sz="2400" dirty="0" err="1">
-                <a:ea typeface="Inter"/>
-                <a:cs typeface="Noto Serif"/>
-              </a:rPr>
-              <a:t>ennustatakse</a:t>
-            </a:r>
-            <a:r>
-              <a:rPr lang="en-US" sz="2400" dirty="0">
-                <a:ea typeface="Inter"/>
-                <a:cs typeface="Noto Serif"/>
-              </a:rPr>
-              <a:t>, milline </a:t>
-            </a:r>
-            <a:r>
-              <a:rPr lang="en-US" sz="2400" dirty="0" err="1">
-                <a:ea typeface="Inter"/>
-                <a:cs typeface="Noto Serif"/>
-              </a:rPr>
-              <a:t>sõna</a:t>
-            </a:r>
-            <a:r>
-              <a:rPr lang="en-US" sz="2400" dirty="0">
-                <a:ea typeface="Inter"/>
-                <a:cs typeface="Noto Serif"/>
-              </a:rPr>
-              <a:t> </a:t>
-            </a:r>
-            <a:r>
-              <a:rPr lang="en-US" sz="2400" dirty="0" err="1">
-                <a:ea typeface="Inter"/>
-                <a:cs typeface="Noto Serif"/>
-              </a:rPr>
-              <a:t>tuleb</a:t>
-            </a:r>
-            <a:r>
-              <a:rPr lang="en-US" sz="2400" dirty="0">
-                <a:ea typeface="Inter"/>
-                <a:cs typeface="Noto Serif"/>
-              </a:rPr>
-              <a:t> </a:t>
-            </a:r>
-            <a:r>
-              <a:rPr lang="en-US" sz="2400" dirty="0" err="1">
-                <a:ea typeface="Inter"/>
-                <a:cs typeface="Noto Serif"/>
-              </a:rPr>
-              <a:t>järgmisena</a:t>
-            </a:r>
-            <a:r>
-              <a:rPr lang="en-US" sz="2400" dirty="0">
-                <a:ea typeface="Inter"/>
-                <a:cs typeface="Noto Serif"/>
-              </a:rPr>
-              <a:t>. </a:t>
-            </a:r>
-            <a:endParaRPr lang="en-US" sz="2400" dirty="0">
+            <a:endParaRPr lang="et-EE" sz="2400" noProof="0" dirty="0">
               <a:cs typeface="Noto Serif"/>
             </a:endParaRPr>
           </a:p>
@@ -27649,74 +27295,11 @@
               <a:buChar char="•"/>
             </a:pPr>
             <a:r>
-              <a:rPr lang="en-US" sz="2400" dirty="0" err="1">
+              <a:rPr lang="et-EE" sz="2400" noProof="0" dirty="0">
                 <a:ea typeface="Inter"/>
                 <a:cs typeface="Noto Serif"/>
               </a:rPr>
-              <a:t>Vastuste</a:t>
-            </a:r>
-            <a:r>
-              <a:rPr lang="en-US" sz="2400" dirty="0">
-                <a:ea typeface="Inter"/>
-                <a:cs typeface="Noto Serif"/>
-              </a:rPr>
-              <a:t> </a:t>
-            </a:r>
-            <a:r>
-              <a:rPr lang="en-US" sz="2400" dirty="0" err="1">
-                <a:ea typeface="Inter"/>
-                <a:cs typeface="Noto Serif"/>
-              </a:rPr>
-              <a:t>kvaliteet</a:t>
-            </a:r>
-            <a:r>
-              <a:rPr lang="en-US" sz="2400" dirty="0">
-                <a:ea typeface="Inter"/>
-                <a:cs typeface="Noto Serif"/>
-              </a:rPr>
-              <a:t> </a:t>
-            </a:r>
-            <a:r>
-              <a:rPr lang="en-US" sz="2400" dirty="0" err="1">
-                <a:ea typeface="Inter"/>
-                <a:cs typeface="Noto Serif"/>
-              </a:rPr>
-              <a:t>oleneb</a:t>
-            </a:r>
-            <a:r>
-              <a:rPr lang="en-US" sz="2400" dirty="0">
-                <a:ea typeface="Inter"/>
-                <a:cs typeface="Noto Serif"/>
-              </a:rPr>
-              <a:t> </a:t>
-            </a:r>
-            <a:r>
-              <a:rPr lang="en-US" sz="2400" dirty="0" err="1">
-                <a:ea typeface="Inter"/>
-                <a:cs typeface="Noto Serif"/>
-              </a:rPr>
-              <a:t>treeningandmestiku</a:t>
-            </a:r>
-            <a:r>
-              <a:rPr lang="en-US" sz="2400" dirty="0">
-                <a:ea typeface="Inter"/>
-                <a:cs typeface="Noto Serif"/>
-              </a:rPr>
-              <a:t> </a:t>
-            </a:r>
-            <a:r>
-              <a:rPr lang="en-US" sz="2400" dirty="0" err="1">
-                <a:ea typeface="Inter"/>
-                <a:cs typeface="Noto Serif"/>
-              </a:rPr>
-              <a:t>kvaliteedist</a:t>
-            </a:r>
-            <a:r>
-              <a:rPr lang="en-US" sz="2400" dirty="0">
-                <a:ea typeface="Inter"/>
-                <a:cs typeface="Noto Serif"/>
-              </a:rPr>
-              <a:t>.</a:t>
+              <a:t>Vastuste kvaliteet oleneb treeningandmestiku kvaliteedist.</a:t>
             </a:r>
           </a:p>
           <a:p>
@@ -27731,48 +27314,27 @@
               <a:buChar char="•"/>
             </a:pPr>
             <a:r>
-              <a:rPr lang="en-US" sz="2400" dirty="0" err="1">
+              <a:rPr lang="et-EE" sz="2400" noProof="0" dirty="0">
                 <a:ea typeface="Inter"/>
                 <a:cs typeface="Noto Serif"/>
               </a:rPr>
-              <a:t>Tehisaru</a:t>
+              <a:t>Tehisaru võib "</a:t>
             </a:r>
             <a:r>
-              <a:rPr lang="en-US" sz="2400" dirty="0">
-                <a:ea typeface="Inter"/>
-                <a:cs typeface="Noto Serif"/>
-              </a:rPr>
-              <a:t> </a:t>
-            </a:r>
-            <a:r>
-              <a:rPr lang="en-US" sz="2400" dirty="0" err="1">
-                <a:ea typeface="Inter"/>
-                <a:cs typeface="Noto Serif"/>
-              </a:rPr>
-              <a:t>võib</a:t>
-            </a:r>
-            <a:r>
-              <a:rPr lang="en-US" sz="2400" dirty="0">
-                <a:ea typeface="Inter"/>
-                <a:cs typeface="Noto Serif"/>
-              </a:rPr>
-              <a:t> "</a:t>
-            </a:r>
-            <a:r>
-              <a:rPr lang="en-US" sz="2400" dirty="0" err="1">
+              <a:rPr lang="et-EE" sz="2400" noProof="0" dirty="0" err="1">
                 <a:ea typeface="Inter"/>
                 <a:cs typeface="Noto Serif"/>
               </a:rPr>
               <a:t>hallutsineerida</a:t>
             </a:r>
             <a:r>
-              <a:rPr lang="en-US" sz="2400" dirty="0">
+              <a:rPr lang="et-EE" sz="2400" noProof="0" dirty="0">
                 <a:ea typeface="Inter"/>
                 <a:cs typeface="Noto Serif"/>
               </a:rPr>
               <a:t>".</a:t>
             </a:r>
-            <a:endParaRPr lang="en-US" sz="2400" dirty="0">
+            <a:endParaRPr lang="et-EE" sz="2400" noProof="0" dirty="0">
               <a:cs typeface="Noto Serif"/>
             </a:endParaRPr>
           </a:p>
@@ -27787,7 +27349,7 @@
               <a:buFont typeface="Arial,Sans-Serif" panose="020B0502030000000004" pitchFamily="34" charset="0"/>
               <a:buChar char="•"/>
             </a:pPr>
-            <a:endParaRPr lang="en-US" sz="2400">
+            <a:endParaRPr lang="et-EE" sz="2400" noProof="0" dirty="0">
               <a:cs typeface="Noto Serif"/>
             </a:endParaRPr>
           </a:p>
@@ -27802,7 +27364,7 @@
               <a:buFont typeface="Arial,Sans-Serif" panose="020B0502030000000004" pitchFamily="34" charset="0"/>
               <a:buChar char="•"/>
             </a:pPr>
-            <a:endParaRPr lang="en-US" sz="2400">
+            <a:endParaRPr lang="et-EE" sz="2400" noProof="0" dirty="0">
               <a:cs typeface="Arial"/>
             </a:endParaRPr>
           </a:p>
@@ -27814,7 +27376,7 @@
               <a:buFont typeface="Arial,Sans-Serif" panose="020B0502030000000004" pitchFamily="34" charset="0"/>
               <a:buChar char="o"/>
             </a:pPr>
-            <a:endParaRPr lang="en-US" sz="2400">
+            <a:endParaRPr lang="et-EE" sz="2400" noProof="0" dirty="0">
               <a:cs typeface="Arial"/>
             </a:endParaRPr>
           </a:p>
@@ -27826,7 +27388,7 @@
               <a:buFont typeface="Arial,Sans-Serif" panose="020B0502030000000004" pitchFamily="34" charset="0"/>
               <a:buChar char="•"/>
             </a:pPr>
-            <a:endParaRPr lang="en-US" sz="2400">
+            <a:endParaRPr lang="et-EE" sz="2400" noProof="0" dirty="0">
               <a:cs typeface="Arial"/>
             </a:endParaRPr>
           </a:p>
@@ -27836,7 +27398,7 @@
                 <a:spcPct val="150000"/>
               </a:lnSpc>
             </a:pPr>
-            <a:endParaRPr lang="en-US" sz="2800">
+            <a:endParaRPr lang="et-EE" sz="2800" noProof="0" dirty="0">
               <a:cs typeface="Arial"/>
             </a:endParaRPr>
           </a:p>
@@ -27847,7 +27409,7 @@
               </a:lnSpc>
               <a:buNone/>
             </a:pPr>
-            <a:endParaRPr lang="en-US" sz="2800"/>
+            <a:endParaRPr lang="et-EE" sz="2800" noProof="0" dirty="0"/>
           </a:p>
         </p:txBody>
       </p:sp>
@@ -28271,7 +27833,7 @@
 </p:sld>
 </file>
 
-<file path=ppt/slides/slide4.xml><?xml version="1.0" encoding="utf-8"?>
+<file path=ppt/slides/slide5.xml><?xml version="1.0" encoding="utf-8"?>
 <p:sld xmlns:a="http://schemas.openxmlformats.org/drawingml/2006/main" xmlns:r="http://schemas.openxmlformats.org/officeDocument/2006/relationships" xmlns:p="http://schemas.openxmlformats.org/presentationml/2006/main">
   <p:cSld>
     <p:spTree>
@@ -28310,36 +27872,8 @@
           <a:lstStyle/>
           <a:p>
             <a:r>
-              <a:rPr lang="en-US" dirty="0" err="1"/>
-              <a:t>Kuidas</a:t>
-            </a:r>
-            <a:r>
-              <a:rPr lang="en-US" dirty="0"/>
-              <a:t> </a:t>
-            </a:r>
-            <a:r>
-              <a:rPr lang="en-US" dirty="0" err="1"/>
-              <a:t>generatiivne</a:t>
-            </a:r>
-            <a:r>
-              <a:rPr lang="en-US" dirty="0"/>
-              <a:t> </a:t>
-            </a:r>
-            <a:r>
-              <a:rPr lang="en-US" dirty="0" err="1"/>
-              <a:t>tehisaru</a:t>
-            </a:r>
-            <a:r>
-              <a:rPr lang="en-US" dirty="0"/>
-              <a:t> </a:t>
-            </a:r>
-            <a:r>
-              <a:rPr lang="en-US" dirty="0" err="1"/>
-              <a:t>töötab</a:t>
-            </a:r>
-            <a:r>
-              <a:rPr lang="en-US" dirty="0"/>
-              <a:t>?</a:t>
+              <a:rPr lang="et-EE" noProof="0" dirty="0"/>
+              <a:t>Kuidas generatiivne tehisaru töötab?</a:t>
             </a:r>
           </a:p>
         </p:txBody>
@@ -28380,55 +27914,19 @@
               <a:buChar char="•"/>
             </a:pPr>
             <a:r>
-              <a:rPr lang="en-US" dirty="0">
+              <a:rPr lang="et-EE" noProof="0" dirty="0">
                 <a:ea typeface="Inter"/>
               </a:rPr>
-              <a:t>Mida </a:t>
+              <a:t>Mida arvasid ameeriklased augustis 2025:</a:t>
             </a:r>
-            <a:r>
-              <a:rPr lang="en-US" dirty="0" err="1">
-                <a:ea typeface="Inter"/>
-              </a:rPr>
-              <a:t>arvasid</a:t>
-            </a:r>
-            <a:r>
-              <a:rPr lang="en-US" dirty="0">
-                <a:ea typeface="Inter"/>
-              </a:rPr>
-              <a:t> </a:t>
-            </a:r>
-            <a:r>
-              <a:rPr lang="en-US" dirty="0" err="1">
-                <a:ea typeface="Inter"/>
-              </a:rPr>
-              <a:t>ameeriklased</a:t>
-            </a:r>
-            <a:r>
-              <a:rPr lang="en-US" dirty="0">
-                <a:ea typeface="Inter"/>
-              </a:rPr>
-              <a:t> </a:t>
-            </a:r>
-            <a:r>
-              <a:rPr lang="en-US" dirty="0" err="1">
-                <a:ea typeface="Inter"/>
-              </a:rPr>
-              <a:t>augustis</a:t>
-            </a:r>
-            <a:r>
-              <a:rPr lang="en-US" dirty="0">
-                <a:ea typeface="Inter"/>
-              </a:rPr>
-              <a:t> 2025:</a:t>
-            </a:r>
-            <a:endParaRPr lang="en-US" dirty="0"/>
+            <a:endParaRPr lang="et-EE" noProof="0" dirty="0"/>
           </a:p>
           <a:p>
             <a:pPr marL="285750" indent="-285750">
               <a:buFont typeface="Arial"/>
               <a:buChar char="•"/>
             </a:pPr>
-            <a:endParaRPr lang="en-US"/>
+            <a:endParaRPr lang="et-EE" noProof="0" dirty="0"/>
           </a:p>
         </p:txBody>
       </p:sp>
@@ -28527,47 +28025,71 @@
           <a:p>
             <a:pPr algn="r"/>
             <a:r>
-              <a:rPr lang="en-US" sz="1400" dirty="0">
+              <a:rPr lang="et-EE" sz="1400" noProof="0" dirty="0">
                 <a:ea typeface="Inter"/>
               </a:rPr>
               <a:t>Allikas:</a:t>
             </a:r>
             <a:r>
-              <a:rPr lang="en-US" sz="1400" dirty="0">
+              <a:rPr lang="et-EE" sz="1400" noProof="0" dirty="0">
                 <a:ea typeface="+mn-lt"/>
                 <a:cs typeface="+mn-lt"/>
               </a:rPr>
               <a:t> </a:t>
             </a:r>
             <a:r>
-              <a:rPr lang="en-US" sz="1400" dirty="0">
+              <a:rPr lang="et-EE" sz="1400" noProof="0" dirty="0" err="1">
                 <a:ea typeface="+mn-lt"/>
                 <a:cs typeface="+mn-lt"/>
                 <a:hlinkClick r:id="rId3"/>
               </a:rPr>
-              <a:t>Searchlight Institute ja Tavern Research uuring AI kohta</a:t>
+              <a:t>Searchlight</a:t>
             </a:r>
             <a:r>
-              <a:rPr lang="en-US" sz="1400" dirty="0">
+              <a:rPr lang="et-EE" sz="1400" noProof="0" dirty="0">
+                <a:ea typeface="+mn-lt"/>
+                <a:cs typeface="+mn-lt"/>
+                <a:hlinkClick r:id="rId3"/>
+              </a:rPr>
+              <a:t> </a:t>
+            </a:r>
+            <a:r>
+              <a:rPr lang="et-EE" sz="1400" noProof="0" dirty="0" err="1">
+                <a:ea typeface="+mn-lt"/>
+                <a:cs typeface="+mn-lt"/>
+                <a:hlinkClick r:id="rId3"/>
+              </a:rPr>
+              <a:t>Institute</a:t>
+            </a:r>
+            <a:r>
+              <a:rPr lang="et-EE" sz="1400" noProof="0" dirty="0">
+                <a:ea typeface="+mn-lt"/>
+                <a:cs typeface="+mn-lt"/>
+                <a:hlinkClick r:id="rId3"/>
+              </a:rPr>
+              <a:t> ja Tavern Research uuring AI kohta</a:t>
+            </a:r>
+            <a:r>
+              <a:rPr lang="et-EE" sz="1400" noProof="0" dirty="0">
                 <a:ea typeface="+mn-lt"/>
                 <a:cs typeface="+mn-lt"/>
               </a:rPr>
               <a:t>.</a:t>
             </a:r>
             <a:r>
-              <a:rPr lang="en-US" dirty="0">
+              <a:rPr lang="et-EE" noProof="0" dirty="0">
                 <a:ea typeface="+mn-lt"/>
                 <a:cs typeface="+mn-lt"/>
               </a:rPr>
               <a:t> </a:t>
             </a:r>
-            <a:endParaRPr lang="en-US" dirty="0">
+            <a:endParaRPr lang="et-EE" noProof="0" dirty="0">
               <a:ea typeface="Inter"/>
             </a:endParaRPr>
           </a:p>
           <a:p>
             <a:pPr algn="r"/>
-            <a:endParaRPr lang="en-US" dirty="0">
+            <a:endParaRPr lang="et-EE" noProof="0" dirty="0">
               <a:solidFill>
                 <a:srgbClr val="121212"/>
               </a:solidFill>
@@ -28575,7 +28097,7 @@
             </a:endParaRPr>
           </a:p>
           <a:p>
-            <a:endParaRPr lang="en-US" dirty="0">
+            <a:endParaRPr lang="et-EE" noProof="0" dirty="0">
               <a:ea typeface="Inter"/>
             </a:endParaRPr>
           </a:p>
@@ -28763,7 +28285,198 @@
 </p:sld>
 </file>
 
-<file path=ppt/slides/slide5.xml><?xml version="1.0" encoding="utf-8"?>
+<file path=ppt/slides/slide6.xml><?xml version="1.0" encoding="utf-8"?>
+<p:sld xmlns:a="http://schemas.openxmlformats.org/drawingml/2006/main" xmlns:r="http://schemas.openxmlformats.org/officeDocument/2006/relationships" xmlns:p="http://schemas.openxmlformats.org/presentationml/2006/main">
+  <p:cSld>
+    <p:spTree>
+      <p:nvGrpSpPr>
+        <p:cNvPr id="1" name=""/>
+        <p:cNvGrpSpPr/>
+        <p:nvPr/>
+      </p:nvGrpSpPr>
+      <p:grpSpPr>
+        <a:xfrm>
+          <a:off x="0" y="0"/>
+          <a:ext cx="0" cy="0"/>
+          <a:chOff x="0" y="0"/>
+          <a:chExt cx="0" cy="0"/>
+        </a:xfrm>
+      </p:grpSpPr>
+      <p:sp>
+        <p:nvSpPr>
+          <p:cNvPr id="2" name="Title 1">
+            <a:extLst>
+              <a:ext uri="{FF2B5EF4-FFF2-40B4-BE49-F238E27FC236}">
+                <a16:creationId xmlns:a16="http://schemas.microsoft.com/office/drawing/2014/main" id="{1A746728-76D6-E8E6-D46A-BE5C5BCFA966}"/>
+              </a:ext>
+            </a:extLst>
+          </p:cNvPr>
+          <p:cNvSpPr>
+            <a:spLocks noGrp="1"/>
+          </p:cNvSpPr>
+          <p:nvPr>
+            <p:ph type="ctrTitle"/>
+          </p:nvPr>
+        </p:nvSpPr>
+        <p:spPr/>
+        <p:txBody>
+          <a:bodyPr/>
+          <a:lstStyle/>
+          <a:p>
+            <a:r>
+              <a:rPr lang="en-US" dirty="0" err="1"/>
+              <a:t>Lisamaterjale</a:t>
+            </a:r>
+            <a:r>
+              <a:rPr lang="en-US" dirty="0"/>
+              <a:t> </a:t>
+            </a:r>
+            <a:r>
+              <a:rPr lang="en-US" dirty="0" err="1"/>
+              <a:t>tehisaru</a:t>
+            </a:r>
+            <a:r>
+              <a:rPr lang="en-US" dirty="0"/>
+              <a:t> </a:t>
+            </a:r>
+            <a:r>
+              <a:rPr lang="en-US" dirty="0" err="1"/>
+              <a:t>olemuse</a:t>
+            </a:r>
+            <a:r>
+              <a:rPr lang="en-US" dirty="0"/>
+              <a:t> </a:t>
+            </a:r>
+            <a:r>
+              <a:rPr lang="en-US" dirty="0" err="1"/>
+              <a:t>mõistmiseks</a:t>
+            </a:r>
+            <a:endParaRPr lang="et-EE" dirty="0"/>
+          </a:p>
+        </p:txBody>
+      </p:sp>
+      <p:sp>
+        <p:nvSpPr>
+          <p:cNvPr id="3" name="Content Placeholder 2">
+            <a:extLst>
+              <a:ext uri="{FF2B5EF4-FFF2-40B4-BE49-F238E27FC236}">
+                <a16:creationId xmlns:a16="http://schemas.microsoft.com/office/drawing/2014/main" id="{04A36C9B-9CD7-7743-0A7B-85761C9ACA6F}"/>
+              </a:ext>
+            </a:extLst>
+          </p:cNvPr>
+          <p:cNvSpPr>
+            <a:spLocks noGrp="1"/>
+          </p:cNvSpPr>
+          <p:nvPr>
+            <p:ph sz="quarter" idx="10"/>
+          </p:nvPr>
+        </p:nvSpPr>
+        <p:spPr/>
+        <p:txBody>
+          <a:bodyPr/>
+          <a:lstStyle/>
+          <a:p>
+            <a:pPr>
+              <a:lnSpc>
+                <a:spcPct val="150000"/>
+              </a:lnSpc>
+            </a:pPr>
+            <a:r>
+              <a:rPr lang="en-US" sz="2400" dirty="0"/>
+              <a:t>TÜ </a:t>
+            </a:r>
+            <a:r>
+              <a:rPr lang="en-US" sz="2400" dirty="0" err="1"/>
+              <a:t>õppematerjal</a:t>
+            </a:r>
+            <a:r>
+              <a:rPr lang="en-US" sz="2400" dirty="0"/>
+              <a:t>: </a:t>
+            </a:r>
+            <a:r>
+              <a:rPr lang="en-US" sz="2400" dirty="0">
+                <a:hlinkClick r:id="rId2"/>
+              </a:rPr>
+              <a:t>https://sisu.ut.ee/ti/oppematerjali-avaleht/</a:t>
+            </a:r>
+            <a:r>
+              <a:rPr lang="en-US" sz="2400" dirty="0"/>
+              <a:t> </a:t>
+            </a:r>
+          </a:p>
+          <a:p>
+            <a:pPr>
+              <a:lnSpc>
+                <a:spcPct val="150000"/>
+              </a:lnSpc>
+            </a:pPr>
+            <a:endParaRPr lang="en-US" sz="2400" dirty="0"/>
+          </a:p>
+          <a:p>
+            <a:pPr>
+              <a:lnSpc>
+                <a:spcPct val="150000"/>
+              </a:lnSpc>
+            </a:pPr>
+            <a:r>
+              <a:rPr lang="en-US" sz="2400" dirty="0" err="1"/>
+              <a:t>Digiriigi</a:t>
+            </a:r>
+            <a:r>
+              <a:rPr lang="en-US" sz="2400" dirty="0"/>
+              <a:t> </a:t>
+            </a:r>
+            <a:r>
+              <a:rPr lang="en-US" sz="2400" dirty="0" err="1"/>
+              <a:t>Akadeemia</a:t>
+            </a:r>
+            <a:r>
+              <a:rPr lang="en-US" sz="2400" dirty="0"/>
+              <a:t> </a:t>
+            </a:r>
+            <a:r>
+              <a:rPr lang="en-US" sz="2400" dirty="0" err="1"/>
+              <a:t>kursused</a:t>
+            </a:r>
+            <a:r>
+              <a:rPr lang="en-US" sz="2400" dirty="0"/>
+              <a:t>:</a:t>
+            </a:r>
+          </a:p>
+          <a:p>
+            <a:pPr lvl="1">
+              <a:lnSpc>
+                <a:spcPct val="150000"/>
+              </a:lnSpc>
+            </a:pPr>
+            <a:r>
+              <a:rPr lang="en-US" sz="2400" dirty="0">
+                <a:hlinkClick r:id="rId3"/>
+              </a:rPr>
+              <a:t>https://digiriigiakadeemia.ee/course/index.php?categoryid=60</a:t>
+            </a:r>
+            <a:r>
+              <a:rPr lang="en-US" sz="2400" dirty="0"/>
+              <a:t> </a:t>
+            </a:r>
+            <a:endParaRPr lang="et-EE" sz="2400" dirty="0"/>
+          </a:p>
+        </p:txBody>
+      </p:sp>
+    </p:spTree>
+    <p:extLst>
+      <p:ext uri="{BB962C8B-B14F-4D97-AF65-F5344CB8AC3E}">
+        <p14:creationId xmlns:p14="http://schemas.microsoft.com/office/powerpoint/2010/main" val="1143583913"/>
+      </p:ext>
+    </p:extLst>
+  </p:cSld>
+  <p:clrMapOvr>
+    <a:masterClrMapping/>
+  </p:clrMapOvr>
+</p:sld>
+</file>
+
+<file path=ppt/slides/slide7.xml><?xml version="1.0" encoding="utf-8"?>
 <p:sld xmlns:a="http://schemas.openxmlformats.org/drawingml/2006/main" xmlns:r="http://schemas.openxmlformats.org/officeDocument/2006/relationships" xmlns:p="http://schemas.openxmlformats.org/presentationml/2006/main">
   <p:cSld>
     <p:spTree>
@@ -28813,28 +28526,8 @@
           <a:lstStyle/>
           <a:p>
             <a:r>
-              <a:rPr lang="en-US" b="1" err="1"/>
-              <a:t>Tehisaru</a:t>
-            </a:r>
-            <a:r>
-              <a:rPr lang="en-US" b="1"/>
-              <a:t> – </a:t>
-            </a:r>
-            <a:r>
-              <a:rPr lang="en-US" b="1" err="1"/>
-              <a:t>levinumad</a:t>
-            </a:r>
-            <a:r>
-              <a:rPr lang="en-US" b="1"/>
-              <a:t> </a:t>
-            </a:r>
-            <a:r>
-              <a:rPr lang="en-US" b="1" err="1"/>
-              <a:t>vestlusrobotid</a:t>
-            </a:r>
-            <a:r>
-              <a:rPr lang="en-US" b="1"/>
-              <a:t> </a:t>
+              <a:rPr lang="et-EE" b="1" noProof="0" dirty="0"/>
+              <a:t>Tehisaru – levinumad vestlusrobotid </a:t>
             </a:r>
           </a:p>
         </p:txBody>
@@ -28868,7 +28561,7 @@
               <a:buChar char="•"/>
             </a:pPr>
             <a:r>
-              <a:rPr lang="en-US" sz="2400" dirty="0">
+              <a:rPr lang="et-EE" sz="2400" noProof="0" dirty="0" err="1">
                 <a:solidFill>
                   <a:srgbClr val="121212"/>
                 </a:solidFill>
@@ -28879,7 +28572,7 @@
               </a:rPr>
               <a:t>ChatGPT</a:t>
             </a:r>
-            <a:endParaRPr lang="en-US" sz="2400" dirty="0">
+            <a:endParaRPr lang="et-EE" sz="2400" noProof="0" dirty="0">
               <a:latin typeface="Inter" panose="02000503000000020004" pitchFamily="2" charset="0"/>
               <a:cs typeface="Noto Serif"/>
             </a:endParaRPr>
@@ -28896,21 +28589,29 @@
               <a:buChar char="•"/>
             </a:pPr>
             <a:r>
-              <a:rPr lang="en-US" sz="2400" dirty="0">
+              <a:rPr lang="et-EE" sz="2400" noProof="0" dirty="0">
                 <a:ea typeface="Inter"/>
                 <a:cs typeface="Noto Serif"/>
                 <a:hlinkClick r:id="rId3"/>
               </a:rPr>
-              <a:t>Google Gemini</a:t>
+              <a:t>Google </a:t>
             </a:r>
             <a:r>
-              <a:rPr lang="en-US" sz="2400" dirty="0">
+              <a:rPr lang="et-EE" sz="2400" noProof="0" dirty="0" err="1">
+                <a:ea typeface="Inter"/>
+                <a:cs typeface="Noto Serif"/>
+                <a:hlinkClick r:id="rId3"/>
+              </a:rPr>
+              <a:t>Gemini</a:t>
+            </a:r>
+            <a:r>
+              <a:rPr lang="et-EE" sz="2400" noProof="0" dirty="0">
                 <a:ea typeface="Inter"/>
                 <a:cs typeface="Noto Serif"/>
               </a:rPr>
               <a:t> </a:t>
             </a:r>
-            <a:endParaRPr lang="en-US" sz="2400" dirty="0">
+            <a:endParaRPr lang="et-EE" sz="2400" noProof="0" dirty="0">
               <a:cs typeface="Noto Serif"/>
             </a:endParaRPr>
           </a:p>
@@ -28926,14 +28627,22 @@
               <a:buChar char="•"/>
             </a:pPr>
             <a:r>
-              <a:rPr lang="en-US" sz="2400" dirty="0">
+              <a:rPr lang="et-EE" sz="2400" noProof="0" dirty="0">
                 <a:ea typeface="Inter"/>
                 <a:cs typeface="Noto Serif"/>
                 <a:hlinkClick r:id="rId4"/>
               </a:rPr>
-              <a:t>Microsoft Copilot</a:t>
+              <a:t>Microsoft </a:t>
             </a:r>
-            <a:endParaRPr lang="en-US" sz="2400" dirty="0">
+            <a:r>
+              <a:rPr lang="et-EE" sz="2400" noProof="0" dirty="0" err="1">
+                <a:ea typeface="Inter"/>
+                <a:cs typeface="Noto Serif"/>
+                <a:hlinkClick r:id="rId4"/>
+              </a:rPr>
+              <a:t>Copilot</a:t>
+            </a:r>
+            <a:endParaRPr lang="et-EE" sz="2400" noProof="0" dirty="0">
               <a:cs typeface="Noto Serif"/>
             </a:endParaRPr>
           </a:p>
@@ -28949,67 +28658,15 @@
               <a:buChar char="•"/>
             </a:pPr>
             <a:r>
-              <a:rPr lang="en-US" sz="2400" dirty="0">
+              <a:rPr lang="et-EE" sz="2400" noProof="0" dirty="0">
                 <a:ea typeface="Inter"/>
                 <a:cs typeface="Noto Serif"/>
                 <a:hlinkClick r:id="rId5"/>
               </a:rPr>
               <a:t>Claude</a:t>
             </a:r>
-            <a:endParaRPr lang="en-US" sz="2400" dirty="0">
-              <a:cs typeface="Noto Serif"/>
-            </a:endParaRPr>
-          </a:p>
-          <a:p>
-            <a:pPr marL="857250" lvl="1" indent="-342900">
-              <a:lnSpc>
-                <a:spcPct val="150000"/>
-              </a:lnSpc>
-              <a:buFont typeface="Arial,Sans-Serif" panose="020B0502030000000004" pitchFamily="34" charset="0"/>
-              <a:buChar char="o"/>
-            </a:pPr>
-            <a:endParaRPr lang="en-US" sz="2400" dirty="0">
-              <a:cs typeface="Noto Serif"/>
-            </a:endParaRPr>
-          </a:p>
-          <a:p>
-            <a:pPr marL="342900" indent="-342900">
-              <a:lnSpc>
-                <a:spcPct val="150000"/>
-              </a:lnSpc>
-              <a:buClr>
-                <a:srgbClr val="121212"/>
-              </a:buClr>
-            </a:pPr>
-            <a:r>
-              <a:rPr lang="en-US" sz="2400" dirty="0" err="1">
-                <a:ea typeface="Inter"/>
-                <a:cs typeface="Noto Serif"/>
-              </a:rPr>
-              <a:t>Nt</a:t>
-            </a:r>
-            <a:r>
-              <a:rPr lang="en-US" sz="2400" dirty="0">
-                <a:ea typeface="Inter"/>
-                <a:cs typeface="Noto Serif"/>
-              </a:rPr>
-              <a:t> </a:t>
-            </a:r>
-            <a:r>
-              <a:rPr lang="en-US" sz="2400" dirty="0" err="1">
-                <a:ea typeface="Inter"/>
-                <a:cs typeface="Noto Serif"/>
-              </a:rPr>
-              <a:t>proovi</a:t>
-            </a:r>
-            <a:r>
-              <a:rPr lang="en-US" sz="2400" dirty="0">
-                <a:ea typeface="Inter"/>
-                <a:cs typeface="Noto Serif"/>
-              </a:rPr>
-              <a:t> "Show world population on graph."</a:t>
-            </a:r>
-            <a:endParaRPr lang="en-US" sz="2400" dirty="0">
+            <a:endParaRPr lang="et-EE" sz="2400" noProof="0" dirty="0">
+              <a:ea typeface="Inter"/>
               <a:cs typeface="Noto Serif"/>
             </a:endParaRPr>
           </a:p>
@@ -29024,7 +28681,89 @@
               <a:buFont typeface="Arial,Sans-Serif" panose="020B0502030000000004" pitchFamily="34" charset="0"/>
               <a:buChar char="•"/>
             </a:pPr>
-            <a:endParaRPr lang="en-US" sz="2400">
+            <a:r>
+              <a:rPr lang="et-EE" sz="2400" noProof="0" dirty="0" err="1">
+                <a:ea typeface="Inter"/>
+                <a:cs typeface="Noto Serif"/>
+                <a:hlinkClick r:id="rId6"/>
+              </a:rPr>
+              <a:t>NotebookLM</a:t>
+            </a:r>
+            <a:endParaRPr lang="et-EE" sz="2400" noProof="0" dirty="0">
+              <a:cs typeface="Noto Serif"/>
+            </a:endParaRPr>
+          </a:p>
+          <a:p>
+            <a:pPr marL="857250" lvl="1" indent="-342900">
+              <a:lnSpc>
+                <a:spcPct val="150000"/>
+              </a:lnSpc>
+              <a:buFont typeface="Arial,Sans-Serif" panose="020B0502030000000004" pitchFamily="34" charset="0"/>
+              <a:buChar char="o"/>
+            </a:pPr>
+            <a:endParaRPr lang="et-EE" sz="2400" noProof="0" dirty="0">
+              <a:cs typeface="Noto Serif"/>
+            </a:endParaRPr>
+          </a:p>
+          <a:p>
+            <a:pPr marL="342900" indent="-342900">
+              <a:lnSpc>
+                <a:spcPct val="150000"/>
+              </a:lnSpc>
+              <a:buClr>
+                <a:srgbClr val="121212"/>
+              </a:buClr>
+            </a:pPr>
+            <a:r>
+              <a:rPr lang="et-EE" sz="2400" noProof="0" dirty="0">
+                <a:ea typeface="Inter"/>
+                <a:cs typeface="Noto Serif"/>
+              </a:rPr>
+              <a:t>Nt proovi "Show </a:t>
+            </a:r>
+            <a:r>
+              <a:rPr lang="et-EE" sz="2400" noProof="0" dirty="0" err="1">
+                <a:ea typeface="Inter"/>
+                <a:cs typeface="Noto Serif"/>
+              </a:rPr>
+              <a:t>world</a:t>
+            </a:r>
+            <a:r>
+              <a:rPr lang="et-EE" sz="2400" noProof="0" dirty="0">
+                <a:ea typeface="Inter"/>
+                <a:cs typeface="Noto Serif"/>
+              </a:rPr>
+              <a:t> </a:t>
+            </a:r>
+            <a:r>
+              <a:rPr lang="et-EE" sz="2400" noProof="0" dirty="0" err="1">
+                <a:ea typeface="Inter"/>
+                <a:cs typeface="Noto Serif"/>
+              </a:rPr>
+              <a:t>population</a:t>
+            </a:r>
+            <a:r>
+              <a:rPr lang="et-EE" sz="2400" noProof="0" dirty="0">
+                <a:ea typeface="Inter"/>
+                <a:cs typeface="Noto Serif"/>
+              </a:rPr>
+              <a:t> on </a:t>
+            </a:r>
+            <a:r>
+              <a:rPr lang="et-EE" sz="2400" noProof="0" dirty="0" err="1">
+                <a:ea typeface="Inter"/>
+                <a:cs typeface="Noto Serif"/>
+              </a:rPr>
+              <a:t>graph</a:t>
+            </a:r>
+            <a:r>
+              <a:rPr lang="et-EE" sz="2400" noProof="0" dirty="0">
+                <a:ea typeface="Inter"/>
+                <a:cs typeface="Noto Serif"/>
+              </a:rPr>
+              <a:t>."</a:t>
+            </a:r>
+            <a:endParaRPr lang="et-EE" sz="2400" noProof="0" dirty="0">
               <a:cs typeface="Noto Serif"/>
             </a:endParaRPr>
           </a:p>
@@ -29039,7 +28778,22 @@
               <a:buFont typeface="Arial,Sans-Serif" panose="020B0502030000000004" pitchFamily="34" charset="0"/>
               <a:buChar char="•"/>
             </a:pPr>
-            <a:endParaRPr lang="en-US" sz="2400">
+            <a:endParaRPr lang="et-EE" sz="2400" noProof="0" dirty="0">
+              <a:cs typeface="Noto Serif"/>
+            </a:endParaRPr>
+          </a:p>
+          <a:p>
+            <a:pPr marL="342900" indent="-342900">
+              <a:lnSpc>
+                <a:spcPct val="150000"/>
+              </a:lnSpc>
+              <a:buClr>
+                <a:srgbClr val="121212"/>
+              </a:buClr>
+              <a:buFont typeface="Arial,Sans-Serif" panose="020B0502030000000004" pitchFamily="34" charset="0"/>
+              <a:buChar char="•"/>
+            </a:pPr>
+            <a:endParaRPr lang="et-EE" sz="2400" noProof="0" dirty="0">
               <a:cs typeface="Arial"/>
             </a:endParaRPr>
           </a:p>
@@ -29051,7 +28805,7 @@
               <a:buFont typeface="Arial,Sans-Serif" panose="020B0502030000000004" pitchFamily="34" charset="0"/>
               <a:buChar char="o"/>
             </a:pPr>
-            <a:endParaRPr lang="en-US" sz="2400">
+            <a:endParaRPr lang="et-EE" sz="2400" noProof="0" dirty="0">
               <a:cs typeface="Arial"/>
             </a:endParaRPr>
           </a:p>
@@ -29063,7 +28817,7 @@
               <a:buFont typeface="Arial,Sans-Serif" panose="020B0502030000000004" pitchFamily="34" charset="0"/>
               <a:buChar char="•"/>
             </a:pPr>
-            <a:endParaRPr lang="en-US" sz="2400">
+            <a:endParaRPr lang="et-EE" sz="2400" noProof="0" dirty="0">
               <a:cs typeface="Arial"/>
             </a:endParaRPr>
           </a:p>
@@ -29073,7 +28827,7 @@
                 <a:spcPct val="150000"/>
               </a:lnSpc>
             </a:pPr>
-            <a:endParaRPr lang="en-US" sz="2800">
+            <a:endParaRPr lang="et-EE" sz="2800" noProof="0" dirty="0">
               <a:cs typeface="Arial"/>
             </a:endParaRPr>
           </a:p>
@@ -29084,7 +28838,7 @@
               </a:lnSpc>
               <a:buNone/>
             </a:pPr>
-            <a:endParaRPr lang="en-US" sz="2800"/>
+            <a:endParaRPr lang="et-EE" sz="2800" noProof="0" dirty="0"/>
           </a:p>
         </p:txBody>
       </p:sp>
@@ -29101,7 +28855,7 @@
 </p:sld>
 </file>
 
-<file path=ppt/slides/slide6.xml><?xml version="1.0" encoding="utf-8"?>
+<file path=ppt/slides/slide8.xml><?xml version="1.0" encoding="utf-8"?>
 <p:sld xmlns:a="http://schemas.openxmlformats.org/drawingml/2006/main" xmlns:r="http://schemas.openxmlformats.org/officeDocument/2006/relationships" xmlns:p="http://schemas.openxmlformats.org/presentationml/2006/main">
   <p:cSld>
     <p:spTree>
@@ -29151,28 +28905,8 @@
           <a:lstStyle/>
           <a:p>
             <a:r>
-              <a:rPr lang="en-US" b="1" err="1"/>
-              <a:t>Tehisaru</a:t>
-            </a:r>
-            <a:r>
-              <a:rPr lang="en-US" b="1"/>
-              <a:t> – </a:t>
-            </a:r>
-            <a:r>
-              <a:rPr lang="en-US" b="1" err="1"/>
-              <a:t>levinumad</a:t>
-            </a:r>
-            <a:r>
-              <a:rPr lang="en-US" b="1"/>
-              <a:t> </a:t>
-            </a:r>
-            <a:r>
-              <a:rPr lang="en-US" b="1" err="1"/>
-              <a:t>kasutusvõimalused</a:t>
-            </a:r>
-            <a:r>
-              <a:rPr lang="en-US" b="1"/>
-              <a:t> </a:t>
+              <a:rPr lang="et-EE" b="1" noProof="0" dirty="0"/>
+              <a:t>Tehisaru – levinumad kasutusvõimalused </a:t>
             </a:r>
           </a:p>
         </p:txBody>
@@ -29206,90 +28940,13 @@
               <a:buChar char="•"/>
             </a:pPr>
             <a:r>
-              <a:rPr lang="en-US" sz="2000">
+              <a:rPr lang="et-EE" sz="2000" noProof="0" dirty="0">
                 <a:ea typeface="Inter"/>
                 <a:cs typeface="Noto Serif"/>
               </a:rPr>
-              <a:t>Koodi ja </a:t>
+              <a:t>Koodi ja valemite loomine ning paluda selgitused juurde</a:t>
             </a:r>
-            <a:r>
-              <a:rPr lang="en-US" sz="2000" err="1">
-                <a:ea typeface="Inter"/>
-                <a:cs typeface="Noto Serif"/>
-              </a:rPr>
-              <a:t>valemite</a:t>
-            </a:r>
-            <a:r>
-              <a:rPr lang="en-US" sz="2000">
-                <a:ea typeface="Inter"/>
-                <a:cs typeface="Noto Serif"/>
-              </a:rPr>
-              <a:t> </a:t>
-            </a:r>
-            <a:r>
-              <a:rPr lang="en-US" sz="2000" err="1">
-                <a:ea typeface="Inter"/>
-                <a:cs typeface="Noto Serif"/>
-              </a:rPr>
-              <a:t>loomine</a:t>
-            </a:r>
-            <a:r>
-              <a:rPr lang="en-US" sz="2000">
-                <a:ea typeface="Inter"/>
-                <a:cs typeface="Noto Serif"/>
-              </a:rPr>
-              <a:t> </a:t>
-            </a:r>
-            <a:r>
-              <a:rPr lang="en-US" sz="2000" err="1">
-                <a:ea typeface="Inter"/>
-                <a:cs typeface="Noto Serif"/>
-              </a:rPr>
-              <a:t>ning</a:t>
-            </a:r>
-            <a:r>
-              <a:rPr lang="en-US" sz="2000">
-                <a:ea typeface="Inter"/>
-                <a:cs typeface="Noto Serif"/>
-              </a:rPr>
-              <a:t> </a:t>
-            </a:r>
-            <a:r>
-              <a:rPr lang="en-US" sz="2000" err="1">
-                <a:ea typeface="Inter"/>
-                <a:cs typeface="Noto Serif"/>
-              </a:rPr>
-              <a:t>paluda</a:t>
-            </a:r>
-            <a:r>
-              <a:rPr lang="en-US" sz="2000">
-                <a:ea typeface="Inter"/>
-                <a:cs typeface="Noto Serif"/>
-              </a:rPr>
-              <a:t> </a:t>
-            </a:r>
-            <a:r>
-              <a:rPr lang="en-US" sz="2000" err="1">
-                <a:ea typeface="Inter"/>
-                <a:cs typeface="Noto Serif"/>
-              </a:rPr>
-              <a:t>selgitused</a:t>
-            </a:r>
-            <a:r>
-              <a:rPr lang="en-US" sz="2000">
-                <a:ea typeface="Inter"/>
-                <a:cs typeface="Noto Serif"/>
-              </a:rPr>
-              <a:t> </a:t>
-            </a:r>
-            <a:r>
-              <a:rPr lang="en-US" sz="2000" err="1">
-                <a:ea typeface="Inter"/>
-                <a:cs typeface="Noto Serif"/>
-              </a:rPr>
-              <a:t>juurde</a:t>
-            </a:r>
-            <a:endParaRPr lang="en-US" sz="2000">
+            <a:endParaRPr lang="et-EE" sz="2000" noProof="0" dirty="0">
               <a:cs typeface="Noto Serif"/>
             </a:endParaRPr>
           </a:p>
@@ -29302,27 +28959,13 @@
               <a:buChar char="•"/>
             </a:pPr>
             <a:r>
-              <a:rPr lang="en-US" sz="2000" err="1">
+              <a:rPr lang="et-EE" sz="2000" noProof="0" dirty="0">
                 <a:ea typeface="Inter"/>
                 <a:cs typeface="Noto Serif"/>
               </a:rPr>
-              <a:t>Veateadete</a:t>
+              <a:t>Veateadete lahendamine</a:t>
             </a:r>
-            <a:r>
-              <a:rPr lang="en-US" sz="2000">
-                <a:ea typeface="Inter"/>
-                <a:cs typeface="Noto Serif"/>
-              </a:rPr>
-              <a:t> </a:t>
-            </a:r>
-            <a:r>
-              <a:rPr lang="en-US" sz="2000" err="1">
-                <a:ea typeface="Inter"/>
-                <a:cs typeface="Noto Serif"/>
-              </a:rPr>
-              <a:t>lahendamine</a:t>
-            </a:r>
-            <a:endParaRPr lang="en-US" sz="2000">
+            <a:endParaRPr lang="et-EE" sz="2000" noProof="0" dirty="0">
               <a:cs typeface="Noto Serif"/>
             </a:endParaRPr>
           </a:p>
@@ -29335,27 +28978,13 @@
               <a:buChar char="•"/>
             </a:pPr>
             <a:r>
-              <a:rPr lang="en-US" sz="2000" err="1">
+              <a:rPr lang="et-EE" sz="2000" noProof="0" dirty="0">
                 <a:ea typeface="Inter"/>
                 <a:cs typeface="Noto Serif"/>
               </a:rPr>
-              <a:t>Andmemudeli</a:t>
+              <a:t>Andmemudeli loomine</a:t>
             </a:r>
-            <a:r>
-              <a:rPr lang="en-US" sz="2000">
-                <a:ea typeface="Inter"/>
-                <a:cs typeface="Noto Serif"/>
-              </a:rPr>
-              <a:t> </a:t>
-            </a:r>
-            <a:r>
-              <a:rPr lang="en-US" sz="2000" err="1">
-                <a:ea typeface="Inter"/>
-                <a:cs typeface="Noto Serif"/>
-              </a:rPr>
-              <a:t>loomine</a:t>
-            </a:r>
-            <a:endParaRPr lang="en-US" sz="2000">
+            <a:endParaRPr lang="et-EE" sz="2000" noProof="0" dirty="0">
               <a:cs typeface="Noto Serif"/>
             </a:endParaRPr>
           </a:p>
@@ -29371,28 +29000,70 @@
               <a:buChar char="•"/>
             </a:pPr>
             <a:r>
-              <a:rPr lang="en-US" sz="2000" err="1">
+              <a:rPr lang="et-EE" sz="2000" noProof="0" dirty="0">
                 <a:ea typeface="Inter"/>
                 <a:cs typeface="Noto Serif"/>
               </a:rPr>
-              <a:t>Näidisandmestike</a:t>
+              <a:t>Näidisandmestike loomine</a:t>
             </a:r>
+          </a:p>
+          <a:p>
+            <a:pPr marL="342900" indent="-342900">
+              <a:lnSpc>
+                <a:spcPct val="150000"/>
+              </a:lnSpc>
+              <a:buClr>
+                <a:srgbClr val="121212"/>
+              </a:buClr>
+              <a:buFont typeface="Arial,Sans-Serif" panose="020B0502030000000004" pitchFamily="34" charset="0"/>
+              <a:buChar char="•"/>
+            </a:pPr>
             <a:r>
-              <a:rPr lang="en-US" sz="2000">
+              <a:rPr lang="et-EE" sz="2000" noProof="0" dirty="0">
                 <a:ea typeface="Inter"/>
                 <a:cs typeface="Noto Serif"/>
               </a:rPr>
-              <a:t> </a:t>
+              <a:t>Graafikute loomine</a:t>
             </a:r>
+          </a:p>
+          <a:p>
+            <a:pPr marL="342900" indent="-342900">
+              <a:lnSpc>
+                <a:spcPct val="150000"/>
+              </a:lnSpc>
+              <a:buClr>
+                <a:srgbClr val="121212"/>
+              </a:buClr>
+              <a:buFont typeface="Arial,Sans-Serif" panose="020B0502030000000004" pitchFamily="34" charset="0"/>
+              <a:buChar char="•"/>
+            </a:pPr>
             <a:r>
-              <a:rPr lang="en-US" sz="2000" err="1">
+              <a:rPr lang="et-EE" sz="2000" noProof="0" dirty="0">
                 <a:ea typeface="Inter"/>
                 <a:cs typeface="Noto Serif"/>
               </a:rPr>
-              <a:t>loomine</a:t>
+              <a:t>Statistiliste analüüside tegemine</a:t>
             </a:r>
-            <a:endParaRPr lang="en-US" sz="2000">
-              <a:ea typeface="Inter"/>
+          </a:p>
+          <a:p>
+            <a:pPr marL="342900" indent="-342900">
+              <a:lnSpc>
+                <a:spcPct val="150000"/>
+              </a:lnSpc>
+              <a:buClr>
+                <a:srgbClr val="121212"/>
+              </a:buClr>
+              <a:buFont typeface="Arial,Sans-Serif" panose="020B0502030000000004" pitchFamily="34" charset="0"/>
+              <a:buChar char="•"/>
+            </a:pPr>
+            <a:r>
+              <a:rPr lang="et-EE" sz="2000" noProof="0" dirty="0">
+                <a:ea typeface="Inter"/>
+                <a:cs typeface="Noto Serif"/>
+              </a:rPr>
+              <a:t>Kokkuvõtete tegemine, tulemuste tõlgendamine</a:t>
+            </a:r>
+            <a:endParaRPr lang="et-EE" sz="2000" noProof="0" dirty="0">
               <a:cs typeface="Noto Serif"/>
             </a:endParaRPr>
           </a:p>
@@ -29407,159 +29078,7 @@
               <a:buFont typeface="Arial,Sans-Serif" panose="020B0502030000000004" pitchFamily="34" charset="0"/>
               <a:buChar char="•"/>
             </a:pPr>
-            <a:r>
-              <a:rPr lang="en-US" sz="2000" err="1">
-                <a:ea typeface="Inter"/>
-                <a:cs typeface="Noto Serif"/>
-              </a:rPr>
-              <a:t>Graafikute</a:t>
-            </a:r>
-            <a:r>
-              <a:rPr lang="en-US" sz="2000">
-                <a:ea typeface="Inter"/>
-                <a:cs typeface="Noto Serif"/>
-              </a:rPr>
-              <a:t> </a:t>
-            </a:r>
-            <a:r>
-              <a:rPr lang="en-US" sz="2000" err="1">
-                <a:ea typeface="Inter"/>
-                <a:cs typeface="Noto Serif"/>
-              </a:rPr>
-              <a:t>loomine</a:t>
-            </a:r>
-            <a:endParaRPr lang="en-US" sz="2000">
-              <a:ea typeface="Inter"/>
-              <a:cs typeface="Noto Serif"/>
-            </a:endParaRPr>
-          </a:p>
-          <a:p>
-            <a:pPr marL="342900" indent="-342900">
-              <a:lnSpc>
-                <a:spcPct val="150000"/>
-              </a:lnSpc>
-              <a:buClr>
-                <a:srgbClr val="121212"/>
-              </a:buClr>
-              <a:buFont typeface="Arial,Sans-Serif" panose="020B0502030000000004" pitchFamily="34" charset="0"/>
-              <a:buChar char="•"/>
-            </a:pPr>
-            <a:r>
-              <a:rPr lang="en-US" sz="2000" err="1">
-                <a:ea typeface="Inter"/>
-                <a:cs typeface="Noto Serif"/>
-              </a:rPr>
-              <a:t>Statistiliste</a:t>
-            </a:r>
-            <a:r>
-              <a:rPr lang="en-US" sz="2000">
-                <a:ea typeface="Inter"/>
-                <a:cs typeface="Noto Serif"/>
-              </a:rPr>
-              <a:t> </a:t>
-            </a:r>
-            <a:r>
-              <a:rPr lang="en-US" sz="2000" err="1">
-                <a:ea typeface="Inter"/>
-                <a:cs typeface="Noto Serif"/>
-              </a:rPr>
-              <a:t>analüüside</a:t>
-            </a:r>
-            <a:r>
-              <a:rPr lang="en-US" sz="2000">
-                <a:ea typeface="Inter"/>
-                <a:cs typeface="Noto Serif"/>
-              </a:rPr>
-              <a:t> </a:t>
-            </a:r>
-            <a:r>
-              <a:rPr lang="en-US" sz="2000" err="1">
-                <a:ea typeface="Inter"/>
-                <a:cs typeface="Noto Serif"/>
-              </a:rPr>
-              <a:t>tegemine</a:t>
-            </a:r>
-            <a:endParaRPr lang="en-US" sz="2000">
-              <a:ea typeface="Inter"/>
-              <a:cs typeface="Noto Serif"/>
-            </a:endParaRPr>
-          </a:p>
-          <a:p>
-            <a:pPr marL="342900" indent="-342900">
-              <a:lnSpc>
-                <a:spcPct val="150000"/>
-              </a:lnSpc>
-              <a:buClr>
-                <a:srgbClr val="121212"/>
-              </a:buClr>
-              <a:buFont typeface="Arial,Sans-Serif" panose="020B0502030000000004" pitchFamily="34" charset="0"/>
-              <a:buChar char="•"/>
-            </a:pPr>
-            <a:r>
-              <a:rPr lang="en-US" sz="2000" err="1">
-                <a:ea typeface="Inter"/>
-                <a:cs typeface="Noto Serif"/>
-              </a:rPr>
-              <a:t>Kokkuvõtete</a:t>
-            </a:r>
-            <a:r>
-              <a:rPr lang="en-US" sz="2000">
-                <a:ea typeface="Inter"/>
-                <a:cs typeface="Noto Serif"/>
-              </a:rPr>
-              <a:t> </a:t>
-            </a:r>
-            <a:r>
-              <a:rPr lang="en-US" sz="2000" err="1">
-                <a:ea typeface="Inter"/>
-                <a:cs typeface="Noto Serif"/>
-              </a:rPr>
-              <a:t>tegemine</a:t>
-            </a:r>
-            <a:r>
-              <a:rPr lang="en-US" sz="2000">
-                <a:ea typeface="Inter"/>
-                <a:cs typeface="Noto Serif"/>
-              </a:rPr>
-              <a:t>, </a:t>
-            </a:r>
-            <a:r>
-              <a:rPr lang="en-US" sz="2000" err="1">
-                <a:ea typeface="Inter"/>
-                <a:cs typeface="Noto Serif"/>
-              </a:rPr>
-              <a:t>tulemuste</a:t>
-            </a:r>
-            <a:r>
-              <a:rPr lang="en-US" sz="2000">
-                <a:ea typeface="Inter"/>
-                <a:cs typeface="Noto Serif"/>
-              </a:rPr>
-              <a:t> </a:t>
-            </a:r>
-            <a:r>
-              <a:rPr lang="en-US" sz="2000" err="1">
-                <a:ea typeface="Inter"/>
-                <a:cs typeface="Noto Serif"/>
-              </a:rPr>
-              <a:t>tõlgendamine</a:t>
-            </a:r>
-            <a:endParaRPr lang="en-US" sz="2000" err="1">
-              <a:cs typeface="Noto Serif"/>
-            </a:endParaRPr>
-          </a:p>
-          <a:p>
-            <a:pPr marL="342900" indent="-342900">
-              <a:lnSpc>
-                <a:spcPct val="150000"/>
-              </a:lnSpc>
-              <a:buClr>
-                <a:srgbClr val="121212"/>
-              </a:buClr>
-              <a:buFont typeface="Arial,Sans-Serif" panose="020B0502030000000004" pitchFamily="34" charset="0"/>
-              <a:buChar char="•"/>
-            </a:pPr>
-            <a:endParaRPr lang="en-US" sz="2400">
+            <a:endParaRPr lang="et-EE" sz="2400" noProof="0" dirty="0">
               <a:cs typeface="Noto Serif"/>
             </a:endParaRPr>
           </a:p>
@@ -29575,209 +29094,13 @@
               <a:buChar char="•"/>
             </a:pPr>
             <a:r>
-              <a:rPr lang="en-US" sz="2400">
+              <a:rPr lang="et-EE" sz="2400" noProof="0" dirty="0">
                 <a:ea typeface="Inter"/>
                 <a:cs typeface="Noto Serif"/>
               </a:rPr>
-              <a:t>NB! </a:t>
+              <a:t>NB! Kasutamisel tuleb silmas pidada andmekaitset ja ärisaladuse hoidmist. Tavaliselt vestlusrobotid kasutavad saadud andmeid edasiseks treenimiseks.</a:t>
             </a:r>
-            <a:r>
-              <a:rPr lang="en-US" sz="2400" err="1">
-                <a:ea typeface="Inter"/>
-                <a:cs typeface="Noto Serif"/>
-              </a:rPr>
-              <a:t>Kasutamisel</a:t>
-            </a:r>
-            <a:r>
-              <a:rPr lang="en-US" sz="2400">
-                <a:ea typeface="Inter"/>
-                <a:cs typeface="Noto Serif"/>
-              </a:rPr>
-              <a:t> </a:t>
-            </a:r>
-            <a:r>
-              <a:rPr lang="en-US" sz="2400" err="1">
-                <a:ea typeface="Inter"/>
-                <a:cs typeface="Noto Serif"/>
-              </a:rPr>
-              <a:t>tuleb</a:t>
-            </a:r>
-            <a:r>
-              <a:rPr lang="en-US" sz="2400">
-                <a:ea typeface="Inter"/>
-                <a:cs typeface="Noto Serif"/>
-              </a:rPr>
-              <a:t> </a:t>
-            </a:r>
-            <a:r>
-              <a:rPr lang="en-US" sz="2400" err="1">
-                <a:ea typeface="Inter"/>
-                <a:cs typeface="Noto Serif"/>
-              </a:rPr>
-              <a:t>silmas</a:t>
-            </a:r>
-            <a:r>
-              <a:rPr lang="en-US" sz="2400">
-                <a:ea typeface="Inter"/>
-                <a:cs typeface="Noto Serif"/>
-              </a:rPr>
-              <a:t> </a:t>
-            </a:r>
-            <a:r>
-              <a:rPr lang="en-US" sz="2400" err="1">
-                <a:ea typeface="Inter"/>
-                <a:cs typeface="Noto Serif"/>
-              </a:rPr>
-              <a:t>pidada</a:t>
-            </a:r>
-            <a:r>
-              <a:rPr lang="en-US" sz="2400">
-                <a:ea typeface="Inter"/>
-                <a:cs typeface="Noto Serif"/>
-              </a:rPr>
-              <a:t> </a:t>
-            </a:r>
-            <a:r>
-              <a:rPr lang="en-US" sz="2400" err="1">
-                <a:ea typeface="Inter"/>
-                <a:cs typeface="Noto Serif"/>
-              </a:rPr>
-              <a:t>andmekaitset</a:t>
-            </a:r>
-            <a:r>
-              <a:rPr lang="en-US" sz="2400">
-                <a:ea typeface="Inter"/>
-                <a:cs typeface="Noto Serif"/>
-              </a:rPr>
-              <a:t> ja </a:t>
-            </a:r>
-            <a:r>
-              <a:rPr lang="en-US" sz="2400" err="1">
-                <a:ea typeface="Inter"/>
-                <a:cs typeface="Noto Serif"/>
-              </a:rPr>
-              <a:t>ärisaladuse</a:t>
-            </a:r>
-            <a:r>
-              <a:rPr lang="en-US" sz="2400">
-                <a:ea typeface="Inter"/>
-                <a:cs typeface="Noto Serif"/>
-              </a:rPr>
-              <a:t> </a:t>
-            </a:r>
-            <a:r>
-              <a:rPr lang="en-US" sz="2400" err="1">
-                <a:ea typeface="Inter"/>
-                <a:cs typeface="Noto Serif"/>
-              </a:rPr>
-              <a:t>hoidmist</a:t>
-            </a:r>
-            <a:r>
-              <a:rPr lang="en-US" sz="2400">
-                <a:ea typeface="Inter"/>
-                <a:cs typeface="Noto Serif"/>
-              </a:rPr>
-              <a:t>. </a:t>
-            </a:r>
-            <a:r>
-              <a:rPr lang="en-US" sz="2400" err="1">
-                <a:ea typeface="Inter"/>
-                <a:cs typeface="Noto Serif"/>
-              </a:rPr>
-              <a:t>Tavaliselt</a:t>
-            </a:r>
-            <a:r>
-              <a:rPr lang="en-US" sz="2400">
-                <a:ea typeface="Inter"/>
-                <a:cs typeface="Noto Serif"/>
-              </a:rPr>
-              <a:t> </a:t>
-            </a:r>
-            <a:r>
-              <a:rPr lang="en-US" sz="2400" err="1">
-                <a:ea typeface="Inter"/>
-                <a:cs typeface="Noto Serif"/>
-              </a:rPr>
-              <a:t>vestlusrobotid</a:t>
-            </a:r>
-            <a:r>
-              <a:rPr lang="en-US" sz="2400">
-                <a:ea typeface="Inter"/>
-                <a:cs typeface="Noto Serif"/>
-              </a:rPr>
-              <a:t> </a:t>
-            </a:r>
-            <a:r>
-              <a:rPr lang="en-US" sz="2400" err="1">
-                <a:ea typeface="Inter"/>
-                <a:cs typeface="Noto Serif"/>
-              </a:rPr>
-              <a:t>kasutavad</a:t>
-            </a:r>
-            <a:r>
-              <a:rPr lang="en-US" sz="2400">
-                <a:ea typeface="Inter"/>
-                <a:cs typeface="Noto Serif"/>
-              </a:rPr>
-              <a:t> </a:t>
-            </a:r>
-            <a:r>
-              <a:rPr lang="en-US" sz="2400" err="1">
-                <a:ea typeface="Inter"/>
-                <a:cs typeface="Noto Serif"/>
-              </a:rPr>
-              <a:t>saadud</a:t>
-            </a:r>
-            <a:r>
-              <a:rPr lang="en-US" sz="2400">
-                <a:ea typeface="Inter"/>
-                <a:cs typeface="Noto Serif"/>
-              </a:rPr>
-              <a:t> </a:t>
-            </a:r>
-            <a:r>
-              <a:rPr lang="en-US" sz="2400" err="1">
-                <a:ea typeface="Inter"/>
-                <a:cs typeface="Noto Serif"/>
-              </a:rPr>
-              <a:t>andmeid</a:t>
-            </a:r>
-            <a:r>
-              <a:rPr lang="en-US" sz="2400">
-                <a:ea typeface="Inter"/>
-                <a:cs typeface="Noto Serif"/>
-              </a:rPr>
-              <a:t> </a:t>
-            </a:r>
-            <a:r>
-              <a:rPr lang="en-US" sz="2400" err="1">
-                <a:ea typeface="Inter"/>
-                <a:cs typeface="Noto Serif"/>
-              </a:rPr>
-              <a:t>edasiseks</a:t>
-            </a:r>
-            <a:r>
-              <a:rPr lang="en-US" sz="2400">
-                <a:ea typeface="Inter"/>
-                <a:cs typeface="Noto Serif"/>
-              </a:rPr>
-              <a:t> </a:t>
-            </a:r>
-            <a:r>
-              <a:rPr lang="en-US" sz="2400" err="1">
-                <a:ea typeface="Inter"/>
-                <a:cs typeface="Noto Serif"/>
-              </a:rPr>
-              <a:t>treenimiseks</a:t>
-            </a:r>
-            <a:r>
-              <a:rPr lang="en-US" sz="2400">
-                <a:ea typeface="Inter"/>
-                <a:cs typeface="Noto Serif"/>
-              </a:rPr>
-              <a:t>.</a:t>
-            </a:r>
-            <a:endParaRPr lang="en-US" sz="2400">
+            <a:endParaRPr lang="et-EE" sz="2400" noProof="0" dirty="0">
               <a:cs typeface="Noto Serif"/>
             </a:endParaRPr>
           </a:p>
@@ -29792,7 +29115,7 @@
               <a:buFont typeface="Arial,Sans-Serif" panose="020B0502030000000004" pitchFamily="34" charset="0"/>
               <a:buChar char="•"/>
             </a:pPr>
-            <a:endParaRPr lang="en-US" sz="2400">
+            <a:endParaRPr lang="et-EE" sz="2400" noProof="0" dirty="0">
               <a:cs typeface="Noto Serif"/>
             </a:endParaRPr>
           </a:p>
@@ -29807,7 +29130,7 @@
               <a:buFont typeface="Arial,Sans-Serif" panose="020B0502030000000004" pitchFamily="34" charset="0"/>
               <a:buChar char="•"/>
             </a:pPr>
-            <a:endParaRPr lang="en-US" sz="2400">
+            <a:endParaRPr lang="et-EE" sz="2400" noProof="0" dirty="0">
               <a:cs typeface="Arial"/>
             </a:endParaRPr>
           </a:p>
@@ -29819,7 +29142,7 @@
               <a:buFont typeface="Arial,Sans-Serif" panose="020B0502030000000004" pitchFamily="34" charset="0"/>
               <a:buChar char="o"/>
             </a:pPr>
-            <a:endParaRPr lang="en-US" sz="2400">
+            <a:endParaRPr lang="et-EE" sz="2400" noProof="0" dirty="0">
               <a:cs typeface="Arial"/>
             </a:endParaRPr>
           </a:p>
@@ -29831,7 +29154,7 @@
               <a:buFont typeface="Arial,Sans-Serif" panose="020B0502030000000004" pitchFamily="34" charset="0"/>
               <a:buChar char="•"/>
             </a:pPr>
-            <a:endParaRPr lang="en-US" sz="2400">
+            <a:endParaRPr lang="et-EE" sz="2400" noProof="0" dirty="0">
               <a:cs typeface="Arial"/>
             </a:endParaRPr>
           </a:p>
@@ -29841,7 +29164,7 @@
                 <a:spcPct val="150000"/>
               </a:lnSpc>
             </a:pPr>
-            <a:endParaRPr lang="en-US" sz="2800">
+            <a:endParaRPr lang="et-EE" sz="2800" noProof="0" dirty="0">
               <a:cs typeface="Arial"/>
             </a:endParaRPr>
           </a:p>
@@ -29852,7 +29175,7 @@
               </a:lnSpc>
               <a:buNone/>
             </a:pPr>
-            <a:endParaRPr lang="en-US" sz="2800"/>
+            <a:endParaRPr lang="et-EE" sz="2800" noProof="0" dirty="0"/>
           </a:p>
         </p:txBody>
       </p:sp>
@@ -30294,7 +29617,7 @@
 </p:sld>
 </file>
 
-<file path=ppt/slides/slide7.xml><?xml version="1.0" encoding="utf-8"?>
+<file path=ppt/slides/slide9.xml><?xml version="1.0" encoding="utf-8"?>
 <p:sld xmlns:a="http://schemas.openxmlformats.org/drawingml/2006/main" xmlns:r="http://schemas.openxmlformats.org/officeDocument/2006/relationships" xmlns:p="http://schemas.openxmlformats.org/presentationml/2006/main">
   <p:cSld>
     <p:spTree>
@@ -30344,36 +29667,8 @@
           <a:lstStyle/>
           <a:p>
             <a:r>
-              <a:rPr lang="en-US" b="1" err="1"/>
-              <a:t>Tehisaru</a:t>
-            </a:r>
-            <a:r>
-              <a:rPr lang="en-US" b="1"/>
-              <a:t> – </a:t>
-            </a:r>
-            <a:r>
-              <a:rPr lang="en-US" b="1" err="1"/>
-              <a:t>eduka</a:t>
-            </a:r>
-            <a:r>
-              <a:rPr lang="en-US" b="1"/>
-              <a:t> </a:t>
-            </a:r>
-            <a:r>
-              <a:rPr lang="en-US" b="1" err="1"/>
-              <a:t>päringu</a:t>
-            </a:r>
-            <a:r>
-              <a:rPr lang="en-US" b="1"/>
-              <a:t> </a:t>
-            </a:r>
-            <a:r>
-              <a:rPr lang="en-US" b="1" err="1"/>
-              <a:t>kirjutamine</a:t>
-            </a:r>
-            <a:r>
-              <a:rPr lang="en-US" b="1"/>
-              <a:t> </a:t>
+              <a:rPr lang="et-EE" b="1" noProof="0" dirty="0"/>
+              <a:t>Tehisaru – eduka sisendi kirjutamine </a:t>
             </a:r>
           </a:p>
         </p:txBody>
@@ -30407,55 +29702,20 @@
               <a:buChar char="•"/>
             </a:pPr>
             <a:r>
-              <a:rPr lang="en-US" sz="2400" err="1">
+              <a:rPr lang="et-EE" sz="2400" noProof="0" dirty="0">
                 <a:ea typeface="Inter"/>
                 <a:cs typeface="Noto Serif"/>
               </a:rPr>
-              <a:t>Päring</a:t>
+              <a:t>Sisend = keelemudelile antud </a:t>
             </a:r>
             <a:r>
-              <a:rPr lang="en-US" sz="2400">
+              <a:rPr lang="et-EE" sz="2400" noProof="0" dirty="0" err="1">
                 <a:ea typeface="Inter"/>
                 <a:cs typeface="Noto Serif"/>
               </a:rPr>
-              <a:t> = </a:t>
+              <a:t>viip</a:t>
             </a:r>
-            <a:r>
-              <a:rPr lang="en-US" sz="2400" err="1">
-                <a:ea typeface="Inter"/>
-                <a:cs typeface="Noto Serif"/>
-              </a:rPr>
-              <a:t>keelemudelile</a:t>
-            </a:r>
-            <a:r>
-              <a:rPr lang="en-US" sz="2400">
-                <a:ea typeface="Inter"/>
-                <a:cs typeface="Noto Serif"/>
-              </a:rPr>
-              <a:t> </a:t>
-            </a:r>
-            <a:r>
-              <a:rPr lang="en-US" sz="2400" err="1">
-                <a:ea typeface="Inter"/>
-                <a:cs typeface="Noto Serif"/>
-              </a:rPr>
-              <a:t>programmi</a:t>
-            </a:r>
-            <a:r>
-              <a:rPr lang="en-US" sz="2400">
-                <a:ea typeface="Inter"/>
-                <a:cs typeface="Noto Serif"/>
-              </a:rPr>
-              <a:t> </a:t>
-            </a:r>
-            <a:r>
-              <a:rPr lang="en-US" sz="2400" err="1">
-                <a:ea typeface="Inter"/>
-                <a:cs typeface="Noto Serif"/>
-              </a:rPr>
-              <a:t>kirjutamine</a:t>
-            </a:r>
-            <a:endParaRPr lang="en-US" sz="2400">
+            <a:endParaRPr lang="et-EE" sz="2400" noProof="0" dirty="0">
               <a:ea typeface="Inter"/>
               <a:cs typeface="Noto Serif"/>
             </a:endParaRPr>
@@ -30469,121 +29729,12 @@
               <a:buChar char="•"/>
             </a:pPr>
             <a:r>
-              <a:rPr lang="en-US" sz="2400">
+              <a:rPr lang="et-EE" sz="2400" noProof="0" dirty="0">
                 <a:ea typeface="Inter"/>
                 <a:cs typeface="Noto Serif"/>
               </a:rPr>
-              <a:t>Anna </a:t>
+              <a:t>Anna võimalikult palju konteksti ning millises formaadis vastust soovid</a:t>
             </a:r>
-            <a:r>
-              <a:rPr lang="en-US" sz="2400" err="1">
-                <a:ea typeface="Inter"/>
-                <a:cs typeface="Noto Serif"/>
-              </a:rPr>
-              <a:t>võimalikult</a:t>
-            </a:r>
-            <a:r>
-              <a:rPr lang="en-US" sz="2400">
-                <a:ea typeface="Inter"/>
-                <a:cs typeface="Noto Serif"/>
-              </a:rPr>
-              <a:t> </a:t>
-            </a:r>
-            <a:r>
-              <a:rPr lang="en-US" sz="2400" err="1">
-                <a:ea typeface="Inter"/>
-                <a:cs typeface="Noto Serif"/>
-              </a:rPr>
-              <a:t>palju</a:t>
-            </a:r>
-            <a:r>
-              <a:rPr lang="en-US" sz="2400">
-                <a:ea typeface="Inter"/>
-                <a:cs typeface="Noto Serif"/>
-              </a:rPr>
-              <a:t> </a:t>
-            </a:r>
-            <a:r>
-              <a:rPr lang="en-US" sz="2400" err="1">
-                <a:ea typeface="Inter"/>
-                <a:cs typeface="Noto Serif"/>
-              </a:rPr>
-              <a:t>konteksti</a:t>
-            </a:r>
-            <a:r>
-              <a:rPr lang="en-US" sz="2400">
-                <a:ea typeface="Inter"/>
-                <a:cs typeface="Noto Serif"/>
-              </a:rPr>
-              <a:t> </a:t>
-            </a:r>
-            <a:r>
-              <a:rPr lang="en-US" sz="2400" err="1">
-                <a:ea typeface="Inter"/>
-                <a:cs typeface="Noto Serif"/>
-              </a:rPr>
-              <a:t>ning</a:t>
-            </a:r>
-            <a:r>
-              <a:rPr lang="en-US" sz="2400">
-                <a:ea typeface="Inter"/>
-                <a:cs typeface="Noto Serif"/>
-              </a:rPr>
-              <a:t> </a:t>
-            </a:r>
-            <a:r>
-              <a:rPr lang="en-US" sz="2400" err="1">
-                <a:ea typeface="Inter"/>
-                <a:cs typeface="Noto Serif"/>
-              </a:rPr>
-              <a:t>millises</a:t>
-            </a:r>
-            <a:r>
-              <a:rPr lang="en-US" sz="2400">
-                <a:ea typeface="Inter"/>
-                <a:cs typeface="Noto Serif"/>
-              </a:rPr>
-              <a:t> </a:t>
-            </a:r>
-            <a:r>
-              <a:rPr lang="en-US" sz="2400" err="1">
-                <a:ea typeface="Inter"/>
-                <a:cs typeface="Noto Serif"/>
-              </a:rPr>
-              <a:t>formaadis</a:t>
-            </a:r>
-            <a:r>
-              <a:rPr lang="en-US" sz="2400">
-                <a:ea typeface="Inter"/>
-                <a:cs typeface="Noto Serif"/>
-              </a:rPr>
-              <a:t> </a:t>
-            </a:r>
-            <a:r>
-              <a:rPr lang="en-US" sz="2400" err="1">
-                <a:ea typeface="Inter"/>
-                <a:cs typeface="Noto Serif"/>
-              </a:rPr>
-              <a:t>vastust</a:t>
-            </a:r>
-            <a:r>
-              <a:rPr lang="en-US" sz="2400">
-                <a:ea typeface="Inter"/>
-                <a:cs typeface="Noto Serif"/>
-              </a:rPr>
-              <a:t> </a:t>
-            </a:r>
-            <a:r>
-              <a:rPr lang="en-US" sz="2400" err="1">
-                <a:ea typeface="Inter"/>
-                <a:cs typeface="Noto Serif"/>
-              </a:rPr>
-              <a:t>soovid</a:t>
-            </a:r>
-            <a:endParaRPr lang="en-US" sz="2400">
-              <a:ea typeface="Inter"/>
-              <a:cs typeface="Noto Serif"/>
-            </a:endParaRPr>
           </a:p>
           <a:p>
             <a:pPr marL="342900" indent="-342900">
@@ -30594,97 +29745,13 @@
               <a:buChar char="•"/>
             </a:pPr>
             <a:r>
-              <a:rPr lang="en-US" sz="2400" err="1">
+              <a:rPr lang="et-EE" sz="2400" noProof="0" dirty="0">
                 <a:ea typeface="Inter"/>
                 <a:cs typeface="Noto Serif"/>
               </a:rPr>
-              <a:t>Täpsusta</a:t>
+              <a:t>Täpsusta, millist tarkvara kasutad, kui valemeid küsid</a:t>
             </a:r>
-            <a:r>
-              <a:rPr lang="en-US" sz="2400">
-                <a:ea typeface="Inter"/>
-                <a:cs typeface="Noto Serif"/>
-              </a:rPr>
-              <a:t>, </a:t>
-            </a:r>
-            <a:r>
-              <a:rPr lang="en-US" sz="2400" err="1">
-                <a:ea typeface="Inter"/>
-                <a:cs typeface="Noto Serif"/>
-              </a:rPr>
-              <a:t>millist</a:t>
-            </a:r>
-            <a:r>
-              <a:rPr lang="en-US" sz="2400">
-                <a:ea typeface="Inter"/>
-                <a:cs typeface="Noto Serif"/>
-              </a:rPr>
-              <a:t> </a:t>
-            </a:r>
-            <a:r>
-              <a:rPr lang="en-US" sz="2400" err="1">
-                <a:ea typeface="Inter"/>
-                <a:cs typeface="Noto Serif"/>
-              </a:rPr>
-              <a:t>tarkvara</a:t>
-            </a:r>
-            <a:r>
-              <a:rPr lang="en-US" sz="2400">
-                <a:ea typeface="Inter"/>
-                <a:cs typeface="Noto Serif"/>
-              </a:rPr>
-              <a:t> </a:t>
-            </a:r>
-            <a:r>
-              <a:rPr lang="en-US" sz="2400" err="1">
-                <a:ea typeface="Inter"/>
-                <a:cs typeface="Noto Serif"/>
-              </a:rPr>
-              <a:t>kasutad</a:t>
-            </a:r>
-            <a:r>
-              <a:rPr lang="en-US" sz="2400">
-                <a:ea typeface="Inter"/>
-                <a:cs typeface="Noto Serif"/>
-              </a:rPr>
-              <a:t>, </a:t>
-            </a:r>
-            <a:r>
-              <a:rPr lang="en-US" sz="2400" err="1">
-                <a:ea typeface="Inter"/>
-                <a:cs typeface="Noto Serif"/>
-              </a:rPr>
-              <a:t>kui</a:t>
-            </a:r>
-            <a:r>
-              <a:rPr lang="en-US" sz="2400">
-                <a:ea typeface="Inter"/>
-                <a:cs typeface="Noto Serif"/>
-              </a:rPr>
-              <a:t> </a:t>
-            </a:r>
-            <a:r>
-              <a:rPr lang="en-US" sz="2400" err="1">
-                <a:ea typeface="Inter"/>
-                <a:cs typeface="Noto Serif"/>
-              </a:rPr>
-              <a:t>valemeid</a:t>
-            </a:r>
-            <a:r>
-              <a:rPr lang="en-US" sz="2400">
-                <a:ea typeface="Inter"/>
-                <a:cs typeface="Noto Serif"/>
-              </a:rPr>
-              <a:t> </a:t>
-            </a:r>
-            <a:r>
-              <a:rPr lang="en-US" sz="2400" err="1">
-                <a:ea typeface="Inter"/>
-                <a:cs typeface="Noto Serif"/>
-              </a:rPr>
-              <a:t>küsid</a:t>
-            </a:r>
-            <a:endParaRPr lang="en-US" sz="2400" err="1">
+            <a:endParaRPr lang="et-EE" sz="2400" noProof="0" dirty="0">
               <a:cs typeface="Noto Serif"/>
             </a:endParaRPr>
           </a:p>
@@ -30700,69 +29767,13 @@
               <a:buChar char="•"/>
             </a:pPr>
             <a:r>
-              <a:rPr lang="en-US" sz="2400" err="1">
+              <a:rPr lang="et-EE" sz="2400" noProof="0" dirty="0">
                 <a:ea typeface="Inter"/>
                 <a:cs typeface="Noto Serif"/>
               </a:rPr>
-              <a:t>Iteratiivne</a:t>
+              <a:t>Iteratiivne protsess – kui kohe ei saa õiget vastust, siis täienda</a:t>
             </a:r>
-            <a:r>
-              <a:rPr lang="en-US" sz="2400">
-                <a:ea typeface="Inter"/>
-                <a:cs typeface="Noto Serif"/>
-              </a:rPr>
-              <a:t> </a:t>
-            </a:r>
-            <a:r>
-              <a:rPr lang="en-US" sz="2400" err="1">
-                <a:ea typeface="Inter"/>
-                <a:cs typeface="Noto Serif"/>
-              </a:rPr>
-              <a:t>protsess</a:t>
-            </a:r>
-            <a:r>
-              <a:rPr lang="en-US" sz="2400">
-                <a:ea typeface="Inter"/>
-                <a:cs typeface="Noto Serif"/>
-              </a:rPr>
-              <a:t> – </a:t>
-            </a:r>
-            <a:r>
-              <a:rPr lang="en-US" sz="2400" err="1">
-                <a:ea typeface="Inter"/>
-                <a:cs typeface="Noto Serif"/>
-              </a:rPr>
-              <a:t>palu</a:t>
-            </a:r>
-            <a:r>
-              <a:rPr lang="en-US" sz="2400">
-                <a:ea typeface="Inter"/>
-                <a:cs typeface="Noto Serif"/>
-              </a:rPr>
-              <a:t> </a:t>
-            </a:r>
-            <a:r>
-              <a:rPr lang="en-US" sz="2400" err="1">
-                <a:ea typeface="Inter"/>
-                <a:cs typeface="Noto Serif"/>
-              </a:rPr>
-              <a:t>täiustada</a:t>
-            </a:r>
-            <a:r>
-              <a:rPr lang="en-US" sz="2400">
-                <a:ea typeface="Inter"/>
-                <a:cs typeface="Noto Serif"/>
-              </a:rPr>
-              <a:t> ja </a:t>
-            </a:r>
-            <a:r>
-              <a:rPr lang="en-US" sz="2400" err="1">
-                <a:ea typeface="Inter"/>
-                <a:cs typeface="Noto Serif"/>
-              </a:rPr>
-              <a:t>täiendada</a:t>
-            </a:r>
-            <a:endParaRPr lang="en-US" sz="2400" err="1">
+            <a:endParaRPr lang="et-EE" sz="2400" noProof="0" dirty="0">
               <a:cs typeface="Noto Serif"/>
             </a:endParaRPr>
           </a:p>
@@ -30777,7 +29788,7 @@
               <a:buFont typeface="Arial,Sans-Serif" panose="020B0502030000000004" pitchFamily="34" charset="0"/>
               <a:buChar char="•"/>
             </a:pPr>
-            <a:endParaRPr lang="en-US" sz="2400">
+            <a:endParaRPr lang="et-EE" sz="2400" noProof="0" dirty="0">
               <a:cs typeface="Noto Serif"/>
             </a:endParaRPr>
           </a:p>
@@ -30792,7 +29803,7 @@
               <a:buFont typeface="Arial,Sans-Serif" panose="020B0502030000000004" pitchFamily="34" charset="0"/>
               <a:buChar char="•"/>
             </a:pPr>
-            <a:endParaRPr lang="en-US" sz="2400">
+            <a:endParaRPr lang="et-EE" sz="2400" noProof="0" dirty="0">
               <a:cs typeface="Noto Serif"/>
             </a:endParaRPr>
           </a:p>
@@ -30807,7 +29818,7 @@
               <a:buFont typeface="Arial,Sans-Serif" panose="020B0502030000000004" pitchFamily="34" charset="0"/>
               <a:buChar char="•"/>
             </a:pPr>
-            <a:endParaRPr lang="en-US" sz="2400">
+            <a:endParaRPr lang="et-EE" sz="2400" noProof="0" dirty="0">
               <a:cs typeface="Arial"/>
             </a:endParaRPr>
           </a:p>
@@ -30819,7 +29830,7 @@
               <a:buFont typeface="Arial,Sans-Serif" panose="020B0502030000000004" pitchFamily="34" charset="0"/>
               <a:buChar char="o"/>
             </a:pPr>
-            <a:endParaRPr lang="en-US" sz="2400">
+            <a:endParaRPr lang="et-EE" sz="2400" noProof="0" dirty="0">
               <a:cs typeface="Arial"/>
             </a:endParaRPr>
           </a:p>
@@ -30831,7 +29842,7 @@
               <a:buFont typeface="Arial,Sans-Serif" panose="020B0502030000000004" pitchFamily="34" charset="0"/>
               <a:buChar char="•"/>
             </a:pPr>
-            <a:endParaRPr lang="en-US" sz="2400">
+            <a:endParaRPr lang="et-EE" sz="2400" noProof="0" dirty="0">
               <a:cs typeface="Arial"/>
             </a:endParaRPr>
           </a:p>
@@ -30841,7 +29852,7 @@
                 <a:spcPct val="150000"/>
               </a:lnSpc>
             </a:pPr>
-            <a:endParaRPr lang="en-US" sz="2800">
+            <a:endParaRPr lang="et-EE" sz="2800" noProof="0" dirty="0">
               <a:cs typeface="Arial"/>
             </a:endParaRPr>
           </a:p>
@@ -30852,7 +29863,7 @@
               </a:lnSpc>
               <a:buNone/>
             </a:pPr>
-            <a:endParaRPr lang="en-US" sz="2800"/>
+            <a:endParaRPr lang="et-EE" sz="2800" noProof="0" dirty="0"/>
           </a:p>
         </p:txBody>
       </p:sp>
@@ -31095,1028 +30106,6 @@
       <p:bldP spid="3" grpId="0" build="p"/>
     </p:bldLst>
   </p:timing>
-</p:sld>
-</file>
-
-<file path=ppt/slides/slide8.xml><?xml version="1.0" encoding="utf-8"?>
-<p:sld xmlns:a="http://schemas.openxmlformats.org/drawingml/2006/main" xmlns:r="http://schemas.openxmlformats.org/officeDocument/2006/relationships" xmlns:p="http://schemas.openxmlformats.org/presentationml/2006/main">
-  <p:cSld>
-    <p:spTree>
-      <p:nvGrpSpPr>
-        <p:cNvPr id="1" name=""/>
-        <p:cNvGrpSpPr/>
-        <p:nvPr/>
-      </p:nvGrpSpPr>
-      <p:grpSpPr>
-        <a:xfrm>
-          <a:off x="0" y="0"/>
-          <a:ext cx="0" cy="0"/>
-          <a:chOff x="0" y="0"/>
-          <a:chExt cx="0" cy="0"/>
-        </a:xfrm>
-      </p:grpSpPr>
-      <p:sp>
-        <p:nvSpPr>
-          <p:cNvPr id="2" name="Title 1">
-            <a:extLst>
-              <a:ext uri="{FF2B5EF4-FFF2-40B4-BE49-F238E27FC236}">
-                <a16:creationId xmlns:a16="http://schemas.microsoft.com/office/drawing/2014/main" id="{15E4613B-AA18-2E8F-A97B-F0B013DE2391}"/>
-              </a:ext>
-            </a:extLst>
-          </p:cNvPr>
-          <p:cNvSpPr>
-            <a:spLocks noGrp="1"/>
-          </p:cNvSpPr>
-          <p:nvPr>
-            <p:ph type="ctrTitle"/>
-          </p:nvPr>
-        </p:nvSpPr>
-        <p:spPr/>
-        <p:txBody>
-          <a:bodyPr/>
-          <a:lstStyle/>
-          <a:p>
-            <a:r>
-              <a:rPr lang="en-US" dirty="0" err="1"/>
-              <a:t>Sisendi</a:t>
-            </a:r>
-            <a:r>
-              <a:rPr lang="en-US" dirty="0"/>
-              <a:t> </a:t>
-            </a:r>
-            <a:r>
-              <a:rPr lang="en-US" dirty="0" err="1"/>
-              <a:t>kirjutamise</a:t>
-            </a:r>
-            <a:r>
-              <a:rPr lang="en-US" dirty="0"/>
-              <a:t> </a:t>
-            </a:r>
-            <a:r>
-              <a:rPr lang="en-US" dirty="0" err="1"/>
-              <a:t>põhimõtted</a:t>
-            </a:r>
-            <a:r>
-              <a:rPr lang="en-US" dirty="0"/>
-              <a:t> (CRAFT </a:t>
-            </a:r>
-            <a:r>
-              <a:rPr lang="en-US" dirty="0" err="1"/>
-              <a:t>mudel</a:t>
-            </a:r>
-            <a:r>
-              <a:rPr lang="en-US" dirty="0"/>
-              <a:t>)</a:t>
-            </a:r>
-          </a:p>
-        </p:txBody>
-      </p:sp>
-      <p:sp>
-        <p:nvSpPr>
-          <p:cNvPr id="3" name="Content Placeholder 2">
-            <a:extLst>
-              <a:ext uri="{FF2B5EF4-FFF2-40B4-BE49-F238E27FC236}">
-                <a16:creationId xmlns:a16="http://schemas.microsoft.com/office/drawing/2014/main" id="{F4A70332-1D1A-2C6E-9052-C6A2A2009676}"/>
-              </a:ext>
-            </a:extLst>
-          </p:cNvPr>
-          <p:cNvSpPr>
-            <a:spLocks noGrp="1"/>
-          </p:cNvSpPr>
-          <p:nvPr>
-            <p:ph sz="quarter" idx="10"/>
-          </p:nvPr>
-        </p:nvSpPr>
-        <p:spPr/>
-        <p:txBody>
-          <a:bodyPr/>
-          <a:lstStyle/>
-          <a:p>
-            <a:pPr marL="457200" indent="0">
-              <a:lnSpc>
-                <a:spcPct val="150000"/>
-              </a:lnSpc>
-              <a:buNone/>
-            </a:pPr>
-            <a:r>
-              <a:rPr lang="en-US" sz="2400" dirty="0">
-                <a:ea typeface="Inter"/>
-              </a:rPr>
-              <a:t>1) </a:t>
-            </a:r>
-            <a:r>
-              <a:rPr lang="en-US" sz="2400" dirty="0" err="1">
-                <a:ea typeface="Inter"/>
-              </a:rPr>
-              <a:t>Kontekst</a:t>
-            </a:r>
-            <a:r>
-              <a:rPr lang="en-US" sz="2400" dirty="0">
-                <a:ea typeface="Inter"/>
-              </a:rPr>
-              <a:t> - </a:t>
-            </a:r>
-            <a:r>
-              <a:rPr lang="en-US" sz="2400" dirty="0" err="1">
-                <a:ea typeface="Inter"/>
-              </a:rPr>
-              <a:t>taustainfo</a:t>
-            </a:r>
-            <a:endParaRPr lang="en-US" sz="2400">
-              <a:ea typeface="Inter"/>
-            </a:endParaRPr>
-          </a:p>
-          <a:p>
-            <a:pPr marL="457200" indent="0">
-              <a:lnSpc>
-                <a:spcPct val="150000"/>
-              </a:lnSpc>
-              <a:buNone/>
-            </a:pPr>
-            <a:r>
-              <a:rPr lang="en-US" sz="2400" dirty="0">
-                <a:ea typeface="Inter"/>
-              </a:rPr>
-              <a:t>2) Roll – </a:t>
-            </a:r>
-            <a:r>
-              <a:rPr lang="en-US" sz="2400" err="1">
-                <a:ea typeface="Inter"/>
-              </a:rPr>
-              <a:t>kelle</a:t>
-            </a:r>
-            <a:r>
-              <a:rPr lang="en-US" sz="2400" dirty="0">
-                <a:ea typeface="Inter"/>
-              </a:rPr>
-              <a:t> </a:t>
-            </a:r>
-            <a:r>
-              <a:rPr lang="en-US" sz="2400" err="1">
-                <a:ea typeface="Inter"/>
-              </a:rPr>
-              <a:t>rolli</a:t>
-            </a:r>
-            <a:r>
-              <a:rPr lang="en-US" sz="2400" dirty="0">
-                <a:ea typeface="Inter"/>
-              </a:rPr>
-              <a:t> </a:t>
-            </a:r>
-            <a:r>
-              <a:rPr lang="en-US" sz="2400" err="1">
-                <a:ea typeface="Inter"/>
-              </a:rPr>
-              <a:t>tehisaru</a:t>
-            </a:r>
-            <a:r>
-              <a:rPr lang="en-US" sz="2400" dirty="0">
-                <a:ea typeface="Inter"/>
-              </a:rPr>
-              <a:t> </a:t>
-            </a:r>
-            <a:r>
-              <a:rPr lang="en-US" sz="2400" err="1">
-                <a:ea typeface="Inter"/>
-              </a:rPr>
-              <a:t>võtab</a:t>
-            </a:r>
-            <a:r>
-              <a:rPr lang="en-US" sz="2400" dirty="0">
-                <a:ea typeface="Inter"/>
-              </a:rPr>
-              <a:t>, </a:t>
-            </a:r>
-            <a:r>
-              <a:rPr lang="en-US" sz="2400" err="1">
-                <a:ea typeface="Inter"/>
-              </a:rPr>
-              <a:t>nt</a:t>
-            </a:r>
-            <a:r>
-              <a:rPr lang="en-US" sz="2400" dirty="0">
-                <a:ea typeface="Inter"/>
-              </a:rPr>
-              <a:t> </a:t>
-            </a:r>
-            <a:r>
-              <a:rPr lang="en-US" sz="2400" err="1">
-                <a:ea typeface="Inter"/>
-              </a:rPr>
-              <a:t>ametiala</a:t>
-            </a:r>
-            <a:endParaRPr lang="en-US" sz="2400">
-              <a:ea typeface="Inter"/>
-            </a:endParaRPr>
-          </a:p>
-          <a:p>
-            <a:pPr marL="457200" indent="0">
-              <a:lnSpc>
-                <a:spcPct val="150000"/>
-              </a:lnSpc>
-              <a:buNone/>
-            </a:pPr>
-            <a:r>
-              <a:rPr lang="en-US" sz="2400" dirty="0">
-                <a:ea typeface="Inter"/>
-              </a:rPr>
-              <a:t>3) </a:t>
-            </a:r>
-            <a:r>
-              <a:rPr lang="en-US" sz="2400" dirty="0" err="1">
-                <a:ea typeface="Inter"/>
-              </a:rPr>
-              <a:t>Tegevus</a:t>
-            </a:r>
-            <a:r>
-              <a:rPr lang="en-US" sz="2400" dirty="0">
-                <a:ea typeface="Inter"/>
-              </a:rPr>
-              <a:t> – mis on </a:t>
-            </a:r>
-            <a:r>
-              <a:rPr lang="en-US" sz="2400" dirty="0" err="1">
-                <a:ea typeface="Inter"/>
-              </a:rPr>
-              <a:t>eesmärk</a:t>
-            </a:r>
-            <a:r>
-              <a:rPr lang="en-US" sz="2400" dirty="0">
-                <a:ea typeface="Inter"/>
-              </a:rPr>
-              <a:t> ja </a:t>
-            </a:r>
-            <a:r>
-              <a:rPr lang="en-US" sz="2400" dirty="0" err="1">
-                <a:ea typeface="Inter"/>
-              </a:rPr>
-              <a:t>oodatud</a:t>
-            </a:r>
-            <a:r>
-              <a:rPr lang="en-US" sz="2400" dirty="0">
-                <a:ea typeface="Inter"/>
-              </a:rPr>
-              <a:t> </a:t>
-            </a:r>
-            <a:r>
-              <a:rPr lang="en-US" sz="2400" dirty="0" err="1">
-                <a:ea typeface="Inter"/>
-              </a:rPr>
-              <a:t>tulemus</a:t>
-            </a:r>
-            <a:endParaRPr lang="en-US" sz="2400">
-              <a:ea typeface="Inter"/>
-            </a:endParaRPr>
-          </a:p>
-          <a:p>
-            <a:pPr marL="457200" indent="0">
-              <a:lnSpc>
-                <a:spcPct val="150000"/>
-              </a:lnSpc>
-              <a:buNone/>
-            </a:pPr>
-            <a:r>
-              <a:rPr lang="en-US" sz="2400" dirty="0">
-                <a:ea typeface="Inter"/>
-              </a:rPr>
-              <a:t>4) </a:t>
-            </a:r>
-            <a:r>
-              <a:rPr lang="en-US" sz="2400" dirty="0" err="1">
-                <a:ea typeface="Inter"/>
-              </a:rPr>
-              <a:t>Formaat</a:t>
-            </a:r>
-            <a:r>
-              <a:rPr lang="en-US" sz="2400" dirty="0">
-                <a:ea typeface="Inter"/>
-              </a:rPr>
-              <a:t> – </a:t>
-            </a:r>
-            <a:r>
-              <a:rPr lang="en-US" sz="2400" dirty="0" err="1">
-                <a:ea typeface="Inter"/>
-              </a:rPr>
-              <a:t>millises</a:t>
-            </a:r>
-            <a:r>
-              <a:rPr lang="en-US" sz="2400" dirty="0">
-                <a:ea typeface="Inter"/>
-              </a:rPr>
-              <a:t> </a:t>
-            </a:r>
-            <a:r>
-              <a:rPr lang="en-US" sz="2400" dirty="0" err="1">
-                <a:ea typeface="Inter"/>
-              </a:rPr>
-              <a:t>formaadis</a:t>
-            </a:r>
-            <a:r>
-              <a:rPr lang="en-US" sz="2400" dirty="0">
-                <a:ea typeface="Inter"/>
-              </a:rPr>
-              <a:t> </a:t>
-            </a:r>
-            <a:r>
-              <a:rPr lang="en-US" sz="2400" dirty="0" err="1">
-                <a:ea typeface="Inter"/>
-              </a:rPr>
-              <a:t>vastust</a:t>
-            </a:r>
-            <a:r>
-              <a:rPr lang="en-US" sz="2400" dirty="0">
-                <a:ea typeface="Inter"/>
-              </a:rPr>
-              <a:t> </a:t>
-            </a:r>
-            <a:r>
-              <a:rPr lang="en-US" sz="2400" dirty="0" err="1">
-                <a:ea typeface="Inter"/>
-              </a:rPr>
-              <a:t>soovid</a:t>
-            </a:r>
-            <a:endParaRPr lang="en-US" dirty="0" err="1">
-              <a:ea typeface="Inter"/>
-            </a:endParaRPr>
-          </a:p>
-          <a:p>
-            <a:pPr marL="457200" indent="0">
-              <a:lnSpc>
-                <a:spcPct val="150000"/>
-              </a:lnSpc>
-              <a:buNone/>
-            </a:pPr>
-            <a:r>
-              <a:rPr lang="en-US" sz="2400" dirty="0">
-                <a:ea typeface="Inter"/>
-              </a:rPr>
-              <a:t>5) </a:t>
-            </a:r>
-            <a:r>
-              <a:rPr lang="en-US" sz="2400" err="1">
-                <a:ea typeface="Inter"/>
-              </a:rPr>
-              <a:t>Sihtgrupp</a:t>
-            </a:r>
-            <a:r>
-              <a:rPr lang="en-US" sz="2400" dirty="0">
-                <a:ea typeface="Inter"/>
-              </a:rPr>
-              <a:t> - </a:t>
-            </a:r>
-            <a:r>
-              <a:rPr lang="en-US" sz="2400" err="1">
-                <a:ea typeface="Inter"/>
-              </a:rPr>
-              <a:t>kellele</a:t>
-            </a:r>
-            <a:r>
-              <a:rPr lang="en-US" sz="2400" dirty="0">
-                <a:ea typeface="Inter"/>
-              </a:rPr>
-              <a:t> on </a:t>
-            </a:r>
-            <a:r>
-              <a:rPr lang="en-US" sz="2400" err="1">
-                <a:ea typeface="Inter"/>
-              </a:rPr>
-              <a:t>tulem</a:t>
-            </a:r>
-            <a:r>
-              <a:rPr lang="en-US" sz="2400" dirty="0">
-                <a:ea typeface="Inter"/>
-              </a:rPr>
-              <a:t> </a:t>
-            </a:r>
-            <a:r>
-              <a:rPr lang="en-US" sz="2400" err="1">
-                <a:ea typeface="Inter"/>
-              </a:rPr>
-              <a:t>suunatud</a:t>
-            </a:r>
-            <a:endParaRPr lang="en-US" err="1"/>
-          </a:p>
-          <a:p>
-            <a:pPr marL="742950" lvl="1" indent="-285750">
-              <a:lnSpc>
-                <a:spcPct val="150000"/>
-              </a:lnSpc>
-            </a:pPr>
-            <a:endParaRPr lang="en-US" dirty="0">
-              <a:solidFill>
-                <a:srgbClr val="121212"/>
-              </a:solidFill>
-            </a:endParaRPr>
-          </a:p>
-        </p:txBody>
-      </p:sp>
-    </p:spTree>
-    <p:extLst>
-      <p:ext uri="{BB962C8B-B14F-4D97-AF65-F5344CB8AC3E}">
-        <p14:creationId xmlns:p14="http://schemas.microsoft.com/office/powerpoint/2010/main" val="1536515755"/>
-      </p:ext>
-    </p:extLst>
-  </p:cSld>
-  <p:clrMapOvr>
-    <a:masterClrMapping/>
-  </p:clrMapOvr>
-</p:sld>
-</file>
-
-<file path=ppt/slides/slide9.xml><?xml version="1.0" encoding="utf-8"?>
-<p:sld xmlns:a="http://schemas.openxmlformats.org/drawingml/2006/main" xmlns:r="http://schemas.openxmlformats.org/officeDocument/2006/relationships" xmlns:p="http://schemas.openxmlformats.org/presentationml/2006/main">
-  <p:cSld>
-    <p:spTree>
-      <p:nvGrpSpPr>
-        <p:cNvPr id="1" name=""/>
-        <p:cNvGrpSpPr/>
-        <p:nvPr/>
-      </p:nvGrpSpPr>
-      <p:grpSpPr>
-        <a:xfrm>
-          <a:off x="0" y="0"/>
-          <a:ext cx="0" cy="0"/>
-          <a:chOff x="0" y="0"/>
-          <a:chExt cx="0" cy="0"/>
-        </a:xfrm>
-      </p:grpSpPr>
-      <p:sp>
-        <p:nvSpPr>
-          <p:cNvPr id="2" name="Title 1">
-            <a:extLst>
-              <a:ext uri="{FF2B5EF4-FFF2-40B4-BE49-F238E27FC236}">
-                <a16:creationId xmlns:a16="http://schemas.microsoft.com/office/drawing/2014/main" id="{637509EE-22F1-1315-8A2D-3282644AA9E1}"/>
-              </a:ext>
-            </a:extLst>
-          </p:cNvPr>
-          <p:cNvSpPr>
-            <a:spLocks noGrp="1"/>
-          </p:cNvSpPr>
-          <p:nvPr>
-            <p:ph type="ctrTitle"/>
-          </p:nvPr>
-        </p:nvSpPr>
-        <p:spPr/>
-        <p:txBody>
-          <a:bodyPr/>
-          <a:lstStyle/>
-          <a:p>
-            <a:r>
-              <a:rPr lang="en-US" dirty="0" err="1"/>
-              <a:t>Sisendi</a:t>
-            </a:r>
-            <a:r>
-              <a:rPr lang="en-US" dirty="0"/>
-              <a:t> näide</a:t>
-            </a:r>
-          </a:p>
-        </p:txBody>
-      </p:sp>
-      <p:sp>
-        <p:nvSpPr>
-          <p:cNvPr id="3" name="Content Placeholder 2">
-            <a:extLst>
-              <a:ext uri="{FF2B5EF4-FFF2-40B4-BE49-F238E27FC236}">
-                <a16:creationId xmlns:a16="http://schemas.microsoft.com/office/drawing/2014/main" id="{90E5931E-0B21-061A-1BAA-585EFA37FA45}"/>
-              </a:ext>
-            </a:extLst>
-          </p:cNvPr>
-          <p:cNvSpPr>
-            <a:spLocks noGrp="1"/>
-          </p:cNvSpPr>
-          <p:nvPr>
-            <p:ph sz="quarter" idx="10"/>
-          </p:nvPr>
-        </p:nvSpPr>
-        <p:spPr/>
-        <p:txBody>
-          <a:bodyPr/>
-          <a:lstStyle/>
-          <a:p>
-            <a:r>
-              <a:rPr lang="en-US" sz="2400" dirty="0" err="1">
-                <a:ea typeface="Inter"/>
-              </a:rPr>
-              <a:t>Algne</a:t>
-            </a:r>
-            <a:r>
-              <a:rPr lang="en-US" sz="2400" dirty="0">
-                <a:ea typeface="Inter"/>
-              </a:rPr>
-              <a:t>: </a:t>
-            </a:r>
-            <a:r>
-              <a:rPr lang="en-US" sz="2400" dirty="0" err="1">
-                <a:ea typeface="+mn-lt"/>
-                <a:cs typeface="+mn-lt"/>
-              </a:rPr>
-              <a:t>Analüüsi</a:t>
-            </a:r>
-            <a:r>
-              <a:rPr lang="en-US" sz="2400" dirty="0">
-                <a:ea typeface="+mn-lt"/>
-                <a:cs typeface="+mn-lt"/>
-              </a:rPr>
-              <a:t> </a:t>
-            </a:r>
-            <a:r>
-              <a:rPr lang="en-US" sz="2400" dirty="0" err="1">
-                <a:ea typeface="+mn-lt"/>
-                <a:cs typeface="+mn-lt"/>
-              </a:rPr>
-              <a:t>andmeid</a:t>
-            </a:r>
-            <a:r>
-              <a:rPr lang="en-US" sz="2400" dirty="0">
-                <a:ea typeface="+mn-lt"/>
-                <a:cs typeface="+mn-lt"/>
-              </a:rPr>
-              <a:t>.</a:t>
-            </a:r>
-            <a:endParaRPr lang="en-US" sz="2400" dirty="0"/>
-          </a:p>
-          <a:p>
-            <a:pPr marL="0" indent="0">
-              <a:buNone/>
-            </a:pPr>
-            <a:endParaRPr lang="en-US" sz="2400" dirty="0"/>
-          </a:p>
-          <a:p>
-            <a:pPr>
-              <a:lnSpc>
-                <a:spcPct val="150000"/>
-              </a:lnSpc>
-            </a:pPr>
-            <a:r>
-              <a:rPr lang="en-US" sz="2400" dirty="0" err="1">
-                <a:ea typeface="Inter"/>
-              </a:rPr>
-              <a:t>Täiendatud</a:t>
-            </a:r>
-            <a:r>
-              <a:rPr lang="en-US" sz="2400" dirty="0">
-                <a:ea typeface="Inter"/>
-              </a:rPr>
-              <a:t>:</a:t>
-            </a:r>
-          </a:p>
-          <a:p>
-            <a:pPr lvl="1">
-              <a:lnSpc>
-                <a:spcPct val="150000"/>
-              </a:lnSpc>
-            </a:pPr>
-            <a:r>
-              <a:rPr lang="en-US" sz="2000" dirty="0" err="1">
-                <a:ea typeface="Inter"/>
-              </a:rPr>
-              <a:t>Siin</a:t>
-            </a:r>
-            <a:r>
-              <a:rPr lang="en-US" sz="2000" dirty="0">
-                <a:ea typeface="Inter"/>
-              </a:rPr>
-              <a:t> on </a:t>
-            </a:r>
-            <a:r>
-              <a:rPr lang="en-US" sz="2000" dirty="0" err="1">
-                <a:ea typeface="Inter"/>
-              </a:rPr>
-              <a:t>andmestik</a:t>
-            </a:r>
-            <a:r>
-              <a:rPr lang="en-US" sz="2000" dirty="0">
-                <a:ea typeface="Inter"/>
-              </a:rPr>
-              <a:t> </a:t>
-            </a:r>
-            <a:r>
-              <a:rPr lang="en-US" sz="2000" dirty="0" err="1">
-                <a:ea typeface="Inter"/>
-              </a:rPr>
-              <a:t>kahe</a:t>
-            </a:r>
-            <a:r>
-              <a:rPr lang="en-US" sz="2000" dirty="0">
-                <a:ea typeface="Inter"/>
-              </a:rPr>
-              <a:t> </a:t>
-            </a:r>
-            <a:r>
-              <a:rPr lang="en-US" sz="2000" dirty="0" err="1">
-                <a:ea typeface="Inter"/>
-              </a:rPr>
-              <a:t>pakiroboti</a:t>
-            </a:r>
-            <a:r>
-              <a:rPr lang="en-US" sz="2000" dirty="0">
-                <a:ea typeface="Inter"/>
-              </a:rPr>
-              <a:t> </a:t>
-            </a:r>
-            <a:r>
-              <a:rPr lang="en-US" sz="2000" dirty="0" err="1">
-                <a:ea typeface="Inter"/>
-              </a:rPr>
-              <a:t>tarneaja</a:t>
-            </a:r>
-            <a:r>
-              <a:rPr lang="en-US" sz="2000" dirty="0">
-                <a:ea typeface="Inter"/>
-              </a:rPr>
-              <a:t> </a:t>
-            </a:r>
-            <a:r>
-              <a:rPr lang="en-US" sz="2000" dirty="0" err="1">
-                <a:ea typeface="Inter"/>
-              </a:rPr>
-              <a:t>kohta</a:t>
-            </a:r>
-            <a:r>
-              <a:rPr lang="en-US" sz="2000" dirty="0">
-                <a:ea typeface="Inter"/>
-              </a:rPr>
-              <a:t>. </a:t>
-            </a:r>
-            <a:r>
-              <a:rPr lang="en-US" sz="2000" i="1" dirty="0">
-                <a:ea typeface="Inter"/>
-              </a:rPr>
-              <a:t>(</a:t>
-            </a:r>
-            <a:r>
-              <a:rPr lang="en-US" sz="2000" i="1" dirty="0" err="1">
-                <a:ea typeface="Inter"/>
-              </a:rPr>
-              <a:t>Kontekst</a:t>
-            </a:r>
-            <a:r>
-              <a:rPr lang="en-US" sz="2000" i="1" dirty="0">
-                <a:ea typeface="Inter"/>
-              </a:rPr>
-              <a:t>)</a:t>
-            </a:r>
-            <a:endParaRPr lang="en-US" sz="2000" i="1" dirty="0"/>
-          </a:p>
-          <a:p>
-            <a:pPr lvl="1">
-              <a:lnSpc>
-                <a:spcPct val="150000"/>
-              </a:lnSpc>
-            </a:pPr>
-            <a:r>
-              <a:rPr lang="en-US" sz="2000" dirty="0">
-                <a:ea typeface="Inter"/>
-              </a:rPr>
-              <a:t>Sa </a:t>
-            </a:r>
-            <a:r>
-              <a:rPr lang="en-US" sz="2000" dirty="0" err="1">
-                <a:ea typeface="Inter"/>
-              </a:rPr>
-              <a:t>oled</a:t>
-            </a:r>
-            <a:r>
-              <a:rPr lang="en-US" sz="2000" dirty="0">
-                <a:ea typeface="Inter"/>
-              </a:rPr>
-              <a:t> </a:t>
-            </a:r>
-            <a:r>
-              <a:rPr lang="en-US" sz="2000" dirty="0" err="1">
-                <a:ea typeface="Inter"/>
-              </a:rPr>
-              <a:t>seenior</a:t>
-            </a:r>
-            <a:r>
-              <a:rPr lang="en-US" sz="2000" dirty="0">
-                <a:ea typeface="Inter"/>
-              </a:rPr>
-              <a:t> </a:t>
-            </a:r>
-            <a:r>
-              <a:rPr lang="en-US" sz="2000" dirty="0" err="1">
-                <a:ea typeface="Inter"/>
-              </a:rPr>
-              <a:t>andmeanalüütik</a:t>
-            </a:r>
-            <a:r>
-              <a:rPr lang="en-US" sz="2000" dirty="0">
-                <a:ea typeface="Inter"/>
-              </a:rPr>
-              <a:t>. </a:t>
-            </a:r>
-            <a:r>
-              <a:rPr lang="en-US" sz="2000" i="1" dirty="0">
-                <a:ea typeface="Inter"/>
-              </a:rPr>
-              <a:t>(Roll)</a:t>
-            </a:r>
-            <a:endParaRPr lang="en-US" sz="2000" i="1" dirty="0"/>
-          </a:p>
-          <a:p>
-            <a:pPr lvl="1">
-              <a:lnSpc>
-                <a:spcPct val="150000"/>
-              </a:lnSpc>
-              <a:buClr>
-                <a:srgbClr val="121212"/>
-              </a:buClr>
-            </a:pPr>
-            <a:r>
-              <a:rPr lang="en-US" sz="2000" dirty="0" err="1">
-                <a:ea typeface="+mn-lt"/>
-                <a:cs typeface="+mn-lt"/>
-              </a:rPr>
-              <a:t>Võrdle</a:t>
-            </a:r>
-            <a:r>
-              <a:rPr lang="en-US" sz="2000" dirty="0">
-                <a:ea typeface="+mn-lt"/>
-                <a:cs typeface="+mn-lt"/>
-              </a:rPr>
-              <a:t> </a:t>
-            </a:r>
-            <a:r>
-              <a:rPr lang="en-US" sz="2000" dirty="0" err="1">
-                <a:ea typeface="+mn-lt"/>
-                <a:cs typeface="+mn-lt"/>
-              </a:rPr>
-              <a:t>erinevust</a:t>
-            </a:r>
-            <a:r>
-              <a:rPr lang="en-US" sz="2000" dirty="0">
-                <a:ea typeface="+mn-lt"/>
-                <a:cs typeface="+mn-lt"/>
-              </a:rPr>
-              <a:t> </a:t>
-            </a:r>
-            <a:r>
-              <a:rPr lang="en-US" sz="2000" dirty="0" err="1">
-                <a:ea typeface="+mn-lt"/>
-                <a:cs typeface="+mn-lt"/>
-              </a:rPr>
-              <a:t>vana</a:t>
-            </a:r>
-            <a:r>
-              <a:rPr lang="en-US" sz="2000" dirty="0">
-                <a:ea typeface="+mn-lt"/>
-                <a:cs typeface="+mn-lt"/>
-              </a:rPr>
-              <a:t> ja </a:t>
-            </a:r>
-            <a:r>
-              <a:rPr lang="en-US" sz="2000" dirty="0" err="1">
-                <a:ea typeface="+mn-lt"/>
-                <a:cs typeface="+mn-lt"/>
-              </a:rPr>
-              <a:t>uue</a:t>
-            </a:r>
-            <a:r>
-              <a:rPr lang="en-US" sz="2000" dirty="0">
-                <a:ea typeface="+mn-lt"/>
-                <a:cs typeface="+mn-lt"/>
-              </a:rPr>
-              <a:t> </a:t>
-            </a:r>
-            <a:r>
-              <a:rPr lang="en-US" sz="2000" dirty="0" err="1">
-                <a:ea typeface="+mn-lt"/>
-                <a:cs typeface="+mn-lt"/>
-              </a:rPr>
-              <a:t>tarkvaraga</a:t>
-            </a:r>
-            <a:r>
-              <a:rPr lang="en-US" sz="2000" dirty="0">
-                <a:ea typeface="+mn-lt"/>
-                <a:cs typeface="+mn-lt"/>
-              </a:rPr>
-              <a:t> </a:t>
-            </a:r>
-            <a:r>
-              <a:rPr lang="en-US" sz="2000" dirty="0" err="1">
-                <a:ea typeface="+mn-lt"/>
-                <a:cs typeface="+mn-lt"/>
-              </a:rPr>
-              <a:t>pakiroboti</a:t>
-            </a:r>
-            <a:r>
-              <a:rPr lang="en-US" sz="2000" dirty="0">
-                <a:ea typeface="+mn-lt"/>
-                <a:cs typeface="+mn-lt"/>
-              </a:rPr>
-              <a:t> </a:t>
-            </a:r>
-            <a:r>
-              <a:rPr lang="en-US" sz="2000" dirty="0" err="1">
-                <a:ea typeface="+mn-lt"/>
-                <a:cs typeface="+mn-lt"/>
-              </a:rPr>
-              <a:t>vahel</a:t>
-            </a:r>
-            <a:r>
-              <a:rPr lang="en-US" sz="2000" dirty="0">
-                <a:ea typeface="+mn-lt"/>
-                <a:cs typeface="+mn-lt"/>
-              </a:rPr>
-              <a:t>. </a:t>
-            </a:r>
-            <a:r>
-              <a:rPr lang="en-US" sz="2000" i="1" dirty="0">
-                <a:ea typeface="+mn-lt"/>
-                <a:cs typeface="+mn-lt"/>
-              </a:rPr>
-              <a:t>(</a:t>
-            </a:r>
-            <a:r>
-              <a:rPr lang="en-US" sz="2000" i="1" dirty="0" err="1">
-                <a:ea typeface="+mn-lt"/>
-                <a:cs typeface="+mn-lt"/>
-              </a:rPr>
-              <a:t>Tegevus</a:t>
-            </a:r>
-            <a:r>
-              <a:rPr lang="en-US" sz="2000" i="1" dirty="0">
-                <a:ea typeface="+mn-lt"/>
-                <a:cs typeface="+mn-lt"/>
-              </a:rPr>
-              <a:t>)</a:t>
-            </a:r>
-          </a:p>
-          <a:p>
-            <a:pPr lvl="1">
-              <a:lnSpc>
-                <a:spcPct val="150000"/>
-              </a:lnSpc>
-              <a:buClr>
-                <a:srgbClr val="121212"/>
-              </a:buClr>
-            </a:pPr>
-            <a:r>
-              <a:rPr lang="en-US" sz="2000" dirty="0">
-                <a:ea typeface="+mn-lt"/>
-                <a:cs typeface="+mn-lt"/>
-              </a:rPr>
-              <a:t>Loo </a:t>
-            </a:r>
-            <a:r>
-              <a:rPr lang="en-US" sz="2000" dirty="0" err="1">
-                <a:ea typeface="+mn-lt"/>
-                <a:cs typeface="+mn-lt"/>
-              </a:rPr>
-              <a:t>Jupyter</a:t>
-            </a:r>
-            <a:r>
-              <a:rPr lang="en-US" sz="2000" dirty="0">
-                <a:ea typeface="+mn-lt"/>
-                <a:cs typeface="+mn-lt"/>
-              </a:rPr>
-              <a:t> Notebook fail. </a:t>
-            </a:r>
-            <a:r>
-              <a:rPr lang="en-US" sz="2000" i="1" dirty="0">
-                <a:ea typeface="+mn-lt"/>
-                <a:cs typeface="+mn-lt"/>
-              </a:rPr>
-              <a:t>(</a:t>
-            </a:r>
-            <a:r>
-              <a:rPr lang="en-US" sz="2000" i="1" dirty="0" err="1">
-                <a:ea typeface="+mn-lt"/>
-                <a:cs typeface="+mn-lt"/>
-              </a:rPr>
-              <a:t>Formaat</a:t>
-            </a:r>
-            <a:r>
-              <a:rPr lang="en-US" sz="2000" i="1" dirty="0">
-                <a:ea typeface="+mn-lt"/>
-                <a:cs typeface="+mn-lt"/>
-              </a:rPr>
-              <a:t>)</a:t>
-            </a:r>
-          </a:p>
-          <a:p>
-            <a:pPr lvl="1">
-              <a:lnSpc>
-                <a:spcPct val="150000"/>
-              </a:lnSpc>
-              <a:buClr>
-                <a:srgbClr val="121212"/>
-              </a:buClr>
-            </a:pPr>
-            <a:r>
-              <a:rPr lang="en-US" sz="2000" dirty="0" err="1">
-                <a:ea typeface="+mn-lt"/>
-                <a:cs typeface="+mn-lt"/>
-              </a:rPr>
-              <a:t>Esitlus</a:t>
-            </a:r>
-            <a:r>
-              <a:rPr lang="en-US" sz="2000" dirty="0">
-                <a:ea typeface="+mn-lt"/>
-                <a:cs typeface="+mn-lt"/>
-              </a:rPr>
-              <a:t> on </a:t>
-            </a:r>
-            <a:r>
-              <a:rPr lang="en-US" sz="2000" dirty="0" err="1">
-                <a:ea typeface="+mn-lt"/>
-                <a:cs typeface="+mn-lt"/>
-              </a:rPr>
-              <a:t>mõeldud</a:t>
-            </a:r>
-            <a:r>
-              <a:rPr lang="en-US" sz="2000" dirty="0">
-                <a:ea typeface="+mn-lt"/>
-                <a:cs typeface="+mn-lt"/>
-              </a:rPr>
-              <a:t> </a:t>
-            </a:r>
-            <a:r>
-              <a:rPr lang="en-US" sz="2000" dirty="0" err="1">
-                <a:ea typeface="+mn-lt"/>
-                <a:cs typeface="+mn-lt"/>
-              </a:rPr>
-              <a:t>tootetiimile</a:t>
-            </a:r>
-            <a:r>
-              <a:rPr lang="en-US" sz="2000" dirty="0">
-                <a:ea typeface="+mn-lt"/>
-                <a:cs typeface="+mn-lt"/>
-              </a:rPr>
-              <a:t>.</a:t>
-            </a:r>
-            <a:r>
-              <a:rPr lang="en-US" sz="2000" i="1" dirty="0">
-                <a:ea typeface="+mn-lt"/>
-                <a:cs typeface="+mn-lt"/>
-              </a:rPr>
-              <a:t> (</a:t>
-            </a:r>
-            <a:r>
-              <a:rPr lang="en-US" sz="2000" i="1" dirty="0" err="1">
-                <a:ea typeface="+mn-lt"/>
-                <a:cs typeface="+mn-lt"/>
-              </a:rPr>
-              <a:t>Sihtgrupp</a:t>
-            </a:r>
-            <a:r>
-              <a:rPr lang="en-US" sz="2000" i="1" dirty="0">
-                <a:ea typeface="+mn-lt"/>
-                <a:cs typeface="+mn-lt"/>
-              </a:rPr>
-              <a:t>)</a:t>
-            </a:r>
-          </a:p>
-          <a:p>
-            <a:pPr lvl="1">
-              <a:lnSpc>
-                <a:spcPct val="150000"/>
-              </a:lnSpc>
-              <a:buClr>
-                <a:srgbClr val="121212"/>
-              </a:buClr>
-              <a:buFont typeface="Courier New" panose="020B0502030000000004" pitchFamily="34" charset="0"/>
-              <a:buChar char="o"/>
-            </a:pPr>
-            <a:endParaRPr lang="en-US" sz="2400" dirty="0"/>
-          </a:p>
-          <a:p>
-            <a:pPr lvl="1">
-              <a:buClr>
-                <a:srgbClr val="121212"/>
-              </a:buClr>
-              <a:buFont typeface="Courier New" panose="020B0502030000000004" pitchFamily="34" charset="0"/>
-              <a:buChar char="o"/>
-            </a:pPr>
-            <a:endParaRPr lang="en-US" sz="2400" dirty="0"/>
-          </a:p>
-          <a:p>
-            <a:pPr lvl="1">
-              <a:buFont typeface="Courier New" panose="020B0502030000000004" pitchFamily="34" charset="0"/>
-              <a:buChar char="o"/>
-            </a:pPr>
-            <a:endParaRPr lang="en-US" sz="2400" dirty="0"/>
-          </a:p>
-          <a:p>
-            <a:pPr lvl="1">
-              <a:buFont typeface="Courier New" panose="020B0502030000000004" pitchFamily="34" charset="0"/>
-              <a:buChar char="o"/>
-            </a:pPr>
-            <a:endParaRPr lang="en-US" dirty="0"/>
-          </a:p>
-        </p:txBody>
-      </p:sp>
-    </p:spTree>
-    <p:extLst>
-      <p:ext uri="{BB962C8B-B14F-4D97-AF65-F5344CB8AC3E}">
-        <p14:creationId xmlns:p14="http://schemas.microsoft.com/office/powerpoint/2010/main" val="3667732403"/>
-      </p:ext>
-    </p:extLst>
-  </p:cSld>
-  <p:clrMapOvr>
-    <a:masterClrMapping/>
-  </p:clrMapOvr>
 </p:sld>
 </file>
 
@@ -32912,18 +30901,18 @@
 </file>
 
 <file path=customXml/item1.xml><?xml version="1.0" encoding="utf-8"?>
-<p:properties xmlns:p="http://schemas.microsoft.com/office/2006/metadata/properties" xmlns:xsi="http://www.w3.org/2001/XMLSchema-instance" xmlns:pc="http://schemas.microsoft.com/office/infopath/2007/PartnerControls">
-  <documentManagement/>
-</p:properties>
-</file>
-
-<file path=customXml/item2.xml><?xml version="1.0" encoding="utf-8"?>
 <?mso-contentType ?>
 <FormTemplates xmlns="http://schemas.microsoft.com/sharepoint/v3/contenttype/forms">
   <Display>DocumentLibraryForm</Display>
   <Edit>DocumentLibraryForm</Edit>
   <New>DocumentLibraryForm</New>
 </FormTemplates>
+</file>
+
+<file path=customXml/item2.xml><?xml version="1.0" encoding="utf-8"?>
+<p:properties xmlns:p="http://schemas.microsoft.com/office/2006/metadata/properties" xmlns:xsi="http://www.w3.org/2001/XMLSchema-instance" xmlns:pc="http://schemas.microsoft.com/office/infopath/2007/PartnerControls">
+  <documentManagement/>
+</p:properties>
 </file>
 
 <file path=customXml/item3.xml><?xml version="1.0" encoding="utf-8"?>
@@ -33095,18 +31084,18 @@
 </file>
 
 <file path=customXml/itemProps1.xml><?xml version="1.0" encoding="utf-8"?>
-<ds:datastoreItem xmlns:ds="http://schemas.openxmlformats.org/officeDocument/2006/customXml" ds:itemID="{5BDF4908-A52A-47DD-A794-6E02D71942FC}">
+<ds:datastoreItem xmlns:ds="http://schemas.openxmlformats.org/officeDocument/2006/customXml" ds:itemID="{9DC439CA-6F1C-4005-ACA6-A52E04DEE0A7}">
   <ds:schemaRefs>
-    <ds:schemaRef ds:uri="http://schemas.microsoft.com/office/2006/metadata/properties"/>
-    <ds:schemaRef ds:uri="http://schemas.microsoft.com/office/infopath/2007/PartnerControls"/>
+    <ds:schemaRef ds:uri="http://schemas.microsoft.com/sharepoint/v3/contenttype/forms"/>
   </ds:schemaRefs>
 </ds:datastoreItem>
 </file>
 
 <file path=customXml/itemProps2.xml><?xml version="1.0" encoding="utf-8"?>
-<ds:datastoreItem xmlns:ds="http://schemas.openxmlformats.org/officeDocument/2006/customXml" ds:itemID="{9DC439CA-6F1C-4005-ACA6-A52E04DEE0A7}">
+<ds:datastoreItem xmlns:ds="http://schemas.openxmlformats.org/officeDocument/2006/customXml" ds:itemID="{5BDF4908-A52A-47DD-A794-6E02D71942FC}">
   <ds:schemaRefs>
-    <ds:schemaRef ds:uri="http://schemas.microsoft.com/sharepoint/v3/contenttype/forms"/>
+    <ds:schemaRef ds:uri="http://schemas.microsoft.com/office/2006/metadata/properties"/>
+    <ds:schemaRef ds:uri="http://schemas.microsoft.com/office/infopath/2007/PartnerControls"/>
   </ds:schemaRefs>
 </ds:datastoreItem>
 </file>

--- a/Day15/15-paev-andmetarkus-esitlus.pptx
+++ b/Day15/15-paev-andmetarkus-esitlus.pptx
@@ -5,52 +5,55 @@
     <p:sldMasterId id="2147483648" r:id="rId4"/>
   </p:sldMasterIdLst>
   <p:notesMasterIdLst>
-    <p:notesMasterId r:id="rId21"/>
+    <p:notesMasterId r:id="rId22"/>
   </p:notesMasterIdLst>
   <p:handoutMasterIdLst>
-    <p:handoutMasterId r:id="rId22"/>
+    <p:handoutMasterId r:id="rId23"/>
   </p:handoutMasterIdLst>
   <p:sldIdLst>
     <p:sldId id="417" r:id="rId5"/>
     <p:sldId id="479" r:id="rId6"/>
     <p:sldId id="567" r:id="rId7"/>
     <p:sldId id="475" r:id="rId8"/>
-    <p:sldId id="452" r:id="rId9"/>
-    <p:sldId id="647" r:id="rId10"/>
-    <p:sldId id="476" r:id="rId11"/>
-    <p:sldId id="477" r:id="rId12"/>
-    <p:sldId id="494" r:id="rId13"/>
-    <p:sldId id="446" r:id="rId14"/>
-    <p:sldId id="447" r:id="rId15"/>
-    <p:sldId id="646" r:id="rId16"/>
-    <p:sldId id="571" r:id="rId17"/>
-    <p:sldId id="514" r:id="rId18"/>
-    <p:sldId id="572" r:id="rId19"/>
-    <p:sldId id="619" r:id="rId20"/>
+    <p:sldId id="261" r:id="rId9"/>
+    <p:sldId id="452" r:id="rId10"/>
+    <p:sldId id="647" r:id="rId11"/>
+    <p:sldId id="476" r:id="rId12"/>
+    <p:sldId id="477" r:id="rId13"/>
+    <p:sldId id="494" r:id="rId14"/>
+    <p:sldId id="446" r:id="rId15"/>
+    <p:sldId id="447" r:id="rId16"/>
+    <p:sldId id="646" r:id="rId17"/>
+    <p:sldId id="571" r:id="rId18"/>
+    <p:sldId id="514" r:id="rId19"/>
+    <p:sldId id="572" r:id="rId20"/>
+    <p:sldId id="619" r:id="rId21"/>
   </p:sldIdLst>
   <p:sldSz cx="12192000" cy="6858000"/>
   <p:notesSz cx="6858000" cy="9144000"/>
   <p:embeddedFontLst>
     <p:embeddedFont>
       <p:font typeface="Inter" panose="020B0604020202020204" charset="0"/>
-      <p:regular r:id="rId23"/>
-      <p:bold r:id="rId24"/>
+      <p:regular r:id="rId24"/>
+      <p:bold r:id="rId25"/>
+      <p:italic r:id="rId26"/>
+      <p:boldItalic r:id="rId27"/>
     </p:embeddedFont>
     <p:embeddedFont>
       <p:font typeface="Inter Bold" panose="020B0604020202020204" charset="0"/>
-      <p:bold r:id="rId25"/>
+      <p:bold r:id="rId28"/>
     </p:embeddedFont>
     <p:embeddedFont>
       <p:font typeface="Noto Serif" panose="02020600060500020200" pitchFamily="18" charset="0"/>
-      <p:regular r:id="rId26"/>
-      <p:bold r:id="rId27"/>
-      <p:italic r:id="rId28"/>
-      <p:boldItalic r:id="rId29"/>
+      <p:regular r:id="rId29"/>
+      <p:bold r:id="rId30"/>
+      <p:italic r:id="rId31"/>
+      <p:boldItalic r:id="rId32"/>
     </p:embeddedFont>
     <p:embeddedFont>
       <p:font typeface="Poppins SemiBold" panose="00000700000000000000" pitchFamily="2" charset="0"/>
-      <p:bold r:id="rId30"/>
-      <p:boldItalic r:id="rId31"/>
+      <p:bold r:id="rId33"/>
+      <p:boldItalic r:id="rId34"/>
     </p:embeddedFont>
   </p:embeddedFontLst>
   <p:defaultTextStyle>
@@ -162,7 +165,7 @@
 <file path=ppt/revisionInfo.xml><?xml version="1.0" encoding="utf-8"?>
 <p1510:revInfo xmlns:a="http://schemas.openxmlformats.org/drawingml/2006/main" xmlns:r="http://schemas.openxmlformats.org/officeDocument/2006/relationships" xmlns:p1510="http://schemas.microsoft.com/office/powerpoint/2015/10/main">
   <p1510:revLst>
-    <p1510:client id="{2EADCC2F-0731-4A5B-A287-B42682DA1D9C}" v="91" dt="2026-04-14T08:13:17.052"/>
+    <p1510:client id="{2EADCC2F-0731-4A5B-A287-B42682DA1D9C}" v="92" dt="2026-04-17T08:26:41.171"/>
   </p1510:revLst>
 </p1510:revInfo>
 </file>
@@ -172,10 +175,65 @@
   <pc:docChgLst>
     <pc:chgData name="Virve Räni" userId="161a7437-7ef4-49ec-91bf-54882f313dfe" providerId="ADAL" clId="{6D754EED-65AA-4A21-B175-6769012CF487}"/>
     <pc:docChg chg="addSld delSld modSld sldOrd">
-      <pc:chgData name="Virve Räni" userId="161a7437-7ef4-49ec-91bf-54882f313dfe" providerId="ADAL" clId="{6D754EED-65AA-4A21-B175-6769012CF487}" dt="2026-04-14T08:13:17.052" v="511" actId="20577"/>
+      <pc:chgData name="Virve Räni" userId="161a7437-7ef4-49ec-91bf-54882f313dfe" providerId="ADAL" clId="{6D754EED-65AA-4A21-B175-6769012CF487}" dt="2026-04-17T08:27:10.969" v="544" actId="1076"/>
       <pc:docMkLst>
         <pc:docMk/>
       </pc:docMkLst>
+      <pc:sldChg chg="modSp add mod">
+        <pc:chgData name="Virve Räni" userId="161a7437-7ef4-49ec-91bf-54882f313dfe" providerId="ADAL" clId="{6D754EED-65AA-4A21-B175-6769012CF487}" dt="2026-04-17T08:27:10.969" v="544" actId="1076"/>
+        <pc:sldMkLst>
+          <pc:docMk/>
+          <pc:sldMk cId="0" sldId="261"/>
+        </pc:sldMkLst>
+        <pc:spChg chg="mod">
+          <ac:chgData name="Virve Räni" userId="161a7437-7ef4-49ec-91bf-54882f313dfe" providerId="ADAL" clId="{6D754EED-65AA-4A21-B175-6769012CF487}" dt="2026-04-17T08:27:02.988" v="543" actId="20577"/>
+          <ac:spMkLst>
+            <pc:docMk/>
+            <pc:sldMk cId="0" sldId="261"/>
+            <ac:spMk id="2" creationId="{00000000-0000-0000-0000-000000000000}"/>
+          </ac:spMkLst>
+        </pc:spChg>
+        <pc:spChg chg="mod">
+          <ac:chgData name="Virve Räni" userId="161a7437-7ef4-49ec-91bf-54882f313dfe" providerId="ADAL" clId="{6D754EED-65AA-4A21-B175-6769012CF487}" dt="2026-04-17T08:27:10.969" v="544" actId="1076"/>
+          <ac:spMkLst>
+            <pc:docMk/>
+            <pc:sldMk cId="0" sldId="261"/>
+            <ac:spMk id="3" creationId="{00000000-0000-0000-0000-000000000000}"/>
+          </ac:spMkLst>
+        </pc:spChg>
+        <pc:spChg chg="mod">
+          <ac:chgData name="Virve Räni" userId="161a7437-7ef4-49ec-91bf-54882f313dfe" providerId="ADAL" clId="{6D754EED-65AA-4A21-B175-6769012CF487}" dt="2026-04-17T08:27:10.969" v="544" actId="1076"/>
+          <ac:spMkLst>
+            <pc:docMk/>
+            <pc:sldMk cId="0" sldId="261"/>
+            <ac:spMk id="4" creationId="{00000000-0000-0000-0000-000000000000}"/>
+          </ac:spMkLst>
+        </pc:spChg>
+        <pc:spChg chg="mod">
+          <ac:chgData name="Virve Räni" userId="161a7437-7ef4-49ec-91bf-54882f313dfe" providerId="ADAL" clId="{6D754EED-65AA-4A21-B175-6769012CF487}" dt="2026-04-17T08:27:10.969" v="544" actId="1076"/>
+          <ac:spMkLst>
+            <pc:docMk/>
+            <pc:sldMk cId="0" sldId="261"/>
+            <ac:spMk id="5" creationId="{00000000-0000-0000-0000-000000000000}"/>
+          </ac:spMkLst>
+        </pc:spChg>
+        <pc:spChg chg="mod">
+          <ac:chgData name="Virve Räni" userId="161a7437-7ef4-49ec-91bf-54882f313dfe" providerId="ADAL" clId="{6D754EED-65AA-4A21-B175-6769012CF487}" dt="2026-04-17T08:27:10.969" v="544" actId="1076"/>
+          <ac:spMkLst>
+            <pc:docMk/>
+            <pc:sldMk cId="0" sldId="261"/>
+            <ac:spMk id="6" creationId="{00000000-0000-0000-0000-000000000000}"/>
+          </ac:spMkLst>
+        </pc:spChg>
+        <pc:spChg chg="mod">
+          <ac:chgData name="Virve Räni" userId="161a7437-7ef4-49ec-91bf-54882f313dfe" providerId="ADAL" clId="{6D754EED-65AA-4A21-B175-6769012CF487}" dt="2026-04-17T08:27:10.969" v="544" actId="1076"/>
+          <ac:spMkLst>
+            <pc:docMk/>
+            <pc:sldMk cId="0" sldId="261"/>
+            <ac:spMk id="7" creationId="{00000000-0000-0000-0000-000000000000}"/>
+          </ac:spMkLst>
+        </pc:spChg>
+      </pc:sldChg>
       <pc:sldChg chg="modSp mod">
         <pc:chgData name="Virve Räni" userId="161a7437-7ef4-49ec-91bf-54882f313dfe" providerId="ADAL" clId="{6D754EED-65AA-4A21-B175-6769012CF487}" dt="2026-04-14T08:06:07.883" v="377" actId="790"/>
         <pc:sldMkLst>
@@ -651,7 +709,7 @@
           <a:p>
             <a:fld id="{F9D2AD6E-DEDD-49A0-A4BE-7A081A9112DA}" type="datetimeFigureOut">
               <a:rPr lang="en-US" smtClean="0"/>
-              <a:t>4/14/2026</a:t>
+              <a:t>4/17/2026</a:t>
             </a:fld>
             <a:endParaRPr lang="en-US"/>
           </a:p>
@@ -827,7 +885,7 @@
           </a:lstStyle>
           <a:p>
             <a:fld id="{2AF9C1A6-4321-41FA-B001-4140F0E2457F}" type="datetimeFigureOut">
-              <a:t>14.04.2026</a:t>
+              <a:t>17.04.2026</a:t>
             </a:fld>
             <a:endParaRPr lang="en-US"/>
           </a:p>
@@ -1223,6 +1281,90 @@
           <a:bodyPr/>
           <a:lstStyle/>
           <a:p>
+            <a:endParaRPr lang="en-US" dirty="0"/>
+          </a:p>
+        </p:txBody>
+      </p:sp>
+      <p:sp>
+        <p:nvSpPr>
+          <p:cNvPr id="4" name="Slide Number Placeholder 3"/>
+          <p:cNvSpPr>
+            <a:spLocks noGrp="1"/>
+          </p:cNvSpPr>
+          <p:nvPr>
+            <p:ph type="sldNum" sz="quarter" idx="10"/>
+          </p:nvPr>
+        </p:nvSpPr>
+        <p:spPr/>
+        <p:txBody>
+          <a:bodyPr/>
+          <a:lstStyle/>
+          <a:p>
+            <a:fld id="{F7021451-1387-4CA6-816F-3879F97B5CBC}" type="slidenum">
+              <a:rPr lang="en-US"/>
+              <a:t>5</a:t>
+            </a:fld>
+            <a:endParaRPr lang="en-US"/>
+          </a:p>
+        </p:txBody>
+      </p:sp>
+    </p:spTree>
+    <p:extLst>
+      <p:ext uri="{BB962C8B-B14F-4D97-AF65-F5344CB8AC3E}">
+        <p14:creationId xmlns:p14="http://schemas.microsoft.com/office/powerpoint/2010/main" val="1024086991"/>
+      </p:ext>
+    </p:extLst>
+  </p:cSld>
+  <p:clrMapOvr>
+    <a:masterClrMapping/>
+  </p:clrMapOvr>
+</p:notes>
+</file>
+
+<file path=ppt/notesSlides/notesSlide3.xml><?xml version="1.0" encoding="utf-8"?>
+<p:notes xmlns:a="http://schemas.openxmlformats.org/drawingml/2006/main" xmlns:r="http://schemas.openxmlformats.org/officeDocument/2006/relationships" xmlns:p="http://schemas.openxmlformats.org/presentationml/2006/main">
+  <p:cSld>
+    <p:spTree>
+      <p:nvGrpSpPr>
+        <p:cNvPr id="1" name=""/>
+        <p:cNvGrpSpPr/>
+        <p:nvPr/>
+      </p:nvGrpSpPr>
+      <p:grpSpPr>
+        <a:xfrm>
+          <a:off x="0" y="0"/>
+          <a:ext cx="0" cy="0"/>
+          <a:chOff x="0" y="0"/>
+          <a:chExt cx="0" cy="0"/>
+        </a:xfrm>
+      </p:grpSpPr>
+      <p:sp>
+        <p:nvSpPr>
+          <p:cNvPr id="2" name="Slide Image Placeholder 1"/>
+          <p:cNvSpPr>
+            <a:spLocks noGrp="1" noRot="1" noChangeAspect="1"/>
+          </p:cNvSpPr>
+          <p:nvPr>
+            <p:ph type="sldImg"/>
+          </p:nvPr>
+        </p:nvSpPr>
+        <p:spPr/>
+      </p:sp>
+      <p:sp>
+        <p:nvSpPr>
+          <p:cNvPr id="3" name="Notes Placeholder 2"/>
+          <p:cNvSpPr>
+            <a:spLocks noGrp="1"/>
+          </p:cNvSpPr>
+          <p:nvPr>
+            <p:ph type="body" idx="1"/>
+          </p:nvPr>
+        </p:nvSpPr>
+        <p:spPr/>
+        <p:txBody>
+          <a:bodyPr/>
+          <a:lstStyle/>
+          <a:p>
             <a:r>
               <a:rPr lang="en-US" err="1">
                 <a:ea typeface="Calibri"/>
@@ -1271,7 +1413,7 @@
           <a:p>
             <a:fld id="{46699514-027B-49BD-8B49-5054CA40ECF4}" type="slidenum">
               <a:rPr lang="en-US"/>
-              <a:t>8</a:t>
+              <a:t>9</a:t>
             </a:fld>
             <a:endParaRPr lang="en-US"/>
           </a:p>
@@ -12417,7 +12559,7 @@
           <a:p>
             <a:fld id="{DE840A40-73C8-4048-8140-49F5D65BB431}" type="datetimeFigureOut">
               <a:rPr lang="et-EE" smtClean="0"/>
-              <a:t>14.04.2026</a:t>
+              <a:t>17.04.2026</a:t>
             </a:fld>
             <a:endParaRPr lang="et-EE"/>
           </a:p>
@@ -12481,6 +12623,703 @@
     <p:extLst>
       <p:ext uri="{BB962C8B-B14F-4D97-AF65-F5344CB8AC3E}">
         <p14:creationId xmlns:p14="http://schemas.microsoft.com/office/powerpoint/2010/main" val="1380957545"/>
+      </p:ext>
+    </p:extLst>
+  </p:cSld>
+  <p:clrMapOvr>
+    <a:masterClrMapping/>
+  </p:clrMapOvr>
+</p:sldLayout>
+</file>
+
+<file path=ppt/slideLayouts/slideLayout19.xml><?xml version="1.0" encoding="utf-8"?>
+<p:sldLayout xmlns:a="http://schemas.openxmlformats.org/drawingml/2006/main" xmlns:r="http://schemas.openxmlformats.org/officeDocument/2006/relationships" xmlns:p="http://schemas.openxmlformats.org/presentationml/2006/main">
+  <p:cSld name="Slide 6 master">
+    <p:bg>
+      <p:bgPr>
+        <a:solidFill>
+          <a:srgbClr val="000000"/>
+        </a:solidFill>
+        <a:effectLst/>
+      </p:bgPr>
+    </p:bg>
+    <p:spTree>
+      <p:nvGrpSpPr>
+        <p:cNvPr id="1" name=""/>
+        <p:cNvGrpSpPr/>
+        <p:nvPr/>
+      </p:nvGrpSpPr>
+      <p:grpSpPr>
+        <a:xfrm>
+          <a:off x="0" y="0"/>
+          <a:ext cx="0" cy="0"/>
+          <a:chOff x="0" y="0"/>
+          <a:chExt cx="0" cy="0"/>
+        </a:xfrm>
+      </p:grpSpPr>
+      <p:sp>
+        <p:nvSpPr>
+          <p:cNvPr id="2" name="Shape 0"/>
+          <p:cNvSpPr/>
+          <p:nvPr/>
+        </p:nvSpPr>
+        <p:spPr>
+          <a:xfrm>
+            <a:off x="0" y="0"/>
+            <a:ext cx="12192000" cy="6858000"/>
+          </a:xfrm>
+          <a:prstGeom prst="rect">
+            <a:avLst/>
+          </a:prstGeom>
+          <a:solidFill>
+            <a:srgbClr val="F6F4F4"/>
+          </a:solidFill>
+          <a:ln/>
+        </p:spPr>
+        <p:txBody>
+          <a:bodyPr/>
+          <a:lstStyle/>
+          <a:p>
+            <a:endParaRPr lang="et-EE" sz="1500"/>
+          </a:p>
+        </p:txBody>
+      </p:sp>
+      <p:sp>
+        <p:nvSpPr>
+          <p:cNvPr id="3" name="Shape 1"/>
+          <p:cNvSpPr/>
+          <p:nvPr/>
+        </p:nvSpPr>
+        <p:spPr>
+          <a:xfrm>
+            <a:off x="0" y="0"/>
+            <a:ext cx="12192000" cy="6858000"/>
+          </a:xfrm>
+          <a:prstGeom prst="rect">
+            <a:avLst/>
+          </a:prstGeom>
+          <a:solidFill>
+            <a:srgbClr val="FFFFFF"/>
+          </a:solidFill>
+          <a:ln/>
+        </p:spPr>
+        <p:txBody>
+          <a:bodyPr/>
+          <a:lstStyle/>
+          <a:p>
+            <a:endParaRPr lang="et-EE" sz="1500"/>
+          </a:p>
+        </p:txBody>
+      </p:sp>
+      <p:cxnSp>
+        <p:nvCxnSpPr>
+          <p:cNvPr id="5" name="Straight Connector 4">
+            <a:extLst>
+              <a:ext uri="{FF2B5EF4-FFF2-40B4-BE49-F238E27FC236}">
+                <a16:creationId xmlns:a16="http://schemas.microsoft.com/office/drawing/2014/main" id="{D316A5AF-4096-3F73-CDAE-6BD353811010}"/>
+              </a:ext>
+            </a:extLst>
+          </p:cNvPr>
+          <p:cNvCxnSpPr>
+            <a:cxnSpLocks/>
+          </p:cNvCxnSpPr>
+          <p:nvPr userDrawn="1"/>
+        </p:nvCxnSpPr>
+        <p:spPr>
+          <a:xfrm>
+            <a:off x="680936" y="6411507"/>
+            <a:ext cx="9766503" cy="0"/>
+          </a:xfrm>
+          <a:prstGeom prst="line">
+            <a:avLst/>
+          </a:prstGeom>
+          <a:noFill/>
+          <a:ln w="38100" cap="flat" cmpd="sng" algn="ctr">
+            <a:solidFill>
+              <a:srgbClr val="584FF5"/>
+            </a:solidFill>
+            <a:prstDash val="solid"/>
+            <a:miter lim="800000"/>
+          </a:ln>
+          <a:effectLst/>
+        </p:spPr>
+      </p:cxnSp>
+      <p:grpSp>
+        <p:nvGrpSpPr>
+          <p:cNvPr id="6" name="Group 5">
+            <a:extLst>
+              <a:ext uri="{FF2B5EF4-FFF2-40B4-BE49-F238E27FC236}">
+                <a16:creationId xmlns:a16="http://schemas.microsoft.com/office/drawing/2014/main" id="{A576EF2F-0C5E-420A-857B-31ACCBDDD5CD}"/>
+              </a:ext>
+            </a:extLst>
+          </p:cNvPr>
+          <p:cNvGrpSpPr/>
+          <p:nvPr userDrawn="1"/>
+        </p:nvGrpSpPr>
+        <p:grpSpPr>
+          <a:xfrm>
+            <a:off x="10951021" y="6277886"/>
+            <a:ext cx="674192" cy="266297"/>
+            <a:chOff x="10757948" y="6254276"/>
+            <a:chExt cx="809030" cy="319556"/>
+          </a:xfrm>
+        </p:grpSpPr>
+        <p:sp>
+          <p:nvSpPr>
+            <p:cNvPr id="7" name="Freeform: Shape 6">
+              <a:extLst>
+                <a:ext uri="{FF2B5EF4-FFF2-40B4-BE49-F238E27FC236}">
+                  <a16:creationId xmlns:a16="http://schemas.microsoft.com/office/drawing/2014/main" id="{2B5F4D7E-D685-D63A-46F9-6F65D124122E}"/>
+                </a:ext>
+              </a:extLst>
+            </p:cNvPr>
+            <p:cNvSpPr/>
+            <p:nvPr/>
+          </p:nvSpPr>
+          <p:spPr>
+            <a:xfrm>
+              <a:off x="10757948" y="6254276"/>
+              <a:ext cx="809030" cy="319556"/>
+            </a:xfrm>
+            <a:custGeom>
+              <a:avLst/>
+              <a:gdLst>
+                <a:gd name="connsiteX0" fmla="*/ 0 w 809030"/>
+                <a:gd name="connsiteY0" fmla="*/ 127987 h 319556"/>
+                <a:gd name="connsiteX1" fmla="*/ 192245 w 809030"/>
+                <a:gd name="connsiteY1" fmla="*/ 127987 h 319556"/>
+                <a:gd name="connsiteX2" fmla="*/ 282424 w 809030"/>
+                <a:gd name="connsiteY2" fmla="*/ 63993 h 319556"/>
+                <a:gd name="connsiteX3" fmla="*/ 0 w 809030"/>
+                <a:gd name="connsiteY3" fmla="*/ 63993 h 319556"/>
+                <a:gd name="connsiteX4" fmla="*/ 0 w 809030"/>
+                <a:gd name="connsiteY4" fmla="*/ 0 h 319556"/>
+                <a:gd name="connsiteX5" fmla="*/ 295806 w 809030"/>
+                <a:gd name="connsiteY5" fmla="*/ 0 h 319556"/>
+                <a:gd name="connsiteX6" fmla="*/ 384973 w 809030"/>
+                <a:gd name="connsiteY6" fmla="*/ 63993 h 319556"/>
+                <a:gd name="connsiteX7" fmla="*/ 424034 w 809030"/>
+                <a:gd name="connsiteY7" fmla="*/ 63993 h 319556"/>
+                <a:gd name="connsiteX8" fmla="*/ 513466 w 809030"/>
+                <a:gd name="connsiteY8" fmla="*/ 0 h 319556"/>
+                <a:gd name="connsiteX9" fmla="*/ 796420 w 809030"/>
+                <a:gd name="connsiteY9" fmla="*/ 265 h 319556"/>
+                <a:gd name="connsiteX10" fmla="*/ 796420 w 809030"/>
+                <a:gd name="connsiteY10" fmla="*/ 63993 h 319556"/>
+                <a:gd name="connsiteX11" fmla="*/ 602921 w 809030"/>
+                <a:gd name="connsiteY11" fmla="*/ 63993 h 319556"/>
+                <a:gd name="connsiteX12" fmla="*/ 602921 w 809030"/>
+                <a:gd name="connsiteY12" fmla="*/ 127697 h 319556"/>
+                <a:gd name="connsiteX13" fmla="*/ 719599 w 809030"/>
+                <a:gd name="connsiteY13" fmla="*/ 127697 h 319556"/>
+                <a:gd name="connsiteX14" fmla="*/ 809031 w 809030"/>
+                <a:gd name="connsiteY14" fmla="*/ 192197 h 319556"/>
+                <a:gd name="connsiteX15" fmla="*/ 602921 w 809030"/>
+                <a:gd name="connsiteY15" fmla="*/ 192197 h 319556"/>
+                <a:gd name="connsiteX16" fmla="*/ 602921 w 809030"/>
+                <a:gd name="connsiteY16" fmla="*/ 255708 h 319556"/>
+                <a:gd name="connsiteX17" fmla="*/ 808766 w 809030"/>
+                <a:gd name="connsiteY17" fmla="*/ 255563 h 319556"/>
+                <a:gd name="connsiteX18" fmla="*/ 808766 w 809030"/>
+                <a:gd name="connsiteY18" fmla="*/ 255563 h 319556"/>
+                <a:gd name="connsiteX19" fmla="*/ 719575 w 809030"/>
+                <a:gd name="connsiteY19" fmla="*/ 319557 h 319556"/>
+                <a:gd name="connsiteX20" fmla="*/ 436379 w 809030"/>
+                <a:gd name="connsiteY20" fmla="*/ 319557 h 319556"/>
+                <a:gd name="connsiteX21" fmla="*/ 436379 w 809030"/>
+                <a:gd name="connsiteY21" fmla="*/ 255708 h 319556"/>
+                <a:gd name="connsiteX22" fmla="*/ 384924 w 809030"/>
+                <a:gd name="connsiteY22" fmla="*/ 255708 h 319556"/>
+                <a:gd name="connsiteX23" fmla="*/ 295830 w 809030"/>
+                <a:gd name="connsiteY23" fmla="*/ 319557 h 319556"/>
+                <a:gd name="connsiteX24" fmla="*/ 0 w 809030"/>
+                <a:gd name="connsiteY24" fmla="*/ 319557 h 319556"/>
+                <a:gd name="connsiteX25" fmla="*/ 0 w 809030"/>
+                <a:gd name="connsiteY25" fmla="*/ 255563 h 319556"/>
+                <a:gd name="connsiteX26" fmla="*/ 272394 w 809030"/>
+                <a:gd name="connsiteY26" fmla="*/ 255563 h 319556"/>
+                <a:gd name="connsiteX27" fmla="*/ 192221 w 809030"/>
+                <a:gd name="connsiteY27" fmla="*/ 192197 h 319556"/>
+                <a:gd name="connsiteX28" fmla="*/ 0 w 809030"/>
+                <a:gd name="connsiteY28" fmla="*/ 192197 h 319556"/>
+                <a:gd name="connsiteX29" fmla="*/ 0 w 809030"/>
+                <a:gd name="connsiteY29" fmla="*/ 127987 h 319556"/>
+                <a:gd name="connsiteX30" fmla="*/ 513466 w 809030"/>
+                <a:gd name="connsiteY30" fmla="*/ 192197 h 319556"/>
+                <a:gd name="connsiteX31" fmla="*/ 424058 w 809030"/>
+                <a:gd name="connsiteY31" fmla="*/ 127842 h 319556"/>
+                <a:gd name="connsiteX32" fmla="*/ 384948 w 809030"/>
+                <a:gd name="connsiteY32" fmla="*/ 127842 h 319556"/>
+                <a:gd name="connsiteX33" fmla="*/ 366213 w 809030"/>
+                <a:gd name="connsiteY33" fmla="*/ 160321 h 319556"/>
+                <a:gd name="connsiteX34" fmla="*/ 384973 w 809030"/>
+                <a:gd name="connsiteY34" fmla="*/ 192197 h 319556"/>
+                <a:gd name="connsiteX35" fmla="*/ 513466 w 809030"/>
+                <a:gd name="connsiteY35" fmla="*/ 192197 h 319556"/>
+              </a:gdLst>
+              <a:ahLst/>
+              <a:cxnLst>
+                <a:cxn ang="0">
+                  <a:pos x="connsiteX0" y="connsiteY0"/>
+                </a:cxn>
+                <a:cxn ang="0">
+                  <a:pos x="connsiteX1" y="connsiteY1"/>
+                </a:cxn>
+                <a:cxn ang="0">
+                  <a:pos x="connsiteX2" y="connsiteY2"/>
+                </a:cxn>
+                <a:cxn ang="0">
+                  <a:pos x="connsiteX3" y="connsiteY3"/>
+                </a:cxn>
+                <a:cxn ang="0">
+                  <a:pos x="connsiteX4" y="connsiteY4"/>
+                </a:cxn>
+                <a:cxn ang="0">
+                  <a:pos x="connsiteX5" y="connsiteY5"/>
+                </a:cxn>
+                <a:cxn ang="0">
+                  <a:pos x="connsiteX6" y="connsiteY6"/>
+                </a:cxn>
+                <a:cxn ang="0">
+                  <a:pos x="connsiteX7" y="connsiteY7"/>
+                </a:cxn>
+                <a:cxn ang="0">
+                  <a:pos x="connsiteX8" y="connsiteY8"/>
+                </a:cxn>
+                <a:cxn ang="0">
+                  <a:pos x="connsiteX9" y="connsiteY9"/>
+                </a:cxn>
+                <a:cxn ang="0">
+                  <a:pos x="connsiteX10" y="connsiteY10"/>
+                </a:cxn>
+                <a:cxn ang="0">
+                  <a:pos x="connsiteX11" y="connsiteY11"/>
+                </a:cxn>
+                <a:cxn ang="0">
+                  <a:pos x="connsiteX12" y="connsiteY12"/>
+                </a:cxn>
+                <a:cxn ang="0">
+                  <a:pos x="connsiteX13" y="connsiteY13"/>
+                </a:cxn>
+                <a:cxn ang="0">
+                  <a:pos x="connsiteX14" y="connsiteY14"/>
+                </a:cxn>
+                <a:cxn ang="0">
+                  <a:pos x="connsiteX15" y="connsiteY15"/>
+                </a:cxn>
+                <a:cxn ang="0">
+                  <a:pos x="connsiteX16" y="connsiteY16"/>
+                </a:cxn>
+                <a:cxn ang="0">
+                  <a:pos x="connsiteX17" y="connsiteY17"/>
+                </a:cxn>
+                <a:cxn ang="0">
+                  <a:pos x="connsiteX18" y="connsiteY18"/>
+                </a:cxn>
+                <a:cxn ang="0">
+                  <a:pos x="connsiteX19" y="connsiteY19"/>
+                </a:cxn>
+                <a:cxn ang="0">
+                  <a:pos x="connsiteX20" y="connsiteY20"/>
+                </a:cxn>
+                <a:cxn ang="0">
+                  <a:pos x="connsiteX21" y="connsiteY21"/>
+                </a:cxn>
+                <a:cxn ang="0">
+                  <a:pos x="connsiteX22" y="connsiteY22"/>
+                </a:cxn>
+                <a:cxn ang="0">
+                  <a:pos x="connsiteX23" y="connsiteY23"/>
+                </a:cxn>
+                <a:cxn ang="0">
+                  <a:pos x="connsiteX24" y="connsiteY24"/>
+                </a:cxn>
+                <a:cxn ang="0">
+                  <a:pos x="connsiteX25" y="connsiteY25"/>
+                </a:cxn>
+                <a:cxn ang="0">
+                  <a:pos x="connsiteX26" y="connsiteY26"/>
+                </a:cxn>
+                <a:cxn ang="0">
+                  <a:pos x="connsiteX27" y="connsiteY27"/>
+                </a:cxn>
+                <a:cxn ang="0">
+                  <a:pos x="connsiteX28" y="connsiteY28"/>
+                </a:cxn>
+                <a:cxn ang="0">
+                  <a:pos x="connsiteX29" y="connsiteY29"/>
+                </a:cxn>
+                <a:cxn ang="0">
+                  <a:pos x="connsiteX30" y="connsiteY30"/>
+                </a:cxn>
+                <a:cxn ang="0">
+                  <a:pos x="connsiteX31" y="connsiteY31"/>
+                </a:cxn>
+                <a:cxn ang="0">
+                  <a:pos x="connsiteX32" y="connsiteY32"/>
+                </a:cxn>
+                <a:cxn ang="0">
+                  <a:pos x="connsiteX33" y="connsiteY33"/>
+                </a:cxn>
+                <a:cxn ang="0">
+                  <a:pos x="connsiteX34" y="connsiteY34"/>
+                </a:cxn>
+                <a:cxn ang="0">
+                  <a:pos x="connsiteX35" y="connsiteY35"/>
+                </a:cxn>
+              </a:cxnLst>
+              <a:rect l="l" t="t" r="r" b="b"/>
+              <a:pathLst>
+                <a:path w="809030" h="319556">
+                  <a:moveTo>
+                    <a:pt x="0" y="127987"/>
+                  </a:moveTo>
+                  <a:lnTo>
+                    <a:pt x="192245" y="127987"/>
+                  </a:lnTo>
+                  <a:cubicBezTo>
+                    <a:pt x="193210" y="123405"/>
+                    <a:pt x="207074" y="63993"/>
+                    <a:pt x="282424" y="63993"/>
+                  </a:cubicBezTo>
+                  <a:lnTo>
+                    <a:pt x="0" y="63993"/>
+                  </a:lnTo>
+                  <a:lnTo>
+                    <a:pt x="0" y="0"/>
+                  </a:lnTo>
+                  <a:lnTo>
+                    <a:pt x="295806" y="0"/>
+                  </a:lnTo>
+                  <a:cubicBezTo>
+                    <a:pt x="374195" y="0"/>
+                    <a:pt x="384973" y="63993"/>
+                    <a:pt x="384973" y="63993"/>
+                  </a:cubicBezTo>
+                  <a:lnTo>
+                    <a:pt x="424034" y="63993"/>
+                  </a:lnTo>
+                  <a:cubicBezTo>
+                    <a:pt x="424034" y="63993"/>
+                    <a:pt x="435077" y="0"/>
+                    <a:pt x="513466" y="0"/>
+                  </a:cubicBezTo>
+                  <a:cubicBezTo>
+                    <a:pt x="591854" y="0"/>
+                    <a:pt x="796420" y="265"/>
+                    <a:pt x="796420" y="265"/>
+                  </a:cubicBezTo>
+                  <a:lnTo>
+                    <a:pt x="796420" y="63993"/>
+                  </a:lnTo>
+                  <a:lnTo>
+                    <a:pt x="602921" y="63993"/>
+                  </a:lnTo>
+                  <a:lnTo>
+                    <a:pt x="602921" y="127697"/>
+                  </a:lnTo>
+                  <a:lnTo>
+                    <a:pt x="719599" y="127697"/>
+                  </a:lnTo>
+                  <a:cubicBezTo>
+                    <a:pt x="797987" y="127697"/>
+                    <a:pt x="809031" y="192197"/>
+                    <a:pt x="809031" y="192197"/>
+                  </a:cubicBezTo>
+                  <a:lnTo>
+                    <a:pt x="602921" y="192197"/>
+                  </a:lnTo>
+                  <a:lnTo>
+                    <a:pt x="602921" y="255708"/>
+                  </a:lnTo>
+                  <a:lnTo>
+                    <a:pt x="808766" y="255563"/>
+                  </a:lnTo>
+                  <a:lnTo>
+                    <a:pt x="808766" y="255563"/>
+                  </a:lnTo>
+                  <a:cubicBezTo>
+                    <a:pt x="808766" y="255563"/>
+                    <a:pt x="797963" y="319557"/>
+                    <a:pt x="719575" y="319557"/>
+                  </a:cubicBezTo>
+                  <a:lnTo>
+                    <a:pt x="436379" y="319557"/>
+                  </a:lnTo>
+                  <a:lnTo>
+                    <a:pt x="436379" y="255708"/>
+                  </a:lnTo>
+                  <a:lnTo>
+                    <a:pt x="384924" y="255708"/>
+                  </a:lnTo>
+                  <a:cubicBezTo>
+                    <a:pt x="383912" y="260868"/>
+                    <a:pt x="370746" y="319557"/>
+                    <a:pt x="295830" y="319557"/>
+                  </a:cubicBezTo>
+                  <a:lnTo>
+                    <a:pt x="0" y="319557"/>
+                  </a:lnTo>
+                  <a:lnTo>
+                    <a:pt x="0" y="255563"/>
+                  </a:lnTo>
+                  <a:lnTo>
+                    <a:pt x="272394" y="255563"/>
+                  </a:lnTo>
+                  <a:cubicBezTo>
+                    <a:pt x="203023" y="250403"/>
+                    <a:pt x="192221" y="192197"/>
+                    <a:pt x="192221" y="192197"/>
+                  </a:cubicBezTo>
+                  <a:lnTo>
+                    <a:pt x="0" y="192197"/>
+                  </a:lnTo>
+                  <a:lnTo>
+                    <a:pt x="0" y="127987"/>
+                  </a:lnTo>
+                  <a:close/>
+                  <a:moveTo>
+                    <a:pt x="513466" y="192197"/>
+                  </a:moveTo>
+                  <a:cubicBezTo>
+                    <a:pt x="438477" y="192197"/>
+                    <a:pt x="424757" y="131169"/>
+                    <a:pt x="424058" y="127842"/>
+                  </a:cubicBezTo>
+                  <a:lnTo>
+                    <a:pt x="384948" y="127842"/>
+                  </a:lnTo>
+                  <a:cubicBezTo>
+                    <a:pt x="384707" y="129699"/>
+                    <a:pt x="382176" y="145805"/>
+                    <a:pt x="366213" y="160321"/>
+                  </a:cubicBezTo>
+                  <a:cubicBezTo>
+                    <a:pt x="384973" y="176259"/>
+                    <a:pt x="384973" y="192197"/>
+                    <a:pt x="384973" y="192197"/>
+                  </a:cubicBezTo>
+                  <a:lnTo>
+                    <a:pt x="513466" y="192197"/>
+                  </a:lnTo>
+                  <a:close/>
+                </a:path>
+              </a:pathLst>
+            </a:custGeom>
+            <a:solidFill>
+              <a:srgbClr val="584FF5"/>
+            </a:solidFill>
+            <a:ln w="2410" cap="flat">
+              <a:noFill/>
+              <a:prstDash val="solid"/>
+              <a:miter/>
+            </a:ln>
+          </p:spPr>
+          <p:txBody>
+            <a:bodyPr rtlCol="0" anchor="ctr"/>
+            <a:lstStyle/>
+            <a:p>
+              <a:pPr marL="0" marR="0" lvl="0" indent="0" defTabSz="761970" eaLnBrk="1" fontAlgn="auto" latinLnBrk="0" hangingPunct="1">
+                <a:lnSpc>
+                  <a:spcPct val="100000"/>
+                </a:lnSpc>
+                <a:spcBef>
+                  <a:spcPts val="0"/>
+                </a:spcBef>
+                <a:spcAft>
+                  <a:spcPts val="0"/>
+                </a:spcAft>
+                <a:buClrTx/>
+                <a:buSzTx/>
+                <a:buFontTx/>
+                <a:buNone/>
+                <a:tabLst/>
+                <a:defRPr/>
+              </a:pPr>
+              <a:endParaRPr kumimoji="0" lang="en-US" sz="1500" b="0" i="0" u="none" strike="noStrike" kern="0" cap="none" spc="0" normalizeH="0" baseline="0" noProof="0">
+                <a:ln>
+                  <a:noFill/>
+                </a:ln>
+                <a:solidFill>
+                  <a:srgbClr val="121212"/>
+                </a:solidFill>
+                <a:effectLst/>
+                <a:uLnTx/>
+                <a:uFillTx/>
+                <a:latin typeface="Inter"/>
+              </a:endParaRPr>
+            </a:p>
+          </p:txBody>
+        </p:sp>
+        <p:sp>
+          <p:nvSpPr>
+            <p:cNvPr id="8" name="Freeform: Shape 7">
+              <a:extLst>
+                <a:ext uri="{FF2B5EF4-FFF2-40B4-BE49-F238E27FC236}">
+                  <a16:creationId xmlns:a16="http://schemas.microsoft.com/office/drawing/2014/main" id="{3C0494AF-C2FA-DB73-BDB7-868AA8801C08}"/>
+                </a:ext>
+              </a:extLst>
+            </p:cNvPr>
+            <p:cNvSpPr/>
+            <p:nvPr/>
+          </p:nvSpPr>
+          <p:spPr>
+            <a:xfrm>
+              <a:off x="10950193" y="6318269"/>
+              <a:ext cx="410675" cy="191714"/>
+            </a:xfrm>
+            <a:custGeom>
+              <a:avLst/>
+              <a:gdLst>
+                <a:gd name="connsiteX0" fmla="*/ 410676 w 410675"/>
+                <a:gd name="connsiteY0" fmla="*/ 0 h 191714"/>
+                <a:gd name="connsiteX1" fmla="*/ 90203 w 410675"/>
+                <a:gd name="connsiteY1" fmla="*/ 0 h 191714"/>
+                <a:gd name="connsiteX2" fmla="*/ 0 w 410675"/>
+                <a:gd name="connsiteY2" fmla="*/ 63993 h 191714"/>
+                <a:gd name="connsiteX3" fmla="*/ 410676 w 410675"/>
+                <a:gd name="connsiteY3" fmla="*/ 63752 h 191714"/>
+                <a:gd name="connsiteX4" fmla="*/ 410676 w 410675"/>
+                <a:gd name="connsiteY4" fmla="*/ 0 h 191714"/>
+                <a:gd name="connsiteX5" fmla="*/ 410676 w 410675"/>
+                <a:gd name="connsiteY5" fmla="*/ 191715 h 191714"/>
+                <a:gd name="connsiteX6" fmla="*/ 87647 w 410675"/>
+                <a:gd name="connsiteY6" fmla="*/ 191715 h 191714"/>
+                <a:gd name="connsiteX7" fmla="*/ 0 w 410675"/>
+                <a:gd name="connsiteY7" fmla="*/ 128204 h 191714"/>
+                <a:gd name="connsiteX8" fmla="*/ 410676 w 410675"/>
+                <a:gd name="connsiteY8" fmla="*/ 128204 h 191714"/>
+                <a:gd name="connsiteX9" fmla="*/ 410676 w 410675"/>
+                <a:gd name="connsiteY9" fmla="*/ 191715 h 191714"/>
+              </a:gdLst>
+              <a:ahLst/>
+              <a:cxnLst>
+                <a:cxn ang="0">
+                  <a:pos x="connsiteX0" y="connsiteY0"/>
+                </a:cxn>
+                <a:cxn ang="0">
+                  <a:pos x="connsiteX1" y="connsiteY1"/>
+                </a:cxn>
+                <a:cxn ang="0">
+                  <a:pos x="connsiteX2" y="connsiteY2"/>
+                </a:cxn>
+                <a:cxn ang="0">
+                  <a:pos x="connsiteX3" y="connsiteY3"/>
+                </a:cxn>
+                <a:cxn ang="0">
+                  <a:pos x="connsiteX4" y="connsiteY4"/>
+                </a:cxn>
+                <a:cxn ang="0">
+                  <a:pos x="connsiteX5" y="connsiteY5"/>
+                </a:cxn>
+                <a:cxn ang="0">
+                  <a:pos x="connsiteX6" y="connsiteY6"/>
+                </a:cxn>
+                <a:cxn ang="0">
+                  <a:pos x="connsiteX7" y="connsiteY7"/>
+                </a:cxn>
+                <a:cxn ang="0">
+                  <a:pos x="connsiteX8" y="connsiteY8"/>
+                </a:cxn>
+                <a:cxn ang="0">
+                  <a:pos x="connsiteX9" y="connsiteY9"/>
+                </a:cxn>
+              </a:cxnLst>
+              <a:rect l="l" t="t" r="r" b="b"/>
+              <a:pathLst>
+                <a:path w="410675" h="191714">
+                  <a:moveTo>
+                    <a:pt x="410676" y="0"/>
+                  </a:moveTo>
+                  <a:lnTo>
+                    <a:pt x="90203" y="0"/>
+                  </a:lnTo>
+                  <a:cubicBezTo>
+                    <a:pt x="11815" y="0"/>
+                    <a:pt x="0" y="63993"/>
+                    <a:pt x="0" y="63993"/>
+                  </a:cubicBezTo>
+                  <a:lnTo>
+                    <a:pt x="410676" y="63752"/>
+                  </a:lnTo>
+                  <a:lnTo>
+                    <a:pt x="410676" y="0"/>
+                  </a:lnTo>
+                  <a:close/>
+                  <a:moveTo>
+                    <a:pt x="410676" y="191715"/>
+                  </a:moveTo>
+                  <a:lnTo>
+                    <a:pt x="87647" y="191715"/>
+                  </a:lnTo>
+                  <a:cubicBezTo>
+                    <a:pt x="9789" y="191715"/>
+                    <a:pt x="121" y="125937"/>
+                    <a:pt x="0" y="128204"/>
+                  </a:cubicBezTo>
+                  <a:lnTo>
+                    <a:pt x="410676" y="128204"/>
+                  </a:lnTo>
+                  <a:lnTo>
+                    <a:pt x="410676" y="191715"/>
+                  </a:lnTo>
+                  <a:close/>
+                </a:path>
+              </a:pathLst>
+            </a:custGeom>
+            <a:solidFill>
+              <a:srgbClr val="584FF5">
+                <a:lumMod val="60000"/>
+                <a:lumOff val="40000"/>
+              </a:srgbClr>
+            </a:solidFill>
+            <a:ln w="2410" cap="flat">
+              <a:noFill/>
+              <a:prstDash val="solid"/>
+              <a:miter/>
+            </a:ln>
+          </p:spPr>
+          <p:txBody>
+            <a:bodyPr rtlCol="0" anchor="ctr"/>
+            <a:lstStyle/>
+            <a:p>
+              <a:pPr marL="0" marR="0" lvl="0" indent="0" defTabSz="761970" eaLnBrk="1" fontAlgn="auto" latinLnBrk="0" hangingPunct="1">
+                <a:lnSpc>
+                  <a:spcPct val="100000"/>
+                </a:lnSpc>
+                <a:spcBef>
+                  <a:spcPts val="0"/>
+                </a:spcBef>
+                <a:spcAft>
+                  <a:spcPts val="0"/>
+                </a:spcAft>
+                <a:buClrTx/>
+                <a:buSzTx/>
+                <a:buFontTx/>
+                <a:buNone/>
+                <a:tabLst/>
+                <a:defRPr/>
+              </a:pPr>
+              <a:endParaRPr kumimoji="0" lang="en-US" sz="1500" b="0" i="0" u="none" strike="noStrike" kern="0" cap="none" spc="0" normalizeH="0" baseline="0" noProof="0">
+                <a:ln>
+                  <a:noFill/>
+                </a:ln>
+                <a:solidFill>
+                  <a:srgbClr val="121212"/>
+                </a:solidFill>
+                <a:effectLst/>
+                <a:uLnTx/>
+                <a:uFillTx/>
+                <a:latin typeface="Inter"/>
+              </a:endParaRPr>
+            </a:p>
+          </p:txBody>
+        </p:sp>
+      </p:grpSp>
+    </p:spTree>
+    <p:extLst>
+      <p:ext uri="{BB962C8B-B14F-4D97-AF65-F5344CB8AC3E}">
+        <p14:creationId xmlns:p14="http://schemas.microsoft.com/office/powerpoint/2010/main" val="1857105681"/>
       </p:ext>
     </p:extLst>
   </p:cSld>
@@ -23745,6 +24584,7 @@
     <p:sldLayoutId id="2147483668" r:id="rId16"/>
     <p:sldLayoutId id="2147483655" r:id="rId17"/>
     <p:sldLayoutId id="2147483677" r:id="rId18"/>
+    <p:sldLayoutId id="2147483678" r:id="rId19"/>
   </p:sldLayoutIdLst>
   <p:txStyles>
     <p:titleStyle>
@@ -24511,6 +25351,498 @@
   <p:cSld>
     <p:spTree>
       <p:nvGrpSpPr>
+        <p:cNvPr id="1" name="">
+          <a:extLst>
+            <a:ext uri="{FF2B5EF4-FFF2-40B4-BE49-F238E27FC236}">
+              <a16:creationId xmlns:a16="http://schemas.microsoft.com/office/drawing/2014/main" id="{1CADDEC0-4E0D-7B98-5997-874242016A28}"/>
+            </a:ext>
+          </a:extLst>
+        </p:cNvPr>
+        <p:cNvGrpSpPr/>
+        <p:nvPr/>
+      </p:nvGrpSpPr>
+      <p:grpSpPr>
+        <a:xfrm>
+          <a:off x="0" y="0"/>
+          <a:ext cx="0" cy="0"/>
+          <a:chOff x="0" y="0"/>
+          <a:chExt cx="0" cy="0"/>
+        </a:xfrm>
+      </p:grpSpPr>
+      <p:sp>
+        <p:nvSpPr>
+          <p:cNvPr id="2" name="Title 1">
+            <a:extLst>
+              <a:ext uri="{FF2B5EF4-FFF2-40B4-BE49-F238E27FC236}">
+                <a16:creationId xmlns:a16="http://schemas.microsoft.com/office/drawing/2014/main" id="{193632AA-1804-C95A-235A-B1630A75A285}"/>
+              </a:ext>
+            </a:extLst>
+          </p:cNvPr>
+          <p:cNvSpPr>
+            <a:spLocks noGrp="1"/>
+          </p:cNvSpPr>
+          <p:nvPr>
+            <p:ph type="ctrTitle"/>
+          </p:nvPr>
+        </p:nvSpPr>
+        <p:spPr>
+          <a:xfrm>
+            <a:off x="614923" y="479570"/>
+            <a:ext cx="10044112" cy="357043"/>
+          </a:xfrm>
+        </p:spPr>
+        <p:txBody>
+          <a:bodyPr/>
+          <a:lstStyle/>
+          <a:p>
+            <a:r>
+              <a:rPr lang="et-EE" b="1" noProof="0" dirty="0"/>
+              <a:t>Tehisaru – eduka sisendi kirjutamine </a:t>
+            </a:r>
+          </a:p>
+        </p:txBody>
+      </p:sp>
+      <p:sp>
+        <p:nvSpPr>
+          <p:cNvPr id="3" name="Content Placeholder 2">
+            <a:extLst>
+              <a:ext uri="{FF2B5EF4-FFF2-40B4-BE49-F238E27FC236}">
+                <a16:creationId xmlns:a16="http://schemas.microsoft.com/office/drawing/2014/main" id="{2ED24C29-7DB7-412C-B56A-46EC71179C17}"/>
+              </a:ext>
+            </a:extLst>
+          </p:cNvPr>
+          <p:cNvSpPr>
+            <a:spLocks noGrp="1"/>
+          </p:cNvSpPr>
+          <p:nvPr>
+            <p:ph sz="quarter" idx="10"/>
+          </p:nvPr>
+        </p:nvSpPr>
+        <p:spPr/>
+        <p:txBody>
+          <a:bodyPr/>
+          <a:lstStyle/>
+          <a:p>
+            <a:pPr marL="342900" indent="-342900">
+              <a:lnSpc>
+                <a:spcPct val="150000"/>
+              </a:lnSpc>
+              <a:buFont typeface="Arial,Sans-Serif" panose="020B0502030000000004" pitchFamily="34" charset="0"/>
+              <a:buChar char="•"/>
+            </a:pPr>
+            <a:r>
+              <a:rPr lang="et-EE" sz="2400" noProof="0" dirty="0">
+                <a:ea typeface="Inter"/>
+                <a:cs typeface="Noto Serif"/>
+              </a:rPr>
+              <a:t>Sisend = keelemudelile antud </a:t>
+            </a:r>
+            <a:r>
+              <a:rPr lang="et-EE" sz="2400" noProof="0" dirty="0" err="1">
+                <a:ea typeface="Inter"/>
+                <a:cs typeface="Noto Serif"/>
+              </a:rPr>
+              <a:t>viip</a:t>
+            </a:r>
+            <a:endParaRPr lang="et-EE" sz="2400" noProof="0" dirty="0">
+              <a:ea typeface="Inter"/>
+              <a:cs typeface="Noto Serif"/>
+            </a:endParaRPr>
+          </a:p>
+          <a:p>
+            <a:pPr marL="342900" indent="-342900">
+              <a:lnSpc>
+                <a:spcPct val="150000"/>
+              </a:lnSpc>
+              <a:buFont typeface="Arial,Sans-Serif" panose="020B0502030000000004" pitchFamily="34" charset="0"/>
+              <a:buChar char="•"/>
+            </a:pPr>
+            <a:r>
+              <a:rPr lang="et-EE" sz="2400" noProof="0" dirty="0">
+                <a:ea typeface="Inter"/>
+                <a:cs typeface="Noto Serif"/>
+              </a:rPr>
+              <a:t>Anna võimalikult palju konteksti ning millises formaadis vastust soovid</a:t>
+            </a:r>
+          </a:p>
+          <a:p>
+            <a:pPr marL="342900" indent="-342900">
+              <a:lnSpc>
+                <a:spcPct val="150000"/>
+              </a:lnSpc>
+              <a:buFont typeface="Arial,Sans-Serif" panose="020B0502030000000004" pitchFamily="34" charset="0"/>
+              <a:buChar char="•"/>
+            </a:pPr>
+            <a:r>
+              <a:rPr lang="et-EE" sz="2400" noProof="0" dirty="0">
+                <a:ea typeface="Inter"/>
+                <a:cs typeface="Noto Serif"/>
+              </a:rPr>
+              <a:t>Täpsusta, millist tarkvara kasutad, kui valemeid küsid</a:t>
+            </a:r>
+            <a:endParaRPr lang="et-EE" sz="2400" noProof="0" dirty="0">
+              <a:cs typeface="Noto Serif"/>
+            </a:endParaRPr>
+          </a:p>
+          <a:p>
+            <a:pPr marL="342900" indent="-342900">
+              <a:lnSpc>
+                <a:spcPct val="150000"/>
+              </a:lnSpc>
+              <a:buClr>
+                <a:srgbClr val="121212"/>
+              </a:buClr>
+              <a:buFont typeface="Arial,Sans-Serif" panose="020B0502030000000004" pitchFamily="34" charset="0"/>
+              <a:buChar char="•"/>
+            </a:pPr>
+            <a:r>
+              <a:rPr lang="et-EE" sz="2400" noProof="0" dirty="0">
+                <a:ea typeface="Inter"/>
+                <a:cs typeface="Noto Serif"/>
+              </a:rPr>
+              <a:t>Iteratiivne protsess – kui kohe ei saa õiget vastust, siis täienda</a:t>
+            </a:r>
+            <a:endParaRPr lang="et-EE" sz="2400" noProof="0" dirty="0">
+              <a:cs typeface="Noto Serif"/>
+            </a:endParaRPr>
+          </a:p>
+          <a:p>
+            <a:pPr marL="342900" indent="-342900">
+              <a:lnSpc>
+                <a:spcPct val="150000"/>
+              </a:lnSpc>
+              <a:buClr>
+                <a:srgbClr val="121212"/>
+              </a:buClr>
+              <a:buFont typeface="Arial,Sans-Serif" panose="020B0502030000000004" pitchFamily="34" charset="0"/>
+              <a:buChar char="•"/>
+            </a:pPr>
+            <a:endParaRPr lang="et-EE" sz="2400" noProof="0" dirty="0">
+              <a:cs typeface="Noto Serif"/>
+            </a:endParaRPr>
+          </a:p>
+          <a:p>
+            <a:pPr marL="342900" indent="-342900">
+              <a:lnSpc>
+                <a:spcPct val="150000"/>
+              </a:lnSpc>
+              <a:buClr>
+                <a:srgbClr val="121212"/>
+              </a:buClr>
+              <a:buFont typeface="Arial,Sans-Serif" panose="020B0502030000000004" pitchFamily="34" charset="0"/>
+              <a:buChar char="•"/>
+            </a:pPr>
+            <a:endParaRPr lang="et-EE" sz="2400" noProof="0" dirty="0">
+              <a:cs typeface="Noto Serif"/>
+            </a:endParaRPr>
+          </a:p>
+          <a:p>
+            <a:pPr marL="342900" indent="-342900">
+              <a:lnSpc>
+                <a:spcPct val="150000"/>
+              </a:lnSpc>
+              <a:buClr>
+                <a:srgbClr val="121212"/>
+              </a:buClr>
+              <a:buFont typeface="Arial,Sans-Serif" panose="020B0502030000000004" pitchFamily="34" charset="0"/>
+              <a:buChar char="•"/>
+            </a:pPr>
+            <a:endParaRPr lang="et-EE" sz="2400" noProof="0" dirty="0">
+              <a:cs typeface="Arial"/>
+            </a:endParaRPr>
+          </a:p>
+          <a:p>
+            <a:pPr marL="857250" lvl="1" indent="-342900">
+              <a:lnSpc>
+                <a:spcPct val="150000"/>
+              </a:lnSpc>
+              <a:buFont typeface="Arial,Sans-Serif" panose="020B0502030000000004" pitchFamily="34" charset="0"/>
+              <a:buChar char="o"/>
+            </a:pPr>
+            <a:endParaRPr lang="et-EE" sz="2400" noProof="0" dirty="0">
+              <a:cs typeface="Arial"/>
+            </a:endParaRPr>
+          </a:p>
+          <a:p>
+            <a:pPr marL="342900" indent="-342900">
+              <a:lnSpc>
+                <a:spcPct val="150000"/>
+              </a:lnSpc>
+              <a:buFont typeface="Arial,Sans-Serif" panose="020B0502030000000004" pitchFamily="34" charset="0"/>
+              <a:buChar char="•"/>
+            </a:pPr>
+            <a:endParaRPr lang="et-EE" sz="2400" noProof="0" dirty="0">
+              <a:cs typeface="Arial"/>
+            </a:endParaRPr>
+          </a:p>
+          <a:p>
+            <a:pPr marL="514350" indent="-514350">
+              <a:lnSpc>
+                <a:spcPct val="150000"/>
+              </a:lnSpc>
+            </a:pPr>
+            <a:endParaRPr lang="et-EE" sz="2800" noProof="0" dirty="0">
+              <a:cs typeface="Arial"/>
+            </a:endParaRPr>
+          </a:p>
+          <a:p>
+            <a:pPr marL="0" indent="0">
+              <a:lnSpc>
+                <a:spcPct val="150000"/>
+              </a:lnSpc>
+              <a:buNone/>
+            </a:pPr>
+            <a:endParaRPr lang="et-EE" sz="2800" noProof="0" dirty="0"/>
+          </a:p>
+        </p:txBody>
+      </p:sp>
+    </p:spTree>
+    <p:extLst>
+      <p:ext uri="{BB962C8B-B14F-4D97-AF65-F5344CB8AC3E}">
+        <p14:creationId xmlns:p14="http://schemas.microsoft.com/office/powerpoint/2010/main" val="4027656671"/>
+      </p:ext>
+    </p:extLst>
+  </p:cSld>
+  <p:clrMapOvr>
+    <a:masterClrMapping/>
+  </p:clrMapOvr>
+  <p:timing>
+    <p:tnLst>
+      <p:par>
+        <p:cTn id="1" dur="indefinite" restart="never" nodeType="tmRoot">
+          <p:childTnLst>
+            <p:seq concurrent="1" nextAc="seek">
+              <p:cTn id="2" dur="indefinite" nodeType="mainSeq">
+                <p:childTnLst>
+                  <p:par>
+                    <p:cTn id="3" fill="hold">
+                      <p:stCondLst>
+                        <p:cond delay="indefinite"/>
+                      </p:stCondLst>
+                      <p:childTnLst>
+                        <p:par>
+                          <p:cTn id="4" fill="hold">
+                            <p:stCondLst>
+                              <p:cond delay="0"/>
+                            </p:stCondLst>
+                            <p:childTnLst>
+                              <p:par>
+                                <p:cTn id="5" presetID="1" presetClass="entr" presetSubtype="0" fill="hold" grpId="0" nodeType="clickEffect">
+                                  <p:stCondLst>
+                                    <p:cond delay="0"/>
+                                  </p:stCondLst>
+                                  <p:childTnLst>
+                                    <p:set>
+                                      <p:cBhvr>
+                                        <p:cTn id="6" dur="1" fill="hold">
+                                          <p:stCondLst>
+                                            <p:cond delay="0"/>
+                                          </p:stCondLst>
+                                        </p:cTn>
+                                        <p:tgtEl>
+                                          <p:spTgt spid="3">
+                                            <p:txEl>
+                                              <p:pRg st="0" end="0"/>
+                                            </p:txEl>
+                                          </p:spTgt>
+                                        </p:tgtEl>
+                                        <p:attrNameLst>
+                                          <p:attrName>style.visibility</p:attrName>
+                                        </p:attrNameLst>
+                                      </p:cBhvr>
+                                      <p:to>
+                                        <p:strVal val="visible"/>
+                                      </p:to>
+                                    </p:set>
+                                  </p:childTnLst>
+                                </p:cTn>
+                              </p:par>
+                            </p:childTnLst>
+                          </p:cTn>
+                        </p:par>
+                      </p:childTnLst>
+                    </p:cTn>
+                  </p:par>
+                  <p:par>
+                    <p:cTn id="7" fill="hold">
+                      <p:stCondLst>
+                        <p:cond delay="indefinite"/>
+                      </p:stCondLst>
+                      <p:childTnLst>
+                        <p:par>
+                          <p:cTn id="8" fill="hold">
+                            <p:stCondLst>
+                              <p:cond delay="0"/>
+                            </p:stCondLst>
+                            <p:childTnLst>
+                              <p:par>
+                                <p:cTn id="9" presetID="1" presetClass="entr" presetSubtype="0" fill="hold" grpId="0" nodeType="clickEffect">
+                                  <p:stCondLst>
+                                    <p:cond delay="0"/>
+                                  </p:stCondLst>
+                                  <p:childTnLst>
+                                    <p:set>
+                                      <p:cBhvr>
+                                        <p:cTn id="10" dur="1" fill="hold">
+                                          <p:stCondLst>
+                                            <p:cond delay="0"/>
+                                          </p:stCondLst>
+                                        </p:cTn>
+                                        <p:tgtEl>
+                                          <p:spTgt spid="3">
+                                            <p:txEl>
+                                              <p:pRg st="1" end="1"/>
+                                            </p:txEl>
+                                          </p:spTgt>
+                                        </p:tgtEl>
+                                        <p:attrNameLst>
+                                          <p:attrName>style.visibility</p:attrName>
+                                        </p:attrNameLst>
+                                      </p:cBhvr>
+                                      <p:to>
+                                        <p:strVal val="visible"/>
+                                      </p:to>
+                                    </p:set>
+                                  </p:childTnLst>
+                                </p:cTn>
+                              </p:par>
+                            </p:childTnLst>
+                          </p:cTn>
+                        </p:par>
+                      </p:childTnLst>
+                    </p:cTn>
+                  </p:par>
+                  <p:par>
+                    <p:cTn id="11" fill="hold">
+                      <p:stCondLst>
+                        <p:cond delay="indefinite"/>
+                      </p:stCondLst>
+                      <p:childTnLst>
+                        <p:par>
+                          <p:cTn id="12" fill="hold">
+                            <p:stCondLst>
+                              <p:cond delay="0"/>
+                            </p:stCondLst>
+                            <p:childTnLst>
+                              <p:par>
+                                <p:cTn id="13" presetID="1" presetClass="entr" presetSubtype="0" fill="hold" grpId="0" nodeType="clickEffect">
+                                  <p:stCondLst>
+                                    <p:cond delay="0"/>
+                                  </p:stCondLst>
+                                  <p:childTnLst>
+                                    <p:set>
+                                      <p:cBhvr>
+                                        <p:cTn id="14" dur="1" fill="hold">
+                                          <p:stCondLst>
+                                            <p:cond delay="0"/>
+                                          </p:stCondLst>
+                                        </p:cTn>
+                                        <p:tgtEl>
+                                          <p:spTgt spid="3">
+                                            <p:txEl>
+                                              <p:pRg st="2" end="2"/>
+                                            </p:txEl>
+                                          </p:spTgt>
+                                        </p:tgtEl>
+                                        <p:attrNameLst>
+                                          <p:attrName>style.visibility</p:attrName>
+                                        </p:attrNameLst>
+                                      </p:cBhvr>
+                                      <p:to>
+                                        <p:strVal val="visible"/>
+                                      </p:to>
+                                    </p:set>
+                                  </p:childTnLst>
+                                </p:cTn>
+                              </p:par>
+                            </p:childTnLst>
+                          </p:cTn>
+                        </p:par>
+                      </p:childTnLst>
+                    </p:cTn>
+                  </p:par>
+                  <p:par>
+                    <p:cTn id="15" fill="hold">
+                      <p:stCondLst>
+                        <p:cond delay="indefinite"/>
+                      </p:stCondLst>
+                      <p:childTnLst>
+                        <p:par>
+                          <p:cTn id="16" fill="hold">
+                            <p:stCondLst>
+                              <p:cond delay="0"/>
+                            </p:stCondLst>
+                            <p:childTnLst>
+                              <p:par>
+                                <p:cTn id="17" presetID="1" presetClass="entr" presetSubtype="0" fill="hold" grpId="0" nodeType="clickEffect">
+                                  <p:stCondLst>
+                                    <p:cond delay="0"/>
+                                  </p:stCondLst>
+                                  <p:childTnLst>
+                                    <p:set>
+                                      <p:cBhvr>
+                                        <p:cTn id="18" dur="1" fill="hold">
+                                          <p:stCondLst>
+                                            <p:cond delay="0"/>
+                                          </p:stCondLst>
+                                        </p:cTn>
+                                        <p:tgtEl>
+                                          <p:spTgt spid="3">
+                                            <p:txEl>
+                                              <p:pRg st="3" end="3"/>
+                                            </p:txEl>
+                                          </p:spTgt>
+                                        </p:tgtEl>
+                                        <p:attrNameLst>
+                                          <p:attrName>style.visibility</p:attrName>
+                                        </p:attrNameLst>
+                                      </p:cBhvr>
+                                      <p:to>
+                                        <p:strVal val="visible"/>
+                                      </p:to>
+                                    </p:set>
+                                  </p:childTnLst>
+                                </p:cTn>
+                              </p:par>
+                            </p:childTnLst>
+                          </p:cTn>
+                        </p:par>
+                      </p:childTnLst>
+                    </p:cTn>
+                  </p:par>
+                </p:childTnLst>
+              </p:cTn>
+              <p:prevCondLst>
+                <p:cond evt="onPrev" delay="0">
+                  <p:tgtEl>
+                    <p:sldTgt/>
+                  </p:tgtEl>
+                </p:cond>
+              </p:prevCondLst>
+              <p:nextCondLst>
+                <p:cond evt="onNext" delay="0">
+                  <p:tgtEl>
+                    <p:sldTgt/>
+                  </p:tgtEl>
+                </p:cond>
+              </p:nextCondLst>
+            </p:seq>
+          </p:childTnLst>
+        </p:cTn>
+      </p:par>
+    </p:tnLst>
+    <p:bldLst>
+      <p:bldP spid="3" grpId="0" build="p"/>
+    </p:bldLst>
+  </p:timing>
+</p:sld>
+</file>
+
+<file path=ppt/slides/slide11.xml><?xml version="1.0" encoding="utf-8"?>
+<p:sld xmlns:a="http://schemas.openxmlformats.org/drawingml/2006/main" xmlns:r="http://schemas.openxmlformats.org/officeDocument/2006/relationships" xmlns:p="http://schemas.openxmlformats.org/presentationml/2006/main">
+  <p:cSld>
+    <p:spTree>
+      <p:nvGrpSpPr>
         <p:cNvPr id="1" name=""/>
         <p:cNvGrpSpPr/>
         <p:nvPr/>
@@ -24672,7 +26004,7 @@
 </p:sld>
 </file>
 
-<file path=ppt/slides/slide11.xml><?xml version="1.0" encoding="utf-8"?>
+<file path=ppt/slides/slide12.xml><?xml version="1.0" encoding="utf-8"?>
 <p:sld xmlns:a="http://schemas.openxmlformats.org/drawingml/2006/main" xmlns:r="http://schemas.openxmlformats.org/officeDocument/2006/relationships" xmlns:p="http://schemas.openxmlformats.org/presentationml/2006/main">
   <p:cSld>
     <p:spTree>
@@ -24964,7 +26296,7 @@
 </p:sld>
 </file>
 
-<file path=ppt/slides/slide12.xml><?xml version="1.0" encoding="utf-8"?>
+<file path=ppt/slides/slide13.xml><?xml version="1.0" encoding="utf-8"?>
 <p:sld xmlns:a="http://schemas.openxmlformats.org/drawingml/2006/main" xmlns:r="http://schemas.openxmlformats.org/officeDocument/2006/relationships" xmlns:p="http://schemas.openxmlformats.org/presentationml/2006/main">
   <p:cSld>
     <p:spTree>
@@ -25103,7 +26435,7 @@
 </p:sld>
 </file>
 
-<file path=ppt/slides/slide13.xml><?xml version="1.0" encoding="utf-8"?>
+<file path=ppt/slides/slide14.xml><?xml version="1.0" encoding="utf-8"?>
 <p:sld xmlns:a="http://schemas.openxmlformats.org/drawingml/2006/main" xmlns:r="http://schemas.openxmlformats.org/officeDocument/2006/relationships" xmlns:p="http://schemas.openxmlformats.org/presentationml/2006/main">
   <p:cSld>
     <p:spTree>
@@ -25216,7 +26548,7 @@
 </p:sld>
 </file>
 
-<file path=ppt/slides/slide14.xml><?xml version="1.0" encoding="utf-8"?>
+<file path=ppt/slides/slide15.xml><?xml version="1.0" encoding="utf-8"?>
 <p:sld xmlns:a="http://schemas.openxmlformats.org/drawingml/2006/main" xmlns:r="http://schemas.openxmlformats.org/officeDocument/2006/relationships" xmlns:p="http://schemas.openxmlformats.org/presentationml/2006/main">
   <p:cSld>
     <p:spTree>
@@ -25629,7 +26961,7 @@
 </p:sld>
 </file>
 
-<file path=ppt/slides/slide15.xml><?xml version="1.0" encoding="utf-8"?>
+<file path=ppt/slides/slide16.xml><?xml version="1.0" encoding="utf-8"?>
 <p:sld xmlns:a="http://schemas.openxmlformats.org/drawingml/2006/main" xmlns:r="http://schemas.openxmlformats.org/officeDocument/2006/relationships" xmlns:p="http://schemas.openxmlformats.org/presentationml/2006/main">
   <p:cSld>
     <p:spTree>
@@ -25742,7 +27074,7 @@
 </p:sld>
 </file>
 
-<file path=ppt/slides/slide16.xml><?xml version="1.0" encoding="utf-8"?>
+<file path=ppt/slides/slide17.xml><?xml version="1.0" encoding="utf-8"?>
 <p:sld xmlns:a="http://schemas.openxmlformats.org/drawingml/2006/main" xmlns:r="http://schemas.openxmlformats.org/officeDocument/2006/relationships" xmlns:p="http://schemas.openxmlformats.org/presentationml/2006/main">
   <p:cSld>
     <p:spTree>
@@ -27852,6 +29184,434 @@
       </p:grpSpPr>
       <p:sp>
         <p:nvSpPr>
+          <p:cNvPr id="2" name="Text 0"/>
+          <p:cNvSpPr/>
+          <p:nvPr/>
+        </p:nvSpPr>
+        <p:spPr>
+          <a:xfrm>
+            <a:off x="579196" y="956041"/>
+            <a:ext cx="9836051" cy="590649"/>
+          </a:xfrm>
+          <a:prstGeom prst="rect">
+            <a:avLst/>
+          </a:prstGeom>
+          <a:noFill/>
+          <a:ln/>
+        </p:spPr>
+        <p:txBody>
+          <a:bodyPr wrap="none" lIns="0" tIns="0" rIns="0" bIns="0" rtlCol="0" anchor="t"/>
+          <a:lstStyle/>
+          <a:p>
+            <a:pPr>
+              <a:lnSpc>
+                <a:spcPts val="4625"/>
+              </a:lnSpc>
+            </a:pPr>
+            <a:r>
+              <a:rPr lang="en-US" sz="3708" b="1" dirty="0" err="1">
+                <a:solidFill>
+                  <a:srgbClr val="000000"/>
+                </a:solidFill>
+                <a:ea typeface="Inter Bold" pitchFamily="34" charset="-122"/>
+                <a:cs typeface="Inter Bold" pitchFamily="34" charset="-120"/>
+              </a:rPr>
+              <a:t>Generatiivne</a:t>
+            </a:r>
+            <a:r>
+              <a:rPr lang="en-US" sz="3708" b="1" dirty="0">
+                <a:solidFill>
+                  <a:srgbClr val="000000"/>
+                </a:solidFill>
+                <a:ea typeface="Inter Bold" pitchFamily="34" charset="-122"/>
+                <a:cs typeface="Inter Bold" pitchFamily="34" charset="-120"/>
+              </a:rPr>
+              <a:t> </a:t>
+            </a:r>
+            <a:r>
+              <a:rPr lang="en-US" sz="3708" b="1" dirty="0" err="1">
+                <a:solidFill>
+                  <a:srgbClr val="000000"/>
+                </a:solidFill>
+                <a:ea typeface="Inter Bold" pitchFamily="34" charset="-122"/>
+                <a:cs typeface="Inter Bold" pitchFamily="34" charset="-120"/>
+              </a:rPr>
+              <a:t>tehisaru</a:t>
+            </a:r>
+            <a:r>
+              <a:rPr lang="en-US" sz="3708" b="1" dirty="0">
+                <a:solidFill>
+                  <a:srgbClr val="000000"/>
+                </a:solidFill>
+                <a:ea typeface="Inter Bold" pitchFamily="34" charset="-122"/>
+                <a:cs typeface="Inter Bold" pitchFamily="34" charset="-120"/>
+              </a:rPr>
+              <a:t> vs traditsiooniline tarkvara</a:t>
+            </a:r>
+            <a:endParaRPr lang="en-US" sz="3708" dirty="0"/>
+          </a:p>
+        </p:txBody>
+      </p:sp>
+      <p:sp>
+        <p:nvSpPr>
+          <p:cNvPr id="3" name="Text 1"/>
+          <p:cNvSpPr/>
+          <p:nvPr/>
+        </p:nvSpPr>
+        <p:spPr>
+          <a:xfrm>
+            <a:off x="560685" y="2348353"/>
+            <a:ext cx="3642916" cy="354409"/>
+          </a:xfrm>
+          <a:prstGeom prst="rect">
+            <a:avLst/>
+          </a:prstGeom>
+          <a:noFill/>
+          <a:ln/>
+        </p:spPr>
+        <p:txBody>
+          <a:bodyPr wrap="none" lIns="0" tIns="0" rIns="0" bIns="0" rtlCol="0" anchor="t"/>
+          <a:lstStyle/>
+          <a:p>
+            <a:pPr>
+              <a:lnSpc>
+                <a:spcPts val="2750"/>
+              </a:lnSpc>
+            </a:pPr>
+            <a:r>
+              <a:rPr lang="en-US" sz="2208" b="1" dirty="0">
+                <a:solidFill>
+                  <a:srgbClr val="000000"/>
+                </a:solidFill>
+                <a:ea typeface="Inter Bold" pitchFamily="34" charset="-122"/>
+                <a:cs typeface="Inter Bold" pitchFamily="34" charset="-120"/>
+              </a:rPr>
+              <a:t>Traditsiooniline programm</a:t>
+            </a:r>
+            <a:endParaRPr lang="en-US" sz="2208" dirty="0"/>
+          </a:p>
+        </p:txBody>
+      </p:sp>
+      <p:sp>
+        <p:nvSpPr>
+          <p:cNvPr id="4" name="Text 2"/>
+          <p:cNvSpPr/>
+          <p:nvPr/>
+        </p:nvSpPr>
+        <p:spPr>
+          <a:xfrm>
+            <a:off x="560685" y="2891775"/>
+            <a:ext cx="5203924" cy="1407914"/>
+          </a:xfrm>
+          <a:prstGeom prst="rect">
+            <a:avLst/>
+          </a:prstGeom>
+          <a:noFill/>
+          <a:ln/>
+        </p:spPr>
+        <p:txBody>
+          <a:bodyPr wrap="square" lIns="0" tIns="0" rIns="0" bIns="0" rtlCol="0" anchor="t"/>
+          <a:lstStyle/>
+          <a:p>
+            <a:pPr marL="285739" indent="-285739">
+              <a:lnSpc>
+                <a:spcPts val="2375"/>
+              </a:lnSpc>
+              <a:buSzPct val="100000"/>
+              <a:buChar char="•"/>
+            </a:pPr>
+            <a:r>
+              <a:rPr lang="en-US" sz="1458" dirty="0">
+                <a:solidFill>
+                  <a:srgbClr val="272525"/>
+                </a:solidFill>
+                <a:ea typeface="Inter" pitchFamily="34" charset="-122"/>
+                <a:cs typeface="Inter" pitchFamily="34" charset="-120"/>
+              </a:rPr>
+              <a:t>Teeb täpselt seda, mis sisse programmeeritud</a:t>
+            </a:r>
+            <a:endParaRPr lang="en-US" sz="1458" dirty="0"/>
+          </a:p>
+          <a:p>
+            <a:pPr marL="285739" indent="-285739">
+              <a:lnSpc>
+                <a:spcPts val="2375"/>
+              </a:lnSpc>
+              <a:buSzPct val="100000"/>
+              <a:buChar char="•"/>
+            </a:pPr>
+            <a:r>
+              <a:rPr lang="en-US" sz="1458" dirty="0">
+                <a:solidFill>
+                  <a:srgbClr val="272525"/>
+                </a:solidFill>
+                <a:ea typeface="Inter" pitchFamily="34" charset="-122"/>
+                <a:cs typeface="Inter" pitchFamily="34" charset="-120"/>
+              </a:rPr>
+              <a:t>Järgib ette määratud reegleid ja algoritme</a:t>
+            </a:r>
+            <a:endParaRPr lang="en-US" sz="1458" dirty="0"/>
+          </a:p>
+          <a:p>
+            <a:pPr marL="285739" indent="-285739">
+              <a:lnSpc>
+                <a:spcPts val="2375"/>
+              </a:lnSpc>
+              <a:buSzPct val="100000"/>
+              <a:buChar char="•"/>
+            </a:pPr>
+            <a:r>
+              <a:rPr lang="en-US" sz="1458" dirty="0">
+                <a:solidFill>
+                  <a:srgbClr val="272525"/>
+                </a:solidFill>
+                <a:ea typeface="Inter" pitchFamily="34" charset="-122"/>
+                <a:cs typeface="Inter" pitchFamily="34" charset="-120"/>
+              </a:rPr>
+              <a:t>Alati ühesugune tulemus samale sisendile</a:t>
+            </a:r>
+            <a:endParaRPr lang="en-US" sz="1458" dirty="0"/>
+          </a:p>
+          <a:p>
+            <a:pPr marL="285739" indent="-285739">
+              <a:lnSpc>
+                <a:spcPts val="2375"/>
+              </a:lnSpc>
+              <a:buSzPct val="100000"/>
+              <a:buChar char="•"/>
+            </a:pPr>
+            <a:r>
+              <a:rPr lang="en-US" sz="1458" dirty="0">
+                <a:solidFill>
+                  <a:srgbClr val="272525"/>
+                </a:solidFill>
+                <a:ea typeface="Inter" pitchFamily="34" charset="-122"/>
+                <a:cs typeface="Inter" pitchFamily="34" charset="-120"/>
+              </a:rPr>
+              <a:t>Ei loo midagi uut ise</a:t>
+            </a:r>
+            <a:endParaRPr lang="en-US" sz="1458" dirty="0"/>
+          </a:p>
+        </p:txBody>
+      </p:sp>
+      <p:sp>
+        <p:nvSpPr>
+          <p:cNvPr id="5" name="Shape 3"/>
+          <p:cNvSpPr/>
+          <p:nvPr/>
+        </p:nvSpPr>
+        <p:spPr>
+          <a:xfrm>
+            <a:off x="6096000" y="2159341"/>
+            <a:ext cx="5476181" cy="2206427"/>
+          </a:xfrm>
+          <a:prstGeom prst="roundRect">
+            <a:avLst>
+              <a:gd name="adj" fmla="val 6168"/>
+            </a:avLst>
+          </a:prstGeom>
+          <a:solidFill>
+            <a:srgbClr val="4950BC"/>
+          </a:solidFill>
+          <a:ln/>
+        </p:spPr>
+        <p:txBody>
+          <a:bodyPr/>
+          <a:lstStyle/>
+          <a:p>
+            <a:endParaRPr lang="et-EE" sz="1500"/>
+          </a:p>
+        </p:txBody>
+      </p:sp>
+      <p:sp>
+        <p:nvSpPr>
+          <p:cNvPr id="6" name="Text 4"/>
+          <p:cNvSpPr/>
+          <p:nvPr/>
+        </p:nvSpPr>
+        <p:spPr>
+          <a:xfrm>
+            <a:off x="6285012" y="2348353"/>
+            <a:ext cx="3655219" cy="354409"/>
+          </a:xfrm>
+          <a:prstGeom prst="rect">
+            <a:avLst/>
+          </a:prstGeom>
+          <a:noFill/>
+          <a:ln/>
+        </p:spPr>
+        <p:txBody>
+          <a:bodyPr wrap="none" lIns="0" tIns="0" rIns="0" bIns="0" rtlCol="0" anchor="t"/>
+          <a:lstStyle/>
+          <a:p>
+            <a:pPr>
+              <a:lnSpc>
+                <a:spcPts val="2750"/>
+              </a:lnSpc>
+            </a:pPr>
+            <a:r>
+              <a:rPr lang="en-US" sz="2208" b="1" dirty="0" err="1">
+                <a:solidFill>
+                  <a:srgbClr val="FFFFFF"/>
+                </a:solidFill>
+                <a:ea typeface="Inter Bold" pitchFamily="34" charset="-122"/>
+                <a:cs typeface="Inter Bold" pitchFamily="34" charset="-120"/>
+              </a:rPr>
+              <a:t>Generatiivne</a:t>
+            </a:r>
+            <a:r>
+              <a:rPr lang="en-US" sz="2208" b="1" dirty="0">
+                <a:solidFill>
+                  <a:srgbClr val="FFFFFF"/>
+                </a:solidFill>
+                <a:ea typeface="Inter Bold" pitchFamily="34" charset="-122"/>
+                <a:cs typeface="Inter Bold" pitchFamily="34" charset="-120"/>
+              </a:rPr>
+              <a:t> </a:t>
+            </a:r>
+            <a:r>
+              <a:rPr lang="en-US" sz="2208" b="1" dirty="0" err="1">
+                <a:solidFill>
+                  <a:srgbClr val="FFFFFF"/>
+                </a:solidFill>
+                <a:ea typeface="Inter Bold" pitchFamily="34" charset="-122"/>
+                <a:cs typeface="Inter Bold" pitchFamily="34" charset="-120"/>
+              </a:rPr>
+              <a:t>tehisaru</a:t>
+            </a:r>
+            <a:endParaRPr lang="en-US" sz="2208" dirty="0"/>
+          </a:p>
+        </p:txBody>
+      </p:sp>
+      <p:sp>
+        <p:nvSpPr>
+          <p:cNvPr id="7" name="Text 5"/>
+          <p:cNvSpPr/>
+          <p:nvPr/>
+        </p:nvSpPr>
+        <p:spPr>
+          <a:xfrm>
+            <a:off x="6285011" y="2891775"/>
+            <a:ext cx="5098157" cy="1407914"/>
+          </a:xfrm>
+          <a:prstGeom prst="rect">
+            <a:avLst/>
+          </a:prstGeom>
+          <a:noFill/>
+          <a:ln/>
+        </p:spPr>
+        <p:txBody>
+          <a:bodyPr wrap="square" lIns="0" tIns="0" rIns="0" bIns="0" rtlCol="0" anchor="t"/>
+          <a:lstStyle/>
+          <a:p>
+            <a:pPr marL="285739" indent="-285739">
+              <a:lnSpc>
+                <a:spcPts val="2375"/>
+              </a:lnSpc>
+              <a:buSzPct val="100000"/>
+              <a:buChar char="•"/>
+            </a:pPr>
+            <a:r>
+              <a:rPr lang="en-US" sz="1458" dirty="0">
+                <a:solidFill>
+                  <a:srgbClr val="FFFFFF"/>
+                </a:solidFill>
+                <a:ea typeface="Inter" pitchFamily="34" charset="-122"/>
+                <a:cs typeface="Inter" pitchFamily="34" charset="-120"/>
+              </a:rPr>
+              <a:t>Loob uut ja originaalset sisu</a:t>
+            </a:r>
+            <a:endParaRPr lang="en-US" sz="1458" dirty="0"/>
+          </a:p>
+          <a:p>
+            <a:pPr marL="285739" indent="-285739">
+              <a:lnSpc>
+                <a:spcPts val="2375"/>
+              </a:lnSpc>
+              <a:buSzPct val="100000"/>
+              <a:buChar char="•"/>
+            </a:pPr>
+            <a:r>
+              <a:rPr lang="en-US" sz="1458" dirty="0">
+                <a:solidFill>
+                  <a:srgbClr val="FFFFFF"/>
+                </a:solidFill>
+                <a:ea typeface="Inter" pitchFamily="34" charset="-122"/>
+                <a:cs typeface="Inter" pitchFamily="34" charset="-120"/>
+              </a:rPr>
+              <a:t>Genereerib teksti, pilte ja tabeleid</a:t>
+            </a:r>
+            <a:endParaRPr lang="en-US" sz="1458" dirty="0"/>
+          </a:p>
+          <a:p>
+            <a:pPr marL="285739" indent="-285739">
+              <a:lnSpc>
+                <a:spcPts val="2375"/>
+              </a:lnSpc>
+              <a:buSzPct val="100000"/>
+              <a:buChar char="•"/>
+            </a:pPr>
+            <a:r>
+              <a:rPr lang="en-US" sz="1458" dirty="0">
+                <a:solidFill>
+                  <a:srgbClr val="FFFFFF"/>
+                </a:solidFill>
+                <a:ea typeface="Inter" pitchFamily="34" charset="-122"/>
+                <a:cs typeface="Inter" pitchFamily="34" charset="-120"/>
+              </a:rPr>
+              <a:t>Kohaneb kontekstiga ja loov vastustes</a:t>
+            </a:r>
+            <a:endParaRPr lang="en-US" sz="1458" dirty="0"/>
+          </a:p>
+          <a:p>
+            <a:pPr marL="285739" indent="-285739">
+              <a:lnSpc>
+                <a:spcPts val="2375"/>
+              </a:lnSpc>
+              <a:buSzPct val="100000"/>
+              <a:buChar char="•"/>
+            </a:pPr>
+            <a:r>
+              <a:rPr lang="en-US" sz="1458" dirty="0">
+                <a:solidFill>
+                  <a:srgbClr val="FFFFFF"/>
+                </a:solidFill>
+                <a:ea typeface="Inter" pitchFamily="34" charset="-122"/>
+                <a:cs typeface="Inter" pitchFamily="34" charset="-120"/>
+              </a:rPr>
+              <a:t>Iga vastus on unikaalne</a:t>
+            </a:r>
+            <a:endParaRPr lang="en-US" sz="1458" dirty="0"/>
+          </a:p>
+        </p:txBody>
+      </p:sp>
+    </p:spTree>
+  </p:cSld>
+  <p:clrMapOvr>
+    <a:masterClrMapping/>
+  </p:clrMapOvr>
+</p:sld>
+</file>
+
+<file path=ppt/slides/slide6.xml><?xml version="1.0" encoding="utf-8"?>
+<p:sld xmlns:a="http://schemas.openxmlformats.org/drawingml/2006/main" xmlns:r="http://schemas.openxmlformats.org/officeDocument/2006/relationships" xmlns:p="http://schemas.openxmlformats.org/presentationml/2006/main">
+  <p:cSld>
+    <p:spTree>
+      <p:nvGrpSpPr>
+        <p:cNvPr id="1" name=""/>
+        <p:cNvGrpSpPr/>
+        <p:nvPr/>
+      </p:nvGrpSpPr>
+      <p:grpSpPr>
+        <a:xfrm>
+          <a:off x="0" y="0"/>
+          <a:ext cx="0" cy="0"/>
+          <a:chOff x="0" y="0"/>
+          <a:chExt cx="0" cy="0"/>
+        </a:xfrm>
+      </p:grpSpPr>
+      <p:sp>
+        <p:nvSpPr>
           <p:cNvPr id="2" name="Title 1">
             <a:extLst>
               <a:ext uri="{FF2B5EF4-FFF2-40B4-BE49-F238E27FC236}">
@@ -28285,7 +30045,7 @@
 </p:sld>
 </file>
 
-<file path=ppt/slides/slide6.xml><?xml version="1.0" encoding="utf-8"?>
+<file path=ppt/slides/slide7.xml><?xml version="1.0" encoding="utf-8"?>
 <p:sld xmlns:a="http://schemas.openxmlformats.org/drawingml/2006/main" xmlns:r="http://schemas.openxmlformats.org/officeDocument/2006/relationships" xmlns:p="http://schemas.openxmlformats.org/presentationml/2006/main">
   <p:cSld>
     <p:spTree>
@@ -28476,7 +30236,7 @@
 </p:sld>
 </file>
 
-<file path=ppt/slides/slide7.xml><?xml version="1.0" encoding="utf-8"?>
+<file path=ppt/slides/slide8.xml><?xml version="1.0" encoding="utf-8"?>
 <p:sld xmlns:a="http://schemas.openxmlformats.org/drawingml/2006/main" xmlns:r="http://schemas.openxmlformats.org/officeDocument/2006/relationships" xmlns:p="http://schemas.openxmlformats.org/presentationml/2006/main">
   <p:cSld>
     <p:spTree>
@@ -28855,7 +30615,7 @@
 </p:sld>
 </file>
 
-<file path=ppt/slides/slide8.xml><?xml version="1.0" encoding="utf-8"?>
+<file path=ppt/slides/slide9.xml><?xml version="1.0" encoding="utf-8"?>
 <p:sld xmlns:a="http://schemas.openxmlformats.org/drawingml/2006/main" xmlns:r="http://schemas.openxmlformats.org/officeDocument/2006/relationships" xmlns:p="http://schemas.openxmlformats.org/presentationml/2006/main">
   <p:cSld>
     <p:spTree>
@@ -29569,498 +31329,6 @@
                                           <p:spTgt spid="3">
                                             <p:txEl>
                                               <p:pRg st="8" end="8"/>
-                                            </p:txEl>
-                                          </p:spTgt>
-                                        </p:tgtEl>
-                                        <p:attrNameLst>
-                                          <p:attrName>style.visibility</p:attrName>
-                                        </p:attrNameLst>
-                                      </p:cBhvr>
-                                      <p:to>
-                                        <p:strVal val="visible"/>
-                                      </p:to>
-                                    </p:set>
-                                  </p:childTnLst>
-                                </p:cTn>
-                              </p:par>
-                            </p:childTnLst>
-                          </p:cTn>
-                        </p:par>
-                      </p:childTnLst>
-                    </p:cTn>
-                  </p:par>
-                </p:childTnLst>
-              </p:cTn>
-              <p:prevCondLst>
-                <p:cond evt="onPrev" delay="0">
-                  <p:tgtEl>
-                    <p:sldTgt/>
-                  </p:tgtEl>
-                </p:cond>
-              </p:prevCondLst>
-              <p:nextCondLst>
-                <p:cond evt="onNext" delay="0">
-                  <p:tgtEl>
-                    <p:sldTgt/>
-                  </p:tgtEl>
-                </p:cond>
-              </p:nextCondLst>
-            </p:seq>
-          </p:childTnLst>
-        </p:cTn>
-      </p:par>
-    </p:tnLst>
-    <p:bldLst>
-      <p:bldP spid="3" grpId="0" build="p"/>
-    </p:bldLst>
-  </p:timing>
-</p:sld>
-</file>
-
-<file path=ppt/slides/slide9.xml><?xml version="1.0" encoding="utf-8"?>
-<p:sld xmlns:a="http://schemas.openxmlformats.org/drawingml/2006/main" xmlns:r="http://schemas.openxmlformats.org/officeDocument/2006/relationships" xmlns:p="http://schemas.openxmlformats.org/presentationml/2006/main">
-  <p:cSld>
-    <p:spTree>
-      <p:nvGrpSpPr>
-        <p:cNvPr id="1" name="">
-          <a:extLst>
-            <a:ext uri="{FF2B5EF4-FFF2-40B4-BE49-F238E27FC236}">
-              <a16:creationId xmlns:a16="http://schemas.microsoft.com/office/drawing/2014/main" id="{1CADDEC0-4E0D-7B98-5997-874242016A28}"/>
-            </a:ext>
-          </a:extLst>
-        </p:cNvPr>
-        <p:cNvGrpSpPr/>
-        <p:nvPr/>
-      </p:nvGrpSpPr>
-      <p:grpSpPr>
-        <a:xfrm>
-          <a:off x="0" y="0"/>
-          <a:ext cx="0" cy="0"/>
-          <a:chOff x="0" y="0"/>
-          <a:chExt cx="0" cy="0"/>
-        </a:xfrm>
-      </p:grpSpPr>
-      <p:sp>
-        <p:nvSpPr>
-          <p:cNvPr id="2" name="Title 1">
-            <a:extLst>
-              <a:ext uri="{FF2B5EF4-FFF2-40B4-BE49-F238E27FC236}">
-                <a16:creationId xmlns:a16="http://schemas.microsoft.com/office/drawing/2014/main" id="{193632AA-1804-C95A-235A-B1630A75A285}"/>
-              </a:ext>
-            </a:extLst>
-          </p:cNvPr>
-          <p:cNvSpPr>
-            <a:spLocks noGrp="1"/>
-          </p:cNvSpPr>
-          <p:nvPr>
-            <p:ph type="ctrTitle"/>
-          </p:nvPr>
-        </p:nvSpPr>
-        <p:spPr>
-          <a:xfrm>
-            <a:off x="614923" y="479570"/>
-            <a:ext cx="10044112" cy="357043"/>
-          </a:xfrm>
-        </p:spPr>
-        <p:txBody>
-          <a:bodyPr/>
-          <a:lstStyle/>
-          <a:p>
-            <a:r>
-              <a:rPr lang="et-EE" b="1" noProof="0" dirty="0"/>
-              <a:t>Tehisaru – eduka sisendi kirjutamine </a:t>
-            </a:r>
-          </a:p>
-        </p:txBody>
-      </p:sp>
-      <p:sp>
-        <p:nvSpPr>
-          <p:cNvPr id="3" name="Content Placeholder 2">
-            <a:extLst>
-              <a:ext uri="{FF2B5EF4-FFF2-40B4-BE49-F238E27FC236}">
-                <a16:creationId xmlns:a16="http://schemas.microsoft.com/office/drawing/2014/main" id="{2ED24C29-7DB7-412C-B56A-46EC71179C17}"/>
-              </a:ext>
-            </a:extLst>
-          </p:cNvPr>
-          <p:cNvSpPr>
-            <a:spLocks noGrp="1"/>
-          </p:cNvSpPr>
-          <p:nvPr>
-            <p:ph sz="quarter" idx="10"/>
-          </p:nvPr>
-        </p:nvSpPr>
-        <p:spPr/>
-        <p:txBody>
-          <a:bodyPr/>
-          <a:lstStyle/>
-          <a:p>
-            <a:pPr marL="342900" indent="-342900">
-              <a:lnSpc>
-                <a:spcPct val="150000"/>
-              </a:lnSpc>
-              <a:buFont typeface="Arial,Sans-Serif" panose="020B0502030000000004" pitchFamily="34" charset="0"/>
-              <a:buChar char="•"/>
-            </a:pPr>
-            <a:r>
-              <a:rPr lang="et-EE" sz="2400" noProof="0" dirty="0">
-                <a:ea typeface="Inter"/>
-                <a:cs typeface="Noto Serif"/>
-              </a:rPr>
-              <a:t>Sisend = keelemudelile antud </a:t>
-            </a:r>
-            <a:r>
-              <a:rPr lang="et-EE" sz="2400" noProof="0" dirty="0" err="1">
-                <a:ea typeface="Inter"/>
-                <a:cs typeface="Noto Serif"/>
-              </a:rPr>
-              <a:t>viip</a:t>
-            </a:r>
-            <a:endParaRPr lang="et-EE" sz="2400" noProof="0" dirty="0">
-              <a:ea typeface="Inter"/>
-              <a:cs typeface="Noto Serif"/>
-            </a:endParaRPr>
-          </a:p>
-          <a:p>
-            <a:pPr marL="342900" indent="-342900">
-              <a:lnSpc>
-                <a:spcPct val="150000"/>
-              </a:lnSpc>
-              <a:buFont typeface="Arial,Sans-Serif" panose="020B0502030000000004" pitchFamily="34" charset="0"/>
-              <a:buChar char="•"/>
-            </a:pPr>
-            <a:r>
-              <a:rPr lang="et-EE" sz="2400" noProof="0" dirty="0">
-                <a:ea typeface="Inter"/>
-                <a:cs typeface="Noto Serif"/>
-              </a:rPr>
-              <a:t>Anna võimalikult palju konteksti ning millises formaadis vastust soovid</a:t>
-            </a:r>
-          </a:p>
-          <a:p>
-            <a:pPr marL="342900" indent="-342900">
-              <a:lnSpc>
-                <a:spcPct val="150000"/>
-              </a:lnSpc>
-              <a:buFont typeface="Arial,Sans-Serif" panose="020B0502030000000004" pitchFamily="34" charset="0"/>
-              <a:buChar char="•"/>
-            </a:pPr>
-            <a:r>
-              <a:rPr lang="et-EE" sz="2400" noProof="0" dirty="0">
-                <a:ea typeface="Inter"/>
-                <a:cs typeface="Noto Serif"/>
-              </a:rPr>
-              <a:t>Täpsusta, millist tarkvara kasutad, kui valemeid küsid</a:t>
-            </a:r>
-            <a:endParaRPr lang="et-EE" sz="2400" noProof="0" dirty="0">
-              <a:cs typeface="Noto Serif"/>
-            </a:endParaRPr>
-          </a:p>
-          <a:p>
-            <a:pPr marL="342900" indent="-342900">
-              <a:lnSpc>
-                <a:spcPct val="150000"/>
-              </a:lnSpc>
-              <a:buClr>
-                <a:srgbClr val="121212"/>
-              </a:buClr>
-              <a:buFont typeface="Arial,Sans-Serif" panose="020B0502030000000004" pitchFamily="34" charset="0"/>
-              <a:buChar char="•"/>
-            </a:pPr>
-            <a:r>
-              <a:rPr lang="et-EE" sz="2400" noProof="0" dirty="0">
-                <a:ea typeface="Inter"/>
-                <a:cs typeface="Noto Serif"/>
-              </a:rPr>
-              <a:t>Iteratiivne protsess – kui kohe ei saa õiget vastust, siis täienda</a:t>
-            </a:r>
-            <a:endParaRPr lang="et-EE" sz="2400" noProof="0" dirty="0">
-              <a:cs typeface="Noto Serif"/>
-            </a:endParaRPr>
-          </a:p>
-          <a:p>
-            <a:pPr marL="342900" indent="-342900">
-              <a:lnSpc>
-                <a:spcPct val="150000"/>
-              </a:lnSpc>
-              <a:buClr>
-                <a:srgbClr val="121212"/>
-              </a:buClr>
-              <a:buFont typeface="Arial,Sans-Serif" panose="020B0502030000000004" pitchFamily="34" charset="0"/>
-              <a:buChar char="•"/>
-            </a:pPr>
-            <a:endParaRPr lang="et-EE" sz="2400" noProof="0" dirty="0">
-              <a:cs typeface="Noto Serif"/>
-            </a:endParaRPr>
-          </a:p>
-          <a:p>
-            <a:pPr marL="342900" indent="-342900">
-              <a:lnSpc>
-                <a:spcPct val="150000"/>
-              </a:lnSpc>
-              <a:buClr>
-                <a:srgbClr val="121212"/>
-              </a:buClr>
-              <a:buFont typeface="Arial,Sans-Serif" panose="020B0502030000000004" pitchFamily="34" charset="0"/>
-              <a:buChar char="•"/>
-            </a:pPr>
-            <a:endParaRPr lang="et-EE" sz="2400" noProof="0" dirty="0">
-              <a:cs typeface="Noto Serif"/>
-            </a:endParaRPr>
-          </a:p>
-          <a:p>
-            <a:pPr marL="342900" indent="-342900">
-              <a:lnSpc>
-                <a:spcPct val="150000"/>
-              </a:lnSpc>
-              <a:buClr>
-                <a:srgbClr val="121212"/>
-              </a:buClr>
-              <a:buFont typeface="Arial,Sans-Serif" panose="020B0502030000000004" pitchFamily="34" charset="0"/>
-              <a:buChar char="•"/>
-            </a:pPr>
-            <a:endParaRPr lang="et-EE" sz="2400" noProof="0" dirty="0">
-              <a:cs typeface="Arial"/>
-            </a:endParaRPr>
-          </a:p>
-          <a:p>
-            <a:pPr marL="857250" lvl="1" indent="-342900">
-              <a:lnSpc>
-                <a:spcPct val="150000"/>
-              </a:lnSpc>
-              <a:buFont typeface="Arial,Sans-Serif" panose="020B0502030000000004" pitchFamily="34" charset="0"/>
-              <a:buChar char="o"/>
-            </a:pPr>
-            <a:endParaRPr lang="et-EE" sz="2400" noProof="0" dirty="0">
-              <a:cs typeface="Arial"/>
-            </a:endParaRPr>
-          </a:p>
-          <a:p>
-            <a:pPr marL="342900" indent="-342900">
-              <a:lnSpc>
-                <a:spcPct val="150000"/>
-              </a:lnSpc>
-              <a:buFont typeface="Arial,Sans-Serif" panose="020B0502030000000004" pitchFamily="34" charset="0"/>
-              <a:buChar char="•"/>
-            </a:pPr>
-            <a:endParaRPr lang="et-EE" sz="2400" noProof="0" dirty="0">
-              <a:cs typeface="Arial"/>
-            </a:endParaRPr>
-          </a:p>
-          <a:p>
-            <a:pPr marL="514350" indent="-514350">
-              <a:lnSpc>
-                <a:spcPct val="150000"/>
-              </a:lnSpc>
-            </a:pPr>
-            <a:endParaRPr lang="et-EE" sz="2800" noProof="0" dirty="0">
-              <a:cs typeface="Arial"/>
-            </a:endParaRPr>
-          </a:p>
-          <a:p>
-            <a:pPr marL="0" indent="0">
-              <a:lnSpc>
-                <a:spcPct val="150000"/>
-              </a:lnSpc>
-              <a:buNone/>
-            </a:pPr>
-            <a:endParaRPr lang="et-EE" sz="2800" noProof="0" dirty="0"/>
-          </a:p>
-        </p:txBody>
-      </p:sp>
-    </p:spTree>
-    <p:extLst>
-      <p:ext uri="{BB962C8B-B14F-4D97-AF65-F5344CB8AC3E}">
-        <p14:creationId xmlns:p14="http://schemas.microsoft.com/office/powerpoint/2010/main" val="4027656671"/>
-      </p:ext>
-    </p:extLst>
-  </p:cSld>
-  <p:clrMapOvr>
-    <a:masterClrMapping/>
-  </p:clrMapOvr>
-  <p:timing>
-    <p:tnLst>
-      <p:par>
-        <p:cTn id="1" dur="indefinite" restart="never" nodeType="tmRoot">
-          <p:childTnLst>
-            <p:seq concurrent="1" nextAc="seek">
-              <p:cTn id="2" dur="indefinite" nodeType="mainSeq">
-                <p:childTnLst>
-                  <p:par>
-                    <p:cTn id="3" fill="hold">
-                      <p:stCondLst>
-                        <p:cond delay="indefinite"/>
-                      </p:stCondLst>
-                      <p:childTnLst>
-                        <p:par>
-                          <p:cTn id="4" fill="hold">
-                            <p:stCondLst>
-                              <p:cond delay="0"/>
-                            </p:stCondLst>
-                            <p:childTnLst>
-                              <p:par>
-                                <p:cTn id="5" presetID="1" presetClass="entr" presetSubtype="0" fill="hold" grpId="0" nodeType="clickEffect">
-                                  <p:stCondLst>
-                                    <p:cond delay="0"/>
-                                  </p:stCondLst>
-                                  <p:childTnLst>
-                                    <p:set>
-                                      <p:cBhvr>
-                                        <p:cTn id="6" dur="1" fill="hold">
-                                          <p:stCondLst>
-                                            <p:cond delay="0"/>
-                                          </p:stCondLst>
-                                        </p:cTn>
-                                        <p:tgtEl>
-                                          <p:spTgt spid="3">
-                                            <p:txEl>
-                                              <p:pRg st="0" end="0"/>
-                                            </p:txEl>
-                                          </p:spTgt>
-                                        </p:tgtEl>
-                                        <p:attrNameLst>
-                                          <p:attrName>style.visibility</p:attrName>
-                                        </p:attrNameLst>
-                                      </p:cBhvr>
-                                      <p:to>
-                                        <p:strVal val="visible"/>
-                                      </p:to>
-                                    </p:set>
-                                  </p:childTnLst>
-                                </p:cTn>
-                              </p:par>
-                            </p:childTnLst>
-                          </p:cTn>
-                        </p:par>
-                      </p:childTnLst>
-                    </p:cTn>
-                  </p:par>
-                  <p:par>
-                    <p:cTn id="7" fill="hold">
-                      <p:stCondLst>
-                        <p:cond delay="indefinite"/>
-                      </p:stCondLst>
-                      <p:childTnLst>
-                        <p:par>
-                          <p:cTn id="8" fill="hold">
-                            <p:stCondLst>
-                              <p:cond delay="0"/>
-                            </p:stCondLst>
-                            <p:childTnLst>
-                              <p:par>
-                                <p:cTn id="9" presetID="1" presetClass="entr" presetSubtype="0" fill="hold" grpId="0" nodeType="clickEffect">
-                                  <p:stCondLst>
-                                    <p:cond delay="0"/>
-                                  </p:stCondLst>
-                                  <p:childTnLst>
-                                    <p:set>
-                                      <p:cBhvr>
-                                        <p:cTn id="10" dur="1" fill="hold">
-                                          <p:stCondLst>
-                                            <p:cond delay="0"/>
-                                          </p:stCondLst>
-                                        </p:cTn>
-                                        <p:tgtEl>
-                                          <p:spTgt spid="3">
-                                            <p:txEl>
-                                              <p:pRg st="1" end="1"/>
-                                            </p:txEl>
-                                          </p:spTgt>
-                                        </p:tgtEl>
-                                        <p:attrNameLst>
-                                          <p:attrName>style.visibility</p:attrName>
-                                        </p:attrNameLst>
-                                      </p:cBhvr>
-                                      <p:to>
-                                        <p:strVal val="visible"/>
-                                      </p:to>
-                                    </p:set>
-                                  </p:childTnLst>
-                                </p:cTn>
-                              </p:par>
-                            </p:childTnLst>
-                          </p:cTn>
-                        </p:par>
-                      </p:childTnLst>
-                    </p:cTn>
-                  </p:par>
-                  <p:par>
-                    <p:cTn id="11" fill="hold">
-                      <p:stCondLst>
-                        <p:cond delay="indefinite"/>
-                      </p:stCondLst>
-                      <p:childTnLst>
-                        <p:par>
-                          <p:cTn id="12" fill="hold">
-                            <p:stCondLst>
-                              <p:cond delay="0"/>
-                            </p:stCondLst>
-                            <p:childTnLst>
-                              <p:par>
-                                <p:cTn id="13" presetID="1" presetClass="entr" presetSubtype="0" fill="hold" grpId="0" nodeType="clickEffect">
-                                  <p:stCondLst>
-                                    <p:cond delay="0"/>
-                                  </p:stCondLst>
-                                  <p:childTnLst>
-                                    <p:set>
-                                      <p:cBhvr>
-                                        <p:cTn id="14" dur="1" fill="hold">
-                                          <p:stCondLst>
-                                            <p:cond delay="0"/>
-                                          </p:stCondLst>
-                                        </p:cTn>
-                                        <p:tgtEl>
-                                          <p:spTgt spid="3">
-                                            <p:txEl>
-                                              <p:pRg st="2" end="2"/>
-                                            </p:txEl>
-                                          </p:spTgt>
-                                        </p:tgtEl>
-                                        <p:attrNameLst>
-                                          <p:attrName>style.visibility</p:attrName>
-                                        </p:attrNameLst>
-                                      </p:cBhvr>
-                                      <p:to>
-                                        <p:strVal val="visible"/>
-                                      </p:to>
-                                    </p:set>
-                                  </p:childTnLst>
-                                </p:cTn>
-                              </p:par>
-                            </p:childTnLst>
-                          </p:cTn>
-                        </p:par>
-                      </p:childTnLst>
-                    </p:cTn>
-                  </p:par>
-                  <p:par>
-                    <p:cTn id="15" fill="hold">
-                      <p:stCondLst>
-                        <p:cond delay="indefinite"/>
-                      </p:stCondLst>
-                      <p:childTnLst>
-                        <p:par>
-                          <p:cTn id="16" fill="hold">
-                            <p:stCondLst>
-                              <p:cond delay="0"/>
-                            </p:stCondLst>
-                            <p:childTnLst>
-                              <p:par>
-                                <p:cTn id="17" presetID="1" presetClass="entr" presetSubtype="0" fill="hold" grpId="0" nodeType="clickEffect">
-                                  <p:stCondLst>
-                                    <p:cond delay="0"/>
-                                  </p:stCondLst>
-                                  <p:childTnLst>
-                                    <p:set>
-                                      <p:cBhvr>
-                                        <p:cTn id="18" dur="1" fill="hold">
-                                          <p:stCondLst>
-                                            <p:cond delay="0"/>
-                                          </p:stCondLst>
-                                        </p:cTn>
-                                        <p:tgtEl>
-                                          <p:spTgt spid="3">
-                                            <p:txEl>
-                                              <p:pRg st="3" end="3"/>
                                             </p:txEl>
                                           </p:spTgt>
                                         </p:tgtEl>
@@ -30901,18 +32169,18 @@
 </file>
 
 <file path=customXml/item1.xml><?xml version="1.0" encoding="utf-8"?>
+<p:properties xmlns:p="http://schemas.microsoft.com/office/2006/metadata/properties" xmlns:xsi="http://www.w3.org/2001/XMLSchema-instance" xmlns:pc="http://schemas.microsoft.com/office/infopath/2007/PartnerControls">
+  <documentManagement/>
+</p:properties>
+</file>
+
+<file path=customXml/item2.xml><?xml version="1.0" encoding="utf-8"?>
 <?mso-contentType ?>
 <FormTemplates xmlns="http://schemas.microsoft.com/sharepoint/v3/contenttype/forms">
   <Display>DocumentLibraryForm</Display>
   <Edit>DocumentLibraryForm</Edit>
   <New>DocumentLibraryForm</New>
 </FormTemplates>
-</file>
-
-<file path=customXml/item2.xml><?xml version="1.0" encoding="utf-8"?>
-<p:properties xmlns:p="http://schemas.microsoft.com/office/2006/metadata/properties" xmlns:xsi="http://www.w3.org/2001/XMLSchema-instance" xmlns:pc="http://schemas.microsoft.com/office/infopath/2007/PartnerControls">
-  <documentManagement/>
-</p:properties>
 </file>
 
 <file path=customXml/item3.xml><?xml version="1.0" encoding="utf-8"?>
@@ -31084,18 +32352,18 @@
 </file>
 
 <file path=customXml/itemProps1.xml><?xml version="1.0" encoding="utf-8"?>
-<ds:datastoreItem xmlns:ds="http://schemas.openxmlformats.org/officeDocument/2006/customXml" ds:itemID="{9DC439CA-6F1C-4005-ACA6-A52E04DEE0A7}">
+<ds:datastoreItem xmlns:ds="http://schemas.openxmlformats.org/officeDocument/2006/customXml" ds:itemID="{5BDF4908-A52A-47DD-A794-6E02D71942FC}">
   <ds:schemaRefs>
-    <ds:schemaRef ds:uri="http://schemas.microsoft.com/sharepoint/v3/contenttype/forms"/>
+    <ds:schemaRef ds:uri="http://schemas.microsoft.com/office/2006/metadata/properties"/>
+    <ds:schemaRef ds:uri="http://schemas.microsoft.com/office/infopath/2007/PartnerControls"/>
   </ds:schemaRefs>
 </ds:datastoreItem>
 </file>
 
 <file path=customXml/itemProps2.xml><?xml version="1.0" encoding="utf-8"?>
-<ds:datastoreItem xmlns:ds="http://schemas.openxmlformats.org/officeDocument/2006/customXml" ds:itemID="{5BDF4908-A52A-47DD-A794-6E02D71942FC}">
+<ds:datastoreItem xmlns:ds="http://schemas.openxmlformats.org/officeDocument/2006/customXml" ds:itemID="{9DC439CA-6F1C-4005-ACA6-A52E04DEE0A7}">
   <ds:schemaRefs>
-    <ds:schemaRef ds:uri="http://schemas.microsoft.com/office/2006/metadata/properties"/>
-    <ds:schemaRef ds:uri="http://schemas.microsoft.com/office/infopath/2007/PartnerControls"/>
+    <ds:schemaRef ds:uri="http://schemas.microsoft.com/sharepoint/v3/contenttype/forms"/>
   </ds:schemaRefs>
 </ds:datastoreItem>
 </file>

--- a/Day15/15-paev-andmetarkus-esitlus.pptx
+++ b/Day15/15-paev-andmetarkus-esitlus.pptx
@@ -14,8 +14,8 @@
     <p:sldId id="417" r:id="rId5"/>
     <p:sldId id="479" r:id="rId6"/>
     <p:sldId id="567" r:id="rId7"/>
-    <p:sldId id="475" r:id="rId8"/>
-    <p:sldId id="452" r:id="rId9"/>
+    <p:sldId id="452" r:id="rId8"/>
+    <p:sldId id="475" r:id="rId9"/>
     <p:sldId id="647" r:id="rId10"/>
     <p:sldId id="476" r:id="rId11"/>
     <p:sldId id="477" r:id="rId12"/>
@@ -35,22 +35,24 @@
       <p:font typeface="Inter" panose="020B0604020202020204" charset="0"/>
       <p:regular r:id="rId23"/>
       <p:bold r:id="rId24"/>
+      <p:italic r:id="rId25"/>
+      <p:boldItalic r:id="rId26"/>
     </p:embeddedFont>
     <p:embeddedFont>
       <p:font typeface="Inter Bold" panose="020B0604020202020204" charset="0"/>
-      <p:bold r:id="rId25"/>
+      <p:bold r:id="rId27"/>
     </p:embeddedFont>
     <p:embeddedFont>
       <p:font typeface="Noto Serif" panose="02020600060500020200" pitchFamily="18" charset="0"/>
-      <p:regular r:id="rId26"/>
-      <p:bold r:id="rId27"/>
-      <p:italic r:id="rId28"/>
-      <p:boldItalic r:id="rId29"/>
+      <p:regular r:id="rId28"/>
+      <p:bold r:id="rId29"/>
+      <p:italic r:id="rId30"/>
+      <p:boldItalic r:id="rId31"/>
     </p:embeddedFont>
     <p:embeddedFont>
       <p:font typeface="Poppins SemiBold" panose="00000700000000000000" pitchFamily="2" charset="0"/>
-      <p:bold r:id="rId30"/>
-      <p:boldItalic r:id="rId31"/>
+      <p:bold r:id="rId32"/>
+      <p:boldItalic r:id="rId33"/>
     </p:embeddedFont>
   </p:embeddedFontLst>
   <p:defaultTextStyle>
@@ -162,7 +164,7 @@
 <file path=ppt/revisionInfo.xml><?xml version="1.0" encoding="utf-8"?>
 <p1510:revInfo xmlns:a="http://schemas.openxmlformats.org/drawingml/2006/main" xmlns:r="http://schemas.openxmlformats.org/officeDocument/2006/relationships" xmlns:p1510="http://schemas.microsoft.com/office/powerpoint/2015/10/main">
   <p1510:revLst>
-    <p1510:client id="{2EADCC2F-0731-4A5B-A287-B42682DA1D9C}" v="91" dt="2026-04-14T08:13:17.052"/>
+    <p1510:client id="{2EADCC2F-0731-4A5B-A287-B42682DA1D9C}" v="1" dt="2026-04-19T18:02:23.753"/>
   </p1510:revLst>
 </p1510:revInfo>
 </file>
@@ -172,7 +174,7 @@
   <pc:docChgLst>
     <pc:chgData name="Virve Räni" userId="161a7437-7ef4-49ec-91bf-54882f313dfe" providerId="ADAL" clId="{6D754EED-65AA-4A21-B175-6769012CF487}"/>
     <pc:docChg chg="addSld delSld modSld sldOrd">
-      <pc:chgData name="Virve Räni" userId="161a7437-7ef4-49ec-91bf-54882f313dfe" providerId="ADAL" clId="{6D754EED-65AA-4A21-B175-6769012CF487}" dt="2026-04-14T08:13:17.052" v="511" actId="20577"/>
+      <pc:chgData name="Virve Räni" userId="161a7437-7ef4-49ec-91bf-54882f313dfe" providerId="ADAL" clId="{6D754EED-65AA-4A21-B175-6769012CF487}" dt="2026-04-19T18:02:23.753" v="573"/>
       <pc:docMkLst>
         <pc:docMk/>
       </pc:docMkLst>
@@ -245,8 +247,8 @@
           </ac:spMkLst>
         </pc:spChg>
       </pc:sldChg>
-      <pc:sldChg chg="modSp add mod">
-        <pc:chgData name="Virve Räni" userId="161a7437-7ef4-49ec-91bf-54882f313dfe" providerId="ADAL" clId="{6D754EED-65AA-4A21-B175-6769012CF487}" dt="2026-04-14T08:06:07.883" v="377" actId="790"/>
+      <pc:sldChg chg="modSp add mod ord">
+        <pc:chgData name="Virve Räni" userId="161a7437-7ef4-49ec-91bf-54882f313dfe" providerId="ADAL" clId="{6D754EED-65AA-4A21-B175-6769012CF487}" dt="2026-04-19T17:43:01.805" v="513"/>
         <pc:sldMkLst>
           <pc:docMk/>
           <pc:sldMk cId="3557357758" sldId="452"/>
@@ -506,8 +508,8 @@
           </ac:spMkLst>
         </pc:spChg>
       </pc:sldChg>
-      <pc:sldChg chg="modSp mod">
-        <pc:chgData name="Virve Räni" userId="161a7437-7ef4-49ec-91bf-54882f313dfe" providerId="ADAL" clId="{6D754EED-65AA-4A21-B175-6769012CF487}" dt="2026-04-14T08:06:07.883" v="377" actId="790"/>
+      <pc:sldChg chg="modSp mod modAnim">
+        <pc:chgData name="Virve Räni" userId="161a7437-7ef4-49ec-91bf-54882f313dfe" providerId="ADAL" clId="{6D754EED-65AA-4A21-B175-6769012CF487}" dt="2026-04-19T18:02:23.753" v="573"/>
         <pc:sldMkLst>
           <pc:docMk/>
           <pc:sldMk cId="3682630093" sldId="646"/>
@@ -521,7 +523,7 @@
           </ac:spMkLst>
         </pc:spChg>
         <pc:spChg chg="mod">
-          <ac:chgData name="Virve Räni" userId="161a7437-7ef4-49ec-91bf-54882f313dfe" providerId="ADAL" clId="{6D754EED-65AA-4A21-B175-6769012CF487}" dt="2026-04-14T08:06:07.883" v="377" actId="790"/>
+          <ac:chgData name="Virve Räni" userId="161a7437-7ef4-49ec-91bf-54882f313dfe" providerId="ADAL" clId="{6D754EED-65AA-4A21-B175-6769012CF487}" dt="2026-04-19T18:02:16.933" v="572" actId="20577"/>
           <ac:spMkLst>
             <pc:docMk/>
             <pc:sldMk cId="3682630093" sldId="646"/>
@@ -651,7 +653,7 @@
           <a:p>
             <a:fld id="{F9D2AD6E-DEDD-49A0-A4BE-7A081A9112DA}" type="datetimeFigureOut">
               <a:rPr lang="en-US" smtClean="0"/>
-              <a:t>4/14/2026</a:t>
+              <a:t>4/19/2026</a:t>
             </a:fld>
             <a:endParaRPr lang="en-US"/>
           </a:p>
@@ -827,7 +829,7 @@
           </a:lstStyle>
           <a:p>
             <a:fld id="{2AF9C1A6-4321-41FA-B001-4140F0E2457F}" type="datetimeFigureOut">
-              <a:t>14.04.2026</a:t>
+              <a:t>19.04.2026</a:t>
             </a:fld>
             <a:endParaRPr lang="en-US"/>
           </a:p>
@@ -12417,7 +12419,7 @@
           <a:p>
             <a:fld id="{DE840A40-73C8-4048-8140-49F5D65BB431}" type="datetimeFigureOut">
               <a:rPr lang="et-EE" smtClean="0"/>
-              <a:t>14.04.2026</a:t>
+              <a:t>19.04.2026</a:t>
             </a:fld>
             <a:endParaRPr lang="et-EE"/>
           </a:p>
@@ -25057,10 +25059,10 @@
               <a:t>Nt </a:t>
             </a:r>
             <a:r>
-              <a:rPr lang="et-EE" sz="2400" noProof="0" dirty="0" err="1">
+              <a:rPr lang="en-US" sz="2400" noProof="0" dirty="0">
                 <a:ea typeface="Inter"/>
               </a:rPr>
-              <a:t>ChatGPT</a:t>
+              <a:t>Claude</a:t>
             </a:r>
             <a:r>
               <a:rPr lang="et-EE" sz="2400" noProof="0" dirty="0">
@@ -25069,24 +25071,80 @@
               <a:t> --&gt; kliki oma profiilil --&gt; </a:t>
             </a:r>
             <a:r>
-              <a:rPr lang="et-EE" sz="2400" noProof="0" dirty="0" err="1">
+              <a:rPr lang="en-US" sz="2400" dirty="0">
                 <a:ea typeface="Inter"/>
               </a:rPr>
-              <a:t>Customize</a:t>
+              <a:t>Settings</a:t>
+            </a:r>
+          </a:p>
+          <a:p>
+            <a:pPr lvl="1">
+              <a:lnSpc>
+                <a:spcPct val="150000"/>
+              </a:lnSpc>
+              <a:buFont typeface="Courier New" panose="020B0502030000000004" pitchFamily="34" charset="0"/>
+              <a:buChar char="o"/>
+            </a:pPr>
+            <a:endParaRPr lang="en-US" sz="2400" noProof="0" dirty="0">
+              <a:ea typeface="Inter"/>
+            </a:endParaRPr>
+          </a:p>
+          <a:p>
+            <a:pPr>
+              <a:lnSpc>
+                <a:spcPct val="150000"/>
+              </a:lnSpc>
+              <a:buFont typeface="Courier New" panose="020B0502030000000004" pitchFamily="34" charset="0"/>
+              <a:buChar char="o"/>
+            </a:pPr>
+            <a:r>
+              <a:rPr lang="en-US" sz="2400" dirty="0">
+                <a:ea typeface="Inter"/>
+              </a:rPr>
+              <a:t>Projects</a:t>
+            </a:r>
+          </a:p>
+          <a:p>
+            <a:pPr>
+              <a:lnSpc>
+                <a:spcPct val="150000"/>
+              </a:lnSpc>
+              <a:buFont typeface="Courier New" panose="020B0502030000000004" pitchFamily="34" charset="0"/>
+              <a:buChar char="o"/>
+            </a:pPr>
+            <a:endParaRPr lang="en-US" sz="2400" noProof="0" dirty="0">
+              <a:ea typeface="Inter"/>
+            </a:endParaRPr>
+          </a:p>
+          <a:p>
+            <a:pPr>
+              <a:lnSpc>
+                <a:spcPct val="150000"/>
+              </a:lnSpc>
+              <a:buFont typeface="Courier New" panose="020B0502030000000004" pitchFamily="34" charset="0"/>
+              <a:buChar char="o"/>
+            </a:pPr>
+            <a:r>
+              <a:rPr lang="en-US" sz="2400" dirty="0" err="1">
+                <a:ea typeface="Inter"/>
+              </a:rPr>
+              <a:t>Mudeli</a:t>
             </a:r>
             <a:r>
-              <a:rPr lang="et-EE" sz="2400" noProof="0" dirty="0">
+              <a:rPr lang="en-US" sz="2400" dirty="0">
                 <a:ea typeface="Inter"/>
               </a:rPr>
               <a:t> </a:t>
             </a:r>
             <a:r>
-              <a:rPr lang="et-EE" sz="2400" noProof="0" dirty="0" err="1">
+              <a:rPr lang="en-US" sz="2400" dirty="0" err="1">
                 <a:ea typeface="Inter"/>
               </a:rPr>
-              <a:t>ChatGPT</a:t>
+              <a:t>valik</a:t>
             </a:r>
-            <a:endParaRPr lang="et-EE" sz="2400" noProof="0" dirty="0"/>
+            <a:endParaRPr lang="en-US" sz="2400" noProof="0" dirty="0">
+              <a:ea typeface="Inter"/>
+            </a:endParaRPr>
           </a:p>
         </p:txBody>
       </p:sp>
@@ -25100,6 +25158,217 @@
   <p:clrMapOvr>
     <a:masterClrMapping/>
   </p:clrMapOvr>
+  <p:timing>
+    <p:tnLst>
+      <p:par>
+        <p:cTn id="1" dur="indefinite" restart="never" nodeType="tmRoot">
+          <p:childTnLst>
+            <p:seq concurrent="1" nextAc="seek">
+              <p:cTn id="2" dur="indefinite" nodeType="mainSeq">
+                <p:childTnLst>
+                  <p:par>
+                    <p:cTn id="3" fill="hold">
+                      <p:stCondLst>
+                        <p:cond delay="indefinite"/>
+                      </p:stCondLst>
+                      <p:childTnLst>
+                        <p:par>
+                          <p:cTn id="4" fill="hold">
+                            <p:stCondLst>
+                              <p:cond delay="0"/>
+                            </p:stCondLst>
+                            <p:childTnLst>
+                              <p:par>
+                                <p:cTn id="5" presetID="1" presetClass="entr" presetSubtype="0" fill="hold" grpId="0" nodeType="clickEffect">
+                                  <p:stCondLst>
+                                    <p:cond delay="0"/>
+                                  </p:stCondLst>
+                                  <p:childTnLst>
+                                    <p:set>
+                                      <p:cBhvr>
+                                        <p:cTn id="6" dur="1" fill="hold">
+                                          <p:stCondLst>
+                                            <p:cond delay="0"/>
+                                          </p:stCondLst>
+                                        </p:cTn>
+                                        <p:tgtEl>
+                                          <p:spTgt spid="3">
+                                            <p:txEl>
+                                              <p:pRg st="0" end="0"/>
+                                            </p:txEl>
+                                          </p:spTgt>
+                                        </p:tgtEl>
+                                        <p:attrNameLst>
+                                          <p:attrName>style.visibility</p:attrName>
+                                        </p:attrNameLst>
+                                      </p:cBhvr>
+                                      <p:to>
+                                        <p:strVal val="visible"/>
+                                      </p:to>
+                                    </p:set>
+                                  </p:childTnLst>
+                                </p:cTn>
+                              </p:par>
+                              <p:par>
+                                <p:cTn id="7" presetID="1" presetClass="entr" presetSubtype="0" fill="hold" grpId="0" nodeType="withEffect">
+                                  <p:stCondLst>
+                                    <p:cond delay="0"/>
+                                  </p:stCondLst>
+                                  <p:childTnLst>
+                                    <p:set>
+                                      <p:cBhvr>
+                                        <p:cTn id="8" dur="1" fill="hold">
+                                          <p:stCondLst>
+                                            <p:cond delay="0"/>
+                                          </p:stCondLst>
+                                        </p:cTn>
+                                        <p:tgtEl>
+                                          <p:spTgt spid="3">
+                                            <p:txEl>
+                                              <p:pRg st="1" end="1"/>
+                                            </p:txEl>
+                                          </p:spTgt>
+                                        </p:tgtEl>
+                                        <p:attrNameLst>
+                                          <p:attrName>style.visibility</p:attrName>
+                                        </p:attrNameLst>
+                                      </p:cBhvr>
+                                      <p:to>
+                                        <p:strVal val="visible"/>
+                                      </p:to>
+                                    </p:set>
+                                  </p:childTnLst>
+                                </p:cTn>
+                              </p:par>
+                            </p:childTnLst>
+                          </p:cTn>
+                        </p:par>
+                      </p:childTnLst>
+                    </p:cTn>
+                  </p:par>
+                  <p:par>
+                    <p:cTn id="9" fill="hold">
+                      <p:stCondLst>
+                        <p:cond delay="indefinite"/>
+                      </p:stCondLst>
+                      <p:childTnLst>
+                        <p:par>
+                          <p:cTn id="10" fill="hold">
+                            <p:stCondLst>
+                              <p:cond delay="0"/>
+                            </p:stCondLst>
+                            <p:childTnLst>
+                              <p:par>
+                                <p:cTn id="11" presetID="1" presetClass="entr" presetSubtype="0" fill="hold" grpId="0" nodeType="clickEffect">
+                                  <p:stCondLst>
+                                    <p:cond delay="0"/>
+                                  </p:stCondLst>
+                                  <p:childTnLst>
+                                    <p:set>
+                                      <p:cBhvr>
+                                        <p:cTn id="12" dur="1" fill="hold">
+                                          <p:stCondLst>
+                                            <p:cond delay="0"/>
+                                          </p:stCondLst>
+                                        </p:cTn>
+                                        <p:tgtEl>
+                                          <p:spTgt spid="3">
+                                            <p:txEl>
+                                              <p:pRg st="3" end="3"/>
+                                            </p:txEl>
+                                          </p:spTgt>
+                                        </p:tgtEl>
+                                        <p:attrNameLst>
+                                          <p:attrName>style.visibility</p:attrName>
+                                        </p:attrNameLst>
+                                      </p:cBhvr>
+                                      <p:to>
+                                        <p:strVal val="visible"/>
+                                      </p:to>
+                                    </p:set>
+                                  </p:childTnLst>
+                                </p:cTn>
+                              </p:par>
+                            </p:childTnLst>
+                          </p:cTn>
+                        </p:par>
+                      </p:childTnLst>
+                    </p:cTn>
+                  </p:par>
+                  <p:par>
+                    <p:cTn id="13" fill="hold">
+                      <p:stCondLst>
+                        <p:cond delay="indefinite"/>
+                      </p:stCondLst>
+                      <p:childTnLst>
+                        <p:par>
+                          <p:cTn id="14" fill="hold">
+                            <p:stCondLst>
+                              <p:cond delay="0"/>
+                            </p:stCondLst>
+                            <p:childTnLst>
+                              <p:par>
+                                <p:cTn id="15" presetID="1" presetClass="entr" presetSubtype="0" fill="hold" grpId="0" nodeType="clickEffect">
+                                  <p:stCondLst>
+                                    <p:cond delay="0"/>
+                                  </p:stCondLst>
+                                  <p:childTnLst>
+                                    <p:set>
+                                      <p:cBhvr>
+                                        <p:cTn id="16" dur="1" fill="hold">
+                                          <p:stCondLst>
+                                            <p:cond delay="0"/>
+                                          </p:stCondLst>
+                                        </p:cTn>
+                                        <p:tgtEl>
+                                          <p:spTgt spid="3">
+                                            <p:txEl>
+                                              <p:pRg st="5" end="5"/>
+                                            </p:txEl>
+                                          </p:spTgt>
+                                        </p:tgtEl>
+                                        <p:attrNameLst>
+                                          <p:attrName>style.visibility</p:attrName>
+                                        </p:attrNameLst>
+                                      </p:cBhvr>
+                                      <p:to>
+                                        <p:strVal val="visible"/>
+                                      </p:to>
+                                    </p:set>
+                                  </p:childTnLst>
+                                </p:cTn>
+                              </p:par>
+                            </p:childTnLst>
+                          </p:cTn>
+                        </p:par>
+                      </p:childTnLst>
+                    </p:cTn>
+                  </p:par>
+                </p:childTnLst>
+              </p:cTn>
+              <p:prevCondLst>
+                <p:cond evt="onPrev" delay="0">
+                  <p:tgtEl>
+                    <p:sldTgt/>
+                  </p:tgtEl>
+                </p:cond>
+              </p:prevCondLst>
+              <p:nextCondLst>
+                <p:cond evt="onNext" delay="0">
+                  <p:tgtEl>
+                    <p:sldTgt/>
+                  </p:tgtEl>
+                </p:cond>
+              </p:nextCondLst>
+            </p:seq>
+          </p:childTnLst>
+        </p:cTn>
+      </p:par>
+    </p:tnLst>
+    <p:bldLst>
+      <p:bldP spid="3" grpId="0" build="p"/>
+    </p:bldLst>
+  </p:timing>
 </p:sld>
 </file>
 
@@ -26985,6 +27254,458 @@
   <p:cSld>
     <p:spTree>
       <p:nvGrpSpPr>
+        <p:cNvPr id="1" name=""/>
+        <p:cNvGrpSpPr/>
+        <p:nvPr/>
+      </p:nvGrpSpPr>
+      <p:grpSpPr>
+        <a:xfrm>
+          <a:off x="0" y="0"/>
+          <a:ext cx="0" cy="0"/>
+          <a:chOff x="0" y="0"/>
+          <a:chExt cx="0" cy="0"/>
+        </a:xfrm>
+      </p:grpSpPr>
+      <p:sp>
+        <p:nvSpPr>
+          <p:cNvPr id="2" name="Title 1">
+            <a:extLst>
+              <a:ext uri="{FF2B5EF4-FFF2-40B4-BE49-F238E27FC236}">
+                <a16:creationId xmlns:a16="http://schemas.microsoft.com/office/drawing/2014/main" id="{8181DBF1-6B0C-F0AB-B6AE-072A389A2741}"/>
+              </a:ext>
+            </a:extLst>
+          </p:cNvPr>
+          <p:cNvSpPr>
+            <a:spLocks noGrp="1"/>
+          </p:cNvSpPr>
+          <p:nvPr>
+            <p:ph type="ctrTitle"/>
+          </p:nvPr>
+        </p:nvSpPr>
+        <p:spPr/>
+        <p:txBody>
+          <a:bodyPr/>
+          <a:lstStyle/>
+          <a:p>
+            <a:r>
+              <a:rPr lang="et-EE" noProof="0" dirty="0"/>
+              <a:t>Kuidas generatiivne tehisaru töötab?</a:t>
+            </a:r>
+          </a:p>
+        </p:txBody>
+      </p:sp>
+      <p:sp>
+        <p:nvSpPr>
+          <p:cNvPr id="9" name="TextBox 8">
+            <a:extLst>
+              <a:ext uri="{FF2B5EF4-FFF2-40B4-BE49-F238E27FC236}">
+                <a16:creationId xmlns:a16="http://schemas.microsoft.com/office/drawing/2014/main" id="{2C7597CA-D61E-17DA-17B5-C9C1738A73BE}"/>
+              </a:ext>
+            </a:extLst>
+          </p:cNvPr>
+          <p:cNvSpPr txBox="1"/>
+          <p:nvPr/>
+        </p:nvSpPr>
+        <p:spPr>
+          <a:xfrm>
+            <a:off x="650240" y="1188720"/>
+            <a:ext cx="5161280" cy="646331"/>
+          </a:xfrm>
+          <a:prstGeom prst="rect">
+            <a:avLst/>
+          </a:prstGeom>
+          <a:noFill/>
+        </p:spPr>
+        <p:txBody>
+          <a:bodyPr rot="0" spcFirstLastPara="0" vertOverflow="overflow" horzOverflow="overflow" vert="horz" wrap="square" lIns="91440" tIns="45720" rIns="91440" bIns="45720" numCol="1" spcCol="0" rtlCol="0" fromWordArt="0" anchor="t" anchorCtr="0" forceAA="0" compatLnSpc="1">
+            <a:prstTxWarp prst="textNoShape">
+              <a:avLst/>
+            </a:prstTxWarp>
+            <a:spAutoFit/>
+          </a:bodyPr>
+          <a:lstStyle/>
+          <a:p>
+            <a:pPr marL="285750" indent="-285750">
+              <a:buFont typeface="Arial"/>
+              <a:buChar char="•"/>
+            </a:pPr>
+            <a:r>
+              <a:rPr lang="et-EE" noProof="0" dirty="0">
+                <a:ea typeface="Inter"/>
+              </a:rPr>
+              <a:t>Mida arvasid ameeriklased augustis 2025:</a:t>
+            </a:r>
+            <a:endParaRPr lang="et-EE" noProof="0" dirty="0"/>
+          </a:p>
+          <a:p>
+            <a:pPr marL="285750" indent="-285750">
+              <a:buFont typeface="Arial"/>
+              <a:buChar char="•"/>
+            </a:pPr>
+            <a:endParaRPr lang="et-EE" noProof="0" dirty="0"/>
+          </a:p>
+        </p:txBody>
+      </p:sp>
+      <p:pic>
+        <p:nvPicPr>
+          <p:cNvPr id="12" name="Content Placeholder 11">
+            <a:extLst>
+              <a:ext uri="{FF2B5EF4-FFF2-40B4-BE49-F238E27FC236}">
+                <a16:creationId xmlns:a16="http://schemas.microsoft.com/office/drawing/2014/main" id="{DDF6099E-FFF5-3B8B-6ED0-48C668AABFB9}"/>
+              </a:ext>
+            </a:extLst>
+          </p:cNvPr>
+          <p:cNvPicPr>
+            <a:picLocks noGrp="1" noChangeAspect="1"/>
+          </p:cNvPicPr>
+          <p:nvPr>
+            <p:ph sz="quarter" idx="10"/>
+          </p:nvPr>
+        </p:nvPicPr>
+        <p:blipFill>
+          <a:blip r:embed="rId2"/>
+          <a:stretch>
+            <a:fillRect/>
+          </a:stretch>
+        </p:blipFill>
+        <p:spPr>
+          <a:xfrm>
+            <a:off x="2055813" y="1836261"/>
+            <a:ext cx="8077200" cy="4000500"/>
+          </a:xfrm>
+          <a:prstGeom prst="rect">
+            <a:avLst/>
+          </a:prstGeom>
+          <a:solidFill>
+            <a:srgbClr val="FFFFFF">
+              <a:shade val="85000"/>
+            </a:srgbClr>
+          </a:solidFill>
+          <a:ln w="88900" cap="sq">
+            <a:solidFill>
+              <a:srgbClr val="FFFFFF"/>
+            </a:solidFill>
+            <a:miter lim="800000"/>
+          </a:ln>
+          <a:effectLst>
+            <a:outerShdw blurRad="55000" dist="18000" dir="5400000" algn="tl" rotWithShape="0">
+              <a:srgbClr val="000000">
+                <a:alpha val="40000"/>
+              </a:srgbClr>
+            </a:outerShdw>
+          </a:effectLst>
+          <a:scene3d>
+            <a:camera prst="orthographicFront"/>
+            <a:lightRig rig="twoPt" dir="t">
+              <a:rot lat="0" lon="0" rev="7200000"/>
+            </a:lightRig>
+          </a:scene3d>
+          <a:sp3d>
+            <a:bevelT w="25400" h="19050"/>
+            <a:contourClr>
+              <a:srgbClr val="FFFFFF"/>
+            </a:contourClr>
+          </a:sp3d>
+        </p:spPr>
+      </p:pic>
+      <p:sp>
+        <p:nvSpPr>
+          <p:cNvPr id="13" name="TextBox 12">
+            <a:extLst>
+              <a:ext uri="{FF2B5EF4-FFF2-40B4-BE49-F238E27FC236}">
+                <a16:creationId xmlns:a16="http://schemas.microsoft.com/office/drawing/2014/main" id="{7D4B374B-E0FB-F26A-AAD2-2AA0ED2D1C5C}"/>
+              </a:ext>
+            </a:extLst>
+          </p:cNvPr>
+          <p:cNvSpPr txBox="1"/>
+          <p:nvPr/>
+        </p:nvSpPr>
+        <p:spPr>
+          <a:xfrm>
+            <a:off x="2692400" y="6014720"/>
+            <a:ext cx="7518400" cy="923330"/>
+          </a:xfrm>
+          <a:prstGeom prst="rect">
+            <a:avLst/>
+          </a:prstGeom>
+          <a:noFill/>
+        </p:spPr>
+        <p:txBody>
+          <a:bodyPr rot="0" spcFirstLastPara="0" vertOverflow="overflow" horzOverflow="overflow" vert="horz" wrap="square" lIns="91440" tIns="45720" rIns="91440" bIns="45720" numCol="1" spcCol="0" rtlCol="0" fromWordArt="0" anchor="t" anchorCtr="0" forceAA="0" compatLnSpc="1">
+            <a:prstTxWarp prst="textNoShape">
+              <a:avLst/>
+            </a:prstTxWarp>
+            <a:spAutoFit/>
+          </a:bodyPr>
+          <a:lstStyle/>
+          <a:p>
+            <a:pPr algn="r"/>
+            <a:r>
+              <a:rPr lang="et-EE" sz="1400" noProof="0" dirty="0">
+                <a:ea typeface="Inter"/>
+              </a:rPr>
+              <a:t>Allikas:</a:t>
+            </a:r>
+            <a:r>
+              <a:rPr lang="et-EE" sz="1400" noProof="0" dirty="0">
+                <a:ea typeface="+mn-lt"/>
+                <a:cs typeface="+mn-lt"/>
+              </a:rPr>
+              <a:t> </a:t>
+            </a:r>
+            <a:r>
+              <a:rPr lang="et-EE" sz="1400" noProof="0" dirty="0" err="1">
+                <a:ea typeface="+mn-lt"/>
+                <a:cs typeface="+mn-lt"/>
+                <a:hlinkClick r:id="rId3"/>
+              </a:rPr>
+              <a:t>Searchlight</a:t>
+            </a:r>
+            <a:r>
+              <a:rPr lang="et-EE" sz="1400" noProof="0" dirty="0">
+                <a:ea typeface="+mn-lt"/>
+                <a:cs typeface="+mn-lt"/>
+                <a:hlinkClick r:id="rId3"/>
+              </a:rPr>
+              <a:t> </a:t>
+            </a:r>
+            <a:r>
+              <a:rPr lang="et-EE" sz="1400" noProof="0" dirty="0" err="1">
+                <a:ea typeface="+mn-lt"/>
+                <a:cs typeface="+mn-lt"/>
+                <a:hlinkClick r:id="rId3"/>
+              </a:rPr>
+              <a:t>Institute</a:t>
+            </a:r>
+            <a:r>
+              <a:rPr lang="et-EE" sz="1400" noProof="0" dirty="0">
+                <a:ea typeface="+mn-lt"/>
+                <a:cs typeface="+mn-lt"/>
+                <a:hlinkClick r:id="rId3"/>
+              </a:rPr>
+              <a:t> ja Tavern Research uuring AI kohta</a:t>
+            </a:r>
+            <a:r>
+              <a:rPr lang="et-EE" sz="1400" noProof="0" dirty="0">
+                <a:ea typeface="+mn-lt"/>
+                <a:cs typeface="+mn-lt"/>
+              </a:rPr>
+              <a:t>.</a:t>
+            </a:r>
+            <a:r>
+              <a:rPr lang="et-EE" noProof="0" dirty="0">
+                <a:ea typeface="+mn-lt"/>
+                <a:cs typeface="+mn-lt"/>
+              </a:rPr>
+              <a:t> </a:t>
+            </a:r>
+            <a:endParaRPr lang="et-EE" noProof="0" dirty="0">
+              <a:ea typeface="Inter"/>
+            </a:endParaRPr>
+          </a:p>
+          <a:p>
+            <a:pPr algn="r"/>
+            <a:endParaRPr lang="et-EE" noProof="0" dirty="0">
+              <a:solidFill>
+                <a:srgbClr val="121212"/>
+              </a:solidFill>
+              <a:ea typeface="Inter"/>
+            </a:endParaRPr>
+          </a:p>
+          <a:p>
+            <a:endParaRPr lang="et-EE" noProof="0" dirty="0">
+              <a:ea typeface="Inter"/>
+            </a:endParaRPr>
+          </a:p>
+        </p:txBody>
+      </p:sp>
+    </p:spTree>
+    <p:extLst>
+      <p:ext uri="{BB962C8B-B14F-4D97-AF65-F5344CB8AC3E}">
+        <p14:creationId xmlns:p14="http://schemas.microsoft.com/office/powerpoint/2010/main" val="3557357758"/>
+      </p:ext>
+    </p:extLst>
+  </p:cSld>
+  <p:clrMapOvr>
+    <a:masterClrMapping/>
+  </p:clrMapOvr>
+  <p:timing>
+    <p:tnLst>
+      <p:par>
+        <p:cTn id="1" dur="indefinite" restart="never" nodeType="tmRoot">
+          <p:childTnLst>
+            <p:seq concurrent="1" nextAc="seek">
+              <p:cTn id="2" dur="indefinite" nodeType="mainSeq">
+                <p:childTnLst>
+                  <p:par>
+                    <p:cTn id="3" fill="hold">
+                      <p:stCondLst>
+                        <p:cond delay="indefinite"/>
+                      </p:stCondLst>
+                      <p:childTnLst>
+                        <p:par>
+                          <p:cTn id="4" fill="hold">
+                            <p:stCondLst>
+                              <p:cond delay="0"/>
+                            </p:stCondLst>
+                            <p:childTnLst>
+                              <p:par>
+                                <p:cTn id="5" presetID="1" presetClass="entr" presetSubtype="0" fill="hold" grpId="0" nodeType="clickEffect">
+                                  <p:stCondLst>
+                                    <p:cond delay="0"/>
+                                  </p:stCondLst>
+                                  <p:childTnLst>
+                                    <p:set>
+                                      <p:cBhvr>
+                                        <p:cTn id="6" dur="1" fill="hold">
+                                          <p:stCondLst>
+                                            <p:cond delay="0"/>
+                                          </p:stCondLst>
+                                        </p:cTn>
+                                        <p:tgtEl>
+                                          <p:spTgt spid="9"/>
+                                        </p:tgtEl>
+                                        <p:attrNameLst>
+                                          <p:attrName>style.visibility</p:attrName>
+                                        </p:attrNameLst>
+                                      </p:cBhvr>
+                                      <p:to>
+                                        <p:strVal val="visible"/>
+                                      </p:to>
+                                    </p:set>
+                                  </p:childTnLst>
+                                </p:cTn>
+                              </p:par>
+                            </p:childTnLst>
+                          </p:cTn>
+                        </p:par>
+                      </p:childTnLst>
+                    </p:cTn>
+                  </p:par>
+                  <p:par>
+                    <p:cTn id="7" fill="hold">
+                      <p:stCondLst>
+                        <p:cond delay="indefinite"/>
+                      </p:stCondLst>
+                      <p:childTnLst>
+                        <p:par>
+                          <p:cTn id="8" fill="hold">
+                            <p:stCondLst>
+                              <p:cond delay="0"/>
+                            </p:stCondLst>
+                            <p:childTnLst>
+                              <p:par>
+                                <p:cTn id="9" presetID="1" presetClass="entr" presetSubtype="0" fill="hold" nodeType="clickEffect">
+                                  <p:stCondLst>
+                                    <p:cond delay="0"/>
+                                  </p:stCondLst>
+                                  <p:childTnLst>
+                                    <p:set>
+                                      <p:cBhvr>
+                                        <p:cTn id="10" dur="1" fill="hold">
+                                          <p:stCondLst>
+                                            <p:cond delay="0"/>
+                                          </p:stCondLst>
+                                        </p:cTn>
+                                        <p:tgtEl>
+                                          <p:spTgt spid="12"/>
+                                        </p:tgtEl>
+                                        <p:attrNameLst>
+                                          <p:attrName>style.visibility</p:attrName>
+                                        </p:attrNameLst>
+                                      </p:cBhvr>
+                                      <p:to>
+                                        <p:strVal val="visible"/>
+                                      </p:to>
+                                    </p:set>
+                                  </p:childTnLst>
+                                </p:cTn>
+                              </p:par>
+                            </p:childTnLst>
+                          </p:cTn>
+                        </p:par>
+                      </p:childTnLst>
+                    </p:cTn>
+                  </p:par>
+                  <p:par>
+                    <p:cTn id="11" fill="hold">
+                      <p:stCondLst>
+                        <p:cond delay="indefinite"/>
+                      </p:stCondLst>
+                      <p:childTnLst>
+                        <p:par>
+                          <p:cTn id="12" fill="hold">
+                            <p:stCondLst>
+                              <p:cond delay="0"/>
+                            </p:stCondLst>
+                            <p:childTnLst>
+                              <p:par>
+                                <p:cTn id="13" presetID="1" presetClass="entr" presetSubtype="0" fill="hold" grpId="0" nodeType="clickEffect">
+                                  <p:stCondLst>
+                                    <p:cond delay="0"/>
+                                  </p:stCondLst>
+                                  <p:childTnLst>
+                                    <p:set>
+                                      <p:cBhvr>
+                                        <p:cTn id="14" dur="1" fill="hold">
+                                          <p:stCondLst>
+                                            <p:cond delay="0"/>
+                                          </p:stCondLst>
+                                        </p:cTn>
+                                        <p:tgtEl>
+                                          <p:spTgt spid="13"/>
+                                        </p:tgtEl>
+                                        <p:attrNameLst>
+                                          <p:attrName>style.visibility</p:attrName>
+                                        </p:attrNameLst>
+                                      </p:cBhvr>
+                                      <p:to>
+                                        <p:strVal val="visible"/>
+                                      </p:to>
+                                    </p:set>
+                                  </p:childTnLst>
+                                </p:cTn>
+                              </p:par>
+                            </p:childTnLst>
+                          </p:cTn>
+                        </p:par>
+                      </p:childTnLst>
+                    </p:cTn>
+                  </p:par>
+                </p:childTnLst>
+              </p:cTn>
+              <p:prevCondLst>
+                <p:cond evt="onPrev" delay="0">
+                  <p:tgtEl>
+                    <p:sldTgt/>
+                  </p:tgtEl>
+                </p:cond>
+              </p:prevCondLst>
+              <p:nextCondLst>
+                <p:cond evt="onNext" delay="0">
+                  <p:tgtEl>
+                    <p:sldTgt/>
+                  </p:tgtEl>
+                </p:cond>
+              </p:nextCondLst>
+            </p:seq>
+          </p:childTnLst>
+        </p:cTn>
+      </p:par>
+    </p:tnLst>
+    <p:bldLst>
+      <p:bldP spid="9" grpId="0"/>
+      <p:bldP spid="13" grpId="0"/>
+    </p:bldLst>
+  </p:timing>
+</p:sld>
+</file>
+
+<file path=ppt/slides/slide5.xml><?xml version="1.0" encoding="utf-8"?>
+<p:sld xmlns:a="http://schemas.openxmlformats.org/drawingml/2006/main" xmlns:r="http://schemas.openxmlformats.org/officeDocument/2006/relationships" xmlns:p="http://schemas.openxmlformats.org/presentationml/2006/main">
+  <p:cSld>
+    <p:spTree>
+      <p:nvGrpSpPr>
         <p:cNvPr id="1" name="">
           <a:extLst>
             <a:ext uri="{FF2B5EF4-FFF2-40B4-BE49-F238E27FC236}">
@@ -27828,458 +28549,6 @@
     </p:tnLst>
     <p:bldLst>
       <p:bldP spid="3" grpId="0" build="p"/>
-    </p:bldLst>
-  </p:timing>
-</p:sld>
-</file>
-
-<file path=ppt/slides/slide5.xml><?xml version="1.0" encoding="utf-8"?>
-<p:sld xmlns:a="http://schemas.openxmlformats.org/drawingml/2006/main" xmlns:r="http://schemas.openxmlformats.org/officeDocument/2006/relationships" xmlns:p="http://schemas.openxmlformats.org/presentationml/2006/main">
-  <p:cSld>
-    <p:spTree>
-      <p:nvGrpSpPr>
-        <p:cNvPr id="1" name=""/>
-        <p:cNvGrpSpPr/>
-        <p:nvPr/>
-      </p:nvGrpSpPr>
-      <p:grpSpPr>
-        <a:xfrm>
-          <a:off x="0" y="0"/>
-          <a:ext cx="0" cy="0"/>
-          <a:chOff x="0" y="0"/>
-          <a:chExt cx="0" cy="0"/>
-        </a:xfrm>
-      </p:grpSpPr>
-      <p:sp>
-        <p:nvSpPr>
-          <p:cNvPr id="2" name="Title 1">
-            <a:extLst>
-              <a:ext uri="{FF2B5EF4-FFF2-40B4-BE49-F238E27FC236}">
-                <a16:creationId xmlns:a16="http://schemas.microsoft.com/office/drawing/2014/main" id="{8181DBF1-6B0C-F0AB-B6AE-072A389A2741}"/>
-              </a:ext>
-            </a:extLst>
-          </p:cNvPr>
-          <p:cNvSpPr>
-            <a:spLocks noGrp="1"/>
-          </p:cNvSpPr>
-          <p:nvPr>
-            <p:ph type="ctrTitle"/>
-          </p:nvPr>
-        </p:nvSpPr>
-        <p:spPr/>
-        <p:txBody>
-          <a:bodyPr/>
-          <a:lstStyle/>
-          <a:p>
-            <a:r>
-              <a:rPr lang="et-EE" noProof="0" dirty="0"/>
-              <a:t>Kuidas generatiivne tehisaru töötab?</a:t>
-            </a:r>
-          </a:p>
-        </p:txBody>
-      </p:sp>
-      <p:sp>
-        <p:nvSpPr>
-          <p:cNvPr id="9" name="TextBox 8">
-            <a:extLst>
-              <a:ext uri="{FF2B5EF4-FFF2-40B4-BE49-F238E27FC236}">
-                <a16:creationId xmlns:a16="http://schemas.microsoft.com/office/drawing/2014/main" id="{2C7597CA-D61E-17DA-17B5-C9C1738A73BE}"/>
-              </a:ext>
-            </a:extLst>
-          </p:cNvPr>
-          <p:cNvSpPr txBox="1"/>
-          <p:nvPr/>
-        </p:nvSpPr>
-        <p:spPr>
-          <a:xfrm>
-            <a:off x="650240" y="1188720"/>
-            <a:ext cx="5161280" cy="646331"/>
-          </a:xfrm>
-          <a:prstGeom prst="rect">
-            <a:avLst/>
-          </a:prstGeom>
-          <a:noFill/>
-        </p:spPr>
-        <p:txBody>
-          <a:bodyPr rot="0" spcFirstLastPara="0" vertOverflow="overflow" horzOverflow="overflow" vert="horz" wrap="square" lIns="91440" tIns="45720" rIns="91440" bIns="45720" numCol="1" spcCol="0" rtlCol="0" fromWordArt="0" anchor="t" anchorCtr="0" forceAA="0" compatLnSpc="1">
-            <a:prstTxWarp prst="textNoShape">
-              <a:avLst/>
-            </a:prstTxWarp>
-            <a:spAutoFit/>
-          </a:bodyPr>
-          <a:lstStyle/>
-          <a:p>
-            <a:pPr marL="285750" indent="-285750">
-              <a:buFont typeface="Arial"/>
-              <a:buChar char="•"/>
-            </a:pPr>
-            <a:r>
-              <a:rPr lang="et-EE" noProof="0" dirty="0">
-                <a:ea typeface="Inter"/>
-              </a:rPr>
-              <a:t>Mida arvasid ameeriklased augustis 2025:</a:t>
-            </a:r>
-            <a:endParaRPr lang="et-EE" noProof="0" dirty="0"/>
-          </a:p>
-          <a:p>
-            <a:pPr marL="285750" indent="-285750">
-              <a:buFont typeface="Arial"/>
-              <a:buChar char="•"/>
-            </a:pPr>
-            <a:endParaRPr lang="et-EE" noProof="0" dirty="0"/>
-          </a:p>
-        </p:txBody>
-      </p:sp>
-      <p:pic>
-        <p:nvPicPr>
-          <p:cNvPr id="12" name="Content Placeholder 11">
-            <a:extLst>
-              <a:ext uri="{FF2B5EF4-FFF2-40B4-BE49-F238E27FC236}">
-                <a16:creationId xmlns:a16="http://schemas.microsoft.com/office/drawing/2014/main" id="{DDF6099E-FFF5-3B8B-6ED0-48C668AABFB9}"/>
-              </a:ext>
-            </a:extLst>
-          </p:cNvPr>
-          <p:cNvPicPr>
-            <a:picLocks noGrp="1" noChangeAspect="1"/>
-          </p:cNvPicPr>
-          <p:nvPr>
-            <p:ph sz="quarter" idx="10"/>
-          </p:nvPr>
-        </p:nvPicPr>
-        <p:blipFill>
-          <a:blip r:embed="rId2"/>
-          <a:stretch>
-            <a:fillRect/>
-          </a:stretch>
-        </p:blipFill>
-        <p:spPr>
-          <a:xfrm>
-            <a:off x="2055813" y="1836261"/>
-            <a:ext cx="8077200" cy="4000500"/>
-          </a:xfrm>
-          <a:prstGeom prst="rect">
-            <a:avLst/>
-          </a:prstGeom>
-          <a:solidFill>
-            <a:srgbClr val="FFFFFF">
-              <a:shade val="85000"/>
-            </a:srgbClr>
-          </a:solidFill>
-          <a:ln w="88900" cap="sq">
-            <a:solidFill>
-              <a:srgbClr val="FFFFFF"/>
-            </a:solidFill>
-            <a:miter lim="800000"/>
-          </a:ln>
-          <a:effectLst>
-            <a:outerShdw blurRad="55000" dist="18000" dir="5400000" algn="tl" rotWithShape="0">
-              <a:srgbClr val="000000">
-                <a:alpha val="40000"/>
-              </a:srgbClr>
-            </a:outerShdw>
-          </a:effectLst>
-          <a:scene3d>
-            <a:camera prst="orthographicFront"/>
-            <a:lightRig rig="twoPt" dir="t">
-              <a:rot lat="0" lon="0" rev="7200000"/>
-            </a:lightRig>
-          </a:scene3d>
-          <a:sp3d>
-            <a:bevelT w="25400" h="19050"/>
-            <a:contourClr>
-              <a:srgbClr val="FFFFFF"/>
-            </a:contourClr>
-          </a:sp3d>
-        </p:spPr>
-      </p:pic>
-      <p:sp>
-        <p:nvSpPr>
-          <p:cNvPr id="13" name="TextBox 12">
-            <a:extLst>
-              <a:ext uri="{FF2B5EF4-FFF2-40B4-BE49-F238E27FC236}">
-                <a16:creationId xmlns:a16="http://schemas.microsoft.com/office/drawing/2014/main" id="{7D4B374B-E0FB-F26A-AAD2-2AA0ED2D1C5C}"/>
-              </a:ext>
-            </a:extLst>
-          </p:cNvPr>
-          <p:cNvSpPr txBox="1"/>
-          <p:nvPr/>
-        </p:nvSpPr>
-        <p:spPr>
-          <a:xfrm>
-            <a:off x="2692400" y="6014720"/>
-            <a:ext cx="7518400" cy="923330"/>
-          </a:xfrm>
-          <a:prstGeom prst="rect">
-            <a:avLst/>
-          </a:prstGeom>
-          <a:noFill/>
-        </p:spPr>
-        <p:txBody>
-          <a:bodyPr rot="0" spcFirstLastPara="0" vertOverflow="overflow" horzOverflow="overflow" vert="horz" wrap="square" lIns="91440" tIns="45720" rIns="91440" bIns="45720" numCol="1" spcCol="0" rtlCol="0" fromWordArt="0" anchor="t" anchorCtr="0" forceAA="0" compatLnSpc="1">
-            <a:prstTxWarp prst="textNoShape">
-              <a:avLst/>
-            </a:prstTxWarp>
-            <a:spAutoFit/>
-          </a:bodyPr>
-          <a:lstStyle/>
-          <a:p>
-            <a:pPr algn="r"/>
-            <a:r>
-              <a:rPr lang="et-EE" sz="1400" noProof="0" dirty="0">
-                <a:ea typeface="Inter"/>
-              </a:rPr>
-              <a:t>Allikas:</a:t>
-            </a:r>
-            <a:r>
-              <a:rPr lang="et-EE" sz="1400" noProof="0" dirty="0">
-                <a:ea typeface="+mn-lt"/>
-                <a:cs typeface="+mn-lt"/>
-              </a:rPr>
-              <a:t> </a:t>
-            </a:r>
-            <a:r>
-              <a:rPr lang="et-EE" sz="1400" noProof="0" dirty="0" err="1">
-                <a:ea typeface="+mn-lt"/>
-                <a:cs typeface="+mn-lt"/>
-                <a:hlinkClick r:id="rId3"/>
-              </a:rPr>
-              <a:t>Searchlight</a:t>
-            </a:r>
-            <a:r>
-              <a:rPr lang="et-EE" sz="1400" noProof="0" dirty="0">
-                <a:ea typeface="+mn-lt"/>
-                <a:cs typeface="+mn-lt"/>
-                <a:hlinkClick r:id="rId3"/>
-              </a:rPr>
-              <a:t> </a:t>
-            </a:r>
-            <a:r>
-              <a:rPr lang="et-EE" sz="1400" noProof="0" dirty="0" err="1">
-                <a:ea typeface="+mn-lt"/>
-                <a:cs typeface="+mn-lt"/>
-                <a:hlinkClick r:id="rId3"/>
-              </a:rPr>
-              <a:t>Institute</a:t>
-            </a:r>
-            <a:r>
-              <a:rPr lang="et-EE" sz="1400" noProof="0" dirty="0">
-                <a:ea typeface="+mn-lt"/>
-                <a:cs typeface="+mn-lt"/>
-                <a:hlinkClick r:id="rId3"/>
-              </a:rPr>
-              <a:t> ja Tavern Research uuring AI kohta</a:t>
-            </a:r>
-            <a:r>
-              <a:rPr lang="et-EE" sz="1400" noProof="0" dirty="0">
-                <a:ea typeface="+mn-lt"/>
-                <a:cs typeface="+mn-lt"/>
-              </a:rPr>
-              <a:t>.</a:t>
-            </a:r>
-            <a:r>
-              <a:rPr lang="et-EE" noProof="0" dirty="0">
-                <a:ea typeface="+mn-lt"/>
-                <a:cs typeface="+mn-lt"/>
-              </a:rPr>
-              <a:t> </a:t>
-            </a:r>
-            <a:endParaRPr lang="et-EE" noProof="0" dirty="0">
-              <a:ea typeface="Inter"/>
-            </a:endParaRPr>
-          </a:p>
-          <a:p>
-            <a:pPr algn="r"/>
-            <a:endParaRPr lang="et-EE" noProof="0" dirty="0">
-              <a:solidFill>
-                <a:srgbClr val="121212"/>
-              </a:solidFill>
-              <a:ea typeface="Inter"/>
-            </a:endParaRPr>
-          </a:p>
-          <a:p>
-            <a:endParaRPr lang="et-EE" noProof="0" dirty="0">
-              <a:ea typeface="Inter"/>
-            </a:endParaRPr>
-          </a:p>
-        </p:txBody>
-      </p:sp>
-    </p:spTree>
-    <p:extLst>
-      <p:ext uri="{BB962C8B-B14F-4D97-AF65-F5344CB8AC3E}">
-        <p14:creationId xmlns:p14="http://schemas.microsoft.com/office/powerpoint/2010/main" val="3557357758"/>
-      </p:ext>
-    </p:extLst>
-  </p:cSld>
-  <p:clrMapOvr>
-    <a:masterClrMapping/>
-  </p:clrMapOvr>
-  <p:timing>
-    <p:tnLst>
-      <p:par>
-        <p:cTn id="1" dur="indefinite" restart="never" nodeType="tmRoot">
-          <p:childTnLst>
-            <p:seq concurrent="1" nextAc="seek">
-              <p:cTn id="2" dur="indefinite" nodeType="mainSeq">
-                <p:childTnLst>
-                  <p:par>
-                    <p:cTn id="3" fill="hold">
-                      <p:stCondLst>
-                        <p:cond delay="indefinite"/>
-                      </p:stCondLst>
-                      <p:childTnLst>
-                        <p:par>
-                          <p:cTn id="4" fill="hold">
-                            <p:stCondLst>
-                              <p:cond delay="0"/>
-                            </p:stCondLst>
-                            <p:childTnLst>
-                              <p:par>
-                                <p:cTn id="5" presetID="1" presetClass="entr" presetSubtype="0" fill="hold" grpId="0" nodeType="clickEffect">
-                                  <p:stCondLst>
-                                    <p:cond delay="0"/>
-                                  </p:stCondLst>
-                                  <p:childTnLst>
-                                    <p:set>
-                                      <p:cBhvr>
-                                        <p:cTn id="6" dur="1" fill="hold">
-                                          <p:stCondLst>
-                                            <p:cond delay="0"/>
-                                          </p:stCondLst>
-                                        </p:cTn>
-                                        <p:tgtEl>
-                                          <p:spTgt spid="9"/>
-                                        </p:tgtEl>
-                                        <p:attrNameLst>
-                                          <p:attrName>style.visibility</p:attrName>
-                                        </p:attrNameLst>
-                                      </p:cBhvr>
-                                      <p:to>
-                                        <p:strVal val="visible"/>
-                                      </p:to>
-                                    </p:set>
-                                  </p:childTnLst>
-                                </p:cTn>
-                              </p:par>
-                            </p:childTnLst>
-                          </p:cTn>
-                        </p:par>
-                      </p:childTnLst>
-                    </p:cTn>
-                  </p:par>
-                  <p:par>
-                    <p:cTn id="7" fill="hold">
-                      <p:stCondLst>
-                        <p:cond delay="indefinite"/>
-                      </p:stCondLst>
-                      <p:childTnLst>
-                        <p:par>
-                          <p:cTn id="8" fill="hold">
-                            <p:stCondLst>
-                              <p:cond delay="0"/>
-                            </p:stCondLst>
-                            <p:childTnLst>
-                              <p:par>
-                                <p:cTn id="9" presetID="1" presetClass="entr" presetSubtype="0" fill="hold" nodeType="clickEffect">
-                                  <p:stCondLst>
-                                    <p:cond delay="0"/>
-                                  </p:stCondLst>
-                                  <p:childTnLst>
-                                    <p:set>
-                                      <p:cBhvr>
-                                        <p:cTn id="10" dur="1" fill="hold">
-                                          <p:stCondLst>
-                                            <p:cond delay="0"/>
-                                          </p:stCondLst>
-                                        </p:cTn>
-                                        <p:tgtEl>
-                                          <p:spTgt spid="12"/>
-                                        </p:tgtEl>
-                                        <p:attrNameLst>
-                                          <p:attrName>style.visibility</p:attrName>
-                                        </p:attrNameLst>
-                                      </p:cBhvr>
-                                      <p:to>
-                                        <p:strVal val="visible"/>
-                                      </p:to>
-                                    </p:set>
-                                  </p:childTnLst>
-                                </p:cTn>
-                              </p:par>
-                            </p:childTnLst>
-                          </p:cTn>
-                        </p:par>
-                      </p:childTnLst>
-                    </p:cTn>
-                  </p:par>
-                  <p:par>
-                    <p:cTn id="11" fill="hold">
-                      <p:stCondLst>
-                        <p:cond delay="indefinite"/>
-                      </p:stCondLst>
-                      <p:childTnLst>
-                        <p:par>
-                          <p:cTn id="12" fill="hold">
-                            <p:stCondLst>
-                              <p:cond delay="0"/>
-                            </p:stCondLst>
-                            <p:childTnLst>
-                              <p:par>
-                                <p:cTn id="13" presetID="1" presetClass="entr" presetSubtype="0" fill="hold" grpId="0" nodeType="clickEffect">
-                                  <p:stCondLst>
-                                    <p:cond delay="0"/>
-                                  </p:stCondLst>
-                                  <p:childTnLst>
-                                    <p:set>
-                                      <p:cBhvr>
-                                        <p:cTn id="14" dur="1" fill="hold">
-                                          <p:stCondLst>
-                                            <p:cond delay="0"/>
-                                          </p:stCondLst>
-                                        </p:cTn>
-                                        <p:tgtEl>
-                                          <p:spTgt spid="13"/>
-                                        </p:tgtEl>
-                                        <p:attrNameLst>
-                                          <p:attrName>style.visibility</p:attrName>
-                                        </p:attrNameLst>
-                                      </p:cBhvr>
-                                      <p:to>
-                                        <p:strVal val="visible"/>
-                                      </p:to>
-                                    </p:set>
-                                  </p:childTnLst>
-                                </p:cTn>
-                              </p:par>
-                            </p:childTnLst>
-                          </p:cTn>
-                        </p:par>
-                      </p:childTnLst>
-                    </p:cTn>
-                  </p:par>
-                </p:childTnLst>
-              </p:cTn>
-              <p:prevCondLst>
-                <p:cond evt="onPrev" delay="0">
-                  <p:tgtEl>
-                    <p:sldTgt/>
-                  </p:tgtEl>
-                </p:cond>
-              </p:prevCondLst>
-              <p:nextCondLst>
-                <p:cond evt="onNext" delay="0">
-                  <p:tgtEl>
-                    <p:sldTgt/>
-                  </p:tgtEl>
-                </p:cond>
-              </p:nextCondLst>
-            </p:seq>
-          </p:childTnLst>
-        </p:cTn>
-      </p:par>
-    </p:tnLst>
-    <p:bldLst>
-      <p:bldP spid="9" grpId="0"/>
-      <p:bldP spid="13" grpId="0"/>
     </p:bldLst>
   </p:timing>
 </p:sld>
@@ -30901,18 +31170,18 @@
 </file>
 
 <file path=customXml/item1.xml><?xml version="1.0" encoding="utf-8"?>
+<p:properties xmlns:p="http://schemas.microsoft.com/office/2006/metadata/properties" xmlns:xsi="http://www.w3.org/2001/XMLSchema-instance" xmlns:pc="http://schemas.microsoft.com/office/infopath/2007/PartnerControls">
+  <documentManagement/>
+</p:properties>
+</file>
+
+<file path=customXml/item2.xml><?xml version="1.0" encoding="utf-8"?>
 <?mso-contentType ?>
 <FormTemplates xmlns="http://schemas.microsoft.com/sharepoint/v3/contenttype/forms">
   <Display>DocumentLibraryForm</Display>
   <Edit>DocumentLibraryForm</Edit>
   <New>DocumentLibraryForm</New>
 </FormTemplates>
-</file>
-
-<file path=customXml/item2.xml><?xml version="1.0" encoding="utf-8"?>
-<p:properties xmlns:p="http://schemas.microsoft.com/office/2006/metadata/properties" xmlns:xsi="http://www.w3.org/2001/XMLSchema-instance" xmlns:pc="http://schemas.microsoft.com/office/infopath/2007/PartnerControls">
-  <documentManagement/>
-</p:properties>
 </file>
 
 <file path=customXml/item3.xml><?xml version="1.0" encoding="utf-8"?>
@@ -31084,18 +31353,18 @@
 </file>
 
 <file path=customXml/itemProps1.xml><?xml version="1.0" encoding="utf-8"?>
-<ds:datastoreItem xmlns:ds="http://schemas.openxmlformats.org/officeDocument/2006/customXml" ds:itemID="{9DC439CA-6F1C-4005-ACA6-A52E04DEE0A7}">
+<ds:datastoreItem xmlns:ds="http://schemas.openxmlformats.org/officeDocument/2006/customXml" ds:itemID="{5BDF4908-A52A-47DD-A794-6E02D71942FC}">
   <ds:schemaRefs>
-    <ds:schemaRef ds:uri="http://schemas.microsoft.com/sharepoint/v3/contenttype/forms"/>
+    <ds:schemaRef ds:uri="http://schemas.microsoft.com/office/2006/metadata/properties"/>
+    <ds:schemaRef ds:uri="http://schemas.microsoft.com/office/infopath/2007/PartnerControls"/>
   </ds:schemaRefs>
 </ds:datastoreItem>
 </file>
 
 <file path=customXml/itemProps2.xml><?xml version="1.0" encoding="utf-8"?>
-<ds:datastoreItem xmlns:ds="http://schemas.openxmlformats.org/officeDocument/2006/customXml" ds:itemID="{5BDF4908-A52A-47DD-A794-6E02D71942FC}">
+<ds:datastoreItem xmlns:ds="http://schemas.openxmlformats.org/officeDocument/2006/customXml" ds:itemID="{9DC439CA-6F1C-4005-ACA6-A52E04DEE0A7}">
   <ds:schemaRefs>
-    <ds:schemaRef ds:uri="http://schemas.microsoft.com/office/2006/metadata/properties"/>
-    <ds:schemaRef ds:uri="http://schemas.microsoft.com/office/infopath/2007/PartnerControls"/>
+    <ds:schemaRef ds:uri="http://schemas.microsoft.com/sharepoint/v3/contenttype/forms"/>
   </ds:schemaRefs>
 </ds:datastoreItem>
 </file>

--- a/Day15/15-paev-andmetarkus-esitlus.pptx
+++ b/Day15/15-paev-andmetarkus-esitlus.pptx
@@ -5,10 +5,10 @@
     <p:sldMasterId id="2147483648" r:id="rId4"/>
   </p:sldMasterIdLst>
   <p:notesMasterIdLst>
-    <p:notesMasterId r:id="rId21"/>
+    <p:notesMasterId r:id="rId22"/>
   </p:notesMasterIdLst>
   <p:handoutMasterIdLst>
-    <p:handoutMasterId r:id="rId22"/>
+    <p:handoutMasterId r:id="rId23"/>
   </p:handoutMasterIdLst>
   <p:sldIdLst>
     <p:sldId id="417" r:id="rId5"/>
@@ -16,43 +16,44 @@
     <p:sldId id="567" r:id="rId7"/>
     <p:sldId id="452" r:id="rId8"/>
     <p:sldId id="475" r:id="rId9"/>
-    <p:sldId id="647" r:id="rId10"/>
-    <p:sldId id="476" r:id="rId11"/>
-    <p:sldId id="477" r:id="rId12"/>
-    <p:sldId id="494" r:id="rId13"/>
-    <p:sldId id="446" r:id="rId14"/>
-    <p:sldId id="447" r:id="rId15"/>
-    <p:sldId id="646" r:id="rId16"/>
-    <p:sldId id="571" r:id="rId17"/>
-    <p:sldId id="514" r:id="rId18"/>
-    <p:sldId id="572" r:id="rId19"/>
-    <p:sldId id="619" r:id="rId20"/>
+    <p:sldId id="261" r:id="rId10"/>
+    <p:sldId id="647" r:id="rId11"/>
+    <p:sldId id="476" r:id="rId12"/>
+    <p:sldId id="477" r:id="rId13"/>
+    <p:sldId id="494" r:id="rId14"/>
+    <p:sldId id="446" r:id="rId15"/>
+    <p:sldId id="447" r:id="rId16"/>
+    <p:sldId id="646" r:id="rId17"/>
+    <p:sldId id="571" r:id="rId18"/>
+    <p:sldId id="514" r:id="rId19"/>
+    <p:sldId id="572" r:id="rId20"/>
+    <p:sldId id="619" r:id="rId21"/>
   </p:sldIdLst>
   <p:sldSz cx="12192000" cy="6858000"/>
   <p:notesSz cx="6858000" cy="9144000"/>
   <p:embeddedFontLst>
     <p:embeddedFont>
       <p:font typeface="Inter" panose="020B0604020202020204" charset="0"/>
-      <p:regular r:id="rId23"/>
-      <p:bold r:id="rId24"/>
-      <p:italic r:id="rId25"/>
-      <p:boldItalic r:id="rId26"/>
+      <p:regular r:id="rId24"/>
+      <p:bold r:id="rId25"/>
+      <p:italic r:id="rId26"/>
+      <p:boldItalic r:id="rId27"/>
     </p:embeddedFont>
     <p:embeddedFont>
       <p:font typeface="Inter Bold" panose="020B0604020202020204" charset="0"/>
-      <p:bold r:id="rId27"/>
+      <p:bold r:id="rId28"/>
     </p:embeddedFont>
     <p:embeddedFont>
       <p:font typeface="Noto Serif" panose="02020600060500020200" pitchFamily="18" charset="0"/>
-      <p:regular r:id="rId28"/>
-      <p:bold r:id="rId29"/>
-      <p:italic r:id="rId30"/>
-      <p:boldItalic r:id="rId31"/>
+      <p:regular r:id="rId29"/>
+      <p:bold r:id="rId30"/>
+      <p:italic r:id="rId31"/>
+      <p:boldItalic r:id="rId32"/>
     </p:embeddedFont>
     <p:embeddedFont>
       <p:font typeface="Poppins SemiBold" panose="00000700000000000000" pitchFamily="2" charset="0"/>
-      <p:bold r:id="rId32"/>
-      <p:boldItalic r:id="rId33"/>
+      <p:bold r:id="rId33"/>
+      <p:boldItalic r:id="rId34"/>
     </p:embeddedFont>
   </p:embeddedFontLst>
   <p:defaultTextStyle>
@@ -164,7 +165,7 @@
 <file path=ppt/revisionInfo.xml><?xml version="1.0" encoding="utf-8"?>
 <p1510:revInfo xmlns:a="http://schemas.openxmlformats.org/drawingml/2006/main" xmlns:r="http://schemas.openxmlformats.org/officeDocument/2006/relationships" xmlns:p1510="http://schemas.microsoft.com/office/powerpoint/2015/10/main">
   <p1510:revLst>
-    <p1510:client id="{2EADCC2F-0731-4A5B-A287-B42682DA1D9C}" v="1" dt="2026-04-19T18:02:23.753"/>
+    <p1510:client id="{2EADCC2F-0731-4A5B-A287-B42682DA1D9C}" v="60" dt="2026-04-20T11:06:16.673"/>
   </p1510:revLst>
 </p1510:revInfo>
 </file>
@@ -173,11 +174,18 @@
 <pc:chgInfo xmlns:a="http://schemas.openxmlformats.org/drawingml/2006/main" xmlns:r="http://schemas.openxmlformats.org/officeDocument/2006/relationships" xmlns:ac="http://schemas.microsoft.com/office/drawing/2013/main/command" xmlns:pc="http://schemas.microsoft.com/office/powerpoint/2013/main/command">
   <pc:docChgLst>
     <pc:chgData name="Virve Räni" userId="161a7437-7ef4-49ec-91bf-54882f313dfe" providerId="ADAL" clId="{6D754EED-65AA-4A21-B175-6769012CF487}"/>
-    <pc:docChg chg="addSld delSld modSld sldOrd">
-      <pc:chgData name="Virve Räni" userId="161a7437-7ef4-49ec-91bf-54882f313dfe" providerId="ADAL" clId="{6D754EED-65AA-4A21-B175-6769012CF487}" dt="2026-04-19T18:02:23.753" v="573"/>
+    <pc:docChg chg="custSel addSld delSld modSld sldOrd">
+      <pc:chgData name="Virve Räni" userId="161a7437-7ef4-49ec-91bf-54882f313dfe" providerId="ADAL" clId="{6D754EED-65AA-4A21-B175-6769012CF487}" dt="2026-04-20T11:06:16.672" v="698" actId="20577"/>
       <pc:docMkLst>
         <pc:docMk/>
       </pc:docMkLst>
+      <pc:sldChg chg="add">
+        <pc:chgData name="Virve Räni" userId="161a7437-7ef4-49ec-91bf-54882f313dfe" providerId="ADAL" clId="{6D754EED-65AA-4A21-B175-6769012CF487}" dt="2026-04-20T07:33:56.018" v="645"/>
+        <pc:sldMkLst>
+          <pc:docMk/>
+          <pc:sldMk cId="0" sldId="261"/>
+        </pc:sldMkLst>
+      </pc:sldChg>
       <pc:sldChg chg="modSp mod">
         <pc:chgData name="Virve Räni" userId="161a7437-7ef4-49ec-91bf-54882f313dfe" providerId="ADAL" clId="{6D754EED-65AA-4A21-B175-6769012CF487}" dt="2026-04-14T08:06:07.883" v="377" actId="790"/>
         <pc:sldMkLst>
@@ -393,8 +401,8 @@
           </ac:spMkLst>
         </pc:spChg>
       </pc:sldChg>
-      <pc:sldChg chg="modSp mod ord">
-        <pc:chgData name="Virve Räni" userId="161a7437-7ef4-49ec-91bf-54882f313dfe" providerId="ADAL" clId="{6D754EED-65AA-4A21-B175-6769012CF487}" dt="2026-04-14T08:06:47.771" v="379"/>
+      <pc:sldChg chg="modSp mod ord modAnim">
+        <pc:chgData name="Virve Räni" userId="161a7437-7ef4-49ec-91bf-54882f313dfe" providerId="ADAL" clId="{6D754EED-65AA-4A21-B175-6769012CF487}" dt="2026-04-20T11:06:16.672" v="698" actId="20577"/>
         <pc:sldMkLst>
           <pc:docMk/>
           <pc:sldMk cId="2641817430" sldId="514"/>
@@ -408,7 +416,7 @@
           </ac:spMkLst>
         </pc:spChg>
         <pc:spChg chg="mod">
-          <ac:chgData name="Virve Räni" userId="161a7437-7ef4-49ec-91bf-54882f313dfe" providerId="ADAL" clId="{6D754EED-65AA-4A21-B175-6769012CF487}" dt="2026-04-14T08:06:07.883" v="377" actId="790"/>
+          <ac:chgData name="Virve Räni" userId="161a7437-7ef4-49ec-91bf-54882f313dfe" providerId="ADAL" clId="{6D754EED-65AA-4A21-B175-6769012CF487}" dt="2026-04-20T11:06:16.672" v="698" actId="20577"/>
           <ac:spMkLst>
             <pc:docMk/>
             <pc:sldMk cId="2641817430" sldId="514"/>
@@ -532,7 +540,7 @@
         </pc:spChg>
       </pc:sldChg>
       <pc:sldChg chg="modSp new mod">
-        <pc:chgData name="Virve Räni" userId="161a7437-7ef4-49ec-91bf-54882f313dfe" providerId="ADAL" clId="{6D754EED-65AA-4A21-B175-6769012CF487}" dt="2026-04-14T08:12:52.894" v="497" actId="20577"/>
+        <pc:chgData name="Virve Räni" userId="161a7437-7ef4-49ec-91bf-54882f313dfe" providerId="ADAL" clId="{6D754EED-65AA-4A21-B175-6769012CF487}" dt="2026-04-20T05:44:09.629" v="644" actId="20577"/>
         <pc:sldMkLst>
           <pc:docMk/>
           <pc:sldMk cId="1143583913" sldId="647"/>
@@ -546,7 +554,7 @@
           </ac:spMkLst>
         </pc:spChg>
         <pc:spChg chg="mod">
-          <ac:chgData name="Virve Räni" userId="161a7437-7ef4-49ec-91bf-54882f313dfe" providerId="ADAL" clId="{6D754EED-65AA-4A21-B175-6769012CF487}" dt="2026-04-14T08:12:52.894" v="497" actId="20577"/>
+          <ac:chgData name="Virve Räni" userId="161a7437-7ef4-49ec-91bf-54882f313dfe" providerId="ADAL" clId="{6D754EED-65AA-4A21-B175-6769012CF487}" dt="2026-04-20T05:44:09.629" v="644" actId="20577"/>
           <ac:spMkLst>
             <pc:docMk/>
             <pc:sldMk cId="1143583913" sldId="647"/>
@@ -653,7 +661,7 @@
           <a:p>
             <a:fld id="{F9D2AD6E-DEDD-49A0-A4BE-7A081A9112DA}" type="datetimeFigureOut">
               <a:rPr lang="en-US" smtClean="0"/>
-              <a:t>4/19/2026</a:t>
+              <a:t>4/20/2026</a:t>
             </a:fld>
             <a:endParaRPr lang="en-US"/>
           </a:p>
@@ -829,7 +837,7 @@
           </a:lstStyle>
           <a:p>
             <a:fld id="{2AF9C1A6-4321-41FA-B001-4140F0E2457F}" type="datetimeFigureOut">
-              <a:t>19.04.2026</a:t>
+              <a:t>20.04.2026</a:t>
             </a:fld>
             <a:endParaRPr lang="en-US"/>
           </a:p>
@@ -1225,6 +1233,90 @@
           <a:bodyPr/>
           <a:lstStyle/>
           <a:p>
+            <a:endParaRPr lang="en-US" dirty="0"/>
+          </a:p>
+        </p:txBody>
+      </p:sp>
+      <p:sp>
+        <p:nvSpPr>
+          <p:cNvPr id="4" name="Slide Number Placeholder 3"/>
+          <p:cNvSpPr>
+            <a:spLocks noGrp="1"/>
+          </p:cNvSpPr>
+          <p:nvPr>
+            <p:ph type="sldNum" sz="quarter" idx="10"/>
+          </p:nvPr>
+        </p:nvSpPr>
+        <p:spPr/>
+        <p:txBody>
+          <a:bodyPr/>
+          <a:lstStyle/>
+          <a:p>
+            <a:fld id="{F7021451-1387-4CA6-816F-3879F97B5CBC}" type="slidenum">
+              <a:rPr lang="en-US"/>
+              <a:t>6</a:t>
+            </a:fld>
+            <a:endParaRPr lang="en-US"/>
+          </a:p>
+        </p:txBody>
+      </p:sp>
+    </p:spTree>
+    <p:extLst>
+      <p:ext uri="{BB962C8B-B14F-4D97-AF65-F5344CB8AC3E}">
+        <p14:creationId xmlns:p14="http://schemas.microsoft.com/office/powerpoint/2010/main" val="1024086991"/>
+      </p:ext>
+    </p:extLst>
+  </p:cSld>
+  <p:clrMapOvr>
+    <a:masterClrMapping/>
+  </p:clrMapOvr>
+</p:notes>
+</file>
+
+<file path=ppt/notesSlides/notesSlide3.xml><?xml version="1.0" encoding="utf-8"?>
+<p:notes xmlns:a="http://schemas.openxmlformats.org/drawingml/2006/main" xmlns:r="http://schemas.openxmlformats.org/officeDocument/2006/relationships" xmlns:p="http://schemas.openxmlformats.org/presentationml/2006/main">
+  <p:cSld>
+    <p:spTree>
+      <p:nvGrpSpPr>
+        <p:cNvPr id="1" name=""/>
+        <p:cNvGrpSpPr/>
+        <p:nvPr/>
+      </p:nvGrpSpPr>
+      <p:grpSpPr>
+        <a:xfrm>
+          <a:off x="0" y="0"/>
+          <a:ext cx="0" cy="0"/>
+          <a:chOff x="0" y="0"/>
+          <a:chExt cx="0" cy="0"/>
+        </a:xfrm>
+      </p:grpSpPr>
+      <p:sp>
+        <p:nvSpPr>
+          <p:cNvPr id="2" name="Slide Image Placeholder 1"/>
+          <p:cNvSpPr>
+            <a:spLocks noGrp="1" noRot="1" noChangeAspect="1"/>
+          </p:cNvSpPr>
+          <p:nvPr>
+            <p:ph type="sldImg"/>
+          </p:nvPr>
+        </p:nvSpPr>
+        <p:spPr/>
+      </p:sp>
+      <p:sp>
+        <p:nvSpPr>
+          <p:cNvPr id="3" name="Notes Placeholder 2"/>
+          <p:cNvSpPr>
+            <a:spLocks noGrp="1"/>
+          </p:cNvSpPr>
+          <p:nvPr>
+            <p:ph type="body" idx="1"/>
+          </p:nvPr>
+        </p:nvSpPr>
+        <p:spPr/>
+        <p:txBody>
+          <a:bodyPr/>
+          <a:lstStyle/>
+          <a:p>
             <a:r>
               <a:rPr lang="en-US" err="1">
                 <a:ea typeface="Calibri"/>
@@ -1273,7 +1365,7 @@
           <a:p>
             <a:fld id="{46699514-027B-49BD-8B49-5054CA40ECF4}" type="slidenum">
               <a:rPr lang="en-US"/>
-              <a:t>8</a:t>
+              <a:t>9</a:t>
             </a:fld>
             <a:endParaRPr lang="en-US"/>
           </a:p>
@@ -12419,7 +12511,7 @@
           <a:p>
             <a:fld id="{DE840A40-73C8-4048-8140-49F5D65BB431}" type="datetimeFigureOut">
               <a:rPr lang="et-EE" smtClean="0"/>
-              <a:t>19.04.2026</a:t>
+              <a:t>20.04.2026</a:t>
             </a:fld>
             <a:endParaRPr lang="et-EE"/>
           </a:p>
@@ -12483,6 +12575,703 @@
     <p:extLst>
       <p:ext uri="{BB962C8B-B14F-4D97-AF65-F5344CB8AC3E}">
         <p14:creationId xmlns:p14="http://schemas.microsoft.com/office/powerpoint/2010/main" val="1380957545"/>
+      </p:ext>
+    </p:extLst>
+  </p:cSld>
+  <p:clrMapOvr>
+    <a:masterClrMapping/>
+  </p:clrMapOvr>
+</p:sldLayout>
+</file>
+
+<file path=ppt/slideLayouts/slideLayout19.xml><?xml version="1.0" encoding="utf-8"?>
+<p:sldLayout xmlns:a="http://schemas.openxmlformats.org/drawingml/2006/main" xmlns:r="http://schemas.openxmlformats.org/officeDocument/2006/relationships" xmlns:p="http://schemas.openxmlformats.org/presentationml/2006/main">
+  <p:cSld name="Slide 6 master">
+    <p:bg>
+      <p:bgPr>
+        <a:solidFill>
+          <a:srgbClr val="000000"/>
+        </a:solidFill>
+        <a:effectLst/>
+      </p:bgPr>
+    </p:bg>
+    <p:spTree>
+      <p:nvGrpSpPr>
+        <p:cNvPr id="1" name=""/>
+        <p:cNvGrpSpPr/>
+        <p:nvPr/>
+      </p:nvGrpSpPr>
+      <p:grpSpPr>
+        <a:xfrm>
+          <a:off x="0" y="0"/>
+          <a:ext cx="0" cy="0"/>
+          <a:chOff x="0" y="0"/>
+          <a:chExt cx="0" cy="0"/>
+        </a:xfrm>
+      </p:grpSpPr>
+      <p:sp>
+        <p:nvSpPr>
+          <p:cNvPr id="2" name="Shape 0"/>
+          <p:cNvSpPr/>
+          <p:nvPr/>
+        </p:nvSpPr>
+        <p:spPr>
+          <a:xfrm>
+            <a:off x="0" y="0"/>
+            <a:ext cx="12192000" cy="6858000"/>
+          </a:xfrm>
+          <a:prstGeom prst="rect">
+            <a:avLst/>
+          </a:prstGeom>
+          <a:solidFill>
+            <a:srgbClr val="F6F4F4"/>
+          </a:solidFill>
+          <a:ln/>
+        </p:spPr>
+        <p:txBody>
+          <a:bodyPr/>
+          <a:lstStyle/>
+          <a:p>
+            <a:endParaRPr lang="et-EE" sz="1500"/>
+          </a:p>
+        </p:txBody>
+      </p:sp>
+      <p:sp>
+        <p:nvSpPr>
+          <p:cNvPr id="3" name="Shape 1"/>
+          <p:cNvSpPr/>
+          <p:nvPr/>
+        </p:nvSpPr>
+        <p:spPr>
+          <a:xfrm>
+            <a:off x="0" y="0"/>
+            <a:ext cx="12192000" cy="6858000"/>
+          </a:xfrm>
+          <a:prstGeom prst="rect">
+            <a:avLst/>
+          </a:prstGeom>
+          <a:solidFill>
+            <a:srgbClr val="FFFFFF"/>
+          </a:solidFill>
+          <a:ln/>
+        </p:spPr>
+        <p:txBody>
+          <a:bodyPr/>
+          <a:lstStyle/>
+          <a:p>
+            <a:endParaRPr lang="et-EE" sz="1500"/>
+          </a:p>
+        </p:txBody>
+      </p:sp>
+      <p:cxnSp>
+        <p:nvCxnSpPr>
+          <p:cNvPr id="5" name="Straight Connector 4">
+            <a:extLst>
+              <a:ext uri="{FF2B5EF4-FFF2-40B4-BE49-F238E27FC236}">
+                <a16:creationId xmlns:a16="http://schemas.microsoft.com/office/drawing/2014/main" id="{D316A5AF-4096-3F73-CDAE-6BD353811010}"/>
+              </a:ext>
+            </a:extLst>
+          </p:cNvPr>
+          <p:cNvCxnSpPr>
+            <a:cxnSpLocks/>
+          </p:cNvCxnSpPr>
+          <p:nvPr userDrawn="1"/>
+        </p:nvCxnSpPr>
+        <p:spPr>
+          <a:xfrm>
+            <a:off x="680936" y="6411507"/>
+            <a:ext cx="9766503" cy="0"/>
+          </a:xfrm>
+          <a:prstGeom prst="line">
+            <a:avLst/>
+          </a:prstGeom>
+          <a:noFill/>
+          <a:ln w="38100" cap="flat" cmpd="sng" algn="ctr">
+            <a:solidFill>
+              <a:srgbClr val="584FF5"/>
+            </a:solidFill>
+            <a:prstDash val="solid"/>
+            <a:miter lim="800000"/>
+          </a:ln>
+          <a:effectLst/>
+        </p:spPr>
+      </p:cxnSp>
+      <p:grpSp>
+        <p:nvGrpSpPr>
+          <p:cNvPr id="6" name="Group 5">
+            <a:extLst>
+              <a:ext uri="{FF2B5EF4-FFF2-40B4-BE49-F238E27FC236}">
+                <a16:creationId xmlns:a16="http://schemas.microsoft.com/office/drawing/2014/main" id="{A576EF2F-0C5E-420A-857B-31ACCBDDD5CD}"/>
+              </a:ext>
+            </a:extLst>
+          </p:cNvPr>
+          <p:cNvGrpSpPr/>
+          <p:nvPr userDrawn="1"/>
+        </p:nvGrpSpPr>
+        <p:grpSpPr>
+          <a:xfrm>
+            <a:off x="10951021" y="6277886"/>
+            <a:ext cx="674192" cy="266297"/>
+            <a:chOff x="10757948" y="6254276"/>
+            <a:chExt cx="809030" cy="319556"/>
+          </a:xfrm>
+        </p:grpSpPr>
+        <p:sp>
+          <p:nvSpPr>
+            <p:cNvPr id="7" name="Freeform: Shape 6">
+              <a:extLst>
+                <a:ext uri="{FF2B5EF4-FFF2-40B4-BE49-F238E27FC236}">
+                  <a16:creationId xmlns:a16="http://schemas.microsoft.com/office/drawing/2014/main" id="{2B5F4D7E-D685-D63A-46F9-6F65D124122E}"/>
+                </a:ext>
+              </a:extLst>
+            </p:cNvPr>
+            <p:cNvSpPr/>
+            <p:nvPr/>
+          </p:nvSpPr>
+          <p:spPr>
+            <a:xfrm>
+              <a:off x="10757948" y="6254276"/>
+              <a:ext cx="809030" cy="319556"/>
+            </a:xfrm>
+            <a:custGeom>
+              <a:avLst/>
+              <a:gdLst>
+                <a:gd name="connsiteX0" fmla="*/ 0 w 809030"/>
+                <a:gd name="connsiteY0" fmla="*/ 127987 h 319556"/>
+                <a:gd name="connsiteX1" fmla="*/ 192245 w 809030"/>
+                <a:gd name="connsiteY1" fmla="*/ 127987 h 319556"/>
+                <a:gd name="connsiteX2" fmla="*/ 282424 w 809030"/>
+                <a:gd name="connsiteY2" fmla="*/ 63993 h 319556"/>
+                <a:gd name="connsiteX3" fmla="*/ 0 w 809030"/>
+                <a:gd name="connsiteY3" fmla="*/ 63993 h 319556"/>
+                <a:gd name="connsiteX4" fmla="*/ 0 w 809030"/>
+                <a:gd name="connsiteY4" fmla="*/ 0 h 319556"/>
+                <a:gd name="connsiteX5" fmla="*/ 295806 w 809030"/>
+                <a:gd name="connsiteY5" fmla="*/ 0 h 319556"/>
+                <a:gd name="connsiteX6" fmla="*/ 384973 w 809030"/>
+                <a:gd name="connsiteY6" fmla="*/ 63993 h 319556"/>
+                <a:gd name="connsiteX7" fmla="*/ 424034 w 809030"/>
+                <a:gd name="connsiteY7" fmla="*/ 63993 h 319556"/>
+                <a:gd name="connsiteX8" fmla="*/ 513466 w 809030"/>
+                <a:gd name="connsiteY8" fmla="*/ 0 h 319556"/>
+                <a:gd name="connsiteX9" fmla="*/ 796420 w 809030"/>
+                <a:gd name="connsiteY9" fmla="*/ 265 h 319556"/>
+                <a:gd name="connsiteX10" fmla="*/ 796420 w 809030"/>
+                <a:gd name="connsiteY10" fmla="*/ 63993 h 319556"/>
+                <a:gd name="connsiteX11" fmla="*/ 602921 w 809030"/>
+                <a:gd name="connsiteY11" fmla="*/ 63993 h 319556"/>
+                <a:gd name="connsiteX12" fmla="*/ 602921 w 809030"/>
+                <a:gd name="connsiteY12" fmla="*/ 127697 h 319556"/>
+                <a:gd name="connsiteX13" fmla="*/ 719599 w 809030"/>
+                <a:gd name="connsiteY13" fmla="*/ 127697 h 319556"/>
+                <a:gd name="connsiteX14" fmla="*/ 809031 w 809030"/>
+                <a:gd name="connsiteY14" fmla="*/ 192197 h 319556"/>
+                <a:gd name="connsiteX15" fmla="*/ 602921 w 809030"/>
+                <a:gd name="connsiteY15" fmla="*/ 192197 h 319556"/>
+                <a:gd name="connsiteX16" fmla="*/ 602921 w 809030"/>
+                <a:gd name="connsiteY16" fmla="*/ 255708 h 319556"/>
+                <a:gd name="connsiteX17" fmla="*/ 808766 w 809030"/>
+                <a:gd name="connsiteY17" fmla="*/ 255563 h 319556"/>
+                <a:gd name="connsiteX18" fmla="*/ 808766 w 809030"/>
+                <a:gd name="connsiteY18" fmla="*/ 255563 h 319556"/>
+                <a:gd name="connsiteX19" fmla="*/ 719575 w 809030"/>
+                <a:gd name="connsiteY19" fmla="*/ 319557 h 319556"/>
+                <a:gd name="connsiteX20" fmla="*/ 436379 w 809030"/>
+                <a:gd name="connsiteY20" fmla="*/ 319557 h 319556"/>
+                <a:gd name="connsiteX21" fmla="*/ 436379 w 809030"/>
+                <a:gd name="connsiteY21" fmla="*/ 255708 h 319556"/>
+                <a:gd name="connsiteX22" fmla="*/ 384924 w 809030"/>
+                <a:gd name="connsiteY22" fmla="*/ 255708 h 319556"/>
+                <a:gd name="connsiteX23" fmla="*/ 295830 w 809030"/>
+                <a:gd name="connsiteY23" fmla="*/ 319557 h 319556"/>
+                <a:gd name="connsiteX24" fmla="*/ 0 w 809030"/>
+                <a:gd name="connsiteY24" fmla="*/ 319557 h 319556"/>
+                <a:gd name="connsiteX25" fmla="*/ 0 w 809030"/>
+                <a:gd name="connsiteY25" fmla="*/ 255563 h 319556"/>
+                <a:gd name="connsiteX26" fmla="*/ 272394 w 809030"/>
+                <a:gd name="connsiteY26" fmla="*/ 255563 h 319556"/>
+                <a:gd name="connsiteX27" fmla="*/ 192221 w 809030"/>
+                <a:gd name="connsiteY27" fmla="*/ 192197 h 319556"/>
+                <a:gd name="connsiteX28" fmla="*/ 0 w 809030"/>
+                <a:gd name="connsiteY28" fmla="*/ 192197 h 319556"/>
+                <a:gd name="connsiteX29" fmla="*/ 0 w 809030"/>
+                <a:gd name="connsiteY29" fmla="*/ 127987 h 319556"/>
+                <a:gd name="connsiteX30" fmla="*/ 513466 w 809030"/>
+                <a:gd name="connsiteY30" fmla="*/ 192197 h 319556"/>
+                <a:gd name="connsiteX31" fmla="*/ 424058 w 809030"/>
+                <a:gd name="connsiteY31" fmla="*/ 127842 h 319556"/>
+                <a:gd name="connsiteX32" fmla="*/ 384948 w 809030"/>
+                <a:gd name="connsiteY32" fmla="*/ 127842 h 319556"/>
+                <a:gd name="connsiteX33" fmla="*/ 366213 w 809030"/>
+                <a:gd name="connsiteY33" fmla="*/ 160321 h 319556"/>
+                <a:gd name="connsiteX34" fmla="*/ 384973 w 809030"/>
+                <a:gd name="connsiteY34" fmla="*/ 192197 h 319556"/>
+                <a:gd name="connsiteX35" fmla="*/ 513466 w 809030"/>
+                <a:gd name="connsiteY35" fmla="*/ 192197 h 319556"/>
+              </a:gdLst>
+              <a:ahLst/>
+              <a:cxnLst>
+                <a:cxn ang="0">
+                  <a:pos x="connsiteX0" y="connsiteY0"/>
+                </a:cxn>
+                <a:cxn ang="0">
+                  <a:pos x="connsiteX1" y="connsiteY1"/>
+                </a:cxn>
+                <a:cxn ang="0">
+                  <a:pos x="connsiteX2" y="connsiteY2"/>
+                </a:cxn>
+                <a:cxn ang="0">
+                  <a:pos x="connsiteX3" y="connsiteY3"/>
+                </a:cxn>
+                <a:cxn ang="0">
+                  <a:pos x="connsiteX4" y="connsiteY4"/>
+                </a:cxn>
+                <a:cxn ang="0">
+                  <a:pos x="connsiteX5" y="connsiteY5"/>
+                </a:cxn>
+                <a:cxn ang="0">
+                  <a:pos x="connsiteX6" y="connsiteY6"/>
+                </a:cxn>
+                <a:cxn ang="0">
+                  <a:pos x="connsiteX7" y="connsiteY7"/>
+                </a:cxn>
+                <a:cxn ang="0">
+                  <a:pos x="connsiteX8" y="connsiteY8"/>
+                </a:cxn>
+                <a:cxn ang="0">
+                  <a:pos x="connsiteX9" y="connsiteY9"/>
+                </a:cxn>
+                <a:cxn ang="0">
+                  <a:pos x="connsiteX10" y="connsiteY10"/>
+                </a:cxn>
+                <a:cxn ang="0">
+                  <a:pos x="connsiteX11" y="connsiteY11"/>
+                </a:cxn>
+                <a:cxn ang="0">
+                  <a:pos x="connsiteX12" y="connsiteY12"/>
+                </a:cxn>
+                <a:cxn ang="0">
+                  <a:pos x="connsiteX13" y="connsiteY13"/>
+                </a:cxn>
+                <a:cxn ang="0">
+                  <a:pos x="connsiteX14" y="connsiteY14"/>
+                </a:cxn>
+                <a:cxn ang="0">
+                  <a:pos x="connsiteX15" y="connsiteY15"/>
+                </a:cxn>
+                <a:cxn ang="0">
+                  <a:pos x="connsiteX16" y="connsiteY16"/>
+                </a:cxn>
+                <a:cxn ang="0">
+                  <a:pos x="connsiteX17" y="connsiteY17"/>
+                </a:cxn>
+                <a:cxn ang="0">
+                  <a:pos x="connsiteX18" y="connsiteY18"/>
+                </a:cxn>
+                <a:cxn ang="0">
+                  <a:pos x="connsiteX19" y="connsiteY19"/>
+                </a:cxn>
+                <a:cxn ang="0">
+                  <a:pos x="connsiteX20" y="connsiteY20"/>
+                </a:cxn>
+                <a:cxn ang="0">
+                  <a:pos x="connsiteX21" y="connsiteY21"/>
+                </a:cxn>
+                <a:cxn ang="0">
+                  <a:pos x="connsiteX22" y="connsiteY22"/>
+                </a:cxn>
+                <a:cxn ang="0">
+                  <a:pos x="connsiteX23" y="connsiteY23"/>
+                </a:cxn>
+                <a:cxn ang="0">
+                  <a:pos x="connsiteX24" y="connsiteY24"/>
+                </a:cxn>
+                <a:cxn ang="0">
+                  <a:pos x="connsiteX25" y="connsiteY25"/>
+                </a:cxn>
+                <a:cxn ang="0">
+                  <a:pos x="connsiteX26" y="connsiteY26"/>
+                </a:cxn>
+                <a:cxn ang="0">
+                  <a:pos x="connsiteX27" y="connsiteY27"/>
+                </a:cxn>
+                <a:cxn ang="0">
+                  <a:pos x="connsiteX28" y="connsiteY28"/>
+                </a:cxn>
+                <a:cxn ang="0">
+                  <a:pos x="connsiteX29" y="connsiteY29"/>
+                </a:cxn>
+                <a:cxn ang="0">
+                  <a:pos x="connsiteX30" y="connsiteY30"/>
+                </a:cxn>
+                <a:cxn ang="0">
+                  <a:pos x="connsiteX31" y="connsiteY31"/>
+                </a:cxn>
+                <a:cxn ang="0">
+                  <a:pos x="connsiteX32" y="connsiteY32"/>
+                </a:cxn>
+                <a:cxn ang="0">
+                  <a:pos x="connsiteX33" y="connsiteY33"/>
+                </a:cxn>
+                <a:cxn ang="0">
+                  <a:pos x="connsiteX34" y="connsiteY34"/>
+                </a:cxn>
+                <a:cxn ang="0">
+                  <a:pos x="connsiteX35" y="connsiteY35"/>
+                </a:cxn>
+              </a:cxnLst>
+              <a:rect l="l" t="t" r="r" b="b"/>
+              <a:pathLst>
+                <a:path w="809030" h="319556">
+                  <a:moveTo>
+                    <a:pt x="0" y="127987"/>
+                  </a:moveTo>
+                  <a:lnTo>
+                    <a:pt x="192245" y="127987"/>
+                  </a:lnTo>
+                  <a:cubicBezTo>
+                    <a:pt x="193210" y="123405"/>
+                    <a:pt x="207074" y="63993"/>
+                    <a:pt x="282424" y="63993"/>
+                  </a:cubicBezTo>
+                  <a:lnTo>
+                    <a:pt x="0" y="63993"/>
+                  </a:lnTo>
+                  <a:lnTo>
+                    <a:pt x="0" y="0"/>
+                  </a:lnTo>
+                  <a:lnTo>
+                    <a:pt x="295806" y="0"/>
+                  </a:lnTo>
+                  <a:cubicBezTo>
+                    <a:pt x="374195" y="0"/>
+                    <a:pt x="384973" y="63993"/>
+                    <a:pt x="384973" y="63993"/>
+                  </a:cubicBezTo>
+                  <a:lnTo>
+                    <a:pt x="424034" y="63993"/>
+                  </a:lnTo>
+                  <a:cubicBezTo>
+                    <a:pt x="424034" y="63993"/>
+                    <a:pt x="435077" y="0"/>
+                    <a:pt x="513466" y="0"/>
+                  </a:cubicBezTo>
+                  <a:cubicBezTo>
+                    <a:pt x="591854" y="0"/>
+                    <a:pt x="796420" y="265"/>
+                    <a:pt x="796420" y="265"/>
+                  </a:cubicBezTo>
+                  <a:lnTo>
+                    <a:pt x="796420" y="63993"/>
+                  </a:lnTo>
+                  <a:lnTo>
+                    <a:pt x="602921" y="63993"/>
+                  </a:lnTo>
+                  <a:lnTo>
+                    <a:pt x="602921" y="127697"/>
+                  </a:lnTo>
+                  <a:lnTo>
+                    <a:pt x="719599" y="127697"/>
+                  </a:lnTo>
+                  <a:cubicBezTo>
+                    <a:pt x="797987" y="127697"/>
+                    <a:pt x="809031" y="192197"/>
+                    <a:pt x="809031" y="192197"/>
+                  </a:cubicBezTo>
+                  <a:lnTo>
+                    <a:pt x="602921" y="192197"/>
+                  </a:lnTo>
+                  <a:lnTo>
+                    <a:pt x="602921" y="255708"/>
+                  </a:lnTo>
+                  <a:lnTo>
+                    <a:pt x="808766" y="255563"/>
+                  </a:lnTo>
+                  <a:lnTo>
+                    <a:pt x="808766" y="255563"/>
+                  </a:lnTo>
+                  <a:cubicBezTo>
+                    <a:pt x="808766" y="255563"/>
+                    <a:pt x="797963" y="319557"/>
+                    <a:pt x="719575" y="319557"/>
+                  </a:cubicBezTo>
+                  <a:lnTo>
+                    <a:pt x="436379" y="319557"/>
+                  </a:lnTo>
+                  <a:lnTo>
+                    <a:pt x="436379" y="255708"/>
+                  </a:lnTo>
+                  <a:lnTo>
+                    <a:pt x="384924" y="255708"/>
+                  </a:lnTo>
+                  <a:cubicBezTo>
+                    <a:pt x="383912" y="260868"/>
+                    <a:pt x="370746" y="319557"/>
+                    <a:pt x="295830" y="319557"/>
+                  </a:cubicBezTo>
+                  <a:lnTo>
+                    <a:pt x="0" y="319557"/>
+                  </a:lnTo>
+                  <a:lnTo>
+                    <a:pt x="0" y="255563"/>
+                  </a:lnTo>
+                  <a:lnTo>
+                    <a:pt x="272394" y="255563"/>
+                  </a:lnTo>
+                  <a:cubicBezTo>
+                    <a:pt x="203023" y="250403"/>
+                    <a:pt x="192221" y="192197"/>
+                    <a:pt x="192221" y="192197"/>
+                  </a:cubicBezTo>
+                  <a:lnTo>
+                    <a:pt x="0" y="192197"/>
+                  </a:lnTo>
+                  <a:lnTo>
+                    <a:pt x="0" y="127987"/>
+                  </a:lnTo>
+                  <a:close/>
+                  <a:moveTo>
+                    <a:pt x="513466" y="192197"/>
+                  </a:moveTo>
+                  <a:cubicBezTo>
+                    <a:pt x="438477" y="192197"/>
+                    <a:pt x="424757" y="131169"/>
+                    <a:pt x="424058" y="127842"/>
+                  </a:cubicBezTo>
+                  <a:lnTo>
+                    <a:pt x="384948" y="127842"/>
+                  </a:lnTo>
+                  <a:cubicBezTo>
+                    <a:pt x="384707" y="129699"/>
+                    <a:pt x="382176" y="145805"/>
+                    <a:pt x="366213" y="160321"/>
+                  </a:cubicBezTo>
+                  <a:cubicBezTo>
+                    <a:pt x="384973" y="176259"/>
+                    <a:pt x="384973" y="192197"/>
+                    <a:pt x="384973" y="192197"/>
+                  </a:cubicBezTo>
+                  <a:lnTo>
+                    <a:pt x="513466" y="192197"/>
+                  </a:lnTo>
+                  <a:close/>
+                </a:path>
+              </a:pathLst>
+            </a:custGeom>
+            <a:solidFill>
+              <a:srgbClr val="584FF5"/>
+            </a:solidFill>
+            <a:ln w="2410" cap="flat">
+              <a:noFill/>
+              <a:prstDash val="solid"/>
+              <a:miter/>
+            </a:ln>
+          </p:spPr>
+          <p:txBody>
+            <a:bodyPr rtlCol="0" anchor="ctr"/>
+            <a:lstStyle/>
+            <a:p>
+              <a:pPr marL="0" marR="0" lvl="0" indent="0" defTabSz="761970" eaLnBrk="1" fontAlgn="auto" latinLnBrk="0" hangingPunct="1">
+                <a:lnSpc>
+                  <a:spcPct val="100000"/>
+                </a:lnSpc>
+                <a:spcBef>
+                  <a:spcPts val="0"/>
+                </a:spcBef>
+                <a:spcAft>
+                  <a:spcPts val="0"/>
+                </a:spcAft>
+                <a:buClrTx/>
+                <a:buSzTx/>
+                <a:buFontTx/>
+                <a:buNone/>
+                <a:tabLst/>
+                <a:defRPr/>
+              </a:pPr>
+              <a:endParaRPr kumimoji="0" lang="en-US" sz="1500" b="0" i="0" u="none" strike="noStrike" kern="0" cap="none" spc="0" normalizeH="0" baseline="0" noProof="0">
+                <a:ln>
+                  <a:noFill/>
+                </a:ln>
+                <a:solidFill>
+                  <a:srgbClr val="121212"/>
+                </a:solidFill>
+                <a:effectLst/>
+                <a:uLnTx/>
+                <a:uFillTx/>
+                <a:latin typeface="Inter"/>
+              </a:endParaRPr>
+            </a:p>
+          </p:txBody>
+        </p:sp>
+        <p:sp>
+          <p:nvSpPr>
+            <p:cNvPr id="8" name="Freeform: Shape 7">
+              <a:extLst>
+                <a:ext uri="{FF2B5EF4-FFF2-40B4-BE49-F238E27FC236}">
+                  <a16:creationId xmlns:a16="http://schemas.microsoft.com/office/drawing/2014/main" id="{3C0494AF-C2FA-DB73-BDB7-868AA8801C08}"/>
+                </a:ext>
+              </a:extLst>
+            </p:cNvPr>
+            <p:cNvSpPr/>
+            <p:nvPr/>
+          </p:nvSpPr>
+          <p:spPr>
+            <a:xfrm>
+              <a:off x="10950193" y="6318269"/>
+              <a:ext cx="410675" cy="191714"/>
+            </a:xfrm>
+            <a:custGeom>
+              <a:avLst/>
+              <a:gdLst>
+                <a:gd name="connsiteX0" fmla="*/ 410676 w 410675"/>
+                <a:gd name="connsiteY0" fmla="*/ 0 h 191714"/>
+                <a:gd name="connsiteX1" fmla="*/ 90203 w 410675"/>
+                <a:gd name="connsiteY1" fmla="*/ 0 h 191714"/>
+                <a:gd name="connsiteX2" fmla="*/ 0 w 410675"/>
+                <a:gd name="connsiteY2" fmla="*/ 63993 h 191714"/>
+                <a:gd name="connsiteX3" fmla="*/ 410676 w 410675"/>
+                <a:gd name="connsiteY3" fmla="*/ 63752 h 191714"/>
+                <a:gd name="connsiteX4" fmla="*/ 410676 w 410675"/>
+                <a:gd name="connsiteY4" fmla="*/ 0 h 191714"/>
+                <a:gd name="connsiteX5" fmla="*/ 410676 w 410675"/>
+                <a:gd name="connsiteY5" fmla="*/ 191715 h 191714"/>
+                <a:gd name="connsiteX6" fmla="*/ 87647 w 410675"/>
+                <a:gd name="connsiteY6" fmla="*/ 191715 h 191714"/>
+                <a:gd name="connsiteX7" fmla="*/ 0 w 410675"/>
+                <a:gd name="connsiteY7" fmla="*/ 128204 h 191714"/>
+                <a:gd name="connsiteX8" fmla="*/ 410676 w 410675"/>
+                <a:gd name="connsiteY8" fmla="*/ 128204 h 191714"/>
+                <a:gd name="connsiteX9" fmla="*/ 410676 w 410675"/>
+                <a:gd name="connsiteY9" fmla="*/ 191715 h 191714"/>
+              </a:gdLst>
+              <a:ahLst/>
+              <a:cxnLst>
+                <a:cxn ang="0">
+                  <a:pos x="connsiteX0" y="connsiteY0"/>
+                </a:cxn>
+                <a:cxn ang="0">
+                  <a:pos x="connsiteX1" y="connsiteY1"/>
+                </a:cxn>
+                <a:cxn ang="0">
+                  <a:pos x="connsiteX2" y="connsiteY2"/>
+                </a:cxn>
+                <a:cxn ang="0">
+                  <a:pos x="connsiteX3" y="connsiteY3"/>
+                </a:cxn>
+                <a:cxn ang="0">
+                  <a:pos x="connsiteX4" y="connsiteY4"/>
+                </a:cxn>
+                <a:cxn ang="0">
+                  <a:pos x="connsiteX5" y="connsiteY5"/>
+                </a:cxn>
+                <a:cxn ang="0">
+                  <a:pos x="connsiteX6" y="connsiteY6"/>
+                </a:cxn>
+                <a:cxn ang="0">
+                  <a:pos x="connsiteX7" y="connsiteY7"/>
+                </a:cxn>
+                <a:cxn ang="0">
+                  <a:pos x="connsiteX8" y="connsiteY8"/>
+                </a:cxn>
+                <a:cxn ang="0">
+                  <a:pos x="connsiteX9" y="connsiteY9"/>
+                </a:cxn>
+              </a:cxnLst>
+              <a:rect l="l" t="t" r="r" b="b"/>
+              <a:pathLst>
+                <a:path w="410675" h="191714">
+                  <a:moveTo>
+                    <a:pt x="410676" y="0"/>
+                  </a:moveTo>
+                  <a:lnTo>
+                    <a:pt x="90203" y="0"/>
+                  </a:lnTo>
+                  <a:cubicBezTo>
+                    <a:pt x="11815" y="0"/>
+                    <a:pt x="0" y="63993"/>
+                    <a:pt x="0" y="63993"/>
+                  </a:cubicBezTo>
+                  <a:lnTo>
+                    <a:pt x="410676" y="63752"/>
+                  </a:lnTo>
+                  <a:lnTo>
+                    <a:pt x="410676" y="0"/>
+                  </a:lnTo>
+                  <a:close/>
+                  <a:moveTo>
+                    <a:pt x="410676" y="191715"/>
+                  </a:moveTo>
+                  <a:lnTo>
+                    <a:pt x="87647" y="191715"/>
+                  </a:lnTo>
+                  <a:cubicBezTo>
+                    <a:pt x="9789" y="191715"/>
+                    <a:pt x="121" y="125937"/>
+                    <a:pt x="0" y="128204"/>
+                  </a:cubicBezTo>
+                  <a:lnTo>
+                    <a:pt x="410676" y="128204"/>
+                  </a:lnTo>
+                  <a:lnTo>
+                    <a:pt x="410676" y="191715"/>
+                  </a:lnTo>
+                  <a:close/>
+                </a:path>
+              </a:pathLst>
+            </a:custGeom>
+            <a:solidFill>
+              <a:srgbClr val="584FF5">
+                <a:lumMod val="60000"/>
+                <a:lumOff val="40000"/>
+              </a:srgbClr>
+            </a:solidFill>
+            <a:ln w="2410" cap="flat">
+              <a:noFill/>
+              <a:prstDash val="solid"/>
+              <a:miter/>
+            </a:ln>
+          </p:spPr>
+          <p:txBody>
+            <a:bodyPr rtlCol="0" anchor="ctr"/>
+            <a:lstStyle/>
+            <a:p>
+              <a:pPr marL="0" marR="0" lvl="0" indent="0" defTabSz="761970" eaLnBrk="1" fontAlgn="auto" latinLnBrk="0" hangingPunct="1">
+                <a:lnSpc>
+                  <a:spcPct val="100000"/>
+                </a:lnSpc>
+                <a:spcBef>
+                  <a:spcPts val="0"/>
+                </a:spcBef>
+                <a:spcAft>
+                  <a:spcPts val="0"/>
+                </a:spcAft>
+                <a:buClrTx/>
+                <a:buSzTx/>
+                <a:buFontTx/>
+                <a:buNone/>
+                <a:tabLst/>
+                <a:defRPr/>
+              </a:pPr>
+              <a:endParaRPr kumimoji="0" lang="en-US" sz="1500" b="0" i="0" u="none" strike="noStrike" kern="0" cap="none" spc="0" normalizeH="0" baseline="0" noProof="0">
+                <a:ln>
+                  <a:noFill/>
+                </a:ln>
+                <a:solidFill>
+                  <a:srgbClr val="121212"/>
+                </a:solidFill>
+                <a:effectLst/>
+                <a:uLnTx/>
+                <a:uFillTx/>
+                <a:latin typeface="Inter"/>
+              </a:endParaRPr>
+            </a:p>
+          </p:txBody>
+        </p:sp>
+      </p:grpSp>
+    </p:spTree>
+    <p:extLst>
+      <p:ext uri="{BB962C8B-B14F-4D97-AF65-F5344CB8AC3E}">
+        <p14:creationId xmlns:p14="http://schemas.microsoft.com/office/powerpoint/2010/main" val="18919152"/>
       </p:ext>
     </p:extLst>
   </p:cSld>
@@ -23747,6 +24536,7 @@
     <p:sldLayoutId id="2147483668" r:id="rId16"/>
     <p:sldLayoutId id="2147483655" r:id="rId17"/>
     <p:sldLayoutId id="2147483677" r:id="rId18"/>
+    <p:sldLayoutId id="2147483678" r:id="rId19"/>
   </p:sldLayoutIdLst>
   <p:txStyles>
     <p:titleStyle>
@@ -24513,6 +25303,498 @@
   <p:cSld>
     <p:spTree>
       <p:nvGrpSpPr>
+        <p:cNvPr id="1" name="">
+          <a:extLst>
+            <a:ext uri="{FF2B5EF4-FFF2-40B4-BE49-F238E27FC236}">
+              <a16:creationId xmlns:a16="http://schemas.microsoft.com/office/drawing/2014/main" id="{1CADDEC0-4E0D-7B98-5997-874242016A28}"/>
+            </a:ext>
+          </a:extLst>
+        </p:cNvPr>
+        <p:cNvGrpSpPr/>
+        <p:nvPr/>
+      </p:nvGrpSpPr>
+      <p:grpSpPr>
+        <a:xfrm>
+          <a:off x="0" y="0"/>
+          <a:ext cx="0" cy="0"/>
+          <a:chOff x="0" y="0"/>
+          <a:chExt cx="0" cy="0"/>
+        </a:xfrm>
+      </p:grpSpPr>
+      <p:sp>
+        <p:nvSpPr>
+          <p:cNvPr id="2" name="Title 1">
+            <a:extLst>
+              <a:ext uri="{FF2B5EF4-FFF2-40B4-BE49-F238E27FC236}">
+                <a16:creationId xmlns:a16="http://schemas.microsoft.com/office/drawing/2014/main" id="{193632AA-1804-C95A-235A-B1630A75A285}"/>
+              </a:ext>
+            </a:extLst>
+          </p:cNvPr>
+          <p:cNvSpPr>
+            <a:spLocks noGrp="1"/>
+          </p:cNvSpPr>
+          <p:nvPr>
+            <p:ph type="ctrTitle"/>
+          </p:nvPr>
+        </p:nvSpPr>
+        <p:spPr>
+          <a:xfrm>
+            <a:off x="614923" y="479570"/>
+            <a:ext cx="10044112" cy="357043"/>
+          </a:xfrm>
+        </p:spPr>
+        <p:txBody>
+          <a:bodyPr/>
+          <a:lstStyle/>
+          <a:p>
+            <a:r>
+              <a:rPr lang="et-EE" b="1" noProof="0" dirty="0"/>
+              <a:t>Tehisaru – eduka sisendi kirjutamine </a:t>
+            </a:r>
+          </a:p>
+        </p:txBody>
+      </p:sp>
+      <p:sp>
+        <p:nvSpPr>
+          <p:cNvPr id="3" name="Content Placeholder 2">
+            <a:extLst>
+              <a:ext uri="{FF2B5EF4-FFF2-40B4-BE49-F238E27FC236}">
+                <a16:creationId xmlns:a16="http://schemas.microsoft.com/office/drawing/2014/main" id="{2ED24C29-7DB7-412C-B56A-46EC71179C17}"/>
+              </a:ext>
+            </a:extLst>
+          </p:cNvPr>
+          <p:cNvSpPr>
+            <a:spLocks noGrp="1"/>
+          </p:cNvSpPr>
+          <p:nvPr>
+            <p:ph sz="quarter" idx="10"/>
+          </p:nvPr>
+        </p:nvSpPr>
+        <p:spPr/>
+        <p:txBody>
+          <a:bodyPr/>
+          <a:lstStyle/>
+          <a:p>
+            <a:pPr marL="342900" indent="-342900">
+              <a:lnSpc>
+                <a:spcPct val="150000"/>
+              </a:lnSpc>
+              <a:buFont typeface="Arial,Sans-Serif" panose="020B0502030000000004" pitchFamily="34" charset="0"/>
+              <a:buChar char="•"/>
+            </a:pPr>
+            <a:r>
+              <a:rPr lang="et-EE" sz="2400" noProof="0" dirty="0">
+                <a:ea typeface="Inter"/>
+                <a:cs typeface="Noto Serif"/>
+              </a:rPr>
+              <a:t>Sisend = keelemudelile antud </a:t>
+            </a:r>
+            <a:r>
+              <a:rPr lang="et-EE" sz="2400" noProof="0" dirty="0" err="1">
+                <a:ea typeface="Inter"/>
+                <a:cs typeface="Noto Serif"/>
+              </a:rPr>
+              <a:t>viip</a:t>
+            </a:r>
+            <a:endParaRPr lang="et-EE" sz="2400" noProof="0" dirty="0">
+              <a:ea typeface="Inter"/>
+              <a:cs typeface="Noto Serif"/>
+            </a:endParaRPr>
+          </a:p>
+          <a:p>
+            <a:pPr marL="342900" indent="-342900">
+              <a:lnSpc>
+                <a:spcPct val="150000"/>
+              </a:lnSpc>
+              <a:buFont typeface="Arial,Sans-Serif" panose="020B0502030000000004" pitchFamily="34" charset="0"/>
+              <a:buChar char="•"/>
+            </a:pPr>
+            <a:r>
+              <a:rPr lang="et-EE" sz="2400" noProof="0" dirty="0">
+                <a:ea typeface="Inter"/>
+                <a:cs typeface="Noto Serif"/>
+              </a:rPr>
+              <a:t>Anna võimalikult palju konteksti ning millises formaadis vastust soovid</a:t>
+            </a:r>
+          </a:p>
+          <a:p>
+            <a:pPr marL="342900" indent="-342900">
+              <a:lnSpc>
+                <a:spcPct val="150000"/>
+              </a:lnSpc>
+              <a:buFont typeface="Arial,Sans-Serif" panose="020B0502030000000004" pitchFamily="34" charset="0"/>
+              <a:buChar char="•"/>
+            </a:pPr>
+            <a:r>
+              <a:rPr lang="et-EE" sz="2400" noProof="0" dirty="0">
+                <a:ea typeface="Inter"/>
+                <a:cs typeface="Noto Serif"/>
+              </a:rPr>
+              <a:t>Täpsusta, millist tarkvara kasutad, kui valemeid küsid</a:t>
+            </a:r>
+            <a:endParaRPr lang="et-EE" sz="2400" noProof="0" dirty="0">
+              <a:cs typeface="Noto Serif"/>
+            </a:endParaRPr>
+          </a:p>
+          <a:p>
+            <a:pPr marL="342900" indent="-342900">
+              <a:lnSpc>
+                <a:spcPct val="150000"/>
+              </a:lnSpc>
+              <a:buClr>
+                <a:srgbClr val="121212"/>
+              </a:buClr>
+              <a:buFont typeface="Arial,Sans-Serif" panose="020B0502030000000004" pitchFamily="34" charset="0"/>
+              <a:buChar char="•"/>
+            </a:pPr>
+            <a:r>
+              <a:rPr lang="et-EE" sz="2400" noProof="0" dirty="0">
+                <a:ea typeface="Inter"/>
+                <a:cs typeface="Noto Serif"/>
+              </a:rPr>
+              <a:t>Iteratiivne protsess – kui kohe ei saa õiget vastust, siis täienda</a:t>
+            </a:r>
+            <a:endParaRPr lang="et-EE" sz="2400" noProof="0" dirty="0">
+              <a:cs typeface="Noto Serif"/>
+            </a:endParaRPr>
+          </a:p>
+          <a:p>
+            <a:pPr marL="342900" indent="-342900">
+              <a:lnSpc>
+                <a:spcPct val="150000"/>
+              </a:lnSpc>
+              <a:buClr>
+                <a:srgbClr val="121212"/>
+              </a:buClr>
+              <a:buFont typeface="Arial,Sans-Serif" panose="020B0502030000000004" pitchFamily="34" charset="0"/>
+              <a:buChar char="•"/>
+            </a:pPr>
+            <a:endParaRPr lang="et-EE" sz="2400" noProof="0" dirty="0">
+              <a:cs typeface="Noto Serif"/>
+            </a:endParaRPr>
+          </a:p>
+          <a:p>
+            <a:pPr marL="342900" indent="-342900">
+              <a:lnSpc>
+                <a:spcPct val="150000"/>
+              </a:lnSpc>
+              <a:buClr>
+                <a:srgbClr val="121212"/>
+              </a:buClr>
+              <a:buFont typeface="Arial,Sans-Serif" panose="020B0502030000000004" pitchFamily="34" charset="0"/>
+              <a:buChar char="•"/>
+            </a:pPr>
+            <a:endParaRPr lang="et-EE" sz="2400" noProof="0" dirty="0">
+              <a:cs typeface="Noto Serif"/>
+            </a:endParaRPr>
+          </a:p>
+          <a:p>
+            <a:pPr marL="342900" indent="-342900">
+              <a:lnSpc>
+                <a:spcPct val="150000"/>
+              </a:lnSpc>
+              <a:buClr>
+                <a:srgbClr val="121212"/>
+              </a:buClr>
+              <a:buFont typeface="Arial,Sans-Serif" panose="020B0502030000000004" pitchFamily="34" charset="0"/>
+              <a:buChar char="•"/>
+            </a:pPr>
+            <a:endParaRPr lang="et-EE" sz="2400" noProof="0" dirty="0">
+              <a:cs typeface="Arial"/>
+            </a:endParaRPr>
+          </a:p>
+          <a:p>
+            <a:pPr marL="857250" lvl="1" indent="-342900">
+              <a:lnSpc>
+                <a:spcPct val="150000"/>
+              </a:lnSpc>
+              <a:buFont typeface="Arial,Sans-Serif" panose="020B0502030000000004" pitchFamily="34" charset="0"/>
+              <a:buChar char="o"/>
+            </a:pPr>
+            <a:endParaRPr lang="et-EE" sz="2400" noProof="0" dirty="0">
+              <a:cs typeface="Arial"/>
+            </a:endParaRPr>
+          </a:p>
+          <a:p>
+            <a:pPr marL="342900" indent="-342900">
+              <a:lnSpc>
+                <a:spcPct val="150000"/>
+              </a:lnSpc>
+              <a:buFont typeface="Arial,Sans-Serif" panose="020B0502030000000004" pitchFamily="34" charset="0"/>
+              <a:buChar char="•"/>
+            </a:pPr>
+            <a:endParaRPr lang="et-EE" sz="2400" noProof="0" dirty="0">
+              <a:cs typeface="Arial"/>
+            </a:endParaRPr>
+          </a:p>
+          <a:p>
+            <a:pPr marL="514350" indent="-514350">
+              <a:lnSpc>
+                <a:spcPct val="150000"/>
+              </a:lnSpc>
+            </a:pPr>
+            <a:endParaRPr lang="et-EE" sz="2800" noProof="0" dirty="0">
+              <a:cs typeface="Arial"/>
+            </a:endParaRPr>
+          </a:p>
+          <a:p>
+            <a:pPr marL="0" indent="0">
+              <a:lnSpc>
+                <a:spcPct val="150000"/>
+              </a:lnSpc>
+              <a:buNone/>
+            </a:pPr>
+            <a:endParaRPr lang="et-EE" sz="2800" noProof="0" dirty="0"/>
+          </a:p>
+        </p:txBody>
+      </p:sp>
+    </p:spTree>
+    <p:extLst>
+      <p:ext uri="{BB962C8B-B14F-4D97-AF65-F5344CB8AC3E}">
+        <p14:creationId xmlns:p14="http://schemas.microsoft.com/office/powerpoint/2010/main" val="4027656671"/>
+      </p:ext>
+    </p:extLst>
+  </p:cSld>
+  <p:clrMapOvr>
+    <a:masterClrMapping/>
+  </p:clrMapOvr>
+  <p:timing>
+    <p:tnLst>
+      <p:par>
+        <p:cTn id="1" dur="indefinite" restart="never" nodeType="tmRoot">
+          <p:childTnLst>
+            <p:seq concurrent="1" nextAc="seek">
+              <p:cTn id="2" dur="indefinite" nodeType="mainSeq">
+                <p:childTnLst>
+                  <p:par>
+                    <p:cTn id="3" fill="hold">
+                      <p:stCondLst>
+                        <p:cond delay="indefinite"/>
+                      </p:stCondLst>
+                      <p:childTnLst>
+                        <p:par>
+                          <p:cTn id="4" fill="hold">
+                            <p:stCondLst>
+                              <p:cond delay="0"/>
+                            </p:stCondLst>
+                            <p:childTnLst>
+                              <p:par>
+                                <p:cTn id="5" presetID="1" presetClass="entr" presetSubtype="0" fill="hold" grpId="0" nodeType="clickEffect">
+                                  <p:stCondLst>
+                                    <p:cond delay="0"/>
+                                  </p:stCondLst>
+                                  <p:childTnLst>
+                                    <p:set>
+                                      <p:cBhvr>
+                                        <p:cTn id="6" dur="1" fill="hold">
+                                          <p:stCondLst>
+                                            <p:cond delay="0"/>
+                                          </p:stCondLst>
+                                        </p:cTn>
+                                        <p:tgtEl>
+                                          <p:spTgt spid="3">
+                                            <p:txEl>
+                                              <p:pRg st="0" end="0"/>
+                                            </p:txEl>
+                                          </p:spTgt>
+                                        </p:tgtEl>
+                                        <p:attrNameLst>
+                                          <p:attrName>style.visibility</p:attrName>
+                                        </p:attrNameLst>
+                                      </p:cBhvr>
+                                      <p:to>
+                                        <p:strVal val="visible"/>
+                                      </p:to>
+                                    </p:set>
+                                  </p:childTnLst>
+                                </p:cTn>
+                              </p:par>
+                            </p:childTnLst>
+                          </p:cTn>
+                        </p:par>
+                      </p:childTnLst>
+                    </p:cTn>
+                  </p:par>
+                  <p:par>
+                    <p:cTn id="7" fill="hold">
+                      <p:stCondLst>
+                        <p:cond delay="indefinite"/>
+                      </p:stCondLst>
+                      <p:childTnLst>
+                        <p:par>
+                          <p:cTn id="8" fill="hold">
+                            <p:stCondLst>
+                              <p:cond delay="0"/>
+                            </p:stCondLst>
+                            <p:childTnLst>
+                              <p:par>
+                                <p:cTn id="9" presetID="1" presetClass="entr" presetSubtype="0" fill="hold" grpId="0" nodeType="clickEffect">
+                                  <p:stCondLst>
+                                    <p:cond delay="0"/>
+                                  </p:stCondLst>
+                                  <p:childTnLst>
+                                    <p:set>
+                                      <p:cBhvr>
+                                        <p:cTn id="10" dur="1" fill="hold">
+                                          <p:stCondLst>
+                                            <p:cond delay="0"/>
+                                          </p:stCondLst>
+                                        </p:cTn>
+                                        <p:tgtEl>
+                                          <p:spTgt spid="3">
+                                            <p:txEl>
+                                              <p:pRg st="1" end="1"/>
+                                            </p:txEl>
+                                          </p:spTgt>
+                                        </p:tgtEl>
+                                        <p:attrNameLst>
+                                          <p:attrName>style.visibility</p:attrName>
+                                        </p:attrNameLst>
+                                      </p:cBhvr>
+                                      <p:to>
+                                        <p:strVal val="visible"/>
+                                      </p:to>
+                                    </p:set>
+                                  </p:childTnLst>
+                                </p:cTn>
+                              </p:par>
+                            </p:childTnLst>
+                          </p:cTn>
+                        </p:par>
+                      </p:childTnLst>
+                    </p:cTn>
+                  </p:par>
+                  <p:par>
+                    <p:cTn id="11" fill="hold">
+                      <p:stCondLst>
+                        <p:cond delay="indefinite"/>
+                      </p:stCondLst>
+                      <p:childTnLst>
+                        <p:par>
+                          <p:cTn id="12" fill="hold">
+                            <p:stCondLst>
+                              <p:cond delay="0"/>
+                            </p:stCondLst>
+                            <p:childTnLst>
+                              <p:par>
+                                <p:cTn id="13" presetID="1" presetClass="entr" presetSubtype="0" fill="hold" grpId="0" nodeType="clickEffect">
+                                  <p:stCondLst>
+                                    <p:cond delay="0"/>
+                                  </p:stCondLst>
+                                  <p:childTnLst>
+                                    <p:set>
+                                      <p:cBhvr>
+                                        <p:cTn id="14" dur="1" fill="hold">
+                                          <p:stCondLst>
+                                            <p:cond delay="0"/>
+                                          </p:stCondLst>
+                                        </p:cTn>
+                                        <p:tgtEl>
+                                          <p:spTgt spid="3">
+                                            <p:txEl>
+                                              <p:pRg st="2" end="2"/>
+                                            </p:txEl>
+                                          </p:spTgt>
+                                        </p:tgtEl>
+                                        <p:attrNameLst>
+                                          <p:attrName>style.visibility</p:attrName>
+                                        </p:attrNameLst>
+                                      </p:cBhvr>
+                                      <p:to>
+                                        <p:strVal val="visible"/>
+                                      </p:to>
+                                    </p:set>
+                                  </p:childTnLst>
+                                </p:cTn>
+                              </p:par>
+                            </p:childTnLst>
+                          </p:cTn>
+                        </p:par>
+                      </p:childTnLst>
+                    </p:cTn>
+                  </p:par>
+                  <p:par>
+                    <p:cTn id="15" fill="hold">
+                      <p:stCondLst>
+                        <p:cond delay="indefinite"/>
+                      </p:stCondLst>
+                      <p:childTnLst>
+                        <p:par>
+                          <p:cTn id="16" fill="hold">
+                            <p:stCondLst>
+                              <p:cond delay="0"/>
+                            </p:stCondLst>
+                            <p:childTnLst>
+                              <p:par>
+                                <p:cTn id="17" presetID="1" presetClass="entr" presetSubtype="0" fill="hold" grpId="0" nodeType="clickEffect">
+                                  <p:stCondLst>
+                                    <p:cond delay="0"/>
+                                  </p:stCondLst>
+                                  <p:childTnLst>
+                                    <p:set>
+                                      <p:cBhvr>
+                                        <p:cTn id="18" dur="1" fill="hold">
+                                          <p:stCondLst>
+                                            <p:cond delay="0"/>
+                                          </p:stCondLst>
+                                        </p:cTn>
+                                        <p:tgtEl>
+                                          <p:spTgt spid="3">
+                                            <p:txEl>
+                                              <p:pRg st="3" end="3"/>
+                                            </p:txEl>
+                                          </p:spTgt>
+                                        </p:tgtEl>
+                                        <p:attrNameLst>
+                                          <p:attrName>style.visibility</p:attrName>
+                                        </p:attrNameLst>
+                                      </p:cBhvr>
+                                      <p:to>
+                                        <p:strVal val="visible"/>
+                                      </p:to>
+                                    </p:set>
+                                  </p:childTnLst>
+                                </p:cTn>
+                              </p:par>
+                            </p:childTnLst>
+                          </p:cTn>
+                        </p:par>
+                      </p:childTnLst>
+                    </p:cTn>
+                  </p:par>
+                </p:childTnLst>
+              </p:cTn>
+              <p:prevCondLst>
+                <p:cond evt="onPrev" delay="0">
+                  <p:tgtEl>
+                    <p:sldTgt/>
+                  </p:tgtEl>
+                </p:cond>
+              </p:prevCondLst>
+              <p:nextCondLst>
+                <p:cond evt="onNext" delay="0">
+                  <p:tgtEl>
+                    <p:sldTgt/>
+                  </p:tgtEl>
+                </p:cond>
+              </p:nextCondLst>
+            </p:seq>
+          </p:childTnLst>
+        </p:cTn>
+      </p:par>
+    </p:tnLst>
+    <p:bldLst>
+      <p:bldP spid="3" grpId="0" build="p"/>
+    </p:bldLst>
+  </p:timing>
+</p:sld>
+</file>
+
+<file path=ppt/slides/slide11.xml><?xml version="1.0" encoding="utf-8"?>
+<p:sld xmlns:a="http://schemas.openxmlformats.org/drawingml/2006/main" xmlns:r="http://schemas.openxmlformats.org/officeDocument/2006/relationships" xmlns:p="http://schemas.openxmlformats.org/presentationml/2006/main">
+  <p:cSld>
+    <p:spTree>
+      <p:nvGrpSpPr>
         <p:cNvPr id="1" name=""/>
         <p:cNvGrpSpPr/>
         <p:nvPr/>
@@ -24674,7 +25956,7 @@
 </p:sld>
 </file>
 
-<file path=ppt/slides/slide11.xml><?xml version="1.0" encoding="utf-8"?>
+<file path=ppt/slides/slide12.xml><?xml version="1.0" encoding="utf-8"?>
 <p:sld xmlns:a="http://schemas.openxmlformats.org/drawingml/2006/main" xmlns:r="http://schemas.openxmlformats.org/officeDocument/2006/relationships" xmlns:p="http://schemas.openxmlformats.org/presentationml/2006/main">
   <p:cSld>
     <p:spTree>
@@ -24966,7 +26248,7 @@
 </p:sld>
 </file>
 
-<file path=ppt/slides/slide12.xml><?xml version="1.0" encoding="utf-8"?>
+<file path=ppt/slides/slide13.xml><?xml version="1.0" encoding="utf-8"?>
 <p:sld xmlns:a="http://schemas.openxmlformats.org/drawingml/2006/main" xmlns:r="http://schemas.openxmlformats.org/officeDocument/2006/relationships" xmlns:p="http://schemas.openxmlformats.org/presentationml/2006/main">
   <p:cSld>
     <p:spTree>
@@ -25372,7 +26654,7 @@
 </p:sld>
 </file>
 
-<file path=ppt/slides/slide13.xml><?xml version="1.0" encoding="utf-8"?>
+<file path=ppt/slides/slide14.xml><?xml version="1.0" encoding="utf-8"?>
 <p:sld xmlns:a="http://schemas.openxmlformats.org/drawingml/2006/main" xmlns:r="http://schemas.openxmlformats.org/officeDocument/2006/relationships" xmlns:p="http://schemas.openxmlformats.org/presentationml/2006/main">
   <p:cSld>
     <p:spTree>
@@ -25485,7 +26767,7 @@
 </p:sld>
 </file>
 
-<file path=ppt/slides/slide14.xml><?xml version="1.0" encoding="utf-8"?>
+<file path=ppt/slides/slide15.xml><?xml version="1.0" encoding="utf-8"?>
 <p:sld xmlns:a="http://schemas.openxmlformats.org/drawingml/2006/main" xmlns:r="http://schemas.openxmlformats.org/officeDocument/2006/relationships" xmlns:p="http://schemas.openxmlformats.org/presentationml/2006/main">
   <p:cSld>
     <p:spTree>
@@ -25577,6 +26859,75 @@
               <a:t>Ava  Müügiraporti Power BI </a:t>
             </a:r>
             <a:endParaRPr lang="et-EE" sz="2400" noProof="0" dirty="0">
+              <a:cs typeface="Noto Serif"/>
+            </a:endParaRPr>
+          </a:p>
+          <a:p>
+            <a:pPr marL="857250" lvl="1" indent="-342900">
+              <a:lnSpc>
+                <a:spcPct val="150000"/>
+              </a:lnSpc>
+              <a:buFont typeface="Arial,Sans-Serif" panose="020B0502030000000004" pitchFamily="34" charset="0"/>
+              <a:buChar char="o"/>
+            </a:pPr>
+            <a:r>
+              <a:rPr lang="en-US" sz="2400" noProof="0" dirty="0">
+                <a:ea typeface="Inter"/>
+                <a:cs typeface="Noto Serif"/>
+              </a:rPr>
+              <a:t>Palu </a:t>
+            </a:r>
+            <a:r>
+              <a:rPr lang="en-US" sz="2400" noProof="0" dirty="0" err="1">
+                <a:ea typeface="Inter"/>
+                <a:cs typeface="Noto Serif"/>
+              </a:rPr>
+              <a:t>vestlusrobotitel</a:t>
+            </a:r>
+            <a:r>
+              <a:rPr lang="en-US" sz="2400" noProof="0" dirty="0">
+                <a:ea typeface="Inter"/>
+                <a:cs typeface="Noto Serif"/>
+              </a:rPr>
+              <a:t> </a:t>
+            </a:r>
+            <a:r>
+              <a:rPr lang="en-US" sz="2400" noProof="0" dirty="0" err="1">
+                <a:ea typeface="Inter"/>
+                <a:cs typeface="Noto Serif"/>
+              </a:rPr>
+              <a:t>selgitada</a:t>
+            </a:r>
+            <a:r>
+              <a:rPr lang="en-US" sz="2400" noProof="0" dirty="0">
+                <a:ea typeface="Inter"/>
+                <a:cs typeface="Noto Serif"/>
+              </a:rPr>
+              <a:t> </a:t>
+            </a:r>
+            <a:r>
+              <a:rPr lang="en-US" sz="2400" noProof="0" dirty="0" err="1">
+                <a:ea typeface="Inter"/>
+                <a:cs typeface="Noto Serif"/>
+              </a:rPr>
+              <a:t>saadud</a:t>
+            </a:r>
+            <a:r>
+              <a:rPr lang="en-US" sz="2400" noProof="0" dirty="0">
+                <a:ea typeface="Inter"/>
+                <a:cs typeface="Noto Serif"/>
+              </a:rPr>
+              <a:t> </a:t>
+            </a:r>
+            <a:r>
+              <a:rPr lang="en-US" sz="2400" noProof="0" dirty="0" err="1">
+                <a:ea typeface="Inter"/>
+                <a:cs typeface="Noto Serif"/>
+              </a:rPr>
+              <a:t>mõõdikuid</a:t>
+            </a:r>
+            <a:endParaRPr lang="en-US" sz="2400" noProof="0" dirty="0">
+              <a:ea typeface="Inter"/>
               <a:cs typeface="Noto Serif"/>
             </a:endParaRPr>
           </a:p>
@@ -25815,33 +27166,15 @@
                                   </p:childTnLst>
                                 </p:cTn>
                               </p:par>
-                            </p:childTnLst>
-                          </p:cTn>
-                        </p:par>
-                      </p:childTnLst>
-                    </p:cTn>
-                  </p:par>
-                  <p:par>
-                    <p:cTn id="9" fill="hold">
-                      <p:stCondLst>
-                        <p:cond delay="indefinite"/>
-                      </p:stCondLst>
-                      <p:childTnLst>
-                        <p:par>
-                          <p:cTn id="10" fill="hold">
-                            <p:stCondLst>
-                              <p:cond delay="0"/>
-                            </p:stCondLst>
-                            <p:childTnLst>
                               <p:par>
-                                <p:cTn id="11" presetID="1" presetClass="entr" presetSubtype="0" fill="hold" grpId="0" nodeType="clickEffect">
+                                <p:cTn id="9" presetID="1" presetClass="entr" presetSubtype="0" fill="hold" grpId="0" nodeType="withEffect">
                                   <p:stCondLst>
                                     <p:cond delay="0"/>
                                   </p:stCondLst>
                                   <p:childTnLst>
                                     <p:set>
                                       <p:cBhvr>
-                                        <p:cTn id="12" dur="1" fill="hold">
+                                        <p:cTn id="10" dur="1" fill="hold">
                                           <p:stCondLst>
                                             <p:cond delay="0"/>
                                           </p:stCondLst>
@@ -25850,6 +27183,55 @@
                                           <p:spTgt spid="3">
                                             <p:txEl>
                                               <p:pRg st="2" end="2"/>
+                                            </p:txEl>
+                                          </p:spTgt>
+                                        </p:tgtEl>
+                                        <p:attrNameLst>
+                                          <p:attrName>style.visibility</p:attrName>
+                                        </p:attrNameLst>
+                                      </p:cBhvr>
+                                      <p:to>
+                                        <p:strVal val="visible"/>
+                                      </p:to>
+                                    </p:set>
+                                  </p:childTnLst>
+                                </p:cTn>
+                              </p:par>
+                            </p:childTnLst>
+                          </p:cTn>
+                        </p:par>
+                      </p:childTnLst>
+                    </p:cTn>
+                  </p:par>
+                  <p:par>
+                    <p:cTn id="11" fill="hold">
+                      <p:stCondLst>
+                        <p:cond delay="indefinite"/>
+                      </p:stCondLst>
+                      <p:childTnLst>
+                        <p:par>
+                          <p:cTn id="12" fill="hold">
+                            <p:stCondLst>
+                              <p:cond delay="0"/>
+                            </p:stCondLst>
+                            <p:childTnLst>
+                              <p:par>
+                                <p:cTn id="13" presetID="1" presetClass="entr" presetSubtype="0" fill="hold" grpId="0" nodeType="clickEffect">
+                                  <p:stCondLst>
+                                    <p:cond delay="0"/>
+                                  </p:stCondLst>
+                                  <p:childTnLst>
+                                    <p:set>
+                                      <p:cBhvr>
+                                        <p:cTn id="14" dur="1" fill="hold">
+                                          <p:stCondLst>
+                                            <p:cond delay="0"/>
+                                          </p:stCondLst>
+                                        </p:cTn>
+                                        <p:tgtEl>
+                                          <p:spTgt spid="3">
+                                            <p:txEl>
+                                              <p:pRg st="3" end="3"/>
                                             </p:txEl>
                                           </p:spTgt>
                                         </p:tgtEl>
@@ -25898,7 +27280,7 @@
 </p:sld>
 </file>
 
-<file path=ppt/slides/slide15.xml><?xml version="1.0" encoding="utf-8"?>
+<file path=ppt/slides/slide16.xml><?xml version="1.0" encoding="utf-8"?>
 <p:sld xmlns:a="http://schemas.openxmlformats.org/drawingml/2006/main" xmlns:r="http://schemas.openxmlformats.org/officeDocument/2006/relationships" xmlns:p="http://schemas.openxmlformats.org/presentationml/2006/main">
   <p:cSld>
     <p:spTree>
@@ -26011,7 +27393,7 @@
 </p:sld>
 </file>
 
-<file path=ppt/slides/slide16.xml><?xml version="1.0" encoding="utf-8"?>
+<file path=ppt/slides/slide17.xml><?xml version="1.0" encoding="utf-8"?>
 <p:sld xmlns:a="http://schemas.openxmlformats.org/drawingml/2006/main" xmlns:r="http://schemas.openxmlformats.org/officeDocument/2006/relationships" xmlns:p="http://schemas.openxmlformats.org/presentationml/2006/main">
   <p:cSld>
     <p:spTree>
@@ -28573,6 +29955,384 @@
       </p:grpSpPr>
       <p:sp>
         <p:nvSpPr>
+          <p:cNvPr id="2" name="Text 0"/>
+          <p:cNvSpPr/>
+          <p:nvPr/>
+        </p:nvSpPr>
+        <p:spPr>
+          <a:xfrm>
+            <a:off x="661492" y="1888729"/>
+            <a:ext cx="9836051" cy="590649"/>
+          </a:xfrm>
+          <a:prstGeom prst="rect">
+            <a:avLst/>
+          </a:prstGeom>
+          <a:noFill/>
+          <a:ln/>
+        </p:spPr>
+        <p:txBody>
+          <a:bodyPr wrap="none" lIns="0" tIns="0" rIns="0" bIns="0" rtlCol="0" anchor="t"/>
+          <a:lstStyle/>
+          <a:p>
+            <a:pPr>
+              <a:lnSpc>
+                <a:spcPts val="4625"/>
+              </a:lnSpc>
+            </a:pPr>
+            <a:r>
+              <a:rPr lang="en-US" sz="3708" b="1" dirty="0">
+                <a:solidFill>
+                  <a:srgbClr val="000000"/>
+                </a:solidFill>
+                <a:ea typeface="Inter Bold" pitchFamily="34" charset="-122"/>
+                <a:cs typeface="Inter Bold" pitchFamily="34" charset="-120"/>
+              </a:rPr>
+              <a:t>Generatiivne AI vs traditsiooniline tarkvara</a:t>
+            </a:r>
+            <a:endParaRPr lang="en-US" sz="3708" dirty="0"/>
+          </a:p>
+        </p:txBody>
+      </p:sp>
+      <p:sp>
+        <p:nvSpPr>
+          <p:cNvPr id="3" name="Text 1"/>
+          <p:cNvSpPr/>
+          <p:nvPr/>
+        </p:nvSpPr>
+        <p:spPr>
+          <a:xfrm>
+            <a:off x="661492" y="2951857"/>
+            <a:ext cx="3642916" cy="354409"/>
+          </a:xfrm>
+          <a:prstGeom prst="rect">
+            <a:avLst/>
+          </a:prstGeom>
+          <a:noFill/>
+          <a:ln/>
+        </p:spPr>
+        <p:txBody>
+          <a:bodyPr wrap="none" lIns="0" tIns="0" rIns="0" bIns="0" rtlCol="0" anchor="t"/>
+          <a:lstStyle/>
+          <a:p>
+            <a:pPr>
+              <a:lnSpc>
+                <a:spcPts val="2750"/>
+              </a:lnSpc>
+            </a:pPr>
+            <a:r>
+              <a:rPr lang="en-US" sz="2208" b="1" dirty="0">
+                <a:solidFill>
+                  <a:srgbClr val="000000"/>
+                </a:solidFill>
+                <a:ea typeface="Inter Bold" pitchFamily="34" charset="-122"/>
+                <a:cs typeface="Inter Bold" pitchFamily="34" charset="-120"/>
+              </a:rPr>
+              <a:t>Traditsiooniline programm</a:t>
+            </a:r>
+            <a:endParaRPr lang="en-US" sz="2208" dirty="0"/>
+          </a:p>
+        </p:txBody>
+      </p:sp>
+      <p:sp>
+        <p:nvSpPr>
+          <p:cNvPr id="4" name="Text 2"/>
+          <p:cNvSpPr/>
+          <p:nvPr/>
+        </p:nvSpPr>
+        <p:spPr>
+          <a:xfrm>
+            <a:off x="661492" y="3495279"/>
+            <a:ext cx="5203924" cy="1407914"/>
+          </a:xfrm>
+          <a:prstGeom prst="rect">
+            <a:avLst/>
+          </a:prstGeom>
+          <a:noFill/>
+          <a:ln/>
+        </p:spPr>
+        <p:txBody>
+          <a:bodyPr wrap="square" lIns="0" tIns="0" rIns="0" bIns="0" rtlCol="0" anchor="t"/>
+          <a:lstStyle/>
+          <a:p>
+            <a:pPr marL="285739" indent="-285739">
+              <a:lnSpc>
+                <a:spcPts val="2375"/>
+              </a:lnSpc>
+              <a:buSzPct val="100000"/>
+              <a:buChar char="•"/>
+            </a:pPr>
+            <a:r>
+              <a:rPr lang="en-US" sz="1458" dirty="0">
+                <a:solidFill>
+                  <a:srgbClr val="272525"/>
+                </a:solidFill>
+                <a:ea typeface="Inter" pitchFamily="34" charset="-122"/>
+                <a:cs typeface="Inter" pitchFamily="34" charset="-120"/>
+              </a:rPr>
+              <a:t>Teeb täpselt seda, mis sisse programmeeritud</a:t>
+            </a:r>
+            <a:endParaRPr lang="en-US" sz="1458" dirty="0"/>
+          </a:p>
+          <a:p>
+            <a:pPr marL="285739" indent="-285739">
+              <a:lnSpc>
+                <a:spcPts val="2375"/>
+              </a:lnSpc>
+              <a:buSzPct val="100000"/>
+              <a:buChar char="•"/>
+            </a:pPr>
+            <a:r>
+              <a:rPr lang="en-US" sz="1458" dirty="0">
+                <a:solidFill>
+                  <a:srgbClr val="272525"/>
+                </a:solidFill>
+                <a:ea typeface="Inter" pitchFamily="34" charset="-122"/>
+                <a:cs typeface="Inter" pitchFamily="34" charset="-120"/>
+              </a:rPr>
+              <a:t>Järgib ette määratud reegleid ja algoritme</a:t>
+            </a:r>
+            <a:endParaRPr lang="en-US" sz="1458" dirty="0"/>
+          </a:p>
+          <a:p>
+            <a:pPr marL="285739" indent="-285739">
+              <a:lnSpc>
+                <a:spcPts val="2375"/>
+              </a:lnSpc>
+              <a:buSzPct val="100000"/>
+              <a:buChar char="•"/>
+            </a:pPr>
+            <a:r>
+              <a:rPr lang="en-US" sz="1458" dirty="0">
+                <a:solidFill>
+                  <a:srgbClr val="272525"/>
+                </a:solidFill>
+                <a:ea typeface="Inter" pitchFamily="34" charset="-122"/>
+                <a:cs typeface="Inter" pitchFamily="34" charset="-120"/>
+              </a:rPr>
+              <a:t>Alati ühesugune tulemus samale sisendile</a:t>
+            </a:r>
+            <a:endParaRPr lang="en-US" sz="1458" dirty="0"/>
+          </a:p>
+          <a:p>
+            <a:pPr marL="285739" indent="-285739">
+              <a:lnSpc>
+                <a:spcPts val="2375"/>
+              </a:lnSpc>
+              <a:buSzPct val="100000"/>
+              <a:buChar char="•"/>
+            </a:pPr>
+            <a:r>
+              <a:rPr lang="en-US" sz="1458" dirty="0">
+                <a:solidFill>
+                  <a:srgbClr val="272525"/>
+                </a:solidFill>
+                <a:ea typeface="Inter" pitchFamily="34" charset="-122"/>
+                <a:cs typeface="Inter" pitchFamily="34" charset="-120"/>
+              </a:rPr>
+              <a:t>Ei loo midagi uut ise</a:t>
+            </a:r>
+            <a:endParaRPr lang="en-US" sz="1458" dirty="0"/>
+          </a:p>
+        </p:txBody>
+      </p:sp>
+      <p:sp>
+        <p:nvSpPr>
+          <p:cNvPr id="5" name="Shape 3"/>
+          <p:cNvSpPr/>
+          <p:nvPr/>
+        </p:nvSpPr>
+        <p:spPr>
+          <a:xfrm>
+            <a:off x="6196807" y="2762845"/>
+            <a:ext cx="5476181" cy="2206427"/>
+          </a:xfrm>
+          <a:prstGeom prst="roundRect">
+            <a:avLst>
+              <a:gd name="adj" fmla="val 6168"/>
+            </a:avLst>
+          </a:prstGeom>
+          <a:solidFill>
+            <a:srgbClr val="4950BC"/>
+          </a:solidFill>
+          <a:ln/>
+        </p:spPr>
+        <p:txBody>
+          <a:bodyPr/>
+          <a:lstStyle/>
+          <a:p>
+            <a:endParaRPr lang="et-EE" sz="1500"/>
+          </a:p>
+        </p:txBody>
+      </p:sp>
+      <p:sp>
+        <p:nvSpPr>
+          <p:cNvPr id="6" name="Text 4"/>
+          <p:cNvSpPr/>
+          <p:nvPr/>
+        </p:nvSpPr>
+        <p:spPr>
+          <a:xfrm>
+            <a:off x="6385819" y="2951857"/>
+            <a:ext cx="3655219" cy="354409"/>
+          </a:xfrm>
+          <a:prstGeom prst="rect">
+            <a:avLst/>
+          </a:prstGeom>
+          <a:noFill/>
+          <a:ln/>
+        </p:spPr>
+        <p:txBody>
+          <a:bodyPr wrap="none" lIns="0" tIns="0" rIns="0" bIns="0" rtlCol="0" anchor="t"/>
+          <a:lstStyle/>
+          <a:p>
+            <a:pPr>
+              <a:lnSpc>
+                <a:spcPts val="2750"/>
+              </a:lnSpc>
+            </a:pPr>
+            <a:r>
+              <a:rPr lang="en-US" sz="2208" b="1" dirty="0">
+                <a:solidFill>
+                  <a:srgbClr val="FFFFFF"/>
+                </a:solidFill>
+                <a:ea typeface="Inter Bold" pitchFamily="34" charset="-122"/>
+                <a:cs typeface="Inter Bold" pitchFamily="34" charset="-120"/>
+              </a:rPr>
+              <a:t>Generatiivne AI (ChatGPT)</a:t>
+            </a:r>
+            <a:endParaRPr lang="en-US" sz="2208" dirty="0"/>
+          </a:p>
+        </p:txBody>
+      </p:sp>
+      <p:sp>
+        <p:nvSpPr>
+          <p:cNvPr id="7" name="Text 5"/>
+          <p:cNvSpPr/>
+          <p:nvPr/>
+        </p:nvSpPr>
+        <p:spPr>
+          <a:xfrm>
+            <a:off x="6385818" y="3495279"/>
+            <a:ext cx="5098157" cy="1407914"/>
+          </a:xfrm>
+          <a:prstGeom prst="rect">
+            <a:avLst/>
+          </a:prstGeom>
+          <a:noFill/>
+          <a:ln/>
+        </p:spPr>
+        <p:txBody>
+          <a:bodyPr wrap="square" lIns="0" tIns="0" rIns="0" bIns="0" rtlCol="0" anchor="t"/>
+          <a:lstStyle/>
+          <a:p>
+            <a:pPr marL="285739" indent="-285739">
+              <a:lnSpc>
+                <a:spcPts val="2375"/>
+              </a:lnSpc>
+              <a:buSzPct val="100000"/>
+              <a:buChar char="•"/>
+            </a:pPr>
+            <a:r>
+              <a:rPr lang="en-US" sz="1458" dirty="0">
+                <a:solidFill>
+                  <a:srgbClr val="FFFFFF"/>
+                </a:solidFill>
+                <a:ea typeface="Inter" pitchFamily="34" charset="-122"/>
+                <a:cs typeface="Inter" pitchFamily="34" charset="-120"/>
+              </a:rPr>
+              <a:t>Loob uut ja originaalset sisu</a:t>
+            </a:r>
+            <a:endParaRPr lang="en-US" sz="1458" dirty="0"/>
+          </a:p>
+          <a:p>
+            <a:pPr marL="285739" indent="-285739">
+              <a:lnSpc>
+                <a:spcPts val="2375"/>
+              </a:lnSpc>
+              <a:buSzPct val="100000"/>
+              <a:buChar char="•"/>
+            </a:pPr>
+            <a:r>
+              <a:rPr lang="en-US" sz="1458" dirty="0">
+                <a:solidFill>
+                  <a:srgbClr val="FFFFFF"/>
+                </a:solidFill>
+                <a:ea typeface="Inter" pitchFamily="34" charset="-122"/>
+                <a:cs typeface="Inter" pitchFamily="34" charset="-120"/>
+              </a:rPr>
+              <a:t>Genereerib teksti, pilte ja tabeleid</a:t>
+            </a:r>
+            <a:endParaRPr lang="en-US" sz="1458" dirty="0"/>
+          </a:p>
+          <a:p>
+            <a:pPr marL="285739" indent="-285739">
+              <a:lnSpc>
+                <a:spcPts val="2375"/>
+              </a:lnSpc>
+              <a:buSzPct val="100000"/>
+              <a:buChar char="•"/>
+            </a:pPr>
+            <a:r>
+              <a:rPr lang="en-US" sz="1458" dirty="0">
+                <a:solidFill>
+                  <a:srgbClr val="FFFFFF"/>
+                </a:solidFill>
+                <a:ea typeface="Inter" pitchFamily="34" charset="-122"/>
+                <a:cs typeface="Inter" pitchFamily="34" charset="-120"/>
+              </a:rPr>
+              <a:t>Kohaneb kontekstiga ja loov vastustes</a:t>
+            </a:r>
+            <a:endParaRPr lang="en-US" sz="1458" dirty="0"/>
+          </a:p>
+          <a:p>
+            <a:pPr marL="285739" indent="-285739">
+              <a:lnSpc>
+                <a:spcPts val="2375"/>
+              </a:lnSpc>
+              <a:buSzPct val="100000"/>
+              <a:buChar char="•"/>
+            </a:pPr>
+            <a:r>
+              <a:rPr lang="en-US" sz="1458" dirty="0">
+                <a:solidFill>
+                  <a:srgbClr val="FFFFFF"/>
+                </a:solidFill>
+                <a:ea typeface="Inter" pitchFamily="34" charset="-122"/>
+                <a:cs typeface="Inter" pitchFamily="34" charset="-120"/>
+              </a:rPr>
+              <a:t>Iga vastus on unikaalne</a:t>
+            </a:r>
+            <a:endParaRPr lang="en-US" sz="1458" dirty="0"/>
+          </a:p>
+        </p:txBody>
+      </p:sp>
+    </p:spTree>
+  </p:cSld>
+  <p:clrMapOvr>
+    <a:masterClrMapping/>
+  </p:clrMapOvr>
+</p:sld>
+</file>
+
+<file path=ppt/slides/slide7.xml><?xml version="1.0" encoding="utf-8"?>
+<p:sld xmlns:a="http://schemas.openxmlformats.org/drawingml/2006/main" xmlns:r="http://schemas.openxmlformats.org/officeDocument/2006/relationships" xmlns:p="http://schemas.openxmlformats.org/presentationml/2006/main">
+  <p:cSld>
+    <p:spTree>
+      <p:nvGrpSpPr>
+        <p:cNvPr id="1" name=""/>
+        <p:cNvGrpSpPr/>
+        <p:nvPr/>
+      </p:nvGrpSpPr>
+      <p:grpSpPr>
+        <a:xfrm>
+          <a:off x="0" y="0"/>
+          <a:ext cx="0" cy="0"/>
+          <a:chOff x="0" y="0"/>
+          <a:chExt cx="0" cy="0"/>
+        </a:xfrm>
+      </p:grpSpPr>
+      <p:sp>
+        <p:nvSpPr>
           <p:cNvPr id="2" name="Title 1">
             <a:extLst>
               <a:ext uri="{FF2B5EF4-FFF2-40B4-BE49-F238E27FC236}">
@@ -28724,9 +30484,86 @@
               </a:rPr>
               <a:t>https://digiriigiakadeemia.ee/course/index.php?categoryid=60</a:t>
             </a:r>
+            <a:endParaRPr lang="en-US" sz="2400" dirty="0"/>
+          </a:p>
+          <a:p>
+            <a:pPr lvl="1">
+              <a:lnSpc>
+                <a:spcPct val="150000"/>
+              </a:lnSpc>
+            </a:pPr>
+            <a:endParaRPr lang="en-US" sz="2400" dirty="0"/>
+          </a:p>
+          <a:p>
+            <a:pPr>
+              <a:lnSpc>
+                <a:spcPct val="150000"/>
+              </a:lnSpc>
+            </a:pPr>
+            <a:r>
+              <a:rPr lang="en-US" sz="2400" dirty="0" err="1"/>
+              <a:t>Lühike</a:t>
+            </a:r>
             <a:r>
               <a:rPr lang="en-US" sz="2400" dirty="0"/>
               <a:t> </a:t>
+            </a:r>
+            <a:r>
+              <a:rPr lang="en-US" sz="2400" dirty="0" err="1"/>
+              <a:t>ingliskeelne</a:t>
+            </a:r>
+            <a:r>
+              <a:rPr lang="en-US" sz="2400" dirty="0"/>
+              <a:t> </a:t>
+            </a:r>
+            <a:r>
+              <a:rPr lang="en-US" sz="2400" dirty="0" err="1"/>
+              <a:t>tutvustus</a:t>
+            </a:r>
+            <a:r>
+              <a:rPr lang="en-US" sz="2400" dirty="0"/>
+              <a:t> </a:t>
+            </a:r>
+            <a:r>
+              <a:rPr lang="en-US" sz="2400" dirty="0" err="1"/>
+              <a:t>keelemudelite</a:t>
+            </a:r>
+            <a:r>
+              <a:rPr lang="en-US" sz="2400" dirty="0"/>
+              <a:t> </a:t>
+            </a:r>
+            <a:r>
+              <a:rPr lang="en-US" sz="2400" dirty="0" err="1"/>
+              <a:t>toimimise</a:t>
+            </a:r>
+            <a:r>
+              <a:rPr lang="en-US" sz="2400" dirty="0"/>
+              <a:t> </a:t>
+            </a:r>
+            <a:r>
+              <a:rPr lang="en-US" sz="2400" dirty="0" err="1"/>
+              <a:t>kohta</a:t>
+            </a:r>
+            <a:r>
+              <a:rPr lang="en-US" sz="2400" dirty="0"/>
+              <a:t>: </a:t>
+            </a:r>
+          </a:p>
+          <a:p>
+            <a:pPr lvl="1">
+              <a:lnSpc>
+                <a:spcPct val="150000"/>
+              </a:lnSpc>
+            </a:pPr>
+            <a:r>
+              <a:rPr lang="en-US" sz="2400" dirty="0">
+                <a:hlinkClick r:id="rId4"/>
+              </a:rPr>
+              <a:t>https://youtu.be/LPZh9BOjkQs?si=Z3O5J0zhSEZG9TWc</a:t>
+            </a:r>
+            <a:r>
+              <a:rPr lang="en-US" sz="2400" dirty="0"/>
+              <a:t>  </a:t>
             </a:r>
             <a:endParaRPr lang="et-EE" sz="2400" dirty="0"/>
           </a:p>
@@ -28745,7 +30582,7 @@
 </p:sld>
 </file>
 
-<file path=ppt/slides/slide7.xml><?xml version="1.0" encoding="utf-8"?>
+<file path=ppt/slides/slide8.xml><?xml version="1.0" encoding="utf-8"?>
 <p:sld xmlns:a="http://schemas.openxmlformats.org/drawingml/2006/main" xmlns:r="http://schemas.openxmlformats.org/officeDocument/2006/relationships" xmlns:p="http://schemas.openxmlformats.org/presentationml/2006/main">
   <p:cSld>
     <p:spTree>
@@ -29124,7 +30961,7 @@
 </p:sld>
 </file>
 
-<file path=ppt/slides/slide8.xml><?xml version="1.0" encoding="utf-8"?>
+<file path=ppt/slides/slide9.xml><?xml version="1.0" encoding="utf-8"?>
 <p:sld xmlns:a="http://schemas.openxmlformats.org/drawingml/2006/main" xmlns:r="http://schemas.openxmlformats.org/officeDocument/2006/relationships" xmlns:p="http://schemas.openxmlformats.org/presentationml/2006/main">
   <p:cSld>
     <p:spTree>
@@ -29838,498 +31675,6 @@
                                           <p:spTgt spid="3">
                                             <p:txEl>
                                               <p:pRg st="8" end="8"/>
-                                            </p:txEl>
-                                          </p:spTgt>
-                                        </p:tgtEl>
-                                        <p:attrNameLst>
-                                          <p:attrName>style.visibility</p:attrName>
-                                        </p:attrNameLst>
-                                      </p:cBhvr>
-                                      <p:to>
-                                        <p:strVal val="visible"/>
-                                      </p:to>
-                                    </p:set>
-                                  </p:childTnLst>
-                                </p:cTn>
-                              </p:par>
-                            </p:childTnLst>
-                          </p:cTn>
-                        </p:par>
-                      </p:childTnLst>
-                    </p:cTn>
-                  </p:par>
-                </p:childTnLst>
-              </p:cTn>
-              <p:prevCondLst>
-                <p:cond evt="onPrev" delay="0">
-                  <p:tgtEl>
-                    <p:sldTgt/>
-                  </p:tgtEl>
-                </p:cond>
-              </p:prevCondLst>
-              <p:nextCondLst>
-                <p:cond evt="onNext" delay="0">
-                  <p:tgtEl>
-                    <p:sldTgt/>
-                  </p:tgtEl>
-                </p:cond>
-              </p:nextCondLst>
-            </p:seq>
-          </p:childTnLst>
-        </p:cTn>
-      </p:par>
-    </p:tnLst>
-    <p:bldLst>
-      <p:bldP spid="3" grpId="0" build="p"/>
-    </p:bldLst>
-  </p:timing>
-</p:sld>
-</file>
-
-<file path=ppt/slides/slide9.xml><?xml version="1.0" encoding="utf-8"?>
-<p:sld xmlns:a="http://schemas.openxmlformats.org/drawingml/2006/main" xmlns:r="http://schemas.openxmlformats.org/officeDocument/2006/relationships" xmlns:p="http://schemas.openxmlformats.org/presentationml/2006/main">
-  <p:cSld>
-    <p:spTree>
-      <p:nvGrpSpPr>
-        <p:cNvPr id="1" name="">
-          <a:extLst>
-            <a:ext uri="{FF2B5EF4-FFF2-40B4-BE49-F238E27FC236}">
-              <a16:creationId xmlns:a16="http://schemas.microsoft.com/office/drawing/2014/main" id="{1CADDEC0-4E0D-7B98-5997-874242016A28}"/>
-            </a:ext>
-          </a:extLst>
-        </p:cNvPr>
-        <p:cNvGrpSpPr/>
-        <p:nvPr/>
-      </p:nvGrpSpPr>
-      <p:grpSpPr>
-        <a:xfrm>
-          <a:off x="0" y="0"/>
-          <a:ext cx="0" cy="0"/>
-          <a:chOff x="0" y="0"/>
-          <a:chExt cx="0" cy="0"/>
-        </a:xfrm>
-      </p:grpSpPr>
-      <p:sp>
-        <p:nvSpPr>
-          <p:cNvPr id="2" name="Title 1">
-            <a:extLst>
-              <a:ext uri="{FF2B5EF4-FFF2-40B4-BE49-F238E27FC236}">
-                <a16:creationId xmlns:a16="http://schemas.microsoft.com/office/drawing/2014/main" id="{193632AA-1804-C95A-235A-B1630A75A285}"/>
-              </a:ext>
-            </a:extLst>
-          </p:cNvPr>
-          <p:cNvSpPr>
-            <a:spLocks noGrp="1"/>
-          </p:cNvSpPr>
-          <p:nvPr>
-            <p:ph type="ctrTitle"/>
-          </p:nvPr>
-        </p:nvSpPr>
-        <p:spPr>
-          <a:xfrm>
-            <a:off x="614923" y="479570"/>
-            <a:ext cx="10044112" cy="357043"/>
-          </a:xfrm>
-        </p:spPr>
-        <p:txBody>
-          <a:bodyPr/>
-          <a:lstStyle/>
-          <a:p>
-            <a:r>
-              <a:rPr lang="et-EE" b="1" noProof="0" dirty="0"/>
-              <a:t>Tehisaru – eduka sisendi kirjutamine </a:t>
-            </a:r>
-          </a:p>
-        </p:txBody>
-      </p:sp>
-      <p:sp>
-        <p:nvSpPr>
-          <p:cNvPr id="3" name="Content Placeholder 2">
-            <a:extLst>
-              <a:ext uri="{FF2B5EF4-FFF2-40B4-BE49-F238E27FC236}">
-                <a16:creationId xmlns:a16="http://schemas.microsoft.com/office/drawing/2014/main" id="{2ED24C29-7DB7-412C-B56A-46EC71179C17}"/>
-              </a:ext>
-            </a:extLst>
-          </p:cNvPr>
-          <p:cNvSpPr>
-            <a:spLocks noGrp="1"/>
-          </p:cNvSpPr>
-          <p:nvPr>
-            <p:ph sz="quarter" idx="10"/>
-          </p:nvPr>
-        </p:nvSpPr>
-        <p:spPr/>
-        <p:txBody>
-          <a:bodyPr/>
-          <a:lstStyle/>
-          <a:p>
-            <a:pPr marL="342900" indent="-342900">
-              <a:lnSpc>
-                <a:spcPct val="150000"/>
-              </a:lnSpc>
-              <a:buFont typeface="Arial,Sans-Serif" panose="020B0502030000000004" pitchFamily="34" charset="0"/>
-              <a:buChar char="•"/>
-            </a:pPr>
-            <a:r>
-              <a:rPr lang="et-EE" sz="2400" noProof="0" dirty="0">
-                <a:ea typeface="Inter"/>
-                <a:cs typeface="Noto Serif"/>
-              </a:rPr>
-              <a:t>Sisend = keelemudelile antud </a:t>
-            </a:r>
-            <a:r>
-              <a:rPr lang="et-EE" sz="2400" noProof="0" dirty="0" err="1">
-                <a:ea typeface="Inter"/>
-                <a:cs typeface="Noto Serif"/>
-              </a:rPr>
-              <a:t>viip</a:t>
-            </a:r>
-            <a:endParaRPr lang="et-EE" sz="2400" noProof="0" dirty="0">
-              <a:ea typeface="Inter"/>
-              <a:cs typeface="Noto Serif"/>
-            </a:endParaRPr>
-          </a:p>
-          <a:p>
-            <a:pPr marL="342900" indent="-342900">
-              <a:lnSpc>
-                <a:spcPct val="150000"/>
-              </a:lnSpc>
-              <a:buFont typeface="Arial,Sans-Serif" panose="020B0502030000000004" pitchFamily="34" charset="0"/>
-              <a:buChar char="•"/>
-            </a:pPr>
-            <a:r>
-              <a:rPr lang="et-EE" sz="2400" noProof="0" dirty="0">
-                <a:ea typeface="Inter"/>
-                <a:cs typeface="Noto Serif"/>
-              </a:rPr>
-              <a:t>Anna võimalikult palju konteksti ning millises formaadis vastust soovid</a:t>
-            </a:r>
-          </a:p>
-          <a:p>
-            <a:pPr marL="342900" indent="-342900">
-              <a:lnSpc>
-                <a:spcPct val="150000"/>
-              </a:lnSpc>
-              <a:buFont typeface="Arial,Sans-Serif" panose="020B0502030000000004" pitchFamily="34" charset="0"/>
-              <a:buChar char="•"/>
-            </a:pPr>
-            <a:r>
-              <a:rPr lang="et-EE" sz="2400" noProof="0" dirty="0">
-                <a:ea typeface="Inter"/>
-                <a:cs typeface="Noto Serif"/>
-              </a:rPr>
-              <a:t>Täpsusta, millist tarkvara kasutad, kui valemeid küsid</a:t>
-            </a:r>
-            <a:endParaRPr lang="et-EE" sz="2400" noProof="0" dirty="0">
-              <a:cs typeface="Noto Serif"/>
-            </a:endParaRPr>
-          </a:p>
-          <a:p>
-            <a:pPr marL="342900" indent="-342900">
-              <a:lnSpc>
-                <a:spcPct val="150000"/>
-              </a:lnSpc>
-              <a:buClr>
-                <a:srgbClr val="121212"/>
-              </a:buClr>
-              <a:buFont typeface="Arial,Sans-Serif" panose="020B0502030000000004" pitchFamily="34" charset="0"/>
-              <a:buChar char="•"/>
-            </a:pPr>
-            <a:r>
-              <a:rPr lang="et-EE" sz="2400" noProof="0" dirty="0">
-                <a:ea typeface="Inter"/>
-                <a:cs typeface="Noto Serif"/>
-              </a:rPr>
-              <a:t>Iteratiivne protsess – kui kohe ei saa õiget vastust, siis täienda</a:t>
-            </a:r>
-            <a:endParaRPr lang="et-EE" sz="2400" noProof="0" dirty="0">
-              <a:cs typeface="Noto Serif"/>
-            </a:endParaRPr>
-          </a:p>
-          <a:p>
-            <a:pPr marL="342900" indent="-342900">
-              <a:lnSpc>
-                <a:spcPct val="150000"/>
-              </a:lnSpc>
-              <a:buClr>
-                <a:srgbClr val="121212"/>
-              </a:buClr>
-              <a:buFont typeface="Arial,Sans-Serif" panose="020B0502030000000004" pitchFamily="34" charset="0"/>
-              <a:buChar char="•"/>
-            </a:pPr>
-            <a:endParaRPr lang="et-EE" sz="2400" noProof="0" dirty="0">
-              <a:cs typeface="Noto Serif"/>
-            </a:endParaRPr>
-          </a:p>
-          <a:p>
-            <a:pPr marL="342900" indent="-342900">
-              <a:lnSpc>
-                <a:spcPct val="150000"/>
-              </a:lnSpc>
-              <a:buClr>
-                <a:srgbClr val="121212"/>
-              </a:buClr>
-              <a:buFont typeface="Arial,Sans-Serif" panose="020B0502030000000004" pitchFamily="34" charset="0"/>
-              <a:buChar char="•"/>
-            </a:pPr>
-            <a:endParaRPr lang="et-EE" sz="2400" noProof="0" dirty="0">
-              <a:cs typeface="Noto Serif"/>
-            </a:endParaRPr>
-          </a:p>
-          <a:p>
-            <a:pPr marL="342900" indent="-342900">
-              <a:lnSpc>
-                <a:spcPct val="150000"/>
-              </a:lnSpc>
-              <a:buClr>
-                <a:srgbClr val="121212"/>
-              </a:buClr>
-              <a:buFont typeface="Arial,Sans-Serif" panose="020B0502030000000004" pitchFamily="34" charset="0"/>
-              <a:buChar char="•"/>
-            </a:pPr>
-            <a:endParaRPr lang="et-EE" sz="2400" noProof="0" dirty="0">
-              <a:cs typeface="Arial"/>
-            </a:endParaRPr>
-          </a:p>
-          <a:p>
-            <a:pPr marL="857250" lvl="1" indent="-342900">
-              <a:lnSpc>
-                <a:spcPct val="150000"/>
-              </a:lnSpc>
-              <a:buFont typeface="Arial,Sans-Serif" panose="020B0502030000000004" pitchFamily="34" charset="0"/>
-              <a:buChar char="o"/>
-            </a:pPr>
-            <a:endParaRPr lang="et-EE" sz="2400" noProof="0" dirty="0">
-              <a:cs typeface="Arial"/>
-            </a:endParaRPr>
-          </a:p>
-          <a:p>
-            <a:pPr marL="342900" indent="-342900">
-              <a:lnSpc>
-                <a:spcPct val="150000"/>
-              </a:lnSpc>
-              <a:buFont typeface="Arial,Sans-Serif" panose="020B0502030000000004" pitchFamily="34" charset="0"/>
-              <a:buChar char="•"/>
-            </a:pPr>
-            <a:endParaRPr lang="et-EE" sz="2400" noProof="0" dirty="0">
-              <a:cs typeface="Arial"/>
-            </a:endParaRPr>
-          </a:p>
-          <a:p>
-            <a:pPr marL="514350" indent="-514350">
-              <a:lnSpc>
-                <a:spcPct val="150000"/>
-              </a:lnSpc>
-            </a:pPr>
-            <a:endParaRPr lang="et-EE" sz="2800" noProof="0" dirty="0">
-              <a:cs typeface="Arial"/>
-            </a:endParaRPr>
-          </a:p>
-          <a:p>
-            <a:pPr marL="0" indent="0">
-              <a:lnSpc>
-                <a:spcPct val="150000"/>
-              </a:lnSpc>
-              <a:buNone/>
-            </a:pPr>
-            <a:endParaRPr lang="et-EE" sz="2800" noProof="0" dirty="0"/>
-          </a:p>
-        </p:txBody>
-      </p:sp>
-    </p:spTree>
-    <p:extLst>
-      <p:ext uri="{BB962C8B-B14F-4D97-AF65-F5344CB8AC3E}">
-        <p14:creationId xmlns:p14="http://schemas.microsoft.com/office/powerpoint/2010/main" val="4027656671"/>
-      </p:ext>
-    </p:extLst>
-  </p:cSld>
-  <p:clrMapOvr>
-    <a:masterClrMapping/>
-  </p:clrMapOvr>
-  <p:timing>
-    <p:tnLst>
-      <p:par>
-        <p:cTn id="1" dur="indefinite" restart="never" nodeType="tmRoot">
-          <p:childTnLst>
-            <p:seq concurrent="1" nextAc="seek">
-              <p:cTn id="2" dur="indefinite" nodeType="mainSeq">
-                <p:childTnLst>
-                  <p:par>
-                    <p:cTn id="3" fill="hold">
-                      <p:stCondLst>
-                        <p:cond delay="indefinite"/>
-                      </p:stCondLst>
-                      <p:childTnLst>
-                        <p:par>
-                          <p:cTn id="4" fill="hold">
-                            <p:stCondLst>
-                              <p:cond delay="0"/>
-                            </p:stCondLst>
-                            <p:childTnLst>
-                              <p:par>
-                                <p:cTn id="5" presetID="1" presetClass="entr" presetSubtype="0" fill="hold" grpId="0" nodeType="clickEffect">
-                                  <p:stCondLst>
-                                    <p:cond delay="0"/>
-                                  </p:stCondLst>
-                                  <p:childTnLst>
-                                    <p:set>
-                                      <p:cBhvr>
-                                        <p:cTn id="6" dur="1" fill="hold">
-                                          <p:stCondLst>
-                                            <p:cond delay="0"/>
-                                          </p:stCondLst>
-                                        </p:cTn>
-                                        <p:tgtEl>
-                                          <p:spTgt spid="3">
-                                            <p:txEl>
-                                              <p:pRg st="0" end="0"/>
-                                            </p:txEl>
-                                          </p:spTgt>
-                                        </p:tgtEl>
-                                        <p:attrNameLst>
-                                          <p:attrName>style.visibility</p:attrName>
-                                        </p:attrNameLst>
-                                      </p:cBhvr>
-                                      <p:to>
-                                        <p:strVal val="visible"/>
-                                      </p:to>
-                                    </p:set>
-                                  </p:childTnLst>
-                                </p:cTn>
-                              </p:par>
-                            </p:childTnLst>
-                          </p:cTn>
-                        </p:par>
-                      </p:childTnLst>
-                    </p:cTn>
-                  </p:par>
-                  <p:par>
-                    <p:cTn id="7" fill="hold">
-                      <p:stCondLst>
-                        <p:cond delay="indefinite"/>
-                      </p:stCondLst>
-                      <p:childTnLst>
-                        <p:par>
-                          <p:cTn id="8" fill="hold">
-                            <p:stCondLst>
-                              <p:cond delay="0"/>
-                            </p:stCondLst>
-                            <p:childTnLst>
-                              <p:par>
-                                <p:cTn id="9" presetID="1" presetClass="entr" presetSubtype="0" fill="hold" grpId="0" nodeType="clickEffect">
-                                  <p:stCondLst>
-                                    <p:cond delay="0"/>
-                                  </p:stCondLst>
-                                  <p:childTnLst>
-                                    <p:set>
-                                      <p:cBhvr>
-                                        <p:cTn id="10" dur="1" fill="hold">
-                                          <p:stCondLst>
-                                            <p:cond delay="0"/>
-                                          </p:stCondLst>
-                                        </p:cTn>
-                                        <p:tgtEl>
-                                          <p:spTgt spid="3">
-                                            <p:txEl>
-                                              <p:pRg st="1" end="1"/>
-                                            </p:txEl>
-                                          </p:spTgt>
-                                        </p:tgtEl>
-                                        <p:attrNameLst>
-                                          <p:attrName>style.visibility</p:attrName>
-                                        </p:attrNameLst>
-                                      </p:cBhvr>
-                                      <p:to>
-                                        <p:strVal val="visible"/>
-                                      </p:to>
-                                    </p:set>
-                                  </p:childTnLst>
-                                </p:cTn>
-                              </p:par>
-                            </p:childTnLst>
-                          </p:cTn>
-                        </p:par>
-                      </p:childTnLst>
-                    </p:cTn>
-                  </p:par>
-                  <p:par>
-                    <p:cTn id="11" fill="hold">
-                      <p:stCondLst>
-                        <p:cond delay="indefinite"/>
-                      </p:stCondLst>
-                      <p:childTnLst>
-                        <p:par>
-                          <p:cTn id="12" fill="hold">
-                            <p:stCondLst>
-                              <p:cond delay="0"/>
-                            </p:stCondLst>
-                            <p:childTnLst>
-                              <p:par>
-                                <p:cTn id="13" presetID="1" presetClass="entr" presetSubtype="0" fill="hold" grpId="0" nodeType="clickEffect">
-                                  <p:stCondLst>
-                                    <p:cond delay="0"/>
-                                  </p:stCondLst>
-                                  <p:childTnLst>
-                                    <p:set>
-                                      <p:cBhvr>
-                                        <p:cTn id="14" dur="1" fill="hold">
-                                          <p:stCondLst>
-                                            <p:cond delay="0"/>
-                                          </p:stCondLst>
-                                        </p:cTn>
-                                        <p:tgtEl>
-                                          <p:spTgt spid="3">
-                                            <p:txEl>
-                                              <p:pRg st="2" end="2"/>
-                                            </p:txEl>
-                                          </p:spTgt>
-                                        </p:tgtEl>
-                                        <p:attrNameLst>
-                                          <p:attrName>style.visibility</p:attrName>
-                                        </p:attrNameLst>
-                                      </p:cBhvr>
-                                      <p:to>
-                                        <p:strVal val="visible"/>
-                                      </p:to>
-                                    </p:set>
-                                  </p:childTnLst>
-                                </p:cTn>
-                              </p:par>
-                            </p:childTnLst>
-                          </p:cTn>
-                        </p:par>
-                      </p:childTnLst>
-                    </p:cTn>
-                  </p:par>
-                  <p:par>
-                    <p:cTn id="15" fill="hold">
-                      <p:stCondLst>
-                        <p:cond delay="indefinite"/>
-                      </p:stCondLst>
-                      <p:childTnLst>
-                        <p:par>
-                          <p:cTn id="16" fill="hold">
-                            <p:stCondLst>
-                              <p:cond delay="0"/>
-                            </p:stCondLst>
-                            <p:childTnLst>
-                              <p:par>
-                                <p:cTn id="17" presetID="1" presetClass="entr" presetSubtype="0" fill="hold" grpId="0" nodeType="clickEffect">
-                                  <p:stCondLst>
-                                    <p:cond delay="0"/>
-                                  </p:stCondLst>
-                                  <p:childTnLst>
-                                    <p:set>
-                                      <p:cBhvr>
-                                        <p:cTn id="18" dur="1" fill="hold">
-                                          <p:stCondLst>
-                                            <p:cond delay="0"/>
-                                          </p:stCondLst>
-                                        </p:cTn>
-                                        <p:tgtEl>
-                                          <p:spTgt spid="3">
-                                            <p:txEl>
-                                              <p:pRg st="3" end="3"/>
                                             </p:txEl>
                                           </p:spTgt>
                                         </p:tgtEl>

--- a/Day15/15-paev-andmetarkus-esitlus.pptx
+++ b/Day15/15-paev-andmetarkus-esitlus.pptx
@@ -14,9 +14,9 @@
     <p:sldId id="417" r:id="rId5"/>
     <p:sldId id="479" r:id="rId6"/>
     <p:sldId id="567" r:id="rId7"/>
-    <p:sldId id="475" r:id="rId8"/>
-    <p:sldId id="261" r:id="rId9"/>
-    <p:sldId id="452" r:id="rId10"/>
+    <p:sldId id="452" r:id="rId8"/>
+    <p:sldId id="475" r:id="rId9"/>
+    <p:sldId id="261" r:id="rId10"/>
     <p:sldId id="647" r:id="rId11"/>
     <p:sldId id="476" r:id="rId12"/>
     <p:sldId id="477" r:id="rId13"/>
@@ -165,7 +165,7 @@
 <file path=ppt/revisionInfo.xml><?xml version="1.0" encoding="utf-8"?>
 <p1510:revInfo xmlns:a="http://schemas.openxmlformats.org/drawingml/2006/main" xmlns:r="http://schemas.openxmlformats.org/officeDocument/2006/relationships" xmlns:p1510="http://schemas.microsoft.com/office/powerpoint/2015/10/main">
   <p1510:revLst>
-    <p1510:client id="{2EADCC2F-0731-4A5B-A287-B42682DA1D9C}" v="92" dt="2026-04-17T08:26:41.171"/>
+    <p1510:client id="{2EADCC2F-0731-4A5B-A287-B42682DA1D9C}" v="60" dt="2026-04-20T11:06:16.673"/>
   </p1510:revLst>
 </p1510:revInfo>
 </file>
@@ -174,65 +174,17 @@
 <pc:chgInfo xmlns:a="http://schemas.openxmlformats.org/drawingml/2006/main" xmlns:r="http://schemas.openxmlformats.org/officeDocument/2006/relationships" xmlns:ac="http://schemas.microsoft.com/office/drawing/2013/main/command" xmlns:pc="http://schemas.microsoft.com/office/powerpoint/2013/main/command">
   <pc:docChgLst>
     <pc:chgData name="Virve Räni" userId="161a7437-7ef4-49ec-91bf-54882f313dfe" providerId="ADAL" clId="{6D754EED-65AA-4A21-B175-6769012CF487}"/>
-    <pc:docChg chg="addSld delSld modSld sldOrd">
-      <pc:chgData name="Virve Räni" userId="161a7437-7ef4-49ec-91bf-54882f313dfe" providerId="ADAL" clId="{6D754EED-65AA-4A21-B175-6769012CF487}" dt="2026-04-17T08:27:10.969" v="544" actId="1076"/>
+    <pc:docChg chg="custSel addSld delSld modSld sldOrd">
+      <pc:chgData name="Virve Räni" userId="161a7437-7ef4-49ec-91bf-54882f313dfe" providerId="ADAL" clId="{6D754EED-65AA-4A21-B175-6769012CF487}" dt="2026-04-20T11:06:16.672" v="698" actId="20577"/>
       <pc:docMkLst>
         <pc:docMk/>
       </pc:docMkLst>
-      <pc:sldChg chg="modSp add mod">
-        <pc:chgData name="Virve Räni" userId="161a7437-7ef4-49ec-91bf-54882f313dfe" providerId="ADAL" clId="{6D754EED-65AA-4A21-B175-6769012CF487}" dt="2026-04-17T08:27:10.969" v="544" actId="1076"/>
+      <pc:sldChg chg="add">
+        <pc:chgData name="Virve Räni" userId="161a7437-7ef4-49ec-91bf-54882f313dfe" providerId="ADAL" clId="{6D754EED-65AA-4A21-B175-6769012CF487}" dt="2026-04-20T07:33:56.018" v="645"/>
         <pc:sldMkLst>
           <pc:docMk/>
           <pc:sldMk cId="0" sldId="261"/>
         </pc:sldMkLst>
-        <pc:spChg chg="mod">
-          <ac:chgData name="Virve Räni" userId="161a7437-7ef4-49ec-91bf-54882f313dfe" providerId="ADAL" clId="{6D754EED-65AA-4A21-B175-6769012CF487}" dt="2026-04-17T08:27:02.988" v="543" actId="20577"/>
-          <ac:spMkLst>
-            <pc:docMk/>
-            <pc:sldMk cId="0" sldId="261"/>
-            <ac:spMk id="2" creationId="{00000000-0000-0000-0000-000000000000}"/>
-          </ac:spMkLst>
-        </pc:spChg>
-        <pc:spChg chg="mod">
-          <ac:chgData name="Virve Räni" userId="161a7437-7ef4-49ec-91bf-54882f313dfe" providerId="ADAL" clId="{6D754EED-65AA-4A21-B175-6769012CF487}" dt="2026-04-17T08:27:10.969" v="544" actId="1076"/>
-          <ac:spMkLst>
-            <pc:docMk/>
-            <pc:sldMk cId="0" sldId="261"/>
-            <ac:spMk id="3" creationId="{00000000-0000-0000-0000-000000000000}"/>
-          </ac:spMkLst>
-        </pc:spChg>
-        <pc:spChg chg="mod">
-          <ac:chgData name="Virve Räni" userId="161a7437-7ef4-49ec-91bf-54882f313dfe" providerId="ADAL" clId="{6D754EED-65AA-4A21-B175-6769012CF487}" dt="2026-04-17T08:27:10.969" v="544" actId="1076"/>
-          <ac:spMkLst>
-            <pc:docMk/>
-            <pc:sldMk cId="0" sldId="261"/>
-            <ac:spMk id="4" creationId="{00000000-0000-0000-0000-000000000000}"/>
-          </ac:spMkLst>
-        </pc:spChg>
-        <pc:spChg chg="mod">
-          <ac:chgData name="Virve Räni" userId="161a7437-7ef4-49ec-91bf-54882f313dfe" providerId="ADAL" clId="{6D754EED-65AA-4A21-B175-6769012CF487}" dt="2026-04-17T08:27:10.969" v="544" actId="1076"/>
-          <ac:spMkLst>
-            <pc:docMk/>
-            <pc:sldMk cId="0" sldId="261"/>
-            <ac:spMk id="5" creationId="{00000000-0000-0000-0000-000000000000}"/>
-          </ac:spMkLst>
-        </pc:spChg>
-        <pc:spChg chg="mod">
-          <ac:chgData name="Virve Räni" userId="161a7437-7ef4-49ec-91bf-54882f313dfe" providerId="ADAL" clId="{6D754EED-65AA-4A21-B175-6769012CF487}" dt="2026-04-17T08:27:10.969" v="544" actId="1076"/>
-          <ac:spMkLst>
-            <pc:docMk/>
-            <pc:sldMk cId="0" sldId="261"/>
-            <ac:spMk id="6" creationId="{00000000-0000-0000-0000-000000000000}"/>
-          </ac:spMkLst>
-        </pc:spChg>
-        <pc:spChg chg="mod">
-          <ac:chgData name="Virve Räni" userId="161a7437-7ef4-49ec-91bf-54882f313dfe" providerId="ADAL" clId="{6D754EED-65AA-4A21-B175-6769012CF487}" dt="2026-04-17T08:27:10.969" v="544" actId="1076"/>
-          <ac:spMkLst>
-            <pc:docMk/>
-            <pc:sldMk cId="0" sldId="261"/>
-            <ac:spMk id="7" creationId="{00000000-0000-0000-0000-000000000000}"/>
-          </ac:spMkLst>
-        </pc:spChg>
       </pc:sldChg>
       <pc:sldChg chg="modSp mod">
         <pc:chgData name="Virve Räni" userId="161a7437-7ef4-49ec-91bf-54882f313dfe" providerId="ADAL" clId="{6D754EED-65AA-4A21-B175-6769012CF487}" dt="2026-04-14T08:06:07.883" v="377" actId="790"/>
@@ -303,8 +255,8 @@
           </ac:spMkLst>
         </pc:spChg>
       </pc:sldChg>
-      <pc:sldChg chg="modSp add mod">
-        <pc:chgData name="Virve Räni" userId="161a7437-7ef4-49ec-91bf-54882f313dfe" providerId="ADAL" clId="{6D754EED-65AA-4A21-B175-6769012CF487}" dt="2026-04-14T08:06:07.883" v="377" actId="790"/>
+      <pc:sldChg chg="modSp add mod ord">
+        <pc:chgData name="Virve Räni" userId="161a7437-7ef4-49ec-91bf-54882f313dfe" providerId="ADAL" clId="{6D754EED-65AA-4A21-B175-6769012CF487}" dt="2026-04-19T17:43:01.805" v="513"/>
         <pc:sldMkLst>
           <pc:docMk/>
           <pc:sldMk cId="3557357758" sldId="452"/>
@@ -449,8 +401,8 @@
           </ac:spMkLst>
         </pc:spChg>
       </pc:sldChg>
-      <pc:sldChg chg="modSp mod ord">
-        <pc:chgData name="Virve Räni" userId="161a7437-7ef4-49ec-91bf-54882f313dfe" providerId="ADAL" clId="{6D754EED-65AA-4A21-B175-6769012CF487}" dt="2026-04-14T08:06:47.771" v="379"/>
+      <pc:sldChg chg="modSp mod ord modAnim">
+        <pc:chgData name="Virve Räni" userId="161a7437-7ef4-49ec-91bf-54882f313dfe" providerId="ADAL" clId="{6D754EED-65AA-4A21-B175-6769012CF487}" dt="2026-04-20T11:06:16.672" v="698" actId="20577"/>
         <pc:sldMkLst>
           <pc:docMk/>
           <pc:sldMk cId="2641817430" sldId="514"/>
@@ -464,7 +416,7 @@
           </ac:spMkLst>
         </pc:spChg>
         <pc:spChg chg="mod">
-          <ac:chgData name="Virve Räni" userId="161a7437-7ef4-49ec-91bf-54882f313dfe" providerId="ADAL" clId="{6D754EED-65AA-4A21-B175-6769012CF487}" dt="2026-04-14T08:06:07.883" v="377" actId="790"/>
+          <ac:chgData name="Virve Räni" userId="161a7437-7ef4-49ec-91bf-54882f313dfe" providerId="ADAL" clId="{6D754EED-65AA-4A21-B175-6769012CF487}" dt="2026-04-20T11:06:16.672" v="698" actId="20577"/>
           <ac:spMkLst>
             <pc:docMk/>
             <pc:sldMk cId="2641817430" sldId="514"/>
@@ -564,8 +516,8 @@
           </ac:spMkLst>
         </pc:spChg>
       </pc:sldChg>
-      <pc:sldChg chg="modSp mod">
-        <pc:chgData name="Virve Räni" userId="161a7437-7ef4-49ec-91bf-54882f313dfe" providerId="ADAL" clId="{6D754EED-65AA-4A21-B175-6769012CF487}" dt="2026-04-14T08:06:07.883" v="377" actId="790"/>
+      <pc:sldChg chg="modSp mod modAnim">
+        <pc:chgData name="Virve Räni" userId="161a7437-7ef4-49ec-91bf-54882f313dfe" providerId="ADAL" clId="{6D754EED-65AA-4A21-B175-6769012CF487}" dt="2026-04-19T18:02:23.753" v="573"/>
         <pc:sldMkLst>
           <pc:docMk/>
           <pc:sldMk cId="3682630093" sldId="646"/>
@@ -579,7 +531,7 @@
           </ac:spMkLst>
         </pc:spChg>
         <pc:spChg chg="mod">
-          <ac:chgData name="Virve Räni" userId="161a7437-7ef4-49ec-91bf-54882f313dfe" providerId="ADAL" clId="{6D754EED-65AA-4A21-B175-6769012CF487}" dt="2026-04-14T08:06:07.883" v="377" actId="790"/>
+          <ac:chgData name="Virve Räni" userId="161a7437-7ef4-49ec-91bf-54882f313dfe" providerId="ADAL" clId="{6D754EED-65AA-4A21-B175-6769012CF487}" dt="2026-04-19T18:02:16.933" v="572" actId="20577"/>
           <ac:spMkLst>
             <pc:docMk/>
             <pc:sldMk cId="3682630093" sldId="646"/>
@@ -588,7 +540,7 @@
         </pc:spChg>
       </pc:sldChg>
       <pc:sldChg chg="modSp new mod">
-        <pc:chgData name="Virve Räni" userId="161a7437-7ef4-49ec-91bf-54882f313dfe" providerId="ADAL" clId="{6D754EED-65AA-4A21-B175-6769012CF487}" dt="2026-04-14T08:12:52.894" v="497" actId="20577"/>
+        <pc:chgData name="Virve Räni" userId="161a7437-7ef4-49ec-91bf-54882f313dfe" providerId="ADAL" clId="{6D754EED-65AA-4A21-B175-6769012CF487}" dt="2026-04-20T05:44:09.629" v="644" actId="20577"/>
         <pc:sldMkLst>
           <pc:docMk/>
           <pc:sldMk cId="1143583913" sldId="647"/>
@@ -602,7 +554,7 @@
           </ac:spMkLst>
         </pc:spChg>
         <pc:spChg chg="mod">
-          <ac:chgData name="Virve Räni" userId="161a7437-7ef4-49ec-91bf-54882f313dfe" providerId="ADAL" clId="{6D754EED-65AA-4A21-B175-6769012CF487}" dt="2026-04-14T08:12:52.894" v="497" actId="20577"/>
+          <ac:chgData name="Virve Räni" userId="161a7437-7ef4-49ec-91bf-54882f313dfe" providerId="ADAL" clId="{6D754EED-65AA-4A21-B175-6769012CF487}" dt="2026-04-20T05:44:09.629" v="644" actId="20577"/>
           <ac:spMkLst>
             <pc:docMk/>
             <pc:sldMk cId="1143583913" sldId="647"/>
@@ -709,7 +661,7 @@
           <a:p>
             <a:fld id="{F9D2AD6E-DEDD-49A0-A4BE-7A081A9112DA}" type="datetimeFigureOut">
               <a:rPr lang="en-US" smtClean="0"/>
-              <a:t>4/17/2026</a:t>
+              <a:t>4/20/2026</a:t>
             </a:fld>
             <a:endParaRPr lang="en-US"/>
           </a:p>
@@ -885,7 +837,7 @@
           </a:lstStyle>
           <a:p>
             <a:fld id="{2AF9C1A6-4321-41FA-B001-4140F0E2457F}" type="datetimeFigureOut">
-              <a:t>17.04.2026</a:t>
+              <a:t>20.04.2026</a:t>
             </a:fld>
             <a:endParaRPr lang="en-US"/>
           </a:p>
@@ -1302,7 +1254,7 @@
           <a:p>
             <a:fld id="{F7021451-1387-4CA6-816F-3879F97B5CBC}" type="slidenum">
               <a:rPr lang="en-US"/>
-              <a:t>5</a:t>
+              <a:t>6</a:t>
             </a:fld>
             <a:endParaRPr lang="en-US"/>
           </a:p>
@@ -12559,7 +12511,7 @@
           <a:p>
             <a:fld id="{DE840A40-73C8-4048-8140-49F5D65BB431}" type="datetimeFigureOut">
               <a:rPr lang="et-EE" smtClean="0"/>
-              <a:t>17.04.2026</a:t>
+              <a:t>20.04.2026</a:t>
             </a:fld>
             <a:endParaRPr lang="et-EE"/>
           </a:p>
@@ -13319,7 +13271,7 @@
     </p:spTree>
     <p:extLst>
       <p:ext uri="{BB962C8B-B14F-4D97-AF65-F5344CB8AC3E}">
-        <p14:creationId xmlns:p14="http://schemas.microsoft.com/office/powerpoint/2010/main" val="1857105681"/>
+        <p14:creationId xmlns:p14="http://schemas.microsoft.com/office/powerpoint/2010/main" val="18919152"/>
       </p:ext>
     </p:extLst>
   </p:cSld>
@@ -26389,10 +26341,10 @@
               <a:t>Nt </a:t>
             </a:r>
             <a:r>
-              <a:rPr lang="et-EE" sz="2400" noProof="0" dirty="0" err="1">
+              <a:rPr lang="en-US" sz="2400" noProof="0" dirty="0">
                 <a:ea typeface="Inter"/>
               </a:rPr>
-              <a:t>ChatGPT</a:t>
+              <a:t>Claude</a:t>
             </a:r>
             <a:r>
               <a:rPr lang="et-EE" sz="2400" noProof="0" dirty="0">
@@ -26401,24 +26353,80 @@
               <a:t> --&gt; kliki oma profiilil --&gt; </a:t>
             </a:r>
             <a:r>
-              <a:rPr lang="et-EE" sz="2400" noProof="0" dirty="0" err="1">
+              <a:rPr lang="en-US" sz="2400" dirty="0">
                 <a:ea typeface="Inter"/>
               </a:rPr>
-              <a:t>Customize</a:t>
+              <a:t>Settings</a:t>
+            </a:r>
+          </a:p>
+          <a:p>
+            <a:pPr lvl="1">
+              <a:lnSpc>
+                <a:spcPct val="150000"/>
+              </a:lnSpc>
+              <a:buFont typeface="Courier New" panose="020B0502030000000004" pitchFamily="34" charset="0"/>
+              <a:buChar char="o"/>
+            </a:pPr>
+            <a:endParaRPr lang="en-US" sz="2400" noProof="0" dirty="0">
+              <a:ea typeface="Inter"/>
+            </a:endParaRPr>
+          </a:p>
+          <a:p>
+            <a:pPr>
+              <a:lnSpc>
+                <a:spcPct val="150000"/>
+              </a:lnSpc>
+              <a:buFont typeface="Courier New" panose="020B0502030000000004" pitchFamily="34" charset="0"/>
+              <a:buChar char="o"/>
+            </a:pPr>
+            <a:r>
+              <a:rPr lang="en-US" sz="2400" dirty="0">
+                <a:ea typeface="Inter"/>
+              </a:rPr>
+              <a:t>Projects</a:t>
+            </a:r>
+          </a:p>
+          <a:p>
+            <a:pPr>
+              <a:lnSpc>
+                <a:spcPct val="150000"/>
+              </a:lnSpc>
+              <a:buFont typeface="Courier New" panose="020B0502030000000004" pitchFamily="34" charset="0"/>
+              <a:buChar char="o"/>
+            </a:pPr>
+            <a:endParaRPr lang="en-US" sz="2400" noProof="0" dirty="0">
+              <a:ea typeface="Inter"/>
+            </a:endParaRPr>
+          </a:p>
+          <a:p>
+            <a:pPr>
+              <a:lnSpc>
+                <a:spcPct val="150000"/>
+              </a:lnSpc>
+              <a:buFont typeface="Courier New" panose="020B0502030000000004" pitchFamily="34" charset="0"/>
+              <a:buChar char="o"/>
+            </a:pPr>
+            <a:r>
+              <a:rPr lang="en-US" sz="2400" dirty="0" err="1">
+                <a:ea typeface="Inter"/>
+              </a:rPr>
+              <a:t>Mudeli</a:t>
             </a:r>
             <a:r>
-              <a:rPr lang="et-EE" sz="2400" noProof="0" dirty="0">
+              <a:rPr lang="en-US" sz="2400" dirty="0">
                 <a:ea typeface="Inter"/>
               </a:rPr>
               <a:t> </a:t>
             </a:r>
             <a:r>
-              <a:rPr lang="et-EE" sz="2400" noProof="0" dirty="0" err="1">
+              <a:rPr lang="en-US" sz="2400" dirty="0" err="1">
                 <a:ea typeface="Inter"/>
               </a:rPr>
-              <a:t>ChatGPT</a:t>
+              <a:t>valik</a:t>
             </a:r>
-            <a:endParaRPr lang="et-EE" sz="2400" noProof="0" dirty="0"/>
+            <a:endParaRPr lang="en-US" sz="2400" noProof="0" dirty="0">
+              <a:ea typeface="Inter"/>
+            </a:endParaRPr>
           </a:p>
         </p:txBody>
       </p:sp>
@@ -26432,6 +26440,217 @@
   <p:clrMapOvr>
     <a:masterClrMapping/>
   </p:clrMapOvr>
+  <p:timing>
+    <p:tnLst>
+      <p:par>
+        <p:cTn id="1" dur="indefinite" restart="never" nodeType="tmRoot">
+          <p:childTnLst>
+            <p:seq concurrent="1" nextAc="seek">
+              <p:cTn id="2" dur="indefinite" nodeType="mainSeq">
+                <p:childTnLst>
+                  <p:par>
+                    <p:cTn id="3" fill="hold">
+                      <p:stCondLst>
+                        <p:cond delay="indefinite"/>
+                      </p:stCondLst>
+                      <p:childTnLst>
+                        <p:par>
+                          <p:cTn id="4" fill="hold">
+                            <p:stCondLst>
+                              <p:cond delay="0"/>
+                            </p:stCondLst>
+                            <p:childTnLst>
+                              <p:par>
+                                <p:cTn id="5" presetID="1" presetClass="entr" presetSubtype="0" fill="hold" grpId="0" nodeType="clickEffect">
+                                  <p:stCondLst>
+                                    <p:cond delay="0"/>
+                                  </p:stCondLst>
+                                  <p:childTnLst>
+                                    <p:set>
+                                      <p:cBhvr>
+                                        <p:cTn id="6" dur="1" fill="hold">
+                                          <p:stCondLst>
+                                            <p:cond delay="0"/>
+                                          </p:stCondLst>
+                                        </p:cTn>
+                                        <p:tgtEl>
+                                          <p:spTgt spid="3">
+                                            <p:txEl>
+                                              <p:pRg st="0" end="0"/>
+                                            </p:txEl>
+                                          </p:spTgt>
+                                        </p:tgtEl>
+                                        <p:attrNameLst>
+                                          <p:attrName>style.visibility</p:attrName>
+                                        </p:attrNameLst>
+                                      </p:cBhvr>
+                                      <p:to>
+                                        <p:strVal val="visible"/>
+                                      </p:to>
+                                    </p:set>
+                                  </p:childTnLst>
+                                </p:cTn>
+                              </p:par>
+                              <p:par>
+                                <p:cTn id="7" presetID="1" presetClass="entr" presetSubtype="0" fill="hold" grpId="0" nodeType="withEffect">
+                                  <p:stCondLst>
+                                    <p:cond delay="0"/>
+                                  </p:stCondLst>
+                                  <p:childTnLst>
+                                    <p:set>
+                                      <p:cBhvr>
+                                        <p:cTn id="8" dur="1" fill="hold">
+                                          <p:stCondLst>
+                                            <p:cond delay="0"/>
+                                          </p:stCondLst>
+                                        </p:cTn>
+                                        <p:tgtEl>
+                                          <p:spTgt spid="3">
+                                            <p:txEl>
+                                              <p:pRg st="1" end="1"/>
+                                            </p:txEl>
+                                          </p:spTgt>
+                                        </p:tgtEl>
+                                        <p:attrNameLst>
+                                          <p:attrName>style.visibility</p:attrName>
+                                        </p:attrNameLst>
+                                      </p:cBhvr>
+                                      <p:to>
+                                        <p:strVal val="visible"/>
+                                      </p:to>
+                                    </p:set>
+                                  </p:childTnLst>
+                                </p:cTn>
+                              </p:par>
+                            </p:childTnLst>
+                          </p:cTn>
+                        </p:par>
+                      </p:childTnLst>
+                    </p:cTn>
+                  </p:par>
+                  <p:par>
+                    <p:cTn id="9" fill="hold">
+                      <p:stCondLst>
+                        <p:cond delay="indefinite"/>
+                      </p:stCondLst>
+                      <p:childTnLst>
+                        <p:par>
+                          <p:cTn id="10" fill="hold">
+                            <p:stCondLst>
+                              <p:cond delay="0"/>
+                            </p:stCondLst>
+                            <p:childTnLst>
+                              <p:par>
+                                <p:cTn id="11" presetID="1" presetClass="entr" presetSubtype="0" fill="hold" grpId="0" nodeType="clickEffect">
+                                  <p:stCondLst>
+                                    <p:cond delay="0"/>
+                                  </p:stCondLst>
+                                  <p:childTnLst>
+                                    <p:set>
+                                      <p:cBhvr>
+                                        <p:cTn id="12" dur="1" fill="hold">
+                                          <p:stCondLst>
+                                            <p:cond delay="0"/>
+                                          </p:stCondLst>
+                                        </p:cTn>
+                                        <p:tgtEl>
+                                          <p:spTgt spid="3">
+                                            <p:txEl>
+                                              <p:pRg st="3" end="3"/>
+                                            </p:txEl>
+                                          </p:spTgt>
+                                        </p:tgtEl>
+                                        <p:attrNameLst>
+                                          <p:attrName>style.visibility</p:attrName>
+                                        </p:attrNameLst>
+                                      </p:cBhvr>
+                                      <p:to>
+                                        <p:strVal val="visible"/>
+                                      </p:to>
+                                    </p:set>
+                                  </p:childTnLst>
+                                </p:cTn>
+                              </p:par>
+                            </p:childTnLst>
+                          </p:cTn>
+                        </p:par>
+                      </p:childTnLst>
+                    </p:cTn>
+                  </p:par>
+                  <p:par>
+                    <p:cTn id="13" fill="hold">
+                      <p:stCondLst>
+                        <p:cond delay="indefinite"/>
+                      </p:stCondLst>
+                      <p:childTnLst>
+                        <p:par>
+                          <p:cTn id="14" fill="hold">
+                            <p:stCondLst>
+                              <p:cond delay="0"/>
+                            </p:stCondLst>
+                            <p:childTnLst>
+                              <p:par>
+                                <p:cTn id="15" presetID="1" presetClass="entr" presetSubtype="0" fill="hold" grpId="0" nodeType="clickEffect">
+                                  <p:stCondLst>
+                                    <p:cond delay="0"/>
+                                  </p:stCondLst>
+                                  <p:childTnLst>
+                                    <p:set>
+                                      <p:cBhvr>
+                                        <p:cTn id="16" dur="1" fill="hold">
+                                          <p:stCondLst>
+                                            <p:cond delay="0"/>
+                                          </p:stCondLst>
+                                        </p:cTn>
+                                        <p:tgtEl>
+                                          <p:spTgt spid="3">
+                                            <p:txEl>
+                                              <p:pRg st="5" end="5"/>
+                                            </p:txEl>
+                                          </p:spTgt>
+                                        </p:tgtEl>
+                                        <p:attrNameLst>
+                                          <p:attrName>style.visibility</p:attrName>
+                                        </p:attrNameLst>
+                                      </p:cBhvr>
+                                      <p:to>
+                                        <p:strVal val="visible"/>
+                                      </p:to>
+                                    </p:set>
+                                  </p:childTnLst>
+                                </p:cTn>
+                              </p:par>
+                            </p:childTnLst>
+                          </p:cTn>
+                        </p:par>
+                      </p:childTnLst>
+                    </p:cTn>
+                  </p:par>
+                </p:childTnLst>
+              </p:cTn>
+              <p:prevCondLst>
+                <p:cond evt="onPrev" delay="0">
+                  <p:tgtEl>
+                    <p:sldTgt/>
+                  </p:tgtEl>
+                </p:cond>
+              </p:prevCondLst>
+              <p:nextCondLst>
+                <p:cond evt="onNext" delay="0">
+                  <p:tgtEl>
+                    <p:sldTgt/>
+                  </p:tgtEl>
+                </p:cond>
+              </p:nextCondLst>
+            </p:seq>
+          </p:childTnLst>
+        </p:cTn>
+      </p:par>
+    </p:tnLst>
+    <p:bldLst>
+      <p:bldP spid="3" grpId="0" build="p"/>
+    </p:bldLst>
+  </p:timing>
 </p:sld>
 </file>
 
@@ -26640,6 +26859,75 @@
               <a:t>Ava  Müügiraporti Power BI </a:t>
             </a:r>
             <a:endParaRPr lang="et-EE" sz="2400" noProof="0" dirty="0">
+              <a:cs typeface="Noto Serif"/>
+            </a:endParaRPr>
+          </a:p>
+          <a:p>
+            <a:pPr marL="857250" lvl="1" indent="-342900">
+              <a:lnSpc>
+                <a:spcPct val="150000"/>
+              </a:lnSpc>
+              <a:buFont typeface="Arial,Sans-Serif" panose="020B0502030000000004" pitchFamily="34" charset="0"/>
+              <a:buChar char="o"/>
+            </a:pPr>
+            <a:r>
+              <a:rPr lang="en-US" sz="2400" noProof="0" dirty="0">
+                <a:ea typeface="Inter"/>
+                <a:cs typeface="Noto Serif"/>
+              </a:rPr>
+              <a:t>Palu </a:t>
+            </a:r>
+            <a:r>
+              <a:rPr lang="en-US" sz="2400" noProof="0" dirty="0" err="1">
+                <a:ea typeface="Inter"/>
+                <a:cs typeface="Noto Serif"/>
+              </a:rPr>
+              <a:t>vestlusrobotitel</a:t>
+            </a:r>
+            <a:r>
+              <a:rPr lang="en-US" sz="2400" noProof="0" dirty="0">
+                <a:ea typeface="Inter"/>
+                <a:cs typeface="Noto Serif"/>
+              </a:rPr>
+              <a:t> </a:t>
+            </a:r>
+            <a:r>
+              <a:rPr lang="en-US" sz="2400" noProof="0" dirty="0" err="1">
+                <a:ea typeface="Inter"/>
+                <a:cs typeface="Noto Serif"/>
+              </a:rPr>
+              <a:t>selgitada</a:t>
+            </a:r>
+            <a:r>
+              <a:rPr lang="en-US" sz="2400" noProof="0" dirty="0">
+                <a:ea typeface="Inter"/>
+                <a:cs typeface="Noto Serif"/>
+              </a:rPr>
+              <a:t> </a:t>
+            </a:r>
+            <a:r>
+              <a:rPr lang="en-US" sz="2400" noProof="0" dirty="0" err="1">
+                <a:ea typeface="Inter"/>
+                <a:cs typeface="Noto Serif"/>
+              </a:rPr>
+              <a:t>saadud</a:t>
+            </a:r>
+            <a:r>
+              <a:rPr lang="en-US" sz="2400" noProof="0" dirty="0">
+                <a:ea typeface="Inter"/>
+                <a:cs typeface="Noto Serif"/>
+              </a:rPr>
+              <a:t> </a:t>
+            </a:r>
+            <a:r>
+              <a:rPr lang="en-US" sz="2400" noProof="0" dirty="0" err="1">
+                <a:ea typeface="Inter"/>
+                <a:cs typeface="Noto Serif"/>
+              </a:rPr>
+              <a:t>mõõdikuid</a:t>
+            </a:r>
+            <a:endParaRPr lang="en-US" sz="2400" noProof="0" dirty="0">
+              <a:ea typeface="Inter"/>
               <a:cs typeface="Noto Serif"/>
             </a:endParaRPr>
           </a:p>
@@ -26878,33 +27166,15 @@
                                   </p:childTnLst>
                                 </p:cTn>
                               </p:par>
-                            </p:childTnLst>
-                          </p:cTn>
-                        </p:par>
-                      </p:childTnLst>
-                    </p:cTn>
-                  </p:par>
-                  <p:par>
-                    <p:cTn id="9" fill="hold">
-                      <p:stCondLst>
-                        <p:cond delay="indefinite"/>
-                      </p:stCondLst>
-                      <p:childTnLst>
-                        <p:par>
-                          <p:cTn id="10" fill="hold">
-                            <p:stCondLst>
-                              <p:cond delay="0"/>
-                            </p:stCondLst>
-                            <p:childTnLst>
                               <p:par>
-                                <p:cTn id="11" presetID="1" presetClass="entr" presetSubtype="0" fill="hold" grpId="0" nodeType="clickEffect">
+                                <p:cTn id="9" presetID="1" presetClass="entr" presetSubtype="0" fill="hold" grpId="0" nodeType="withEffect">
                                   <p:stCondLst>
                                     <p:cond delay="0"/>
                                   </p:stCondLst>
                                   <p:childTnLst>
                                     <p:set>
                                       <p:cBhvr>
-                                        <p:cTn id="12" dur="1" fill="hold">
+                                        <p:cTn id="10" dur="1" fill="hold">
                                           <p:stCondLst>
                                             <p:cond delay="0"/>
                                           </p:stCondLst>
@@ -26913,6 +27183,55 @@
                                           <p:spTgt spid="3">
                                             <p:txEl>
                                               <p:pRg st="2" end="2"/>
+                                            </p:txEl>
+                                          </p:spTgt>
+                                        </p:tgtEl>
+                                        <p:attrNameLst>
+                                          <p:attrName>style.visibility</p:attrName>
+                                        </p:attrNameLst>
+                                      </p:cBhvr>
+                                      <p:to>
+                                        <p:strVal val="visible"/>
+                                      </p:to>
+                                    </p:set>
+                                  </p:childTnLst>
+                                </p:cTn>
+                              </p:par>
+                            </p:childTnLst>
+                          </p:cTn>
+                        </p:par>
+                      </p:childTnLst>
+                    </p:cTn>
+                  </p:par>
+                  <p:par>
+                    <p:cTn id="11" fill="hold">
+                      <p:stCondLst>
+                        <p:cond delay="indefinite"/>
+                      </p:stCondLst>
+                      <p:childTnLst>
+                        <p:par>
+                          <p:cTn id="12" fill="hold">
+                            <p:stCondLst>
+                              <p:cond delay="0"/>
+                            </p:stCondLst>
+                            <p:childTnLst>
+                              <p:par>
+                                <p:cTn id="13" presetID="1" presetClass="entr" presetSubtype="0" fill="hold" grpId="0" nodeType="clickEffect">
+                                  <p:stCondLst>
+                                    <p:cond delay="0"/>
+                                  </p:stCondLst>
+                                  <p:childTnLst>
+                                    <p:set>
+                                      <p:cBhvr>
+                                        <p:cTn id="14" dur="1" fill="hold">
+                                          <p:stCondLst>
+                                            <p:cond delay="0"/>
+                                          </p:stCondLst>
+                                        </p:cTn>
+                                        <p:tgtEl>
+                                          <p:spTgt spid="3">
+                                            <p:txEl>
+                                              <p:pRg st="3" end="3"/>
                                             </p:txEl>
                                           </p:spTgt>
                                         </p:tgtEl>
@@ -28317,6 +28636,458 @@
   <p:cSld>
     <p:spTree>
       <p:nvGrpSpPr>
+        <p:cNvPr id="1" name=""/>
+        <p:cNvGrpSpPr/>
+        <p:nvPr/>
+      </p:nvGrpSpPr>
+      <p:grpSpPr>
+        <a:xfrm>
+          <a:off x="0" y="0"/>
+          <a:ext cx="0" cy="0"/>
+          <a:chOff x="0" y="0"/>
+          <a:chExt cx="0" cy="0"/>
+        </a:xfrm>
+      </p:grpSpPr>
+      <p:sp>
+        <p:nvSpPr>
+          <p:cNvPr id="2" name="Title 1">
+            <a:extLst>
+              <a:ext uri="{FF2B5EF4-FFF2-40B4-BE49-F238E27FC236}">
+                <a16:creationId xmlns:a16="http://schemas.microsoft.com/office/drawing/2014/main" id="{8181DBF1-6B0C-F0AB-B6AE-072A389A2741}"/>
+              </a:ext>
+            </a:extLst>
+          </p:cNvPr>
+          <p:cNvSpPr>
+            <a:spLocks noGrp="1"/>
+          </p:cNvSpPr>
+          <p:nvPr>
+            <p:ph type="ctrTitle"/>
+          </p:nvPr>
+        </p:nvSpPr>
+        <p:spPr/>
+        <p:txBody>
+          <a:bodyPr/>
+          <a:lstStyle/>
+          <a:p>
+            <a:r>
+              <a:rPr lang="et-EE" noProof="0" dirty="0"/>
+              <a:t>Kuidas generatiivne tehisaru töötab?</a:t>
+            </a:r>
+          </a:p>
+        </p:txBody>
+      </p:sp>
+      <p:sp>
+        <p:nvSpPr>
+          <p:cNvPr id="9" name="TextBox 8">
+            <a:extLst>
+              <a:ext uri="{FF2B5EF4-FFF2-40B4-BE49-F238E27FC236}">
+                <a16:creationId xmlns:a16="http://schemas.microsoft.com/office/drawing/2014/main" id="{2C7597CA-D61E-17DA-17B5-C9C1738A73BE}"/>
+              </a:ext>
+            </a:extLst>
+          </p:cNvPr>
+          <p:cNvSpPr txBox="1"/>
+          <p:nvPr/>
+        </p:nvSpPr>
+        <p:spPr>
+          <a:xfrm>
+            <a:off x="650240" y="1188720"/>
+            <a:ext cx="5161280" cy="646331"/>
+          </a:xfrm>
+          <a:prstGeom prst="rect">
+            <a:avLst/>
+          </a:prstGeom>
+          <a:noFill/>
+        </p:spPr>
+        <p:txBody>
+          <a:bodyPr rot="0" spcFirstLastPara="0" vertOverflow="overflow" horzOverflow="overflow" vert="horz" wrap="square" lIns="91440" tIns="45720" rIns="91440" bIns="45720" numCol="1" spcCol="0" rtlCol="0" fromWordArt="0" anchor="t" anchorCtr="0" forceAA="0" compatLnSpc="1">
+            <a:prstTxWarp prst="textNoShape">
+              <a:avLst/>
+            </a:prstTxWarp>
+            <a:spAutoFit/>
+          </a:bodyPr>
+          <a:lstStyle/>
+          <a:p>
+            <a:pPr marL="285750" indent="-285750">
+              <a:buFont typeface="Arial"/>
+              <a:buChar char="•"/>
+            </a:pPr>
+            <a:r>
+              <a:rPr lang="et-EE" noProof="0" dirty="0">
+                <a:ea typeface="Inter"/>
+              </a:rPr>
+              <a:t>Mida arvasid ameeriklased augustis 2025:</a:t>
+            </a:r>
+            <a:endParaRPr lang="et-EE" noProof="0" dirty="0"/>
+          </a:p>
+          <a:p>
+            <a:pPr marL="285750" indent="-285750">
+              <a:buFont typeface="Arial"/>
+              <a:buChar char="•"/>
+            </a:pPr>
+            <a:endParaRPr lang="et-EE" noProof="0" dirty="0"/>
+          </a:p>
+        </p:txBody>
+      </p:sp>
+      <p:pic>
+        <p:nvPicPr>
+          <p:cNvPr id="12" name="Content Placeholder 11">
+            <a:extLst>
+              <a:ext uri="{FF2B5EF4-FFF2-40B4-BE49-F238E27FC236}">
+                <a16:creationId xmlns:a16="http://schemas.microsoft.com/office/drawing/2014/main" id="{DDF6099E-FFF5-3B8B-6ED0-48C668AABFB9}"/>
+              </a:ext>
+            </a:extLst>
+          </p:cNvPr>
+          <p:cNvPicPr>
+            <a:picLocks noGrp="1" noChangeAspect="1"/>
+          </p:cNvPicPr>
+          <p:nvPr>
+            <p:ph sz="quarter" idx="10"/>
+          </p:nvPr>
+        </p:nvPicPr>
+        <p:blipFill>
+          <a:blip r:embed="rId2"/>
+          <a:stretch>
+            <a:fillRect/>
+          </a:stretch>
+        </p:blipFill>
+        <p:spPr>
+          <a:xfrm>
+            <a:off x="2055813" y="1836261"/>
+            <a:ext cx="8077200" cy="4000500"/>
+          </a:xfrm>
+          <a:prstGeom prst="rect">
+            <a:avLst/>
+          </a:prstGeom>
+          <a:solidFill>
+            <a:srgbClr val="FFFFFF">
+              <a:shade val="85000"/>
+            </a:srgbClr>
+          </a:solidFill>
+          <a:ln w="88900" cap="sq">
+            <a:solidFill>
+              <a:srgbClr val="FFFFFF"/>
+            </a:solidFill>
+            <a:miter lim="800000"/>
+          </a:ln>
+          <a:effectLst>
+            <a:outerShdw blurRad="55000" dist="18000" dir="5400000" algn="tl" rotWithShape="0">
+              <a:srgbClr val="000000">
+                <a:alpha val="40000"/>
+              </a:srgbClr>
+            </a:outerShdw>
+          </a:effectLst>
+          <a:scene3d>
+            <a:camera prst="orthographicFront"/>
+            <a:lightRig rig="twoPt" dir="t">
+              <a:rot lat="0" lon="0" rev="7200000"/>
+            </a:lightRig>
+          </a:scene3d>
+          <a:sp3d>
+            <a:bevelT w="25400" h="19050"/>
+            <a:contourClr>
+              <a:srgbClr val="FFFFFF"/>
+            </a:contourClr>
+          </a:sp3d>
+        </p:spPr>
+      </p:pic>
+      <p:sp>
+        <p:nvSpPr>
+          <p:cNvPr id="13" name="TextBox 12">
+            <a:extLst>
+              <a:ext uri="{FF2B5EF4-FFF2-40B4-BE49-F238E27FC236}">
+                <a16:creationId xmlns:a16="http://schemas.microsoft.com/office/drawing/2014/main" id="{7D4B374B-E0FB-F26A-AAD2-2AA0ED2D1C5C}"/>
+              </a:ext>
+            </a:extLst>
+          </p:cNvPr>
+          <p:cNvSpPr txBox="1"/>
+          <p:nvPr/>
+        </p:nvSpPr>
+        <p:spPr>
+          <a:xfrm>
+            <a:off x="2692400" y="6014720"/>
+            <a:ext cx="7518400" cy="923330"/>
+          </a:xfrm>
+          <a:prstGeom prst="rect">
+            <a:avLst/>
+          </a:prstGeom>
+          <a:noFill/>
+        </p:spPr>
+        <p:txBody>
+          <a:bodyPr rot="0" spcFirstLastPara="0" vertOverflow="overflow" horzOverflow="overflow" vert="horz" wrap="square" lIns="91440" tIns="45720" rIns="91440" bIns="45720" numCol="1" spcCol="0" rtlCol="0" fromWordArt="0" anchor="t" anchorCtr="0" forceAA="0" compatLnSpc="1">
+            <a:prstTxWarp prst="textNoShape">
+              <a:avLst/>
+            </a:prstTxWarp>
+            <a:spAutoFit/>
+          </a:bodyPr>
+          <a:lstStyle/>
+          <a:p>
+            <a:pPr algn="r"/>
+            <a:r>
+              <a:rPr lang="et-EE" sz="1400" noProof="0" dirty="0">
+                <a:ea typeface="Inter"/>
+              </a:rPr>
+              <a:t>Allikas:</a:t>
+            </a:r>
+            <a:r>
+              <a:rPr lang="et-EE" sz="1400" noProof="0" dirty="0">
+                <a:ea typeface="+mn-lt"/>
+                <a:cs typeface="+mn-lt"/>
+              </a:rPr>
+              <a:t> </a:t>
+            </a:r>
+            <a:r>
+              <a:rPr lang="et-EE" sz="1400" noProof="0" dirty="0" err="1">
+                <a:ea typeface="+mn-lt"/>
+                <a:cs typeface="+mn-lt"/>
+                <a:hlinkClick r:id="rId3"/>
+              </a:rPr>
+              <a:t>Searchlight</a:t>
+            </a:r>
+            <a:r>
+              <a:rPr lang="et-EE" sz="1400" noProof="0" dirty="0">
+                <a:ea typeface="+mn-lt"/>
+                <a:cs typeface="+mn-lt"/>
+                <a:hlinkClick r:id="rId3"/>
+              </a:rPr>
+              <a:t> </a:t>
+            </a:r>
+            <a:r>
+              <a:rPr lang="et-EE" sz="1400" noProof="0" dirty="0" err="1">
+                <a:ea typeface="+mn-lt"/>
+                <a:cs typeface="+mn-lt"/>
+                <a:hlinkClick r:id="rId3"/>
+              </a:rPr>
+              <a:t>Institute</a:t>
+            </a:r>
+            <a:r>
+              <a:rPr lang="et-EE" sz="1400" noProof="0" dirty="0">
+                <a:ea typeface="+mn-lt"/>
+                <a:cs typeface="+mn-lt"/>
+                <a:hlinkClick r:id="rId3"/>
+              </a:rPr>
+              <a:t> ja Tavern Research uuring AI kohta</a:t>
+            </a:r>
+            <a:r>
+              <a:rPr lang="et-EE" sz="1400" noProof="0" dirty="0">
+                <a:ea typeface="+mn-lt"/>
+                <a:cs typeface="+mn-lt"/>
+              </a:rPr>
+              <a:t>.</a:t>
+            </a:r>
+            <a:r>
+              <a:rPr lang="et-EE" noProof="0" dirty="0">
+                <a:ea typeface="+mn-lt"/>
+                <a:cs typeface="+mn-lt"/>
+              </a:rPr>
+              <a:t> </a:t>
+            </a:r>
+            <a:endParaRPr lang="et-EE" noProof="0" dirty="0">
+              <a:ea typeface="Inter"/>
+            </a:endParaRPr>
+          </a:p>
+          <a:p>
+            <a:pPr algn="r"/>
+            <a:endParaRPr lang="et-EE" noProof="0" dirty="0">
+              <a:solidFill>
+                <a:srgbClr val="121212"/>
+              </a:solidFill>
+              <a:ea typeface="Inter"/>
+            </a:endParaRPr>
+          </a:p>
+          <a:p>
+            <a:endParaRPr lang="et-EE" noProof="0" dirty="0">
+              <a:ea typeface="Inter"/>
+            </a:endParaRPr>
+          </a:p>
+        </p:txBody>
+      </p:sp>
+    </p:spTree>
+    <p:extLst>
+      <p:ext uri="{BB962C8B-B14F-4D97-AF65-F5344CB8AC3E}">
+        <p14:creationId xmlns:p14="http://schemas.microsoft.com/office/powerpoint/2010/main" val="3557357758"/>
+      </p:ext>
+    </p:extLst>
+  </p:cSld>
+  <p:clrMapOvr>
+    <a:masterClrMapping/>
+  </p:clrMapOvr>
+  <p:timing>
+    <p:tnLst>
+      <p:par>
+        <p:cTn id="1" dur="indefinite" restart="never" nodeType="tmRoot">
+          <p:childTnLst>
+            <p:seq concurrent="1" nextAc="seek">
+              <p:cTn id="2" dur="indefinite" nodeType="mainSeq">
+                <p:childTnLst>
+                  <p:par>
+                    <p:cTn id="3" fill="hold">
+                      <p:stCondLst>
+                        <p:cond delay="indefinite"/>
+                      </p:stCondLst>
+                      <p:childTnLst>
+                        <p:par>
+                          <p:cTn id="4" fill="hold">
+                            <p:stCondLst>
+                              <p:cond delay="0"/>
+                            </p:stCondLst>
+                            <p:childTnLst>
+                              <p:par>
+                                <p:cTn id="5" presetID="1" presetClass="entr" presetSubtype="0" fill="hold" grpId="0" nodeType="clickEffect">
+                                  <p:stCondLst>
+                                    <p:cond delay="0"/>
+                                  </p:stCondLst>
+                                  <p:childTnLst>
+                                    <p:set>
+                                      <p:cBhvr>
+                                        <p:cTn id="6" dur="1" fill="hold">
+                                          <p:stCondLst>
+                                            <p:cond delay="0"/>
+                                          </p:stCondLst>
+                                        </p:cTn>
+                                        <p:tgtEl>
+                                          <p:spTgt spid="9"/>
+                                        </p:tgtEl>
+                                        <p:attrNameLst>
+                                          <p:attrName>style.visibility</p:attrName>
+                                        </p:attrNameLst>
+                                      </p:cBhvr>
+                                      <p:to>
+                                        <p:strVal val="visible"/>
+                                      </p:to>
+                                    </p:set>
+                                  </p:childTnLst>
+                                </p:cTn>
+                              </p:par>
+                            </p:childTnLst>
+                          </p:cTn>
+                        </p:par>
+                      </p:childTnLst>
+                    </p:cTn>
+                  </p:par>
+                  <p:par>
+                    <p:cTn id="7" fill="hold">
+                      <p:stCondLst>
+                        <p:cond delay="indefinite"/>
+                      </p:stCondLst>
+                      <p:childTnLst>
+                        <p:par>
+                          <p:cTn id="8" fill="hold">
+                            <p:stCondLst>
+                              <p:cond delay="0"/>
+                            </p:stCondLst>
+                            <p:childTnLst>
+                              <p:par>
+                                <p:cTn id="9" presetID="1" presetClass="entr" presetSubtype="0" fill="hold" nodeType="clickEffect">
+                                  <p:stCondLst>
+                                    <p:cond delay="0"/>
+                                  </p:stCondLst>
+                                  <p:childTnLst>
+                                    <p:set>
+                                      <p:cBhvr>
+                                        <p:cTn id="10" dur="1" fill="hold">
+                                          <p:stCondLst>
+                                            <p:cond delay="0"/>
+                                          </p:stCondLst>
+                                        </p:cTn>
+                                        <p:tgtEl>
+                                          <p:spTgt spid="12"/>
+                                        </p:tgtEl>
+                                        <p:attrNameLst>
+                                          <p:attrName>style.visibility</p:attrName>
+                                        </p:attrNameLst>
+                                      </p:cBhvr>
+                                      <p:to>
+                                        <p:strVal val="visible"/>
+                                      </p:to>
+                                    </p:set>
+                                  </p:childTnLst>
+                                </p:cTn>
+                              </p:par>
+                            </p:childTnLst>
+                          </p:cTn>
+                        </p:par>
+                      </p:childTnLst>
+                    </p:cTn>
+                  </p:par>
+                  <p:par>
+                    <p:cTn id="11" fill="hold">
+                      <p:stCondLst>
+                        <p:cond delay="indefinite"/>
+                      </p:stCondLst>
+                      <p:childTnLst>
+                        <p:par>
+                          <p:cTn id="12" fill="hold">
+                            <p:stCondLst>
+                              <p:cond delay="0"/>
+                            </p:stCondLst>
+                            <p:childTnLst>
+                              <p:par>
+                                <p:cTn id="13" presetID="1" presetClass="entr" presetSubtype="0" fill="hold" grpId="0" nodeType="clickEffect">
+                                  <p:stCondLst>
+                                    <p:cond delay="0"/>
+                                  </p:stCondLst>
+                                  <p:childTnLst>
+                                    <p:set>
+                                      <p:cBhvr>
+                                        <p:cTn id="14" dur="1" fill="hold">
+                                          <p:stCondLst>
+                                            <p:cond delay="0"/>
+                                          </p:stCondLst>
+                                        </p:cTn>
+                                        <p:tgtEl>
+                                          <p:spTgt spid="13"/>
+                                        </p:tgtEl>
+                                        <p:attrNameLst>
+                                          <p:attrName>style.visibility</p:attrName>
+                                        </p:attrNameLst>
+                                      </p:cBhvr>
+                                      <p:to>
+                                        <p:strVal val="visible"/>
+                                      </p:to>
+                                    </p:set>
+                                  </p:childTnLst>
+                                </p:cTn>
+                              </p:par>
+                            </p:childTnLst>
+                          </p:cTn>
+                        </p:par>
+                      </p:childTnLst>
+                    </p:cTn>
+                  </p:par>
+                </p:childTnLst>
+              </p:cTn>
+              <p:prevCondLst>
+                <p:cond evt="onPrev" delay="0">
+                  <p:tgtEl>
+                    <p:sldTgt/>
+                  </p:tgtEl>
+                </p:cond>
+              </p:prevCondLst>
+              <p:nextCondLst>
+                <p:cond evt="onNext" delay="0">
+                  <p:tgtEl>
+                    <p:sldTgt/>
+                  </p:tgtEl>
+                </p:cond>
+              </p:nextCondLst>
+            </p:seq>
+          </p:childTnLst>
+        </p:cTn>
+      </p:par>
+    </p:tnLst>
+    <p:bldLst>
+      <p:bldP spid="9" grpId="0"/>
+      <p:bldP spid="13" grpId="0"/>
+    </p:bldLst>
+  </p:timing>
+</p:sld>
+</file>
+
+<file path=ppt/slides/slide5.xml><?xml version="1.0" encoding="utf-8"?>
+<p:sld xmlns:a="http://schemas.openxmlformats.org/drawingml/2006/main" xmlns:r="http://schemas.openxmlformats.org/officeDocument/2006/relationships" xmlns:p="http://schemas.openxmlformats.org/presentationml/2006/main">
+  <p:cSld>
+    <p:spTree>
+      <p:nvGrpSpPr>
         <p:cNvPr id="1" name="">
           <a:extLst>
             <a:ext uri="{FF2B5EF4-FFF2-40B4-BE49-F238E27FC236}">
@@ -29165,7 +29936,7 @@
 </p:sld>
 </file>
 
-<file path=ppt/slides/slide5.xml><?xml version="1.0" encoding="utf-8"?>
+<file path=ppt/slides/slide6.xml><?xml version="1.0" encoding="utf-8"?>
 <p:sld xmlns:a="http://schemas.openxmlformats.org/drawingml/2006/main" xmlns:r="http://schemas.openxmlformats.org/officeDocument/2006/relationships" xmlns:p="http://schemas.openxmlformats.org/presentationml/2006/main">
   <p:cSld>
     <p:spTree>
@@ -29190,7 +29961,7 @@
         </p:nvSpPr>
         <p:spPr>
           <a:xfrm>
-            <a:off x="579196" y="956041"/>
+            <a:off x="661492" y="1888729"/>
             <a:ext cx="9836051" cy="590649"/>
           </a:xfrm>
           <a:prstGeom prst="rect">
@@ -29209,16 +29980,6 @@
               </a:lnSpc>
             </a:pPr>
             <a:r>
-              <a:rPr lang="en-US" sz="3708" b="1" dirty="0" err="1">
-                <a:solidFill>
-                  <a:srgbClr val="000000"/>
-                </a:solidFill>
-                <a:ea typeface="Inter Bold" pitchFamily="34" charset="-122"/>
-                <a:cs typeface="Inter Bold" pitchFamily="34" charset="-120"/>
-              </a:rPr>
-              <a:t>Generatiivne</a:t>
-            </a:r>
-            <a:r>
               <a:rPr lang="en-US" sz="3708" b="1" dirty="0">
                 <a:solidFill>
                   <a:srgbClr val="000000"/>
@@ -29226,27 +29987,7 @@
                 <a:ea typeface="Inter Bold" pitchFamily="34" charset="-122"/>
                 <a:cs typeface="Inter Bold" pitchFamily="34" charset="-120"/>
               </a:rPr>
-              <a:t> </a:t>
-            </a:r>
-            <a:r>
-              <a:rPr lang="en-US" sz="3708" b="1" dirty="0" err="1">
-                <a:solidFill>
-                  <a:srgbClr val="000000"/>
-                </a:solidFill>
-                <a:ea typeface="Inter Bold" pitchFamily="34" charset="-122"/>
-                <a:cs typeface="Inter Bold" pitchFamily="34" charset="-120"/>
-              </a:rPr>
-              <a:t>tehisaru</a:t>
-            </a:r>
-            <a:r>
-              <a:rPr lang="en-US" sz="3708" b="1" dirty="0">
-                <a:solidFill>
-                  <a:srgbClr val="000000"/>
-                </a:solidFill>
-                <a:ea typeface="Inter Bold" pitchFamily="34" charset="-122"/>
-                <a:cs typeface="Inter Bold" pitchFamily="34" charset="-120"/>
-              </a:rPr>
-              <a:t> vs traditsiooniline tarkvara</a:t>
+              <a:t>Generatiivne AI vs traditsiooniline tarkvara</a:t>
             </a:r>
             <a:endParaRPr lang="en-US" sz="3708" dirty="0"/>
           </a:p>
@@ -29260,7 +30001,7 @@
         </p:nvSpPr>
         <p:spPr>
           <a:xfrm>
-            <a:off x="560685" y="2348353"/>
+            <a:off x="661492" y="2951857"/>
             <a:ext cx="3642916" cy="354409"/>
           </a:xfrm>
           <a:prstGeom prst="rect">
@@ -29300,7 +30041,7 @@
         </p:nvSpPr>
         <p:spPr>
           <a:xfrm>
-            <a:off x="560685" y="2891775"/>
+            <a:off x="661492" y="3495279"/>
             <a:ext cx="5203924" cy="1407914"/>
           </a:xfrm>
           <a:prstGeom prst="rect">
@@ -29402,7 +30143,7 @@
         </p:nvSpPr>
         <p:spPr>
           <a:xfrm>
-            <a:off x="6096000" y="2159341"/>
+            <a:off x="6196807" y="2762845"/>
             <a:ext cx="5476181" cy="2206427"/>
           </a:xfrm>
           <a:prstGeom prst="roundRect">
@@ -29431,7 +30172,7 @@
         </p:nvSpPr>
         <p:spPr>
           <a:xfrm>
-            <a:off x="6285012" y="2348353"/>
+            <a:off x="6385819" y="2951857"/>
             <a:ext cx="3655219" cy="354409"/>
           </a:xfrm>
           <a:prstGeom prst="rect">
@@ -29450,16 +30191,6 @@
               </a:lnSpc>
             </a:pPr>
             <a:r>
-              <a:rPr lang="en-US" sz="2208" b="1" dirty="0" err="1">
-                <a:solidFill>
-                  <a:srgbClr val="FFFFFF"/>
-                </a:solidFill>
-                <a:ea typeface="Inter Bold" pitchFamily="34" charset="-122"/>
-                <a:cs typeface="Inter Bold" pitchFamily="34" charset="-120"/>
-              </a:rPr>
-              <a:t>Generatiivne</a:t>
-            </a:r>
-            <a:r>
               <a:rPr lang="en-US" sz="2208" b="1" dirty="0">
                 <a:solidFill>
                   <a:srgbClr val="FFFFFF"/>
@@ -29467,17 +30198,7 @@
                 <a:ea typeface="Inter Bold" pitchFamily="34" charset="-122"/>
                 <a:cs typeface="Inter Bold" pitchFamily="34" charset="-120"/>
               </a:rPr>
-              <a:t> </a:t>
-            </a:r>
-            <a:r>
-              <a:rPr lang="en-US" sz="2208" b="1" dirty="0" err="1">
-                <a:solidFill>
-                  <a:srgbClr val="FFFFFF"/>
-                </a:solidFill>
-                <a:ea typeface="Inter Bold" pitchFamily="34" charset="-122"/>
-                <a:cs typeface="Inter Bold" pitchFamily="34" charset="-120"/>
-              </a:rPr>
-              <a:t>tehisaru</a:t>
+              <a:t>Generatiivne AI (ChatGPT)</a:t>
             </a:r>
             <a:endParaRPr lang="en-US" sz="2208" dirty="0"/>
           </a:p>
@@ -29491,7 +30212,7 @@
         </p:nvSpPr>
         <p:spPr>
           <a:xfrm>
-            <a:off x="6285011" y="2891775"/>
+            <a:off x="6385818" y="3495279"/>
             <a:ext cx="5098157" cy="1407914"/>
           </a:xfrm>
           <a:prstGeom prst="rect">
@@ -29590,458 +30311,6 @@
   <p:clrMapOvr>
     <a:masterClrMapping/>
   </p:clrMapOvr>
-</p:sld>
-</file>
-
-<file path=ppt/slides/slide6.xml><?xml version="1.0" encoding="utf-8"?>
-<p:sld xmlns:a="http://schemas.openxmlformats.org/drawingml/2006/main" xmlns:r="http://schemas.openxmlformats.org/officeDocument/2006/relationships" xmlns:p="http://schemas.openxmlformats.org/presentationml/2006/main">
-  <p:cSld>
-    <p:spTree>
-      <p:nvGrpSpPr>
-        <p:cNvPr id="1" name=""/>
-        <p:cNvGrpSpPr/>
-        <p:nvPr/>
-      </p:nvGrpSpPr>
-      <p:grpSpPr>
-        <a:xfrm>
-          <a:off x="0" y="0"/>
-          <a:ext cx="0" cy="0"/>
-          <a:chOff x="0" y="0"/>
-          <a:chExt cx="0" cy="0"/>
-        </a:xfrm>
-      </p:grpSpPr>
-      <p:sp>
-        <p:nvSpPr>
-          <p:cNvPr id="2" name="Title 1">
-            <a:extLst>
-              <a:ext uri="{FF2B5EF4-FFF2-40B4-BE49-F238E27FC236}">
-                <a16:creationId xmlns:a16="http://schemas.microsoft.com/office/drawing/2014/main" id="{8181DBF1-6B0C-F0AB-B6AE-072A389A2741}"/>
-              </a:ext>
-            </a:extLst>
-          </p:cNvPr>
-          <p:cNvSpPr>
-            <a:spLocks noGrp="1"/>
-          </p:cNvSpPr>
-          <p:nvPr>
-            <p:ph type="ctrTitle"/>
-          </p:nvPr>
-        </p:nvSpPr>
-        <p:spPr/>
-        <p:txBody>
-          <a:bodyPr/>
-          <a:lstStyle/>
-          <a:p>
-            <a:r>
-              <a:rPr lang="et-EE" noProof="0" dirty="0"/>
-              <a:t>Kuidas generatiivne tehisaru töötab?</a:t>
-            </a:r>
-          </a:p>
-        </p:txBody>
-      </p:sp>
-      <p:sp>
-        <p:nvSpPr>
-          <p:cNvPr id="9" name="TextBox 8">
-            <a:extLst>
-              <a:ext uri="{FF2B5EF4-FFF2-40B4-BE49-F238E27FC236}">
-                <a16:creationId xmlns:a16="http://schemas.microsoft.com/office/drawing/2014/main" id="{2C7597CA-D61E-17DA-17B5-C9C1738A73BE}"/>
-              </a:ext>
-            </a:extLst>
-          </p:cNvPr>
-          <p:cNvSpPr txBox="1"/>
-          <p:nvPr/>
-        </p:nvSpPr>
-        <p:spPr>
-          <a:xfrm>
-            <a:off x="650240" y="1188720"/>
-            <a:ext cx="5161280" cy="646331"/>
-          </a:xfrm>
-          <a:prstGeom prst="rect">
-            <a:avLst/>
-          </a:prstGeom>
-          <a:noFill/>
-        </p:spPr>
-        <p:txBody>
-          <a:bodyPr rot="0" spcFirstLastPara="0" vertOverflow="overflow" horzOverflow="overflow" vert="horz" wrap="square" lIns="91440" tIns="45720" rIns="91440" bIns="45720" numCol="1" spcCol="0" rtlCol="0" fromWordArt="0" anchor="t" anchorCtr="0" forceAA="0" compatLnSpc="1">
-            <a:prstTxWarp prst="textNoShape">
-              <a:avLst/>
-            </a:prstTxWarp>
-            <a:spAutoFit/>
-          </a:bodyPr>
-          <a:lstStyle/>
-          <a:p>
-            <a:pPr marL="285750" indent="-285750">
-              <a:buFont typeface="Arial"/>
-              <a:buChar char="•"/>
-            </a:pPr>
-            <a:r>
-              <a:rPr lang="et-EE" noProof="0" dirty="0">
-                <a:ea typeface="Inter"/>
-              </a:rPr>
-              <a:t>Mida arvasid ameeriklased augustis 2025:</a:t>
-            </a:r>
-            <a:endParaRPr lang="et-EE" noProof="0" dirty="0"/>
-          </a:p>
-          <a:p>
-            <a:pPr marL="285750" indent="-285750">
-              <a:buFont typeface="Arial"/>
-              <a:buChar char="•"/>
-            </a:pPr>
-            <a:endParaRPr lang="et-EE" noProof="0" dirty="0"/>
-          </a:p>
-        </p:txBody>
-      </p:sp>
-      <p:pic>
-        <p:nvPicPr>
-          <p:cNvPr id="12" name="Content Placeholder 11">
-            <a:extLst>
-              <a:ext uri="{FF2B5EF4-FFF2-40B4-BE49-F238E27FC236}">
-                <a16:creationId xmlns:a16="http://schemas.microsoft.com/office/drawing/2014/main" id="{DDF6099E-FFF5-3B8B-6ED0-48C668AABFB9}"/>
-              </a:ext>
-            </a:extLst>
-          </p:cNvPr>
-          <p:cNvPicPr>
-            <a:picLocks noGrp="1" noChangeAspect="1"/>
-          </p:cNvPicPr>
-          <p:nvPr>
-            <p:ph sz="quarter" idx="10"/>
-          </p:nvPr>
-        </p:nvPicPr>
-        <p:blipFill>
-          <a:blip r:embed="rId2"/>
-          <a:stretch>
-            <a:fillRect/>
-          </a:stretch>
-        </p:blipFill>
-        <p:spPr>
-          <a:xfrm>
-            <a:off x="2055813" y="1836261"/>
-            <a:ext cx="8077200" cy="4000500"/>
-          </a:xfrm>
-          <a:prstGeom prst="rect">
-            <a:avLst/>
-          </a:prstGeom>
-          <a:solidFill>
-            <a:srgbClr val="FFFFFF">
-              <a:shade val="85000"/>
-            </a:srgbClr>
-          </a:solidFill>
-          <a:ln w="88900" cap="sq">
-            <a:solidFill>
-              <a:srgbClr val="FFFFFF"/>
-            </a:solidFill>
-            <a:miter lim="800000"/>
-          </a:ln>
-          <a:effectLst>
-            <a:outerShdw blurRad="55000" dist="18000" dir="5400000" algn="tl" rotWithShape="0">
-              <a:srgbClr val="000000">
-                <a:alpha val="40000"/>
-              </a:srgbClr>
-            </a:outerShdw>
-          </a:effectLst>
-          <a:scene3d>
-            <a:camera prst="orthographicFront"/>
-            <a:lightRig rig="twoPt" dir="t">
-              <a:rot lat="0" lon="0" rev="7200000"/>
-            </a:lightRig>
-          </a:scene3d>
-          <a:sp3d>
-            <a:bevelT w="25400" h="19050"/>
-            <a:contourClr>
-              <a:srgbClr val="FFFFFF"/>
-            </a:contourClr>
-          </a:sp3d>
-        </p:spPr>
-      </p:pic>
-      <p:sp>
-        <p:nvSpPr>
-          <p:cNvPr id="13" name="TextBox 12">
-            <a:extLst>
-              <a:ext uri="{FF2B5EF4-FFF2-40B4-BE49-F238E27FC236}">
-                <a16:creationId xmlns:a16="http://schemas.microsoft.com/office/drawing/2014/main" id="{7D4B374B-E0FB-F26A-AAD2-2AA0ED2D1C5C}"/>
-              </a:ext>
-            </a:extLst>
-          </p:cNvPr>
-          <p:cNvSpPr txBox="1"/>
-          <p:nvPr/>
-        </p:nvSpPr>
-        <p:spPr>
-          <a:xfrm>
-            <a:off x="2692400" y="6014720"/>
-            <a:ext cx="7518400" cy="923330"/>
-          </a:xfrm>
-          <a:prstGeom prst="rect">
-            <a:avLst/>
-          </a:prstGeom>
-          <a:noFill/>
-        </p:spPr>
-        <p:txBody>
-          <a:bodyPr rot="0" spcFirstLastPara="0" vertOverflow="overflow" horzOverflow="overflow" vert="horz" wrap="square" lIns="91440" tIns="45720" rIns="91440" bIns="45720" numCol="1" spcCol="0" rtlCol="0" fromWordArt="0" anchor="t" anchorCtr="0" forceAA="0" compatLnSpc="1">
-            <a:prstTxWarp prst="textNoShape">
-              <a:avLst/>
-            </a:prstTxWarp>
-            <a:spAutoFit/>
-          </a:bodyPr>
-          <a:lstStyle/>
-          <a:p>
-            <a:pPr algn="r"/>
-            <a:r>
-              <a:rPr lang="et-EE" sz="1400" noProof="0" dirty="0">
-                <a:ea typeface="Inter"/>
-              </a:rPr>
-              <a:t>Allikas:</a:t>
-            </a:r>
-            <a:r>
-              <a:rPr lang="et-EE" sz="1400" noProof="0" dirty="0">
-                <a:ea typeface="+mn-lt"/>
-                <a:cs typeface="+mn-lt"/>
-              </a:rPr>
-              <a:t> </a:t>
-            </a:r>
-            <a:r>
-              <a:rPr lang="et-EE" sz="1400" noProof="0" dirty="0" err="1">
-                <a:ea typeface="+mn-lt"/>
-                <a:cs typeface="+mn-lt"/>
-                <a:hlinkClick r:id="rId3"/>
-              </a:rPr>
-              <a:t>Searchlight</a:t>
-            </a:r>
-            <a:r>
-              <a:rPr lang="et-EE" sz="1400" noProof="0" dirty="0">
-                <a:ea typeface="+mn-lt"/>
-                <a:cs typeface="+mn-lt"/>
-                <a:hlinkClick r:id="rId3"/>
-              </a:rPr>
-              <a:t> </a:t>
-            </a:r>
-            <a:r>
-              <a:rPr lang="et-EE" sz="1400" noProof="0" dirty="0" err="1">
-                <a:ea typeface="+mn-lt"/>
-                <a:cs typeface="+mn-lt"/>
-                <a:hlinkClick r:id="rId3"/>
-              </a:rPr>
-              <a:t>Institute</a:t>
-            </a:r>
-            <a:r>
-              <a:rPr lang="et-EE" sz="1400" noProof="0" dirty="0">
-                <a:ea typeface="+mn-lt"/>
-                <a:cs typeface="+mn-lt"/>
-                <a:hlinkClick r:id="rId3"/>
-              </a:rPr>
-              <a:t> ja Tavern Research uuring AI kohta</a:t>
-            </a:r>
-            <a:r>
-              <a:rPr lang="et-EE" sz="1400" noProof="0" dirty="0">
-                <a:ea typeface="+mn-lt"/>
-                <a:cs typeface="+mn-lt"/>
-              </a:rPr>
-              <a:t>.</a:t>
-            </a:r>
-            <a:r>
-              <a:rPr lang="et-EE" noProof="0" dirty="0">
-                <a:ea typeface="+mn-lt"/>
-                <a:cs typeface="+mn-lt"/>
-              </a:rPr>
-              <a:t> </a:t>
-            </a:r>
-            <a:endParaRPr lang="et-EE" noProof="0" dirty="0">
-              <a:ea typeface="Inter"/>
-            </a:endParaRPr>
-          </a:p>
-          <a:p>
-            <a:pPr algn="r"/>
-            <a:endParaRPr lang="et-EE" noProof="0" dirty="0">
-              <a:solidFill>
-                <a:srgbClr val="121212"/>
-              </a:solidFill>
-              <a:ea typeface="Inter"/>
-            </a:endParaRPr>
-          </a:p>
-          <a:p>
-            <a:endParaRPr lang="et-EE" noProof="0" dirty="0">
-              <a:ea typeface="Inter"/>
-            </a:endParaRPr>
-          </a:p>
-        </p:txBody>
-      </p:sp>
-    </p:spTree>
-    <p:extLst>
-      <p:ext uri="{BB962C8B-B14F-4D97-AF65-F5344CB8AC3E}">
-        <p14:creationId xmlns:p14="http://schemas.microsoft.com/office/powerpoint/2010/main" val="3557357758"/>
-      </p:ext>
-    </p:extLst>
-  </p:cSld>
-  <p:clrMapOvr>
-    <a:masterClrMapping/>
-  </p:clrMapOvr>
-  <p:timing>
-    <p:tnLst>
-      <p:par>
-        <p:cTn id="1" dur="indefinite" restart="never" nodeType="tmRoot">
-          <p:childTnLst>
-            <p:seq concurrent="1" nextAc="seek">
-              <p:cTn id="2" dur="indefinite" nodeType="mainSeq">
-                <p:childTnLst>
-                  <p:par>
-                    <p:cTn id="3" fill="hold">
-                      <p:stCondLst>
-                        <p:cond delay="indefinite"/>
-                      </p:stCondLst>
-                      <p:childTnLst>
-                        <p:par>
-                          <p:cTn id="4" fill="hold">
-                            <p:stCondLst>
-                              <p:cond delay="0"/>
-                            </p:stCondLst>
-                            <p:childTnLst>
-                              <p:par>
-                                <p:cTn id="5" presetID="1" presetClass="entr" presetSubtype="0" fill="hold" grpId="0" nodeType="clickEffect">
-                                  <p:stCondLst>
-                                    <p:cond delay="0"/>
-                                  </p:stCondLst>
-                                  <p:childTnLst>
-                                    <p:set>
-                                      <p:cBhvr>
-                                        <p:cTn id="6" dur="1" fill="hold">
-                                          <p:stCondLst>
-                                            <p:cond delay="0"/>
-                                          </p:stCondLst>
-                                        </p:cTn>
-                                        <p:tgtEl>
-                                          <p:spTgt spid="9"/>
-                                        </p:tgtEl>
-                                        <p:attrNameLst>
-                                          <p:attrName>style.visibility</p:attrName>
-                                        </p:attrNameLst>
-                                      </p:cBhvr>
-                                      <p:to>
-                                        <p:strVal val="visible"/>
-                                      </p:to>
-                                    </p:set>
-                                  </p:childTnLst>
-                                </p:cTn>
-                              </p:par>
-                            </p:childTnLst>
-                          </p:cTn>
-                        </p:par>
-                      </p:childTnLst>
-                    </p:cTn>
-                  </p:par>
-                  <p:par>
-                    <p:cTn id="7" fill="hold">
-                      <p:stCondLst>
-                        <p:cond delay="indefinite"/>
-                      </p:stCondLst>
-                      <p:childTnLst>
-                        <p:par>
-                          <p:cTn id="8" fill="hold">
-                            <p:stCondLst>
-                              <p:cond delay="0"/>
-                            </p:stCondLst>
-                            <p:childTnLst>
-                              <p:par>
-                                <p:cTn id="9" presetID="1" presetClass="entr" presetSubtype="0" fill="hold" nodeType="clickEffect">
-                                  <p:stCondLst>
-                                    <p:cond delay="0"/>
-                                  </p:stCondLst>
-                                  <p:childTnLst>
-                                    <p:set>
-                                      <p:cBhvr>
-                                        <p:cTn id="10" dur="1" fill="hold">
-                                          <p:stCondLst>
-                                            <p:cond delay="0"/>
-                                          </p:stCondLst>
-                                        </p:cTn>
-                                        <p:tgtEl>
-                                          <p:spTgt spid="12"/>
-                                        </p:tgtEl>
-                                        <p:attrNameLst>
-                                          <p:attrName>style.visibility</p:attrName>
-                                        </p:attrNameLst>
-                                      </p:cBhvr>
-                                      <p:to>
-                                        <p:strVal val="visible"/>
-                                      </p:to>
-                                    </p:set>
-                                  </p:childTnLst>
-                                </p:cTn>
-                              </p:par>
-                            </p:childTnLst>
-                          </p:cTn>
-                        </p:par>
-                      </p:childTnLst>
-                    </p:cTn>
-                  </p:par>
-                  <p:par>
-                    <p:cTn id="11" fill="hold">
-                      <p:stCondLst>
-                        <p:cond delay="indefinite"/>
-                      </p:stCondLst>
-                      <p:childTnLst>
-                        <p:par>
-                          <p:cTn id="12" fill="hold">
-                            <p:stCondLst>
-                              <p:cond delay="0"/>
-                            </p:stCondLst>
-                            <p:childTnLst>
-                              <p:par>
-                                <p:cTn id="13" presetID="1" presetClass="entr" presetSubtype="0" fill="hold" grpId="0" nodeType="clickEffect">
-                                  <p:stCondLst>
-                                    <p:cond delay="0"/>
-                                  </p:stCondLst>
-                                  <p:childTnLst>
-                                    <p:set>
-                                      <p:cBhvr>
-                                        <p:cTn id="14" dur="1" fill="hold">
-                                          <p:stCondLst>
-                                            <p:cond delay="0"/>
-                                          </p:stCondLst>
-                                        </p:cTn>
-                                        <p:tgtEl>
-                                          <p:spTgt spid="13"/>
-                                        </p:tgtEl>
-                                        <p:attrNameLst>
-                                          <p:attrName>style.visibility</p:attrName>
-                                        </p:attrNameLst>
-                                      </p:cBhvr>
-                                      <p:to>
-                                        <p:strVal val="visible"/>
-                                      </p:to>
-                                    </p:set>
-                                  </p:childTnLst>
-                                </p:cTn>
-                              </p:par>
-                            </p:childTnLst>
-                          </p:cTn>
-                        </p:par>
-                      </p:childTnLst>
-                    </p:cTn>
-                  </p:par>
-                </p:childTnLst>
-              </p:cTn>
-              <p:prevCondLst>
-                <p:cond evt="onPrev" delay="0">
-                  <p:tgtEl>
-                    <p:sldTgt/>
-                  </p:tgtEl>
-                </p:cond>
-              </p:prevCondLst>
-              <p:nextCondLst>
-                <p:cond evt="onNext" delay="0">
-                  <p:tgtEl>
-                    <p:sldTgt/>
-                  </p:tgtEl>
-                </p:cond>
-              </p:nextCondLst>
-            </p:seq>
-          </p:childTnLst>
-        </p:cTn>
-      </p:par>
-    </p:tnLst>
-    <p:bldLst>
-      <p:bldP spid="9" grpId="0"/>
-      <p:bldP spid="13" grpId="0"/>
-    </p:bldLst>
-  </p:timing>
 </p:sld>
 </file>
 
@@ -30215,9 +30484,86 @@
               </a:rPr>
               <a:t>https://digiriigiakadeemia.ee/course/index.php?categoryid=60</a:t>
             </a:r>
+            <a:endParaRPr lang="en-US" sz="2400" dirty="0"/>
+          </a:p>
+          <a:p>
+            <a:pPr lvl="1">
+              <a:lnSpc>
+                <a:spcPct val="150000"/>
+              </a:lnSpc>
+            </a:pPr>
+            <a:endParaRPr lang="en-US" sz="2400" dirty="0"/>
+          </a:p>
+          <a:p>
+            <a:pPr>
+              <a:lnSpc>
+                <a:spcPct val="150000"/>
+              </a:lnSpc>
+            </a:pPr>
+            <a:r>
+              <a:rPr lang="en-US" sz="2400" dirty="0" err="1"/>
+              <a:t>Lühike</a:t>
+            </a:r>
             <a:r>
               <a:rPr lang="en-US" sz="2400" dirty="0"/>
               <a:t> </a:t>
+            </a:r>
+            <a:r>
+              <a:rPr lang="en-US" sz="2400" dirty="0" err="1"/>
+              <a:t>ingliskeelne</a:t>
+            </a:r>
+            <a:r>
+              <a:rPr lang="en-US" sz="2400" dirty="0"/>
+              <a:t> </a:t>
+            </a:r>
+            <a:r>
+              <a:rPr lang="en-US" sz="2400" dirty="0" err="1"/>
+              <a:t>tutvustus</a:t>
+            </a:r>
+            <a:r>
+              <a:rPr lang="en-US" sz="2400" dirty="0"/>
+              <a:t> </a:t>
+            </a:r>
+            <a:r>
+              <a:rPr lang="en-US" sz="2400" dirty="0" err="1"/>
+              <a:t>keelemudelite</a:t>
+            </a:r>
+            <a:r>
+              <a:rPr lang="en-US" sz="2400" dirty="0"/>
+              <a:t> </a:t>
+            </a:r>
+            <a:r>
+              <a:rPr lang="en-US" sz="2400" dirty="0" err="1"/>
+              <a:t>toimimise</a:t>
+            </a:r>
+            <a:r>
+              <a:rPr lang="en-US" sz="2400" dirty="0"/>
+              <a:t> </a:t>
+            </a:r>
+            <a:r>
+              <a:rPr lang="en-US" sz="2400" dirty="0" err="1"/>
+              <a:t>kohta</a:t>
+            </a:r>
+            <a:r>
+              <a:rPr lang="en-US" sz="2400" dirty="0"/>
+              <a:t>: </a:t>
+            </a:r>
+          </a:p>
+          <a:p>
+            <a:pPr lvl="1">
+              <a:lnSpc>
+                <a:spcPct val="150000"/>
+              </a:lnSpc>
+            </a:pPr>
+            <a:r>
+              <a:rPr lang="en-US" sz="2400" dirty="0">
+                <a:hlinkClick r:id="rId4"/>
+              </a:rPr>
+              <a:t>https://youtu.be/LPZh9BOjkQs?si=Z3O5J0zhSEZG9TWc</a:t>
+            </a:r>
+            <a:r>
+              <a:rPr lang="en-US" sz="2400" dirty="0"/>
+              <a:t>  </a:t>
             </a:r>
             <a:endParaRPr lang="et-EE" sz="2400" dirty="0"/>
           </a:p>
